--- a/PPT/week6.pptx
+++ b/PPT/week6.pptx
@@ -8787,7 +8787,7 @@
                 <a:latin typeface="나눔바른고딕" panose="020B0603020101020101" pitchFamily="34" charset="-127"/>
                 <a:ea typeface="나눔바른고딕" panose="020B0603020101020101" pitchFamily="34" charset="-127"/>
               </a:rPr>
-              <a:t>복잡한 지형 연속 구간 테스트</a:t>
+              <a:t>지형 테스트</a:t>
             </a:r>
             <a:endParaRPr lang="en-US" altLang="ko-KR" sz="1200" dirty="0">
               <a:latin typeface="나눔바른고딕" panose="020B0603020101020101" pitchFamily="34" charset="-127"/>
@@ -9162,7 +9162,7 @@
         <p:spPr>
           <a:xfrm>
             <a:off x="302450" y="1342316"/>
-            <a:ext cx="5138684" cy="646331"/>
+            <a:ext cx="5138684" cy="1015663"/>
           </a:xfrm>
           <a:prstGeom prst="rect">
             <a:avLst/>
@@ -9187,14 +9187,14 @@
                 <a:latin typeface="나눔바른고딕" panose="020B0603020101020101" pitchFamily="34" charset="-127"/>
                 <a:ea typeface="나눔바른고딕" panose="020B0603020101020101" pitchFamily="34" charset="-127"/>
               </a:rPr>
-              <a:t> </a:t>
+              <a:t>, </a:t>
             </a:r>
             <a:r>
               <a:rPr lang="ko-KR" altLang="en-US" sz="1200" dirty="0">
                 <a:latin typeface="나눔바른고딕" panose="020B0603020101020101" pitchFamily="34" charset="-127"/>
                 <a:ea typeface="나눔바른고딕" panose="020B0603020101020101" pitchFamily="34" charset="-127"/>
               </a:rPr>
-              <a:t>후속 작업</a:t>
+              <a:t>후속 작업 진행</a:t>
             </a:r>
             <a:endParaRPr lang="en-US" altLang="ko-KR" sz="1200" dirty="0">
               <a:latin typeface="나눔바른고딕" panose="020B0603020101020101" pitchFamily="34" charset="-127"/>
@@ -9202,6 +9202,25 @@
             </a:endParaRPr>
           </a:p>
           <a:p>
+            <a:endParaRPr lang="en-US" altLang="ko-KR" sz="1200" dirty="0">
+              <a:latin typeface="나눔바른고딕" panose="020B0603020101020101" pitchFamily="34" charset="-127"/>
+              <a:ea typeface="나눔바른고딕" panose="020B0603020101020101" pitchFamily="34" charset="-127"/>
+            </a:endParaRPr>
+          </a:p>
+          <a:p>
+            <a:r>
+              <a:rPr lang="ko-KR" altLang="en-US" sz="1200" dirty="0">
+                <a:latin typeface="나눔바른고딕" panose="020B0603020101020101" pitchFamily="34" charset="-127"/>
+                <a:ea typeface="나눔바른고딕" panose="020B0603020101020101" pitchFamily="34" charset="-127"/>
+              </a:rPr>
+              <a:t>데이터 작업 대상</a:t>
+            </a:r>
+            <a:endParaRPr lang="en-US" altLang="ko-KR" sz="1200" dirty="0">
+              <a:latin typeface="나눔바른고딕" panose="020B0603020101020101" pitchFamily="34" charset="-127"/>
+              <a:ea typeface="나눔바른고딕" panose="020B0603020101020101" pitchFamily="34" charset="-127"/>
+            </a:endParaRPr>
+          </a:p>
+          <a:p>
             <a:pPr marL="171450" indent="-171450">
               <a:buFont typeface="Arial" panose="020B0604020202020204" pitchFamily="34" charset="0"/>
               <a:buChar char="•"/>
@@ -9211,21 +9230,7 @@
                 <a:latin typeface="나눔바른고딕" panose="020B0603020101020101" pitchFamily="34" charset="-127"/>
                 <a:ea typeface="나눔바른고딕" panose="020B0603020101020101" pitchFamily="34" charset="-127"/>
               </a:rPr>
-              <a:t>지형 인식 트리 형태</a:t>
-            </a:r>
-            <a:r>
-              <a:rPr lang="en-US" altLang="ko-KR" sz="1200" dirty="0">
-                <a:latin typeface="나눔바른고딕" panose="020B0603020101020101" pitchFamily="34" charset="-127"/>
-                <a:ea typeface="나눔바른고딕" panose="020B0603020101020101" pitchFamily="34" charset="-127"/>
-              </a:rPr>
-              <a:t> </a:t>
-            </a:r>
-            <a:r>
-              <a:rPr lang="ko-KR" altLang="en-US" sz="1200" dirty="0">
-                <a:latin typeface="나눔바른고딕" panose="020B0603020101020101" pitchFamily="34" charset="-127"/>
-                <a:ea typeface="나눔바른고딕" panose="020B0603020101020101" pitchFamily="34" charset="-127"/>
-              </a:rPr>
-              <a:t>데이터화</a:t>
+              <a:t>지형 인식 트리 인식</a:t>
             </a:r>
             <a:endParaRPr lang="en-US" altLang="ko-KR" sz="1200" dirty="0">
               <a:latin typeface="나눔바른고딕" panose="020B0603020101020101" pitchFamily="34" charset="-127"/>
@@ -9242,7 +9247,243 @@
                 <a:latin typeface="나눔바른고딕" panose="020B0603020101020101" pitchFamily="34" charset="-127"/>
                 <a:ea typeface="나눔바른고딕" panose="020B0603020101020101" pitchFamily="34" charset="-127"/>
               </a:rPr>
-              <a:t>인식 결과 처리 조건과 적용 대상 모션 데이터화</a:t>
+              <a:t>결과 처리 조건 및 모션 매칭</a:t>
+            </a:r>
+            <a:endParaRPr lang="en-US" altLang="ko-KR" sz="1200" dirty="0">
+              <a:latin typeface="나눔바른고딕" panose="020B0603020101020101" pitchFamily="34" charset="-127"/>
+              <a:ea typeface="나눔바른고딕" panose="020B0603020101020101" pitchFamily="34" charset="-127"/>
+            </a:endParaRPr>
+          </a:p>
+        </p:txBody>
+      </p:sp>
+      <p:sp>
+        <p:nvSpPr>
+          <p:cNvPr id="4" name="TextBox 3">
+            <a:extLst>
+              <a:ext uri="{FF2B5EF4-FFF2-40B4-BE49-F238E27FC236}">
+                <a16:creationId xmlns:a16="http://schemas.microsoft.com/office/drawing/2014/main" id="{FC09C16A-35D2-48AD-4061-2C115EAF7976}"/>
+              </a:ext>
+            </a:extLst>
+          </p:cNvPr>
+          <p:cNvSpPr txBox="1"/>
+          <p:nvPr/>
+        </p:nvSpPr>
+        <p:spPr>
+          <a:xfrm>
+            <a:off x="302450" y="3295120"/>
+            <a:ext cx="6822627" cy="830997"/>
+          </a:xfrm>
+          <a:prstGeom prst="rect">
+            <a:avLst/>
+          </a:prstGeom>
+          <a:noFill/>
+        </p:spPr>
+        <p:txBody>
+          <a:bodyPr wrap="square" rtlCol="0">
+            <a:spAutoFit/>
+          </a:bodyPr>
+          <a:lstStyle/>
+          <a:p>
+            <a:r>
+              <a:rPr lang="ko-KR" altLang="en-US" sz="1200" dirty="0">
+                <a:latin typeface="나눔바른고딕" panose="020B0603020101020101" pitchFamily="34" charset="-127"/>
+                <a:ea typeface="나눔바른고딕" panose="020B0603020101020101" pitchFamily="34" charset="-127"/>
+              </a:rPr>
+              <a:t>구조적 문제점</a:t>
+            </a:r>
+            <a:endParaRPr lang="en-US" altLang="ko-KR" sz="1200" dirty="0">
+              <a:latin typeface="나눔바른고딕" panose="020B0603020101020101" pitchFamily="34" charset="-127"/>
+              <a:ea typeface="나눔바른고딕" panose="020B0603020101020101" pitchFamily="34" charset="-127"/>
+            </a:endParaRPr>
+          </a:p>
+          <a:p>
+            <a:pPr marL="171450" indent="-171450">
+              <a:buFont typeface="Arial" panose="020B0604020202020204" pitchFamily="34" charset="0"/>
+              <a:buChar char="•"/>
+            </a:pPr>
+            <a:r>
+              <a:rPr lang="ko-KR" altLang="en-US" sz="1200" dirty="0">
+                <a:latin typeface="나눔바른고딕" panose="020B0603020101020101" pitchFamily="34" charset="-127"/>
+                <a:ea typeface="나눔바른고딕" panose="020B0603020101020101" pitchFamily="34" charset="-127"/>
+              </a:rPr>
+              <a:t>지형 인식 과정을 트리 구조로 처리</a:t>
+            </a:r>
+            <a:endParaRPr lang="en-US" altLang="ko-KR" sz="1200" dirty="0">
+              <a:latin typeface="나눔바른고딕" panose="020B0603020101020101" pitchFamily="34" charset="-127"/>
+              <a:ea typeface="나눔바른고딕" panose="020B0603020101020101" pitchFamily="34" charset="-127"/>
+            </a:endParaRPr>
+          </a:p>
+          <a:p>
+            <a:pPr marL="171450" indent="-171450">
+              <a:buFont typeface="Arial" panose="020B0604020202020204" pitchFamily="34" charset="0"/>
+              <a:buChar char="•"/>
+            </a:pPr>
+            <a:r>
+              <a:rPr lang="ko-KR" altLang="en-US" sz="1200" dirty="0">
+                <a:latin typeface="나눔바른고딕" panose="020B0603020101020101" pitchFamily="34" charset="-127"/>
+                <a:ea typeface="나눔바른고딕" panose="020B0603020101020101" pitchFamily="34" charset="-127"/>
+              </a:rPr>
+              <a:t>결과는 무수히 많아질 수 있는데 이걸 </a:t>
+            </a:r>
+            <a:r>
+              <a:rPr lang="ko-KR" altLang="en-US" sz="1200" dirty="0" err="1">
+                <a:latin typeface="나눔바른고딕" panose="020B0603020101020101" pitchFamily="34" charset="-127"/>
+                <a:ea typeface="나눔바른고딕" panose="020B0603020101020101" pitchFamily="34" charset="-127"/>
+              </a:rPr>
+              <a:t>일일히</a:t>
+            </a:r>
+            <a:r>
+              <a:rPr lang="ko-KR" altLang="en-US" sz="1200" dirty="0">
+                <a:latin typeface="나눔바른고딕" panose="020B0603020101020101" pitchFamily="34" charset="-127"/>
+                <a:ea typeface="나눔바른고딕" panose="020B0603020101020101" pitchFamily="34" charset="-127"/>
+              </a:rPr>
+              <a:t> </a:t>
+            </a:r>
+            <a:r>
+              <a:rPr lang="en-US" altLang="ko-KR" sz="1200" dirty="0">
+                <a:latin typeface="나눔바른고딕" panose="020B0603020101020101" pitchFamily="34" charset="-127"/>
+                <a:ea typeface="나눔바른고딕" panose="020B0603020101020101" pitchFamily="34" charset="-127"/>
+              </a:rPr>
+              <a:t>FSM</a:t>
+            </a:r>
+            <a:r>
+              <a:rPr lang="ko-KR" altLang="en-US" sz="1200" dirty="0">
+                <a:latin typeface="나눔바른고딕" panose="020B0603020101020101" pitchFamily="34" charset="-127"/>
+                <a:ea typeface="나눔바른고딕" panose="020B0603020101020101" pitchFamily="34" charset="-127"/>
+              </a:rPr>
+              <a:t>으로 처리하고 있는 상황</a:t>
+            </a:r>
+            <a:endParaRPr lang="en-US" altLang="ko-KR" sz="1200" dirty="0">
+              <a:latin typeface="나눔바른고딕" panose="020B0603020101020101" pitchFamily="34" charset="-127"/>
+              <a:ea typeface="나눔바른고딕" panose="020B0603020101020101" pitchFamily="34" charset="-127"/>
+            </a:endParaRPr>
+          </a:p>
+          <a:p>
+            <a:pPr marL="628650" lvl="1" indent="-171450">
+              <a:buFont typeface="Arial" panose="020B0604020202020204" pitchFamily="34" charset="0"/>
+              <a:buChar char="•"/>
+            </a:pPr>
+            <a:r>
+              <a:rPr lang="ko-KR" altLang="en-US" sz="1200" dirty="0">
+                <a:latin typeface="나눔바른고딕" panose="020B0603020101020101" pitchFamily="34" charset="-127"/>
+                <a:ea typeface="나눔바른고딕" panose="020B0603020101020101" pitchFamily="34" charset="-127"/>
+              </a:rPr>
+              <a:t>처리해야 할 조건들</a:t>
+            </a:r>
+            <a:r>
+              <a:rPr lang="en-US" altLang="ko-KR" sz="1200" dirty="0">
+                <a:latin typeface="나눔바른고딕" panose="020B0603020101020101" pitchFamily="34" charset="-127"/>
+                <a:ea typeface="나눔바른고딕" panose="020B0603020101020101" pitchFamily="34" charset="-127"/>
+              </a:rPr>
+              <a:t>, </a:t>
+            </a:r>
+            <a:r>
+              <a:rPr lang="ko-KR" altLang="en-US" sz="1200" dirty="0">
+                <a:latin typeface="나눔바른고딕" panose="020B0603020101020101" pitchFamily="34" charset="-127"/>
+                <a:ea typeface="나눔바른고딕" panose="020B0603020101020101" pitchFamily="34" charset="-127"/>
+              </a:rPr>
+              <a:t>상황들은 많은데 이것들을 </a:t>
+            </a:r>
+            <a:r>
+              <a:rPr lang="ko-KR" altLang="en-US" sz="1200" dirty="0" err="1">
+                <a:latin typeface="나눔바른고딕" panose="020B0603020101020101" pitchFamily="34" charset="-127"/>
+                <a:ea typeface="나눔바른고딕" panose="020B0603020101020101" pitchFamily="34" charset="-127"/>
+              </a:rPr>
+              <a:t>일일히</a:t>
+            </a:r>
+            <a:r>
+              <a:rPr lang="ko-KR" altLang="en-US" sz="1200" dirty="0">
+                <a:latin typeface="나눔바른고딕" panose="020B0603020101020101" pitchFamily="34" charset="-127"/>
+                <a:ea typeface="나눔바른고딕" panose="020B0603020101020101" pitchFamily="34" charset="-127"/>
+              </a:rPr>
+              <a:t> </a:t>
+            </a:r>
+            <a:r>
+              <a:rPr lang="en-US" altLang="ko-KR" sz="1200" dirty="0">
+                <a:latin typeface="나눔바른고딕" panose="020B0603020101020101" pitchFamily="34" charset="-127"/>
+                <a:ea typeface="나눔바른고딕" panose="020B0603020101020101" pitchFamily="34" charset="-127"/>
+              </a:rPr>
+              <a:t>FSM</a:t>
+            </a:r>
+            <a:r>
+              <a:rPr lang="ko-KR" altLang="en-US" sz="1200" dirty="0">
+                <a:latin typeface="나눔바른고딕" panose="020B0603020101020101" pitchFamily="34" charset="-127"/>
+                <a:ea typeface="나눔바른고딕" panose="020B0603020101020101" pitchFamily="34" charset="-127"/>
+              </a:rPr>
+              <a:t>에서 코드로 처리하는 것은 비효율적</a:t>
+            </a:r>
+            <a:endParaRPr lang="en-US" altLang="ko-KR" sz="1200" dirty="0">
+              <a:latin typeface="나눔바른고딕" panose="020B0603020101020101" pitchFamily="34" charset="-127"/>
+              <a:ea typeface="나눔바른고딕" panose="020B0603020101020101" pitchFamily="34" charset="-127"/>
+            </a:endParaRPr>
+          </a:p>
+        </p:txBody>
+      </p:sp>
+      <p:sp>
+        <p:nvSpPr>
+          <p:cNvPr id="6" name="TextBox 5">
+            <a:extLst>
+              <a:ext uri="{FF2B5EF4-FFF2-40B4-BE49-F238E27FC236}">
+                <a16:creationId xmlns:a16="http://schemas.microsoft.com/office/drawing/2014/main" id="{E8CCFE6E-0F8B-0AFD-783E-1814D9C177FA}"/>
+              </a:ext>
+            </a:extLst>
+          </p:cNvPr>
+          <p:cNvSpPr txBox="1"/>
+          <p:nvPr/>
+        </p:nvSpPr>
+        <p:spPr>
+          <a:xfrm>
+            <a:off x="302449" y="5171961"/>
+            <a:ext cx="6822627" cy="461665"/>
+          </a:xfrm>
+          <a:prstGeom prst="rect">
+            <a:avLst/>
+          </a:prstGeom>
+          <a:noFill/>
+        </p:spPr>
+        <p:txBody>
+          <a:bodyPr wrap="square" rtlCol="0">
+            <a:spAutoFit/>
+          </a:bodyPr>
+          <a:lstStyle/>
+          <a:p>
+            <a:r>
+              <a:rPr lang="ko-KR" altLang="en-US" sz="1200" dirty="0">
+                <a:latin typeface="나눔바른고딕" panose="020B0603020101020101" pitchFamily="34" charset="-127"/>
+                <a:ea typeface="나눔바른고딕" panose="020B0603020101020101" pitchFamily="34" charset="-127"/>
+              </a:rPr>
+              <a:t>해결 방법</a:t>
+            </a:r>
+            <a:endParaRPr lang="en-US" altLang="ko-KR" sz="1200" dirty="0">
+              <a:latin typeface="나눔바른고딕" panose="020B0603020101020101" pitchFamily="34" charset="-127"/>
+              <a:ea typeface="나눔바른고딕" panose="020B0603020101020101" pitchFamily="34" charset="-127"/>
+            </a:endParaRPr>
+          </a:p>
+          <a:p>
+            <a:pPr marL="171450" indent="-171450">
+              <a:buFont typeface="Arial" panose="020B0604020202020204" pitchFamily="34" charset="0"/>
+              <a:buChar char="•"/>
+            </a:pPr>
+            <a:r>
+              <a:rPr lang="ko-KR" altLang="en-US" sz="1200" dirty="0">
+                <a:latin typeface="나눔바른고딕" panose="020B0603020101020101" pitchFamily="34" charset="-127"/>
+                <a:ea typeface="나눔바른고딕" panose="020B0603020101020101" pitchFamily="34" charset="-127"/>
+              </a:rPr>
+              <a:t>처리 결과를 </a:t>
+            </a:r>
+            <a:r>
+              <a:rPr lang="en-US" altLang="ko-KR" sz="1200" dirty="0">
+                <a:latin typeface="나눔바른고딕" panose="020B0603020101020101" pitchFamily="34" charset="-127"/>
+                <a:ea typeface="나눔바른고딕" panose="020B0603020101020101" pitchFamily="34" charset="-127"/>
+              </a:rPr>
+              <a:t>FSM</a:t>
+            </a:r>
+            <a:r>
+              <a:rPr lang="ko-KR" altLang="en-US" sz="1200" dirty="0">
+                <a:latin typeface="나눔바른고딕" panose="020B0603020101020101" pitchFamily="34" charset="-127"/>
+                <a:ea typeface="나눔바른고딕" panose="020B0603020101020101" pitchFamily="34" charset="-127"/>
+              </a:rPr>
+              <a:t>으로 하지 않고 마찬가지로 추가하기 용이한 방법으로 데이터화</a:t>
             </a:r>
             <a:endParaRPr lang="en-US" altLang="ko-KR" sz="1200" dirty="0">
               <a:latin typeface="나눔바른고딕" panose="020B0603020101020101" pitchFamily="34" charset="-127"/>
@@ -9569,6 +9810,452 @@
           </a:p>
         </p:txBody>
       </p:sp>
+      <p:grpSp>
+        <p:nvGrpSpPr>
+          <p:cNvPr id="30" name="그룹 29">
+            <a:extLst>
+              <a:ext uri="{FF2B5EF4-FFF2-40B4-BE49-F238E27FC236}">
+                <a16:creationId xmlns:a16="http://schemas.microsoft.com/office/drawing/2014/main" id="{A6DA15CE-5F24-FFF6-A074-18E1A83481E6}"/>
+              </a:ext>
+            </a:extLst>
+          </p:cNvPr>
+          <p:cNvGrpSpPr/>
+          <p:nvPr/>
+        </p:nvGrpSpPr>
+        <p:grpSpPr>
+          <a:xfrm>
+            <a:off x="7535008" y="1480815"/>
+            <a:ext cx="3222192" cy="4621793"/>
+            <a:chOff x="7535008" y="1480815"/>
+            <a:chExt cx="3222192" cy="4621793"/>
+          </a:xfrm>
+        </p:grpSpPr>
+        <p:pic>
+          <p:nvPicPr>
+            <p:cNvPr id="4" name="그림 3">
+              <a:extLst>
+                <a:ext uri="{FF2B5EF4-FFF2-40B4-BE49-F238E27FC236}">
+                  <a16:creationId xmlns:a16="http://schemas.microsoft.com/office/drawing/2014/main" id="{3A214DBD-1651-1475-989A-E14493702D2D}"/>
+                </a:ext>
+              </a:extLst>
+            </p:cNvPr>
+            <p:cNvPicPr>
+              <a:picLocks noChangeAspect="1"/>
+            </p:cNvPicPr>
+            <p:nvPr/>
+          </p:nvPicPr>
+          <p:blipFill>
+            <a:blip r:embed="rId3"/>
+            <a:stretch>
+              <a:fillRect/>
+            </a:stretch>
+          </p:blipFill>
+          <p:spPr>
+            <a:xfrm>
+              <a:off x="7535008" y="1480815"/>
+              <a:ext cx="3222192" cy="4621793"/>
+            </a:xfrm>
+            <a:prstGeom prst="rect">
+              <a:avLst/>
+            </a:prstGeom>
+          </p:spPr>
+        </p:pic>
+        <p:sp>
+          <p:nvSpPr>
+            <p:cNvPr id="7" name="직사각형 6">
+              <a:extLst>
+                <a:ext uri="{FF2B5EF4-FFF2-40B4-BE49-F238E27FC236}">
+                  <a16:creationId xmlns:a16="http://schemas.microsoft.com/office/drawing/2014/main" id="{F9E65E49-A8A8-BBD3-74E0-04B6A2EFAA36}"/>
+                </a:ext>
+              </a:extLst>
+            </p:cNvPr>
+            <p:cNvSpPr/>
+            <p:nvPr/>
+          </p:nvSpPr>
+          <p:spPr>
+            <a:xfrm>
+              <a:off x="7962901" y="2100263"/>
+              <a:ext cx="920750" cy="161925"/>
+            </a:xfrm>
+            <a:prstGeom prst="rect">
+              <a:avLst/>
+            </a:prstGeom>
+            <a:noFill/>
+            <a:ln>
+              <a:solidFill>
+                <a:schemeClr val="tx2">
+                  <a:lumMod val="50000"/>
+                  <a:lumOff val="50000"/>
+                </a:schemeClr>
+              </a:solidFill>
+            </a:ln>
+          </p:spPr>
+          <p:style>
+            <a:lnRef idx="2">
+              <a:schemeClr val="accent1">
+                <a:shade val="15000"/>
+              </a:schemeClr>
+            </a:lnRef>
+            <a:fillRef idx="1">
+              <a:schemeClr val="accent1"/>
+            </a:fillRef>
+            <a:effectRef idx="0">
+              <a:schemeClr val="accent1"/>
+            </a:effectRef>
+            <a:fontRef idx="minor">
+              <a:schemeClr val="lt1"/>
+            </a:fontRef>
+          </p:style>
+          <p:txBody>
+            <a:bodyPr rtlCol="0" anchor="ctr"/>
+            <a:lstStyle/>
+            <a:p>
+              <a:pPr algn="ctr"/>
+              <a:endParaRPr lang="ko-KR" altLang="en-US"/>
+            </a:p>
+          </p:txBody>
+        </p:sp>
+        <p:sp>
+          <p:nvSpPr>
+            <p:cNvPr id="13" name="직사각형 12">
+              <a:extLst>
+                <a:ext uri="{FF2B5EF4-FFF2-40B4-BE49-F238E27FC236}">
+                  <a16:creationId xmlns:a16="http://schemas.microsoft.com/office/drawing/2014/main" id="{23AD9AF1-9D94-6237-6A92-1A3A5817628C}"/>
+                </a:ext>
+              </a:extLst>
+            </p:cNvPr>
+            <p:cNvSpPr/>
+            <p:nvPr/>
+          </p:nvSpPr>
+          <p:spPr>
+            <a:xfrm>
+              <a:off x="7962900" y="3148013"/>
+              <a:ext cx="1752599" cy="280987"/>
+            </a:xfrm>
+            <a:prstGeom prst="rect">
+              <a:avLst/>
+            </a:prstGeom>
+            <a:noFill/>
+            <a:ln>
+              <a:solidFill>
+                <a:schemeClr val="tx2">
+                  <a:lumMod val="50000"/>
+                  <a:lumOff val="50000"/>
+                </a:schemeClr>
+              </a:solidFill>
+            </a:ln>
+          </p:spPr>
+          <p:style>
+            <a:lnRef idx="2">
+              <a:schemeClr val="accent1">
+                <a:shade val="15000"/>
+              </a:schemeClr>
+            </a:lnRef>
+            <a:fillRef idx="1">
+              <a:schemeClr val="accent1"/>
+            </a:fillRef>
+            <a:effectRef idx="0">
+              <a:schemeClr val="accent1"/>
+            </a:effectRef>
+            <a:fontRef idx="minor">
+              <a:schemeClr val="lt1"/>
+            </a:fontRef>
+          </p:style>
+          <p:txBody>
+            <a:bodyPr rtlCol="0" anchor="ctr"/>
+            <a:lstStyle/>
+            <a:p>
+              <a:pPr algn="ctr"/>
+              <a:endParaRPr lang="ko-KR" altLang="en-US"/>
+            </a:p>
+          </p:txBody>
+        </p:sp>
+        <p:cxnSp>
+          <p:nvCxnSpPr>
+            <p:cNvPr id="15" name="연결선: 꺾임 14">
+              <a:extLst>
+                <a:ext uri="{FF2B5EF4-FFF2-40B4-BE49-F238E27FC236}">
+                  <a16:creationId xmlns:a16="http://schemas.microsoft.com/office/drawing/2014/main" id="{DAB8CAF1-FB11-9067-1644-667819E60FB0}"/>
+                </a:ext>
+              </a:extLst>
+            </p:cNvPr>
+            <p:cNvCxnSpPr>
+              <a:cxnSpLocks/>
+              <a:stCxn id="7" idx="3"/>
+              <a:endCxn id="13" idx="0"/>
+            </p:cNvCxnSpPr>
+            <p:nvPr/>
+          </p:nvCxnSpPr>
+          <p:spPr>
+            <a:xfrm flipH="1">
+              <a:off x="8839200" y="2181226"/>
+              <a:ext cx="44451" cy="966787"/>
+            </a:xfrm>
+            <a:prstGeom prst="bentConnector4">
+              <a:avLst>
+                <a:gd name="adj1" fmla="val -514274"/>
+                <a:gd name="adj2" fmla="val 54187"/>
+              </a:avLst>
+            </a:prstGeom>
+            <a:ln>
+              <a:solidFill>
+                <a:schemeClr val="tx2">
+                  <a:lumMod val="50000"/>
+                  <a:lumOff val="50000"/>
+                </a:schemeClr>
+              </a:solidFill>
+              <a:tailEnd type="triangle"/>
+            </a:ln>
+          </p:spPr>
+          <p:style>
+            <a:lnRef idx="2">
+              <a:schemeClr val="accent1"/>
+            </a:lnRef>
+            <a:fillRef idx="0">
+              <a:schemeClr val="accent1"/>
+            </a:fillRef>
+            <a:effectRef idx="1">
+              <a:schemeClr val="accent1"/>
+            </a:effectRef>
+            <a:fontRef idx="minor">
+              <a:schemeClr val="tx1"/>
+            </a:fontRef>
+          </p:style>
+        </p:cxnSp>
+        <p:sp>
+          <p:nvSpPr>
+            <p:cNvPr id="18" name="직사각형 17">
+              <a:extLst>
+                <a:ext uri="{FF2B5EF4-FFF2-40B4-BE49-F238E27FC236}">
+                  <a16:creationId xmlns:a16="http://schemas.microsoft.com/office/drawing/2014/main" id="{2DC80D0A-EBA1-DF24-6345-7929413EC1D8}"/>
+                </a:ext>
+              </a:extLst>
+            </p:cNvPr>
+            <p:cNvSpPr/>
+            <p:nvPr/>
+          </p:nvSpPr>
+          <p:spPr>
+            <a:xfrm>
+              <a:off x="8151514" y="3767461"/>
+              <a:ext cx="920750" cy="161925"/>
+            </a:xfrm>
+            <a:prstGeom prst="rect">
+              <a:avLst/>
+            </a:prstGeom>
+            <a:noFill/>
+            <a:ln>
+              <a:solidFill>
+                <a:schemeClr val="tx2">
+                  <a:lumMod val="50000"/>
+                  <a:lumOff val="50000"/>
+                </a:schemeClr>
+              </a:solidFill>
+            </a:ln>
+          </p:spPr>
+          <p:style>
+            <a:lnRef idx="2">
+              <a:schemeClr val="accent1">
+                <a:shade val="15000"/>
+              </a:schemeClr>
+            </a:lnRef>
+            <a:fillRef idx="1">
+              <a:schemeClr val="accent1"/>
+            </a:fillRef>
+            <a:effectRef idx="0">
+              <a:schemeClr val="accent1"/>
+            </a:effectRef>
+            <a:fontRef idx="minor">
+              <a:schemeClr val="lt1"/>
+            </a:fontRef>
+          </p:style>
+          <p:txBody>
+            <a:bodyPr rtlCol="0" anchor="ctr"/>
+            <a:lstStyle/>
+            <a:p>
+              <a:pPr algn="ctr"/>
+              <a:endParaRPr lang="ko-KR" altLang="en-US"/>
+            </a:p>
+          </p:txBody>
+        </p:sp>
+        <p:sp>
+          <p:nvSpPr>
+            <p:cNvPr id="20" name="직사각형 19">
+              <a:extLst>
+                <a:ext uri="{FF2B5EF4-FFF2-40B4-BE49-F238E27FC236}">
+                  <a16:creationId xmlns:a16="http://schemas.microsoft.com/office/drawing/2014/main" id="{3B3F4FF5-4D70-71E7-C892-86F125617051}"/>
+                </a:ext>
+              </a:extLst>
+            </p:cNvPr>
+            <p:cNvSpPr/>
+            <p:nvPr/>
+          </p:nvSpPr>
+          <p:spPr>
+            <a:xfrm>
+              <a:off x="8151514" y="4322910"/>
+              <a:ext cx="1843512" cy="280987"/>
+            </a:xfrm>
+            <a:prstGeom prst="rect">
+              <a:avLst/>
+            </a:prstGeom>
+            <a:noFill/>
+            <a:ln>
+              <a:solidFill>
+                <a:schemeClr val="tx2">
+                  <a:lumMod val="50000"/>
+                  <a:lumOff val="50000"/>
+                </a:schemeClr>
+              </a:solidFill>
+            </a:ln>
+          </p:spPr>
+          <p:style>
+            <a:lnRef idx="2">
+              <a:schemeClr val="accent1">
+                <a:shade val="15000"/>
+              </a:schemeClr>
+            </a:lnRef>
+            <a:fillRef idx="1">
+              <a:schemeClr val="accent1"/>
+            </a:fillRef>
+            <a:effectRef idx="0">
+              <a:schemeClr val="accent1"/>
+            </a:effectRef>
+            <a:fontRef idx="minor">
+              <a:schemeClr val="lt1"/>
+            </a:fontRef>
+          </p:style>
+          <p:txBody>
+            <a:bodyPr rtlCol="0" anchor="ctr"/>
+            <a:lstStyle/>
+            <a:p>
+              <a:pPr algn="ctr"/>
+              <a:endParaRPr lang="ko-KR" altLang="en-US"/>
+            </a:p>
+          </p:txBody>
+        </p:sp>
+        <p:cxnSp>
+          <p:nvCxnSpPr>
+            <p:cNvPr id="21" name="연결선: 꺾임 20">
+              <a:extLst>
+                <a:ext uri="{FF2B5EF4-FFF2-40B4-BE49-F238E27FC236}">
+                  <a16:creationId xmlns:a16="http://schemas.microsoft.com/office/drawing/2014/main" id="{0E207835-0D29-1B22-9A3F-4DEAA7DB59AE}"/>
+                </a:ext>
+              </a:extLst>
+            </p:cNvPr>
+            <p:cNvCxnSpPr>
+              <a:cxnSpLocks/>
+              <a:stCxn id="18" idx="3"/>
+              <a:endCxn id="20" idx="3"/>
+            </p:cNvCxnSpPr>
+            <p:nvPr/>
+          </p:nvCxnSpPr>
+          <p:spPr>
+            <a:xfrm>
+              <a:off x="9072264" y="3848424"/>
+              <a:ext cx="922762" cy="614980"/>
+            </a:xfrm>
+            <a:prstGeom prst="bentConnector3">
+              <a:avLst>
+                <a:gd name="adj1" fmla="val 124773"/>
+              </a:avLst>
+            </a:prstGeom>
+            <a:ln>
+              <a:solidFill>
+                <a:schemeClr val="tx2">
+                  <a:lumMod val="50000"/>
+                  <a:lumOff val="50000"/>
+                </a:schemeClr>
+              </a:solidFill>
+              <a:tailEnd type="triangle"/>
+            </a:ln>
+          </p:spPr>
+          <p:style>
+            <a:lnRef idx="2">
+              <a:schemeClr val="accent1"/>
+            </a:lnRef>
+            <a:fillRef idx="0">
+              <a:schemeClr val="accent1"/>
+            </a:fillRef>
+            <a:effectRef idx="1">
+              <a:schemeClr val="accent1"/>
+            </a:effectRef>
+            <a:fontRef idx="minor">
+              <a:schemeClr val="tx1"/>
+            </a:fontRef>
+          </p:style>
+        </p:cxnSp>
+      </p:grpSp>
+      <p:sp>
+        <p:nvSpPr>
+          <p:cNvPr id="32" name="사각형: 둥근 모서리 31">
+            <a:extLst>
+              <a:ext uri="{FF2B5EF4-FFF2-40B4-BE49-F238E27FC236}">
+                <a16:creationId xmlns:a16="http://schemas.microsoft.com/office/drawing/2014/main" id="{409384A0-8E2E-5B98-5811-1EE512A460CF}"/>
+              </a:ext>
+            </a:extLst>
+          </p:cNvPr>
+          <p:cNvSpPr/>
+          <p:nvPr/>
+        </p:nvSpPr>
+        <p:spPr>
+          <a:xfrm>
+            <a:off x="387511" y="2270938"/>
+            <a:ext cx="4364578" cy="3306300"/>
+          </a:xfrm>
+          <a:prstGeom prst="roundRect">
+            <a:avLst>
+              <a:gd name="adj" fmla="val 0"/>
+            </a:avLst>
+          </a:prstGeom>
+        </p:spPr>
+        <p:style>
+          <a:lnRef idx="2">
+            <a:schemeClr val="accent1">
+              <a:shade val="15000"/>
+            </a:schemeClr>
+          </a:lnRef>
+          <a:fillRef idx="1">
+            <a:schemeClr val="accent1"/>
+          </a:fillRef>
+          <a:effectRef idx="0">
+            <a:schemeClr val="accent1"/>
+          </a:effectRef>
+          <a:fontRef idx="minor">
+            <a:schemeClr val="lt1"/>
+          </a:fontRef>
+        </p:style>
+        <p:txBody>
+          <a:bodyPr rtlCol="0" anchor="ctr"/>
+          <a:lstStyle/>
+          <a:p>
+            <a:pPr algn="ctr"/>
+            <a:r>
+              <a:rPr lang="ko-KR" altLang="en-US" dirty="0">
+                <a:latin typeface="나눔바른고딕" panose="020B0603020101020101" pitchFamily="34" charset="-127"/>
+                <a:ea typeface="나눔바른고딕" panose="020B0603020101020101" pitchFamily="34" charset="-127"/>
+              </a:rPr>
+              <a:t>지형 </a:t>
+            </a:r>
+            <a:r>
+              <a:rPr lang="ko-KR" altLang="en-US" dirty="0" err="1">
+                <a:latin typeface="나눔바른고딕" panose="020B0603020101020101" pitchFamily="34" charset="-127"/>
+                <a:ea typeface="나눔바른고딕" panose="020B0603020101020101" pitchFamily="34" charset="-127"/>
+              </a:rPr>
+              <a:t>인식트리</a:t>
+            </a:r>
+            <a:r>
+              <a:rPr lang="ko-KR" altLang="en-US" dirty="0">
+                <a:latin typeface="나눔바른고딕" panose="020B0603020101020101" pitchFamily="34" charset="-127"/>
+                <a:ea typeface="나눔바른고딕" panose="020B0603020101020101" pitchFamily="34" charset="-127"/>
+              </a:rPr>
+              <a:t> 간이 구조</a:t>
+            </a:r>
+            <a:endParaRPr lang="en-US" altLang="ko-KR" dirty="0">
+              <a:latin typeface="나눔바른고딕" panose="020B0603020101020101" pitchFamily="34" charset="-127"/>
+              <a:ea typeface="나눔바른고딕" panose="020B0603020101020101" pitchFamily="34" charset="-127"/>
+            </a:endParaRPr>
+          </a:p>
+        </p:txBody>
+      </p:sp>
     </p:spTree>
     <p:extLst>
       <p:ext uri="{BB962C8B-B14F-4D97-AF65-F5344CB8AC3E}">
@@ -9887,6 +10574,287 @@
           </a:p>
         </p:txBody>
       </p:sp>
+      <p:sp>
+        <p:nvSpPr>
+          <p:cNvPr id="18" name="사각형: 둥근 모서리 17">
+            <a:extLst>
+              <a:ext uri="{FF2B5EF4-FFF2-40B4-BE49-F238E27FC236}">
+                <a16:creationId xmlns:a16="http://schemas.microsoft.com/office/drawing/2014/main" id="{53F6B5E3-D78F-2C0F-FE33-E72FA876B3FA}"/>
+              </a:ext>
+            </a:extLst>
+          </p:cNvPr>
+          <p:cNvSpPr/>
+          <p:nvPr/>
+        </p:nvSpPr>
+        <p:spPr>
+          <a:xfrm>
+            <a:off x="387511" y="2270938"/>
+            <a:ext cx="4364578" cy="3306300"/>
+          </a:xfrm>
+          <a:prstGeom prst="roundRect">
+            <a:avLst>
+              <a:gd name="adj" fmla="val 0"/>
+            </a:avLst>
+          </a:prstGeom>
+        </p:spPr>
+        <p:style>
+          <a:lnRef idx="2">
+            <a:schemeClr val="accent1">
+              <a:shade val="15000"/>
+            </a:schemeClr>
+          </a:lnRef>
+          <a:fillRef idx="1">
+            <a:schemeClr val="accent1"/>
+          </a:fillRef>
+          <a:effectRef idx="0">
+            <a:schemeClr val="accent1"/>
+          </a:effectRef>
+          <a:fontRef idx="minor">
+            <a:schemeClr val="lt1"/>
+          </a:fontRef>
+        </p:style>
+        <p:txBody>
+          <a:bodyPr rtlCol="0" anchor="ctr"/>
+          <a:lstStyle/>
+          <a:p>
+            <a:pPr algn="ctr"/>
+            <a:r>
+              <a:rPr lang="ko-KR" altLang="en-US">
+                <a:latin typeface="나눔바른고딕" panose="020B0603020101020101" pitchFamily="34" charset="-127"/>
+                <a:ea typeface="나눔바른고딕" panose="020B0603020101020101" pitchFamily="34" charset="-127"/>
+              </a:rPr>
+              <a:t>처리 조건 간이 구조</a:t>
+            </a:r>
+            <a:endParaRPr lang="en-US" altLang="ko-KR" dirty="0">
+              <a:latin typeface="나눔바른고딕" panose="020B0603020101020101" pitchFamily="34" charset="-127"/>
+              <a:ea typeface="나눔바른고딕" panose="020B0603020101020101" pitchFamily="34" charset="-127"/>
+            </a:endParaRPr>
+          </a:p>
+        </p:txBody>
+      </p:sp>
+      <p:pic>
+        <p:nvPicPr>
+          <p:cNvPr id="26" name="그림 25">
+            <a:extLst>
+              <a:ext uri="{FF2B5EF4-FFF2-40B4-BE49-F238E27FC236}">
+                <a16:creationId xmlns:a16="http://schemas.microsoft.com/office/drawing/2014/main" id="{94998307-14E9-A7BB-377D-CF5C660A48B2}"/>
+              </a:ext>
+            </a:extLst>
+          </p:cNvPr>
+          <p:cNvPicPr>
+            <a:picLocks noChangeAspect="1"/>
+          </p:cNvPicPr>
+          <p:nvPr/>
+        </p:nvPicPr>
+        <p:blipFill>
+          <a:blip r:embed="rId3"/>
+          <a:srcRect t="22743" r="17893"/>
+          <a:stretch>
+            <a:fillRect/>
+          </a:stretch>
+        </p:blipFill>
+        <p:spPr>
+          <a:xfrm>
+            <a:off x="5246591" y="2201256"/>
+            <a:ext cx="2383853" cy="3023606"/>
+          </a:xfrm>
+          <a:prstGeom prst="rect">
+            <a:avLst/>
+          </a:prstGeom>
+        </p:spPr>
+      </p:pic>
+      <p:pic>
+        <p:nvPicPr>
+          <p:cNvPr id="28" name="그림 27">
+            <a:extLst>
+              <a:ext uri="{FF2B5EF4-FFF2-40B4-BE49-F238E27FC236}">
+                <a16:creationId xmlns:a16="http://schemas.microsoft.com/office/drawing/2014/main" id="{18C09418-DC5F-4DF6-0E94-14DC09E30333}"/>
+              </a:ext>
+            </a:extLst>
+          </p:cNvPr>
+          <p:cNvPicPr>
+            <a:picLocks noChangeAspect="1"/>
+          </p:cNvPicPr>
+          <p:nvPr/>
+        </p:nvPicPr>
+        <p:blipFill>
+          <a:blip r:embed="rId4"/>
+          <a:srcRect t="38076" b="29068"/>
+          <a:stretch>
+            <a:fillRect/>
+          </a:stretch>
+        </p:blipFill>
+        <p:spPr>
+          <a:xfrm>
+            <a:off x="7719071" y="3670301"/>
+            <a:ext cx="4693919" cy="1285877"/>
+          </a:xfrm>
+          <a:prstGeom prst="rect">
+            <a:avLst/>
+          </a:prstGeom>
+        </p:spPr>
+      </p:pic>
+      <p:pic>
+        <p:nvPicPr>
+          <p:cNvPr id="30" name="그림 29">
+            <a:extLst>
+              <a:ext uri="{FF2B5EF4-FFF2-40B4-BE49-F238E27FC236}">
+                <a16:creationId xmlns:a16="http://schemas.microsoft.com/office/drawing/2014/main" id="{626AF803-A46C-A563-26C1-DC47EB5CBE95}"/>
+              </a:ext>
+            </a:extLst>
+          </p:cNvPr>
+          <p:cNvPicPr>
+            <a:picLocks noChangeAspect="1"/>
+          </p:cNvPicPr>
+          <p:nvPr/>
+        </p:nvPicPr>
+        <p:blipFill>
+          <a:blip r:embed="rId5"/>
+          <a:stretch>
+            <a:fillRect/>
+          </a:stretch>
+        </p:blipFill>
+        <p:spPr>
+          <a:xfrm>
+            <a:off x="12709959" y="2806574"/>
+            <a:ext cx="2813435" cy="3423758"/>
+          </a:xfrm>
+          <a:prstGeom prst="rect">
+            <a:avLst/>
+          </a:prstGeom>
+        </p:spPr>
+      </p:pic>
+      <p:sp>
+        <p:nvSpPr>
+          <p:cNvPr id="32" name="TextBox 31">
+            <a:extLst>
+              <a:ext uri="{FF2B5EF4-FFF2-40B4-BE49-F238E27FC236}">
+                <a16:creationId xmlns:a16="http://schemas.microsoft.com/office/drawing/2014/main" id="{59294F2D-ECCD-F62C-6CB8-6A61C54D819A}"/>
+              </a:ext>
+            </a:extLst>
+          </p:cNvPr>
+          <p:cNvSpPr txBox="1"/>
+          <p:nvPr/>
+        </p:nvSpPr>
+        <p:spPr>
+          <a:xfrm>
+            <a:off x="6027400" y="5269463"/>
+            <a:ext cx="668773" cy="246221"/>
+          </a:xfrm>
+          <a:prstGeom prst="rect">
+            <a:avLst/>
+          </a:prstGeom>
+          <a:noFill/>
+        </p:spPr>
+        <p:txBody>
+          <a:bodyPr wrap="none" rtlCol="0">
+            <a:spAutoFit/>
+          </a:bodyPr>
+          <a:lstStyle/>
+          <a:p>
+            <a:pPr algn="ctr"/>
+            <a:r>
+              <a:rPr lang="ko-KR" altLang="en-US" sz="1000" dirty="0">
+                <a:latin typeface="나눔바른고딕" panose="020B0603020101020101" pitchFamily="50" charset="-127"/>
+                <a:ea typeface="나눔바른고딕" panose="020B0603020101020101" pitchFamily="50" charset="-127"/>
+              </a:rPr>
+              <a:t>개별 조건</a:t>
+            </a:r>
+          </a:p>
+        </p:txBody>
+      </p:sp>
+      <p:sp>
+        <p:nvSpPr>
+          <p:cNvPr id="34" name="TextBox 33">
+            <a:extLst>
+              <a:ext uri="{FF2B5EF4-FFF2-40B4-BE49-F238E27FC236}">
+                <a16:creationId xmlns:a16="http://schemas.microsoft.com/office/drawing/2014/main" id="{DC5D9207-25EB-035F-5DCB-626072ECDBD4}"/>
+              </a:ext>
+            </a:extLst>
+          </p:cNvPr>
+          <p:cNvSpPr txBox="1"/>
+          <p:nvPr/>
+        </p:nvSpPr>
+        <p:spPr>
+          <a:xfrm>
+            <a:off x="9606628" y="4988166"/>
+            <a:ext cx="925254" cy="246221"/>
+          </a:xfrm>
+          <a:prstGeom prst="rect">
+            <a:avLst/>
+          </a:prstGeom>
+          <a:noFill/>
+        </p:spPr>
+        <p:txBody>
+          <a:bodyPr wrap="none" rtlCol="0">
+            <a:spAutoFit/>
+          </a:bodyPr>
+          <a:lstStyle/>
+          <a:p>
+            <a:pPr algn="ctr"/>
+            <a:r>
+              <a:rPr lang="ko-KR" altLang="en-US" sz="1000" dirty="0">
+                <a:latin typeface="나눔바른고딕" panose="020B0603020101020101" pitchFamily="50" charset="-127"/>
+                <a:ea typeface="나눔바른고딕" panose="020B0603020101020101" pitchFamily="50" charset="-127"/>
+              </a:rPr>
+              <a:t>개별 조건 합성</a:t>
+            </a:r>
+          </a:p>
+        </p:txBody>
+      </p:sp>
+      <p:sp>
+        <p:nvSpPr>
+          <p:cNvPr id="36" name="TextBox 35">
+            <a:extLst>
+              <a:ext uri="{FF2B5EF4-FFF2-40B4-BE49-F238E27FC236}">
+                <a16:creationId xmlns:a16="http://schemas.microsoft.com/office/drawing/2014/main" id="{3EDC0331-B6CA-958E-7125-B577FD65F081}"/>
+              </a:ext>
+            </a:extLst>
+          </p:cNvPr>
+          <p:cNvSpPr txBox="1"/>
+          <p:nvPr/>
+        </p:nvSpPr>
+        <p:spPr>
+          <a:xfrm>
+            <a:off x="13582718" y="6319467"/>
+            <a:ext cx="1067921" cy="246221"/>
+          </a:xfrm>
+          <a:prstGeom prst="rect">
+            <a:avLst/>
+          </a:prstGeom>
+          <a:noFill/>
+        </p:spPr>
+        <p:txBody>
+          <a:bodyPr wrap="none" rtlCol="0">
+            <a:spAutoFit/>
+          </a:bodyPr>
+          <a:lstStyle/>
+          <a:p>
+            <a:pPr algn="ctr"/>
+            <a:r>
+              <a:rPr lang="ko-KR" altLang="en-US" sz="1000" dirty="0">
+                <a:latin typeface="나눔바른고딕" panose="020B0603020101020101" pitchFamily="50" charset="-127"/>
+                <a:ea typeface="나눔바른고딕" panose="020B0603020101020101" pitchFamily="50" charset="-127"/>
+              </a:rPr>
+              <a:t>조건 </a:t>
+            </a:r>
+            <a:r>
+              <a:rPr lang="en-US" altLang="ko-KR" sz="1000" dirty="0">
+                <a:latin typeface="나눔바른고딕" panose="020B0603020101020101" pitchFamily="50" charset="-127"/>
+                <a:ea typeface="나눔바른고딕" panose="020B0603020101020101" pitchFamily="50" charset="-127"/>
+              </a:rPr>
+              <a:t>– </a:t>
+            </a:r>
+            <a:r>
+              <a:rPr lang="ko-KR" altLang="en-US" sz="1000" dirty="0">
+                <a:latin typeface="나눔바른고딕" panose="020B0603020101020101" pitchFamily="50" charset="-127"/>
+                <a:ea typeface="나눔바른고딕" panose="020B0603020101020101" pitchFamily="50" charset="-127"/>
+              </a:rPr>
+              <a:t>액션 매핑</a:t>
+            </a:r>
+          </a:p>
+        </p:txBody>
+      </p:sp>
     </p:spTree>
     <p:extLst>
       <p:ext uri="{BB962C8B-B14F-4D97-AF65-F5344CB8AC3E}">
@@ -10178,7 +11146,7 @@
         <p:spPr>
           <a:xfrm>
             <a:off x="302450" y="1342316"/>
-            <a:ext cx="5138684" cy="276999"/>
+            <a:ext cx="3078925" cy="276999"/>
           </a:xfrm>
           <a:prstGeom prst="rect">
             <a:avLst/>
@@ -10222,6 +11190,37 @@
           </a:p>
         </p:txBody>
       </p:sp>
+      <p:pic>
+        <p:nvPicPr>
+          <p:cNvPr id="4" name="그림 3">
+            <a:extLst>
+              <a:ext uri="{FF2B5EF4-FFF2-40B4-BE49-F238E27FC236}">
+                <a16:creationId xmlns:a16="http://schemas.microsoft.com/office/drawing/2014/main" id="{B1D6041B-BAA4-0EE6-F386-3883261487F7}"/>
+              </a:ext>
+            </a:extLst>
+          </p:cNvPr>
+          <p:cNvPicPr>
+            <a:picLocks noChangeAspect="1"/>
+          </p:cNvPicPr>
+          <p:nvPr/>
+        </p:nvPicPr>
+        <p:blipFill>
+          <a:blip r:embed="rId3"/>
+          <a:srcRect b="68523"/>
+          <a:stretch>
+            <a:fillRect/>
+          </a:stretch>
+        </p:blipFill>
+        <p:spPr>
+          <a:xfrm>
+            <a:off x="7376349" y="3122060"/>
+            <a:ext cx="2454887" cy="1703940"/>
+          </a:xfrm>
+          <a:prstGeom prst="rect">
+            <a:avLst/>
+          </a:prstGeom>
+        </p:spPr>
+      </p:pic>
     </p:spTree>
     <p:extLst>
       <p:ext uri="{BB962C8B-B14F-4D97-AF65-F5344CB8AC3E}">
@@ -10534,6 +11533,78 @@
               <a:t>작동 과정</a:t>
             </a:r>
             <a:endParaRPr lang="en-US" altLang="ko-KR" sz="1200" dirty="0">
+              <a:latin typeface="나눔바른고딕" panose="020B0603020101020101" pitchFamily="34" charset="-127"/>
+              <a:ea typeface="나눔바른고딕" panose="020B0603020101020101" pitchFamily="34" charset="-127"/>
+            </a:endParaRPr>
+          </a:p>
+        </p:txBody>
+      </p:sp>
+      <p:sp>
+        <p:nvSpPr>
+          <p:cNvPr id="4" name="사각형: 둥근 모서리 3">
+            <a:extLst>
+              <a:ext uri="{FF2B5EF4-FFF2-40B4-BE49-F238E27FC236}">
+                <a16:creationId xmlns:a16="http://schemas.microsoft.com/office/drawing/2014/main" id="{0740C2F9-7A33-5697-3852-4CC9C7440513}"/>
+              </a:ext>
+            </a:extLst>
+          </p:cNvPr>
+          <p:cNvSpPr/>
+          <p:nvPr/>
+        </p:nvSpPr>
+        <p:spPr>
+          <a:xfrm>
+            <a:off x="3486991" y="2209384"/>
+            <a:ext cx="4364578" cy="3306300"/>
+          </a:xfrm>
+          <a:prstGeom prst="roundRect">
+            <a:avLst>
+              <a:gd name="adj" fmla="val 0"/>
+            </a:avLst>
+          </a:prstGeom>
+        </p:spPr>
+        <p:style>
+          <a:lnRef idx="2">
+            <a:schemeClr val="accent1">
+              <a:shade val="15000"/>
+            </a:schemeClr>
+          </a:lnRef>
+          <a:fillRef idx="1">
+            <a:schemeClr val="accent1"/>
+          </a:fillRef>
+          <a:effectRef idx="0">
+            <a:schemeClr val="accent1"/>
+          </a:effectRef>
+          <a:fontRef idx="minor">
+            <a:schemeClr val="lt1"/>
+          </a:fontRef>
+        </p:style>
+        <p:txBody>
+          <a:bodyPr rtlCol="0" anchor="ctr"/>
+          <a:lstStyle/>
+          <a:p>
+            <a:pPr algn="ctr"/>
+            <a:r>
+              <a:rPr lang="ko-KR" altLang="en-US" dirty="0">
+                <a:latin typeface="나눔바른고딕" panose="020B0603020101020101" pitchFamily="34" charset="-127"/>
+                <a:ea typeface="나눔바른고딕" panose="020B0603020101020101" pitchFamily="34" charset="-127"/>
+              </a:rPr>
+              <a:t>데이터 연결과</a:t>
+            </a:r>
+            <a:endParaRPr lang="en-US" altLang="ko-KR" dirty="0">
+              <a:latin typeface="나눔바른고딕" panose="020B0603020101020101" pitchFamily="34" charset="-127"/>
+              <a:ea typeface="나눔바른고딕" panose="020B0603020101020101" pitchFamily="34" charset="-127"/>
+            </a:endParaRPr>
+          </a:p>
+          <a:p>
+            <a:pPr algn="ctr"/>
+            <a:r>
+              <a:rPr lang="ko-KR" altLang="en-US" dirty="0">
+                <a:latin typeface="나눔바른고딕" panose="020B0603020101020101" pitchFamily="34" charset="-127"/>
+                <a:ea typeface="나눔바른고딕" panose="020B0603020101020101" pitchFamily="34" charset="-127"/>
+              </a:rPr>
+              <a:t>처리 컴포넌트 흐름</a:t>
+            </a:r>
+            <a:endParaRPr lang="en-US" altLang="ko-KR" dirty="0">
               <a:latin typeface="나눔바른고딕" panose="020B0603020101020101" pitchFamily="34" charset="-127"/>
               <a:ea typeface="나눔바른고딕" panose="020B0603020101020101" pitchFamily="34" charset="-127"/>
             </a:endParaRPr>

--- a/PPT/week6.pptx
+++ b/PPT/week6.pptx
@@ -11,9 +11,9 @@
     <p:sldId id="262" r:id="rId2"/>
     <p:sldId id="278" r:id="rId3"/>
     <p:sldId id="280" r:id="rId4"/>
-    <p:sldId id="281" r:id="rId5"/>
-    <p:sldId id="282" r:id="rId6"/>
-    <p:sldId id="283" r:id="rId7"/>
+    <p:sldId id="290" r:id="rId5"/>
+    <p:sldId id="281" r:id="rId6"/>
+    <p:sldId id="282" r:id="rId7"/>
     <p:sldId id="284" r:id="rId8"/>
     <p:sldId id="279" r:id="rId9"/>
     <p:sldId id="285" r:id="rId10"/>
@@ -27,12 +27,12 @@
   <p:notesSz cx="6858000" cy="9144000"/>
   <p:embeddedFontLst>
     <p:embeddedFont>
-      <p:font typeface="나눔바른고딕" panose="020B0603020101020101" pitchFamily="50" charset="-127"/>
+      <p:font typeface="맑은 고딕" panose="020B0503020000020004" pitchFamily="34" charset="-127"/>
       <p:regular r:id="rId17"/>
       <p:bold r:id="rId18"/>
     </p:embeddedFont>
     <p:embeddedFont>
-      <p:font typeface="맑은 고딕" panose="020B0503020000020004" pitchFamily="50" charset="-127"/>
+      <p:font typeface="나눔바른고딕" panose="020B0603020101020101" pitchFamily="34" charset="-127"/>
       <p:regular r:id="rId19"/>
       <p:bold r:id="rId20"/>
     </p:embeddedFont>
@@ -222,7 +222,7 @@
           <a:p>
             <a:fld id="{79FA7D5B-B91B-48D9-9BBD-A861B53BECFD}" type="datetimeFigureOut">
               <a:rPr lang="ko-KR" altLang="en-US" smtClean="0"/>
-              <a:t>2026-08-06</a:t>
+              <a:t>2026-08-07</a:t>
             </a:fld>
             <a:endParaRPr lang="ko-KR" altLang="en-US"/>
           </a:p>
@@ -581,7 +581,7 @@
         <p:cNvPr id="1" name="">
           <a:extLst>
             <a:ext uri="{FF2B5EF4-FFF2-40B4-BE49-F238E27FC236}">
-              <a16:creationId xmlns:a16="http://schemas.microsoft.com/office/drawing/2014/main" id="{0350ECA6-11FC-1DB9-A06D-63BBB0A7C527}"/>
+              <a16:creationId xmlns:a16="http://schemas.microsoft.com/office/drawing/2014/main" xmlns="" id="{0350ECA6-11FC-1DB9-A06D-63BBB0A7C527}"/>
             </a:ext>
           </a:extLst>
         </p:cNvPr>
@@ -601,7 +601,7 @@
           <p:cNvPr id="2" name="슬라이드 이미지 개체 틀 1">
             <a:extLst>
               <a:ext uri="{FF2B5EF4-FFF2-40B4-BE49-F238E27FC236}">
-                <a16:creationId xmlns:a16="http://schemas.microsoft.com/office/drawing/2014/main" id="{5941A8E8-300D-2CD2-F859-3730FEB50C7F}"/>
+                <a16:creationId xmlns:a16="http://schemas.microsoft.com/office/drawing/2014/main" xmlns="" id="{5941A8E8-300D-2CD2-F859-3730FEB50C7F}"/>
               </a:ext>
             </a:extLst>
           </p:cNvPr>
@@ -619,7 +619,7 @@
           <p:cNvPr id="3" name="슬라이드 노트 개체 틀 2">
             <a:extLst>
               <a:ext uri="{FF2B5EF4-FFF2-40B4-BE49-F238E27FC236}">
-                <a16:creationId xmlns:a16="http://schemas.microsoft.com/office/drawing/2014/main" id="{FDE2D11D-E2A8-65CA-3163-987BE0049037}"/>
+                <a16:creationId xmlns:a16="http://schemas.microsoft.com/office/drawing/2014/main" xmlns="" id="{FDE2D11D-E2A8-65CA-3163-987BE0049037}"/>
               </a:ext>
             </a:extLst>
           </p:cNvPr>
@@ -644,7 +644,7 @@
           <p:cNvPr id="4" name="슬라이드 번호 개체 틀 3">
             <a:extLst>
               <a:ext uri="{FF2B5EF4-FFF2-40B4-BE49-F238E27FC236}">
-                <a16:creationId xmlns:a16="http://schemas.microsoft.com/office/drawing/2014/main" id="{908F4815-000D-BD80-CD19-2FA5D55D5A3C}"/>
+                <a16:creationId xmlns:a16="http://schemas.microsoft.com/office/drawing/2014/main" xmlns="" id="{908F4815-000D-BD80-CD19-2FA5D55D5A3C}"/>
               </a:ext>
             </a:extLst>
           </p:cNvPr>
@@ -689,7 +689,7 @@
         <p:cNvPr id="1" name="">
           <a:extLst>
             <a:ext uri="{FF2B5EF4-FFF2-40B4-BE49-F238E27FC236}">
-              <a16:creationId xmlns:a16="http://schemas.microsoft.com/office/drawing/2014/main" id="{96DA3B39-8894-5F9A-934E-FCF5B21FE094}"/>
+              <a16:creationId xmlns:a16="http://schemas.microsoft.com/office/drawing/2014/main" xmlns="" id="{96DA3B39-8894-5F9A-934E-FCF5B21FE094}"/>
             </a:ext>
           </a:extLst>
         </p:cNvPr>
@@ -709,7 +709,7 @@
           <p:cNvPr id="2" name="슬라이드 이미지 개체 틀 1">
             <a:extLst>
               <a:ext uri="{FF2B5EF4-FFF2-40B4-BE49-F238E27FC236}">
-                <a16:creationId xmlns:a16="http://schemas.microsoft.com/office/drawing/2014/main" id="{B4F1F109-881F-1045-0558-BD4713E8A010}"/>
+                <a16:creationId xmlns:a16="http://schemas.microsoft.com/office/drawing/2014/main" xmlns="" id="{B4F1F109-881F-1045-0558-BD4713E8A010}"/>
               </a:ext>
             </a:extLst>
           </p:cNvPr>
@@ -727,7 +727,7 @@
           <p:cNvPr id="3" name="슬라이드 노트 개체 틀 2">
             <a:extLst>
               <a:ext uri="{FF2B5EF4-FFF2-40B4-BE49-F238E27FC236}">
-                <a16:creationId xmlns:a16="http://schemas.microsoft.com/office/drawing/2014/main" id="{50B3D547-C55C-7D84-2362-21E153F0B1F1}"/>
+                <a16:creationId xmlns:a16="http://schemas.microsoft.com/office/drawing/2014/main" xmlns="" id="{50B3D547-C55C-7D84-2362-21E153F0B1F1}"/>
               </a:ext>
             </a:extLst>
           </p:cNvPr>
@@ -752,7 +752,7 @@
           <p:cNvPr id="4" name="슬라이드 번호 개체 틀 3">
             <a:extLst>
               <a:ext uri="{FF2B5EF4-FFF2-40B4-BE49-F238E27FC236}">
-                <a16:creationId xmlns:a16="http://schemas.microsoft.com/office/drawing/2014/main" id="{F25ED412-6A91-4910-2C5B-30D9A592C4D9}"/>
+                <a16:creationId xmlns:a16="http://schemas.microsoft.com/office/drawing/2014/main" xmlns="" id="{F25ED412-6A91-4910-2C5B-30D9A592C4D9}"/>
               </a:ext>
             </a:extLst>
           </p:cNvPr>
@@ -797,7 +797,7 @@
         <p:cNvPr id="1" name="">
           <a:extLst>
             <a:ext uri="{FF2B5EF4-FFF2-40B4-BE49-F238E27FC236}">
-              <a16:creationId xmlns:a16="http://schemas.microsoft.com/office/drawing/2014/main" id="{50DC35D4-0EB2-D96E-FEC2-15DE35D2997C}"/>
+              <a16:creationId xmlns:a16="http://schemas.microsoft.com/office/drawing/2014/main" xmlns="" id="{50DC35D4-0EB2-D96E-FEC2-15DE35D2997C}"/>
             </a:ext>
           </a:extLst>
         </p:cNvPr>
@@ -817,7 +817,7 @@
           <p:cNvPr id="2" name="슬라이드 이미지 개체 틀 1">
             <a:extLst>
               <a:ext uri="{FF2B5EF4-FFF2-40B4-BE49-F238E27FC236}">
-                <a16:creationId xmlns:a16="http://schemas.microsoft.com/office/drawing/2014/main" id="{99637B56-09F8-D88B-57B1-AA984EE2B7FD}"/>
+                <a16:creationId xmlns:a16="http://schemas.microsoft.com/office/drawing/2014/main" xmlns="" id="{99637B56-09F8-D88B-57B1-AA984EE2B7FD}"/>
               </a:ext>
             </a:extLst>
           </p:cNvPr>
@@ -835,7 +835,7 @@
           <p:cNvPr id="3" name="슬라이드 노트 개체 틀 2">
             <a:extLst>
               <a:ext uri="{FF2B5EF4-FFF2-40B4-BE49-F238E27FC236}">
-                <a16:creationId xmlns:a16="http://schemas.microsoft.com/office/drawing/2014/main" id="{B385C1FD-EB20-045C-494E-90A4493EC558}"/>
+                <a16:creationId xmlns:a16="http://schemas.microsoft.com/office/drawing/2014/main" xmlns="" id="{B385C1FD-EB20-045C-494E-90A4493EC558}"/>
               </a:ext>
             </a:extLst>
           </p:cNvPr>
@@ -860,7 +860,7 @@
           <p:cNvPr id="4" name="슬라이드 번호 개체 틀 3">
             <a:extLst>
               <a:ext uri="{FF2B5EF4-FFF2-40B4-BE49-F238E27FC236}">
-                <a16:creationId xmlns:a16="http://schemas.microsoft.com/office/drawing/2014/main" id="{356638F2-87D8-5072-51A8-E438416CD848}"/>
+                <a16:creationId xmlns:a16="http://schemas.microsoft.com/office/drawing/2014/main" xmlns="" id="{356638F2-87D8-5072-51A8-E438416CD848}"/>
               </a:ext>
             </a:extLst>
           </p:cNvPr>
@@ -1082,7 +1082,7 @@
         <p:cNvPr id="1" name="">
           <a:extLst>
             <a:ext uri="{FF2B5EF4-FFF2-40B4-BE49-F238E27FC236}">
-              <a16:creationId xmlns:a16="http://schemas.microsoft.com/office/drawing/2014/main" id="{6FA38960-BC67-841A-1008-8ED7410D5C24}"/>
+              <a16:creationId xmlns:a16="http://schemas.microsoft.com/office/drawing/2014/main" xmlns="" id="{6FA38960-BC67-841A-1008-8ED7410D5C24}"/>
             </a:ext>
           </a:extLst>
         </p:cNvPr>
@@ -1102,7 +1102,7 @@
           <p:cNvPr id="2" name="슬라이드 이미지 개체 틀 1">
             <a:extLst>
               <a:ext uri="{FF2B5EF4-FFF2-40B4-BE49-F238E27FC236}">
-                <a16:creationId xmlns:a16="http://schemas.microsoft.com/office/drawing/2014/main" id="{E2A2A7C5-4DBD-6DA0-D4C4-9F158145444E}"/>
+                <a16:creationId xmlns:a16="http://schemas.microsoft.com/office/drawing/2014/main" xmlns="" id="{E2A2A7C5-4DBD-6DA0-D4C4-9F158145444E}"/>
               </a:ext>
             </a:extLst>
           </p:cNvPr>
@@ -1120,7 +1120,7 @@
           <p:cNvPr id="3" name="슬라이드 노트 개체 틀 2">
             <a:extLst>
               <a:ext uri="{FF2B5EF4-FFF2-40B4-BE49-F238E27FC236}">
-                <a16:creationId xmlns:a16="http://schemas.microsoft.com/office/drawing/2014/main" id="{CFDC0F1D-EE0C-3681-61B0-1DEA4C2B6566}"/>
+                <a16:creationId xmlns:a16="http://schemas.microsoft.com/office/drawing/2014/main" xmlns="" id="{CFDC0F1D-EE0C-3681-61B0-1DEA4C2B6566}"/>
               </a:ext>
             </a:extLst>
           </p:cNvPr>
@@ -1145,7 +1145,7 @@
           <p:cNvPr id="4" name="슬라이드 번호 개체 틀 3">
             <a:extLst>
               <a:ext uri="{FF2B5EF4-FFF2-40B4-BE49-F238E27FC236}">
-                <a16:creationId xmlns:a16="http://schemas.microsoft.com/office/drawing/2014/main" id="{A52BD183-004B-E054-798A-87423BE18FA6}"/>
+                <a16:creationId xmlns:a16="http://schemas.microsoft.com/office/drawing/2014/main" xmlns="" id="{A52BD183-004B-E054-798A-87423BE18FA6}"/>
               </a:ext>
             </a:extLst>
           </p:cNvPr>
@@ -1190,7 +1190,7 @@
         <p:cNvPr id="1" name="">
           <a:extLst>
             <a:ext uri="{FF2B5EF4-FFF2-40B4-BE49-F238E27FC236}">
-              <a16:creationId xmlns:a16="http://schemas.microsoft.com/office/drawing/2014/main" id="{CDA8A9F5-7FAD-EA63-4B9A-5846B7E22875}"/>
+              <a16:creationId xmlns:a16="http://schemas.microsoft.com/office/drawing/2014/main" xmlns="" id="{6FA38960-BC67-841A-1008-8ED7410D5C24}"/>
             </a:ext>
           </a:extLst>
         </p:cNvPr>
@@ -1210,7 +1210,7 @@
           <p:cNvPr id="2" name="슬라이드 이미지 개체 틀 1">
             <a:extLst>
               <a:ext uri="{FF2B5EF4-FFF2-40B4-BE49-F238E27FC236}">
-                <a16:creationId xmlns:a16="http://schemas.microsoft.com/office/drawing/2014/main" id="{E202E732-321E-64DE-26A7-11C0FFAC9731}"/>
+                <a16:creationId xmlns:a16="http://schemas.microsoft.com/office/drawing/2014/main" xmlns="" id="{E2A2A7C5-4DBD-6DA0-D4C4-9F158145444E}"/>
               </a:ext>
             </a:extLst>
           </p:cNvPr>
@@ -1228,7 +1228,7 @@
           <p:cNvPr id="3" name="슬라이드 노트 개체 틀 2">
             <a:extLst>
               <a:ext uri="{FF2B5EF4-FFF2-40B4-BE49-F238E27FC236}">
-                <a16:creationId xmlns:a16="http://schemas.microsoft.com/office/drawing/2014/main" id="{0414D46E-19A2-3FE0-BD28-64F8E1AA2D44}"/>
+                <a16:creationId xmlns:a16="http://schemas.microsoft.com/office/drawing/2014/main" xmlns="" id="{CFDC0F1D-EE0C-3681-61B0-1DEA4C2B6566}"/>
               </a:ext>
             </a:extLst>
           </p:cNvPr>
@@ -1253,7 +1253,7 @@
           <p:cNvPr id="4" name="슬라이드 번호 개체 틀 3">
             <a:extLst>
               <a:ext uri="{FF2B5EF4-FFF2-40B4-BE49-F238E27FC236}">
-                <a16:creationId xmlns:a16="http://schemas.microsoft.com/office/drawing/2014/main" id="{DEE4F259-EAD0-3E0A-4FEE-20170219770C}"/>
+                <a16:creationId xmlns:a16="http://schemas.microsoft.com/office/drawing/2014/main" xmlns="" id="{A52BD183-004B-E054-798A-87423BE18FA6}"/>
               </a:ext>
             </a:extLst>
           </p:cNvPr>
@@ -1280,7 +1280,7 @@
     </p:spTree>
     <p:extLst>
       <p:ext uri="{BB962C8B-B14F-4D97-AF65-F5344CB8AC3E}">
-        <p14:creationId xmlns:p14="http://schemas.microsoft.com/office/powerpoint/2010/main" val="2497128577"/>
+        <p14:creationId xmlns:p14="http://schemas.microsoft.com/office/powerpoint/2010/main" val="546798784"/>
       </p:ext>
     </p:extLst>
   </p:cSld>
@@ -1298,7 +1298,7 @@
         <p:cNvPr id="1" name="">
           <a:extLst>
             <a:ext uri="{FF2B5EF4-FFF2-40B4-BE49-F238E27FC236}">
-              <a16:creationId xmlns:a16="http://schemas.microsoft.com/office/drawing/2014/main" id="{2AEF1E15-50B0-7CD5-5CD9-AF14260601F9}"/>
+              <a16:creationId xmlns:a16="http://schemas.microsoft.com/office/drawing/2014/main" xmlns="" id="{CDA8A9F5-7FAD-EA63-4B9A-5846B7E22875}"/>
             </a:ext>
           </a:extLst>
         </p:cNvPr>
@@ -1318,7 +1318,7 @@
           <p:cNvPr id="2" name="슬라이드 이미지 개체 틀 1">
             <a:extLst>
               <a:ext uri="{FF2B5EF4-FFF2-40B4-BE49-F238E27FC236}">
-                <a16:creationId xmlns:a16="http://schemas.microsoft.com/office/drawing/2014/main" id="{2C5E0A1A-0F25-DCCA-903B-AF336B347216}"/>
+                <a16:creationId xmlns:a16="http://schemas.microsoft.com/office/drawing/2014/main" xmlns="" id="{E202E732-321E-64DE-26A7-11C0FFAC9731}"/>
               </a:ext>
             </a:extLst>
           </p:cNvPr>
@@ -1336,7 +1336,7 @@
           <p:cNvPr id="3" name="슬라이드 노트 개체 틀 2">
             <a:extLst>
               <a:ext uri="{FF2B5EF4-FFF2-40B4-BE49-F238E27FC236}">
-                <a16:creationId xmlns:a16="http://schemas.microsoft.com/office/drawing/2014/main" id="{378C4E44-1823-534F-C317-628BA12DF2CE}"/>
+                <a16:creationId xmlns:a16="http://schemas.microsoft.com/office/drawing/2014/main" xmlns="" id="{0414D46E-19A2-3FE0-BD28-64F8E1AA2D44}"/>
               </a:ext>
             </a:extLst>
           </p:cNvPr>
@@ -1361,7 +1361,7 @@
           <p:cNvPr id="4" name="슬라이드 번호 개체 틀 3">
             <a:extLst>
               <a:ext uri="{FF2B5EF4-FFF2-40B4-BE49-F238E27FC236}">
-                <a16:creationId xmlns:a16="http://schemas.microsoft.com/office/drawing/2014/main" id="{DD898966-BE35-B09B-403B-482EAD85F6D8}"/>
+                <a16:creationId xmlns:a16="http://schemas.microsoft.com/office/drawing/2014/main" xmlns="" id="{DEE4F259-EAD0-3E0A-4FEE-20170219770C}"/>
               </a:ext>
             </a:extLst>
           </p:cNvPr>
@@ -1388,7 +1388,7 @@
     </p:spTree>
     <p:extLst>
       <p:ext uri="{BB962C8B-B14F-4D97-AF65-F5344CB8AC3E}">
-        <p14:creationId xmlns:p14="http://schemas.microsoft.com/office/powerpoint/2010/main" val="855382003"/>
+        <p14:creationId xmlns:p14="http://schemas.microsoft.com/office/powerpoint/2010/main" val="2497128577"/>
       </p:ext>
     </p:extLst>
   </p:cSld>
@@ -1406,7 +1406,7 @@
         <p:cNvPr id="1" name="">
           <a:extLst>
             <a:ext uri="{FF2B5EF4-FFF2-40B4-BE49-F238E27FC236}">
-              <a16:creationId xmlns:a16="http://schemas.microsoft.com/office/drawing/2014/main" id="{C504A8CD-060B-520A-1539-B50E08D82A5B}"/>
+              <a16:creationId xmlns:a16="http://schemas.microsoft.com/office/drawing/2014/main" xmlns="" id="{2AEF1E15-50B0-7CD5-5CD9-AF14260601F9}"/>
             </a:ext>
           </a:extLst>
         </p:cNvPr>
@@ -1426,7 +1426,7 @@
           <p:cNvPr id="2" name="슬라이드 이미지 개체 틀 1">
             <a:extLst>
               <a:ext uri="{FF2B5EF4-FFF2-40B4-BE49-F238E27FC236}">
-                <a16:creationId xmlns:a16="http://schemas.microsoft.com/office/drawing/2014/main" id="{D0ECCCAC-5625-D489-0D80-E44820EBBAD7}"/>
+                <a16:creationId xmlns:a16="http://schemas.microsoft.com/office/drawing/2014/main" xmlns="" id="{2C5E0A1A-0F25-DCCA-903B-AF336B347216}"/>
               </a:ext>
             </a:extLst>
           </p:cNvPr>
@@ -1444,7 +1444,7 @@
           <p:cNvPr id="3" name="슬라이드 노트 개체 틀 2">
             <a:extLst>
               <a:ext uri="{FF2B5EF4-FFF2-40B4-BE49-F238E27FC236}">
-                <a16:creationId xmlns:a16="http://schemas.microsoft.com/office/drawing/2014/main" id="{0BDE29CD-63EC-784A-64E7-B6B523223679}"/>
+                <a16:creationId xmlns:a16="http://schemas.microsoft.com/office/drawing/2014/main" xmlns="" id="{378C4E44-1823-534F-C317-628BA12DF2CE}"/>
               </a:ext>
             </a:extLst>
           </p:cNvPr>
@@ -1469,7 +1469,7 @@
           <p:cNvPr id="4" name="슬라이드 번호 개체 틀 3">
             <a:extLst>
               <a:ext uri="{FF2B5EF4-FFF2-40B4-BE49-F238E27FC236}">
-                <a16:creationId xmlns:a16="http://schemas.microsoft.com/office/drawing/2014/main" id="{A1A896FB-CC67-A4DC-2394-10F168A5FF41}"/>
+                <a16:creationId xmlns:a16="http://schemas.microsoft.com/office/drawing/2014/main" xmlns="" id="{DD898966-BE35-B09B-403B-482EAD85F6D8}"/>
               </a:ext>
             </a:extLst>
           </p:cNvPr>
@@ -1496,7 +1496,7 @@
     </p:spTree>
     <p:extLst>
       <p:ext uri="{BB962C8B-B14F-4D97-AF65-F5344CB8AC3E}">
-        <p14:creationId xmlns:p14="http://schemas.microsoft.com/office/powerpoint/2010/main" val="997819394"/>
+        <p14:creationId xmlns:p14="http://schemas.microsoft.com/office/powerpoint/2010/main" val="855382003"/>
       </p:ext>
     </p:extLst>
   </p:cSld>
@@ -1514,7 +1514,7 @@
         <p:cNvPr id="1" name="">
           <a:extLst>
             <a:ext uri="{FF2B5EF4-FFF2-40B4-BE49-F238E27FC236}">
-              <a16:creationId xmlns:a16="http://schemas.microsoft.com/office/drawing/2014/main" id="{E7C90BDA-805E-3810-7AC0-6461A3B05D9D}"/>
+              <a16:creationId xmlns:a16="http://schemas.microsoft.com/office/drawing/2014/main" xmlns="" id="{E7C90BDA-805E-3810-7AC0-6461A3B05D9D}"/>
             </a:ext>
           </a:extLst>
         </p:cNvPr>
@@ -1534,7 +1534,7 @@
           <p:cNvPr id="2" name="슬라이드 이미지 개체 틀 1">
             <a:extLst>
               <a:ext uri="{FF2B5EF4-FFF2-40B4-BE49-F238E27FC236}">
-                <a16:creationId xmlns:a16="http://schemas.microsoft.com/office/drawing/2014/main" id="{1E6C3313-1968-467F-E98C-5C86AAD5D8DE}"/>
+                <a16:creationId xmlns:a16="http://schemas.microsoft.com/office/drawing/2014/main" xmlns="" id="{1E6C3313-1968-467F-E98C-5C86AAD5D8DE}"/>
               </a:ext>
             </a:extLst>
           </p:cNvPr>
@@ -1552,7 +1552,7 @@
           <p:cNvPr id="3" name="슬라이드 노트 개체 틀 2">
             <a:extLst>
               <a:ext uri="{FF2B5EF4-FFF2-40B4-BE49-F238E27FC236}">
-                <a16:creationId xmlns:a16="http://schemas.microsoft.com/office/drawing/2014/main" id="{06C7B1B1-2165-67D8-CD12-9DB8174DA0EE}"/>
+                <a16:creationId xmlns:a16="http://schemas.microsoft.com/office/drawing/2014/main" xmlns="" id="{06C7B1B1-2165-67D8-CD12-9DB8174DA0EE}"/>
               </a:ext>
             </a:extLst>
           </p:cNvPr>
@@ -1577,7 +1577,7 @@
           <p:cNvPr id="4" name="슬라이드 번호 개체 틀 3">
             <a:extLst>
               <a:ext uri="{FF2B5EF4-FFF2-40B4-BE49-F238E27FC236}">
-                <a16:creationId xmlns:a16="http://schemas.microsoft.com/office/drawing/2014/main" id="{E0E81CD0-9089-C7DA-75CD-CA965606E2DA}"/>
+                <a16:creationId xmlns:a16="http://schemas.microsoft.com/office/drawing/2014/main" xmlns="" id="{E0E81CD0-9089-C7DA-75CD-CA965606E2DA}"/>
               </a:ext>
             </a:extLst>
           </p:cNvPr>
@@ -1622,7 +1622,7 @@
         <p:cNvPr id="1" name="">
           <a:extLst>
             <a:ext uri="{FF2B5EF4-FFF2-40B4-BE49-F238E27FC236}">
-              <a16:creationId xmlns:a16="http://schemas.microsoft.com/office/drawing/2014/main" id="{B96581C7-E434-47DB-6ACF-69FCF793A96B}"/>
+              <a16:creationId xmlns:a16="http://schemas.microsoft.com/office/drawing/2014/main" xmlns="" id="{B96581C7-E434-47DB-6ACF-69FCF793A96B}"/>
             </a:ext>
           </a:extLst>
         </p:cNvPr>
@@ -1642,7 +1642,7 @@
           <p:cNvPr id="2" name="슬라이드 이미지 개체 틀 1">
             <a:extLst>
               <a:ext uri="{FF2B5EF4-FFF2-40B4-BE49-F238E27FC236}">
-                <a16:creationId xmlns:a16="http://schemas.microsoft.com/office/drawing/2014/main" id="{ADD29801-CBD4-2FA8-2EA2-88B9857B6C3D}"/>
+                <a16:creationId xmlns:a16="http://schemas.microsoft.com/office/drawing/2014/main" xmlns="" id="{ADD29801-CBD4-2FA8-2EA2-88B9857B6C3D}"/>
               </a:ext>
             </a:extLst>
           </p:cNvPr>
@@ -1660,7 +1660,7 @@
           <p:cNvPr id="3" name="슬라이드 노트 개체 틀 2">
             <a:extLst>
               <a:ext uri="{FF2B5EF4-FFF2-40B4-BE49-F238E27FC236}">
-                <a16:creationId xmlns:a16="http://schemas.microsoft.com/office/drawing/2014/main" id="{305474EC-565F-6D80-B904-9D4B868429EA}"/>
+                <a16:creationId xmlns:a16="http://schemas.microsoft.com/office/drawing/2014/main" xmlns="" id="{305474EC-565F-6D80-B904-9D4B868429EA}"/>
               </a:ext>
             </a:extLst>
           </p:cNvPr>
@@ -1685,7 +1685,7 @@
           <p:cNvPr id="4" name="슬라이드 번호 개체 틀 3">
             <a:extLst>
               <a:ext uri="{FF2B5EF4-FFF2-40B4-BE49-F238E27FC236}">
-                <a16:creationId xmlns:a16="http://schemas.microsoft.com/office/drawing/2014/main" id="{6D2390A5-EAE6-1386-7936-D6AF28666EB2}"/>
+                <a16:creationId xmlns:a16="http://schemas.microsoft.com/office/drawing/2014/main" xmlns="" id="{6D2390A5-EAE6-1386-7936-D6AF28666EB2}"/>
               </a:ext>
             </a:extLst>
           </p:cNvPr>
@@ -1730,7 +1730,7 @@
         <p:cNvPr id="1" name="">
           <a:extLst>
             <a:ext uri="{FF2B5EF4-FFF2-40B4-BE49-F238E27FC236}">
-              <a16:creationId xmlns:a16="http://schemas.microsoft.com/office/drawing/2014/main" id="{34E1B068-BCF9-DF67-6E29-01EF82BB4015}"/>
+              <a16:creationId xmlns:a16="http://schemas.microsoft.com/office/drawing/2014/main" xmlns="" id="{34E1B068-BCF9-DF67-6E29-01EF82BB4015}"/>
             </a:ext>
           </a:extLst>
         </p:cNvPr>
@@ -1750,7 +1750,7 @@
           <p:cNvPr id="2" name="슬라이드 이미지 개체 틀 1">
             <a:extLst>
               <a:ext uri="{FF2B5EF4-FFF2-40B4-BE49-F238E27FC236}">
-                <a16:creationId xmlns:a16="http://schemas.microsoft.com/office/drawing/2014/main" id="{925E688F-A200-C65E-6A69-AFC1F3DB5EE0}"/>
+                <a16:creationId xmlns:a16="http://schemas.microsoft.com/office/drawing/2014/main" xmlns="" id="{925E688F-A200-C65E-6A69-AFC1F3DB5EE0}"/>
               </a:ext>
             </a:extLst>
           </p:cNvPr>
@@ -1768,7 +1768,7 @@
           <p:cNvPr id="3" name="슬라이드 노트 개체 틀 2">
             <a:extLst>
               <a:ext uri="{FF2B5EF4-FFF2-40B4-BE49-F238E27FC236}">
-                <a16:creationId xmlns:a16="http://schemas.microsoft.com/office/drawing/2014/main" id="{B0141520-229E-D6BA-1D69-806FABD37E88}"/>
+                <a16:creationId xmlns:a16="http://schemas.microsoft.com/office/drawing/2014/main" xmlns="" id="{B0141520-229E-D6BA-1D69-806FABD37E88}"/>
               </a:ext>
             </a:extLst>
           </p:cNvPr>
@@ -1793,7 +1793,7 @@
           <p:cNvPr id="4" name="슬라이드 번호 개체 틀 3">
             <a:extLst>
               <a:ext uri="{FF2B5EF4-FFF2-40B4-BE49-F238E27FC236}">
-                <a16:creationId xmlns:a16="http://schemas.microsoft.com/office/drawing/2014/main" id="{CD6B0D90-DC5B-3AE6-13C9-4AD3D2986211}"/>
+                <a16:creationId xmlns:a16="http://schemas.microsoft.com/office/drawing/2014/main" xmlns="" id="{CD6B0D90-DC5B-3AE6-13C9-4AD3D2986211}"/>
               </a:ext>
             </a:extLst>
           </p:cNvPr>
@@ -1838,7 +1838,7 @@
         <p:cNvPr id="1" name="">
           <a:extLst>
             <a:ext uri="{FF2B5EF4-FFF2-40B4-BE49-F238E27FC236}">
-              <a16:creationId xmlns:a16="http://schemas.microsoft.com/office/drawing/2014/main" id="{B1BDADBC-6CCF-EA69-5FBA-13CF2A01CFCE}"/>
+              <a16:creationId xmlns:a16="http://schemas.microsoft.com/office/drawing/2014/main" xmlns="" id="{B1BDADBC-6CCF-EA69-5FBA-13CF2A01CFCE}"/>
             </a:ext>
           </a:extLst>
         </p:cNvPr>
@@ -1858,7 +1858,7 @@
           <p:cNvPr id="2" name="슬라이드 이미지 개체 틀 1">
             <a:extLst>
               <a:ext uri="{FF2B5EF4-FFF2-40B4-BE49-F238E27FC236}">
-                <a16:creationId xmlns:a16="http://schemas.microsoft.com/office/drawing/2014/main" id="{72BCCC5F-F401-9A94-2426-2B481E6D9B74}"/>
+                <a16:creationId xmlns:a16="http://schemas.microsoft.com/office/drawing/2014/main" xmlns="" id="{72BCCC5F-F401-9A94-2426-2B481E6D9B74}"/>
               </a:ext>
             </a:extLst>
           </p:cNvPr>
@@ -1876,7 +1876,7 @@
           <p:cNvPr id="3" name="슬라이드 노트 개체 틀 2">
             <a:extLst>
               <a:ext uri="{FF2B5EF4-FFF2-40B4-BE49-F238E27FC236}">
-                <a16:creationId xmlns:a16="http://schemas.microsoft.com/office/drawing/2014/main" id="{D147BFC0-7061-2FD7-CC0E-5E10DDF4D5F9}"/>
+                <a16:creationId xmlns:a16="http://schemas.microsoft.com/office/drawing/2014/main" xmlns="" id="{D147BFC0-7061-2FD7-CC0E-5E10DDF4D5F9}"/>
               </a:ext>
             </a:extLst>
           </p:cNvPr>
@@ -1901,7 +1901,7 @@
           <p:cNvPr id="4" name="슬라이드 번호 개체 틀 3">
             <a:extLst>
               <a:ext uri="{FF2B5EF4-FFF2-40B4-BE49-F238E27FC236}">
-                <a16:creationId xmlns:a16="http://schemas.microsoft.com/office/drawing/2014/main" id="{6F8764C0-AB41-E0B8-5881-76F2E6C708E1}"/>
+                <a16:creationId xmlns:a16="http://schemas.microsoft.com/office/drawing/2014/main" xmlns="" id="{6F8764C0-AB41-E0B8-5881-76F2E6C708E1}"/>
               </a:ext>
             </a:extLst>
           </p:cNvPr>
@@ -1960,7 +1960,7 @@
           <p:cNvPr id="2" name="제목 1">
             <a:extLst>
               <a:ext uri="{FF2B5EF4-FFF2-40B4-BE49-F238E27FC236}">
-                <a16:creationId xmlns:a16="http://schemas.microsoft.com/office/drawing/2014/main" id="{47C6A88D-EDAF-CEC2-712F-FA6A7E4FF53C}"/>
+                <a16:creationId xmlns:a16="http://schemas.microsoft.com/office/drawing/2014/main" xmlns="" id="{47C6A88D-EDAF-CEC2-712F-FA6A7E4FF53C}"/>
               </a:ext>
             </a:extLst>
           </p:cNvPr>
@@ -1997,7 +1997,7 @@
           <p:cNvPr id="3" name="부제목 2">
             <a:extLst>
               <a:ext uri="{FF2B5EF4-FFF2-40B4-BE49-F238E27FC236}">
-                <a16:creationId xmlns:a16="http://schemas.microsoft.com/office/drawing/2014/main" id="{1F7A10E8-4E5D-A611-E577-EBA5676A507E}"/>
+                <a16:creationId xmlns:a16="http://schemas.microsoft.com/office/drawing/2014/main" xmlns="" id="{1F7A10E8-4E5D-A611-E577-EBA5676A507E}"/>
               </a:ext>
             </a:extLst>
           </p:cNvPr>
@@ -2067,7 +2067,7 @@
           <p:cNvPr id="4" name="날짜 개체 틀 3">
             <a:extLst>
               <a:ext uri="{FF2B5EF4-FFF2-40B4-BE49-F238E27FC236}">
-                <a16:creationId xmlns:a16="http://schemas.microsoft.com/office/drawing/2014/main" id="{FA4EF1CD-FA03-944B-0EC0-2AABE3B0C471}"/>
+                <a16:creationId xmlns:a16="http://schemas.microsoft.com/office/drawing/2014/main" xmlns="" id="{FA4EF1CD-FA03-944B-0EC0-2AABE3B0C471}"/>
               </a:ext>
             </a:extLst>
           </p:cNvPr>
@@ -2085,7 +2085,7 @@
           <a:p>
             <a:fld id="{5850A429-5607-4C3C-9BC0-4142A9E07459}" type="datetimeFigureOut">
               <a:rPr lang="ko-KR" altLang="en-US" smtClean="0"/>
-              <a:t>2026-08-06</a:t>
+              <a:t>2026-08-07</a:t>
             </a:fld>
             <a:endParaRPr lang="ko-KR" altLang="en-US"/>
           </a:p>
@@ -2096,7 +2096,7 @@
           <p:cNvPr id="5" name="바닥글 개체 틀 4">
             <a:extLst>
               <a:ext uri="{FF2B5EF4-FFF2-40B4-BE49-F238E27FC236}">
-                <a16:creationId xmlns:a16="http://schemas.microsoft.com/office/drawing/2014/main" id="{D7E1904F-F41F-7809-481D-7E79FCD2132E}"/>
+                <a16:creationId xmlns:a16="http://schemas.microsoft.com/office/drawing/2014/main" xmlns="" id="{D7E1904F-F41F-7809-481D-7E79FCD2132E}"/>
               </a:ext>
             </a:extLst>
           </p:cNvPr>
@@ -2121,7 +2121,7 @@
           <p:cNvPr id="6" name="슬라이드 번호 개체 틀 5">
             <a:extLst>
               <a:ext uri="{FF2B5EF4-FFF2-40B4-BE49-F238E27FC236}">
-                <a16:creationId xmlns:a16="http://schemas.microsoft.com/office/drawing/2014/main" id="{46C721DE-9DEE-BACB-B354-8E260F43215D}"/>
+                <a16:creationId xmlns:a16="http://schemas.microsoft.com/office/drawing/2014/main" xmlns="" id="{46C721DE-9DEE-BACB-B354-8E260F43215D}"/>
               </a:ext>
             </a:extLst>
           </p:cNvPr>
@@ -2180,7 +2180,7 @@
           <p:cNvPr id="2" name="제목 1">
             <a:extLst>
               <a:ext uri="{FF2B5EF4-FFF2-40B4-BE49-F238E27FC236}">
-                <a16:creationId xmlns:a16="http://schemas.microsoft.com/office/drawing/2014/main" id="{8EC6E50E-2954-B290-1563-C4936B9E8431}"/>
+                <a16:creationId xmlns:a16="http://schemas.microsoft.com/office/drawing/2014/main" xmlns="" id="{8EC6E50E-2954-B290-1563-C4936B9E8431}"/>
               </a:ext>
             </a:extLst>
           </p:cNvPr>
@@ -2208,7 +2208,7 @@
           <p:cNvPr id="3" name="세로 텍스트 개체 틀 2">
             <a:extLst>
               <a:ext uri="{FF2B5EF4-FFF2-40B4-BE49-F238E27FC236}">
-                <a16:creationId xmlns:a16="http://schemas.microsoft.com/office/drawing/2014/main" id="{5B6A99E4-1414-E268-7B72-A4C896708AE3}"/>
+                <a16:creationId xmlns:a16="http://schemas.microsoft.com/office/drawing/2014/main" xmlns="" id="{5B6A99E4-1414-E268-7B72-A4C896708AE3}"/>
               </a:ext>
             </a:extLst>
           </p:cNvPr>
@@ -2265,7 +2265,7 @@
           <p:cNvPr id="4" name="날짜 개체 틀 3">
             <a:extLst>
               <a:ext uri="{FF2B5EF4-FFF2-40B4-BE49-F238E27FC236}">
-                <a16:creationId xmlns:a16="http://schemas.microsoft.com/office/drawing/2014/main" id="{3A9BB3C2-1FA4-4151-9ADB-996284F1BDE2}"/>
+                <a16:creationId xmlns:a16="http://schemas.microsoft.com/office/drawing/2014/main" xmlns="" id="{3A9BB3C2-1FA4-4151-9ADB-996284F1BDE2}"/>
               </a:ext>
             </a:extLst>
           </p:cNvPr>
@@ -2283,7 +2283,7 @@
           <a:p>
             <a:fld id="{5850A429-5607-4C3C-9BC0-4142A9E07459}" type="datetimeFigureOut">
               <a:rPr lang="ko-KR" altLang="en-US" smtClean="0"/>
-              <a:t>2026-08-06</a:t>
+              <a:t>2026-08-07</a:t>
             </a:fld>
             <a:endParaRPr lang="ko-KR" altLang="en-US"/>
           </a:p>
@@ -2294,7 +2294,7 @@
           <p:cNvPr id="5" name="바닥글 개체 틀 4">
             <a:extLst>
               <a:ext uri="{FF2B5EF4-FFF2-40B4-BE49-F238E27FC236}">
-                <a16:creationId xmlns:a16="http://schemas.microsoft.com/office/drawing/2014/main" id="{8A27C81A-BE4E-27CE-6CE4-0AE5876D470A}"/>
+                <a16:creationId xmlns:a16="http://schemas.microsoft.com/office/drawing/2014/main" xmlns="" id="{8A27C81A-BE4E-27CE-6CE4-0AE5876D470A}"/>
               </a:ext>
             </a:extLst>
           </p:cNvPr>
@@ -2319,7 +2319,7 @@
           <p:cNvPr id="6" name="슬라이드 번호 개체 틀 5">
             <a:extLst>
               <a:ext uri="{FF2B5EF4-FFF2-40B4-BE49-F238E27FC236}">
-                <a16:creationId xmlns:a16="http://schemas.microsoft.com/office/drawing/2014/main" id="{B4E3C814-C417-2E3F-F02B-1B9ED6941FBD}"/>
+                <a16:creationId xmlns:a16="http://schemas.microsoft.com/office/drawing/2014/main" xmlns="" id="{B4E3C814-C417-2E3F-F02B-1B9ED6941FBD}"/>
               </a:ext>
             </a:extLst>
           </p:cNvPr>
@@ -2378,7 +2378,7 @@
           <p:cNvPr id="2" name="세로 제목 1">
             <a:extLst>
               <a:ext uri="{FF2B5EF4-FFF2-40B4-BE49-F238E27FC236}">
-                <a16:creationId xmlns:a16="http://schemas.microsoft.com/office/drawing/2014/main" id="{AC1D687F-54E9-57A3-FDA2-5A8060E79A80}"/>
+                <a16:creationId xmlns:a16="http://schemas.microsoft.com/office/drawing/2014/main" xmlns="" id="{AC1D687F-54E9-57A3-FDA2-5A8060E79A80}"/>
               </a:ext>
             </a:extLst>
           </p:cNvPr>
@@ -2411,7 +2411,7 @@
           <p:cNvPr id="3" name="세로 텍스트 개체 틀 2">
             <a:extLst>
               <a:ext uri="{FF2B5EF4-FFF2-40B4-BE49-F238E27FC236}">
-                <a16:creationId xmlns:a16="http://schemas.microsoft.com/office/drawing/2014/main" id="{BC846A14-940B-8FE8-A769-3DABAE11AD25}"/>
+                <a16:creationId xmlns:a16="http://schemas.microsoft.com/office/drawing/2014/main" xmlns="" id="{BC846A14-940B-8FE8-A769-3DABAE11AD25}"/>
               </a:ext>
             </a:extLst>
           </p:cNvPr>
@@ -2473,7 +2473,7 @@
           <p:cNvPr id="4" name="날짜 개체 틀 3">
             <a:extLst>
               <a:ext uri="{FF2B5EF4-FFF2-40B4-BE49-F238E27FC236}">
-                <a16:creationId xmlns:a16="http://schemas.microsoft.com/office/drawing/2014/main" id="{393732A3-4427-5A76-3A9C-DBE87A4364DD}"/>
+                <a16:creationId xmlns:a16="http://schemas.microsoft.com/office/drawing/2014/main" xmlns="" id="{393732A3-4427-5A76-3A9C-DBE87A4364DD}"/>
               </a:ext>
             </a:extLst>
           </p:cNvPr>
@@ -2491,7 +2491,7 @@
           <a:p>
             <a:fld id="{5850A429-5607-4C3C-9BC0-4142A9E07459}" type="datetimeFigureOut">
               <a:rPr lang="ko-KR" altLang="en-US" smtClean="0"/>
-              <a:t>2026-08-06</a:t>
+              <a:t>2026-08-07</a:t>
             </a:fld>
             <a:endParaRPr lang="ko-KR" altLang="en-US"/>
           </a:p>
@@ -2502,7 +2502,7 @@
           <p:cNvPr id="5" name="바닥글 개체 틀 4">
             <a:extLst>
               <a:ext uri="{FF2B5EF4-FFF2-40B4-BE49-F238E27FC236}">
-                <a16:creationId xmlns:a16="http://schemas.microsoft.com/office/drawing/2014/main" id="{16A5B672-F383-0FF5-2D72-72E1E7F0F0D3}"/>
+                <a16:creationId xmlns:a16="http://schemas.microsoft.com/office/drawing/2014/main" xmlns="" id="{16A5B672-F383-0FF5-2D72-72E1E7F0F0D3}"/>
               </a:ext>
             </a:extLst>
           </p:cNvPr>
@@ -2527,7 +2527,7 @@
           <p:cNvPr id="6" name="슬라이드 번호 개체 틀 5">
             <a:extLst>
               <a:ext uri="{FF2B5EF4-FFF2-40B4-BE49-F238E27FC236}">
-                <a16:creationId xmlns:a16="http://schemas.microsoft.com/office/drawing/2014/main" id="{DE28928A-9906-D889-A8B7-B97D729CDB76}"/>
+                <a16:creationId xmlns:a16="http://schemas.microsoft.com/office/drawing/2014/main" xmlns="" id="{DE28928A-9906-D889-A8B7-B97D729CDB76}"/>
               </a:ext>
             </a:extLst>
           </p:cNvPr>
@@ -2586,7 +2586,7 @@
           <p:cNvPr id="2" name="제목 1">
             <a:extLst>
               <a:ext uri="{FF2B5EF4-FFF2-40B4-BE49-F238E27FC236}">
-                <a16:creationId xmlns:a16="http://schemas.microsoft.com/office/drawing/2014/main" id="{54F5793F-94FE-56B0-E0CB-A317DA7FB4BC}"/>
+                <a16:creationId xmlns:a16="http://schemas.microsoft.com/office/drawing/2014/main" xmlns="" id="{54F5793F-94FE-56B0-E0CB-A317DA7FB4BC}"/>
               </a:ext>
             </a:extLst>
           </p:cNvPr>
@@ -2614,7 +2614,7 @@
           <p:cNvPr id="3" name="내용 개체 틀 2">
             <a:extLst>
               <a:ext uri="{FF2B5EF4-FFF2-40B4-BE49-F238E27FC236}">
-                <a16:creationId xmlns:a16="http://schemas.microsoft.com/office/drawing/2014/main" id="{BFAF79B8-2AD1-69C6-D4D5-21827C6802F8}"/>
+                <a16:creationId xmlns:a16="http://schemas.microsoft.com/office/drawing/2014/main" xmlns="" id="{BFAF79B8-2AD1-69C6-D4D5-21827C6802F8}"/>
               </a:ext>
             </a:extLst>
           </p:cNvPr>
@@ -2671,7 +2671,7 @@
           <p:cNvPr id="4" name="날짜 개체 틀 3">
             <a:extLst>
               <a:ext uri="{FF2B5EF4-FFF2-40B4-BE49-F238E27FC236}">
-                <a16:creationId xmlns:a16="http://schemas.microsoft.com/office/drawing/2014/main" id="{6718AF63-4F49-82B6-24FC-BB457FC964FC}"/>
+                <a16:creationId xmlns:a16="http://schemas.microsoft.com/office/drawing/2014/main" xmlns="" id="{6718AF63-4F49-82B6-24FC-BB457FC964FC}"/>
               </a:ext>
             </a:extLst>
           </p:cNvPr>
@@ -2689,7 +2689,7 @@
           <a:p>
             <a:fld id="{5850A429-5607-4C3C-9BC0-4142A9E07459}" type="datetimeFigureOut">
               <a:rPr lang="ko-KR" altLang="en-US" smtClean="0"/>
-              <a:t>2026-08-06</a:t>
+              <a:t>2026-08-07</a:t>
             </a:fld>
             <a:endParaRPr lang="ko-KR" altLang="en-US"/>
           </a:p>
@@ -2700,7 +2700,7 @@
           <p:cNvPr id="5" name="바닥글 개체 틀 4">
             <a:extLst>
               <a:ext uri="{FF2B5EF4-FFF2-40B4-BE49-F238E27FC236}">
-                <a16:creationId xmlns:a16="http://schemas.microsoft.com/office/drawing/2014/main" id="{AA45FF19-25D7-1FF3-E311-2C2E07B26764}"/>
+                <a16:creationId xmlns:a16="http://schemas.microsoft.com/office/drawing/2014/main" xmlns="" id="{AA45FF19-25D7-1FF3-E311-2C2E07B26764}"/>
               </a:ext>
             </a:extLst>
           </p:cNvPr>
@@ -2725,7 +2725,7 @@
           <p:cNvPr id="6" name="슬라이드 번호 개체 틀 5">
             <a:extLst>
               <a:ext uri="{FF2B5EF4-FFF2-40B4-BE49-F238E27FC236}">
-                <a16:creationId xmlns:a16="http://schemas.microsoft.com/office/drawing/2014/main" id="{6F43D8BF-52A4-97EB-612B-F9899664EFD5}"/>
+                <a16:creationId xmlns:a16="http://schemas.microsoft.com/office/drawing/2014/main" xmlns="" id="{6F43D8BF-52A4-97EB-612B-F9899664EFD5}"/>
               </a:ext>
             </a:extLst>
           </p:cNvPr>
@@ -2784,7 +2784,7 @@
           <p:cNvPr id="2" name="제목 1">
             <a:extLst>
               <a:ext uri="{FF2B5EF4-FFF2-40B4-BE49-F238E27FC236}">
-                <a16:creationId xmlns:a16="http://schemas.microsoft.com/office/drawing/2014/main" id="{1EB95909-78E9-5BAC-68EA-7DCA2A1271F7}"/>
+                <a16:creationId xmlns:a16="http://schemas.microsoft.com/office/drawing/2014/main" xmlns="" id="{1EB95909-78E9-5BAC-68EA-7DCA2A1271F7}"/>
               </a:ext>
             </a:extLst>
           </p:cNvPr>
@@ -2821,7 +2821,7 @@
           <p:cNvPr id="3" name="텍스트 개체 틀 2">
             <a:extLst>
               <a:ext uri="{FF2B5EF4-FFF2-40B4-BE49-F238E27FC236}">
-                <a16:creationId xmlns:a16="http://schemas.microsoft.com/office/drawing/2014/main" id="{D6B98DAF-2A47-3ECD-807C-96FB70CF9854}"/>
+                <a16:creationId xmlns:a16="http://schemas.microsoft.com/office/drawing/2014/main" xmlns="" id="{D6B98DAF-2A47-3ECD-807C-96FB70CF9854}"/>
               </a:ext>
             </a:extLst>
           </p:cNvPr>
@@ -2946,7 +2946,7 @@
           <p:cNvPr id="4" name="날짜 개체 틀 3">
             <a:extLst>
               <a:ext uri="{FF2B5EF4-FFF2-40B4-BE49-F238E27FC236}">
-                <a16:creationId xmlns:a16="http://schemas.microsoft.com/office/drawing/2014/main" id="{A3AD9670-C268-56FC-281A-FE1F59541EB9}"/>
+                <a16:creationId xmlns:a16="http://schemas.microsoft.com/office/drawing/2014/main" xmlns="" id="{A3AD9670-C268-56FC-281A-FE1F59541EB9}"/>
               </a:ext>
             </a:extLst>
           </p:cNvPr>
@@ -2964,7 +2964,7 @@
           <a:p>
             <a:fld id="{5850A429-5607-4C3C-9BC0-4142A9E07459}" type="datetimeFigureOut">
               <a:rPr lang="ko-KR" altLang="en-US" smtClean="0"/>
-              <a:t>2026-08-06</a:t>
+              <a:t>2026-08-07</a:t>
             </a:fld>
             <a:endParaRPr lang="ko-KR" altLang="en-US"/>
           </a:p>
@@ -2975,7 +2975,7 @@
           <p:cNvPr id="5" name="바닥글 개체 틀 4">
             <a:extLst>
               <a:ext uri="{FF2B5EF4-FFF2-40B4-BE49-F238E27FC236}">
-                <a16:creationId xmlns:a16="http://schemas.microsoft.com/office/drawing/2014/main" id="{A4946F37-FE38-E38E-7339-DC6E4EFA5B3B}"/>
+                <a16:creationId xmlns:a16="http://schemas.microsoft.com/office/drawing/2014/main" xmlns="" id="{A4946F37-FE38-E38E-7339-DC6E4EFA5B3B}"/>
               </a:ext>
             </a:extLst>
           </p:cNvPr>
@@ -3000,7 +3000,7 @@
           <p:cNvPr id="6" name="슬라이드 번호 개체 틀 5">
             <a:extLst>
               <a:ext uri="{FF2B5EF4-FFF2-40B4-BE49-F238E27FC236}">
-                <a16:creationId xmlns:a16="http://schemas.microsoft.com/office/drawing/2014/main" id="{7C17C39B-6348-28CC-59AF-B1A65BE2F149}"/>
+                <a16:creationId xmlns:a16="http://schemas.microsoft.com/office/drawing/2014/main" xmlns="" id="{7C17C39B-6348-28CC-59AF-B1A65BE2F149}"/>
               </a:ext>
             </a:extLst>
           </p:cNvPr>
@@ -3059,7 +3059,7 @@
           <p:cNvPr id="2" name="제목 1">
             <a:extLst>
               <a:ext uri="{FF2B5EF4-FFF2-40B4-BE49-F238E27FC236}">
-                <a16:creationId xmlns:a16="http://schemas.microsoft.com/office/drawing/2014/main" id="{0D0EFA0F-10D7-865F-1370-4EA34C786709}"/>
+                <a16:creationId xmlns:a16="http://schemas.microsoft.com/office/drawing/2014/main" xmlns="" id="{0D0EFA0F-10D7-865F-1370-4EA34C786709}"/>
               </a:ext>
             </a:extLst>
           </p:cNvPr>
@@ -3087,7 +3087,7 @@
           <p:cNvPr id="3" name="내용 개체 틀 2">
             <a:extLst>
               <a:ext uri="{FF2B5EF4-FFF2-40B4-BE49-F238E27FC236}">
-                <a16:creationId xmlns:a16="http://schemas.microsoft.com/office/drawing/2014/main" id="{0498CDB5-9D2B-5F68-9DD8-ED20454B1044}"/>
+                <a16:creationId xmlns:a16="http://schemas.microsoft.com/office/drawing/2014/main" xmlns="" id="{0498CDB5-9D2B-5F68-9DD8-ED20454B1044}"/>
               </a:ext>
             </a:extLst>
           </p:cNvPr>
@@ -3149,7 +3149,7 @@
           <p:cNvPr id="4" name="내용 개체 틀 3">
             <a:extLst>
               <a:ext uri="{FF2B5EF4-FFF2-40B4-BE49-F238E27FC236}">
-                <a16:creationId xmlns:a16="http://schemas.microsoft.com/office/drawing/2014/main" id="{570EB1B7-8EDE-2794-EA53-E0C1972FAF1A}"/>
+                <a16:creationId xmlns:a16="http://schemas.microsoft.com/office/drawing/2014/main" xmlns="" id="{570EB1B7-8EDE-2794-EA53-E0C1972FAF1A}"/>
               </a:ext>
             </a:extLst>
           </p:cNvPr>
@@ -3211,7 +3211,7 @@
           <p:cNvPr id="5" name="날짜 개체 틀 4">
             <a:extLst>
               <a:ext uri="{FF2B5EF4-FFF2-40B4-BE49-F238E27FC236}">
-                <a16:creationId xmlns:a16="http://schemas.microsoft.com/office/drawing/2014/main" id="{31FBCFA4-CF51-706E-F9F0-8B66CA1A0E1B}"/>
+                <a16:creationId xmlns:a16="http://schemas.microsoft.com/office/drawing/2014/main" xmlns="" id="{31FBCFA4-CF51-706E-F9F0-8B66CA1A0E1B}"/>
               </a:ext>
             </a:extLst>
           </p:cNvPr>
@@ -3229,7 +3229,7 @@
           <a:p>
             <a:fld id="{5850A429-5607-4C3C-9BC0-4142A9E07459}" type="datetimeFigureOut">
               <a:rPr lang="ko-KR" altLang="en-US" smtClean="0"/>
-              <a:t>2026-08-06</a:t>
+              <a:t>2026-08-07</a:t>
             </a:fld>
             <a:endParaRPr lang="ko-KR" altLang="en-US"/>
           </a:p>
@@ -3240,7 +3240,7 @@
           <p:cNvPr id="6" name="바닥글 개체 틀 5">
             <a:extLst>
               <a:ext uri="{FF2B5EF4-FFF2-40B4-BE49-F238E27FC236}">
-                <a16:creationId xmlns:a16="http://schemas.microsoft.com/office/drawing/2014/main" id="{FD56636A-469F-7FE9-480E-955BCC0E6D70}"/>
+                <a16:creationId xmlns:a16="http://schemas.microsoft.com/office/drawing/2014/main" xmlns="" id="{FD56636A-469F-7FE9-480E-955BCC0E6D70}"/>
               </a:ext>
             </a:extLst>
           </p:cNvPr>
@@ -3265,7 +3265,7 @@
           <p:cNvPr id="7" name="슬라이드 번호 개체 틀 6">
             <a:extLst>
               <a:ext uri="{FF2B5EF4-FFF2-40B4-BE49-F238E27FC236}">
-                <a16:creationId xmlns:a16="http://schemas.microsoft.com/office/drawing/2014/main" id="{3971D272-167D-EE36-E685-CD8BFE8CC9A6}"/>
+                <a16:creationId xmlns:a16="http://schemas.microsoft.com/office/drawing/2014/main" xmlns="" id="{3971D272-167D-EE36-E685-CD8BFE8CC9A6}"/>
               </a:ext>
             </a:extLst>
           </p:cNvPr>
@@ -3324,7 +3324,7 @@
           <p:cNvPr id="2" name="제목 1">
             <a:extLst>
               <a:ext uri="{FF2B5EF4-FFF2-40B4-BE49-F238E27FC236}">
-                <a16:creationId xmlns:a16="http://schemas.microsoft.com/office/drawing/2014/main" id="{9AC7230E-A2F3-4027-B6F6-9C5C289B1314}"/>
+                <a16:creationId xmlns:a16="http://schemas.microsoft.com/office/drawing/2014/main" xmlns="" id="{9AC7230E-A2F3-4027-B6F6-9C5C289B1314}"/>
               </a:ext>
             </a:extLst>
           </p:cNvPr>
@@ -3357,7 +3357,7 @@
           <p:cNvPr id="3" name="텍스트 개체 틀 2">
             <a:extLst>
               <a:ext uri="{FF2B5EF4-FFF2-40B4-BE49-F238E27FC236}">
-                <a16:creationId xmlns:a16="http://schemas.microsoft.com/office/drawing/2014/main" id="{0C685356-7419-AD93-377A-8D9A0293423E}"/>
+                <a16:creationId xmlns:a16="http://schemas.microsoft.com/office/drawing/2014/main" xmlns="" id="{0C685356-7419-AD93-377A-8D9A0293423E}"/>
               </a:ext>
             </a:extLst>
           </p:cNvPr>
@@ -3428,7 +3428,7 @@
           <p:cNvPr id="4" name="내용 개체 틀 3">
             <a:extLst>
               <a:ext uri="{FF2B5EF4-FFF2-40B4-BE49-F238E27FC236}">
-                <a16:creationId xmlns:a16="http://schemas.microsoft.com/office/drawing/2014/main" id="{CC36E6CA-94A6-3223-C91A-F6E9648C8EAD}"/>
+                <a16:creationId xmlns:a16="http://schemas.microsoft.com/office/drawing/2014/main" xmlns="" id="{CC36E6CA-94A6-3223-C91A-F6E9648C8EAD}"/>
               </a:ext>
             </a:extLst>
           </p:cNvPr>
@@ -3490,7 +3490,7 @@
           <p:cNvPr id="5" name="텍스트 개체 틀 4">
             <a:extLst>
               <a:ext uri="{FF2B5EF4-FFF2-40B4-BE49-F238E27FC236}">
-                <a16:creationId xmlns:a16="http://schemas.microsoft.com/office/drawing/2014/main" id="{F4DFD790-787A-88A3-300F-C173DAD2E1AF}"/>
+                <a16:creationId xmlns:a16="http://schemas.microsoft.com/office/drawing/2014/main" xmlns="" id="{F4DFD790-787A-88A3-300F-C173DAD2E1AF}"/>
               </a:ext>
             </a:extLst>
           </p:cNvPr>
@@ -3561,7 +3561,7 @@
           <p:cNvPr id="6" name="내용 개체 틀 5">
             <a:extLst>
               <a:ext uri="{FF2B5EF4-FFF2-40B4-BE49-F238E27FC236}">
-                <a16:creationId xmlns:a16="http://schemas.microsoft.com/office/drawing/2014/main" id="{012AE83D-2990-A6E4-CC9C-06D342A67C09}"/>
+                <a16:creationId xmlns:a16="http://schemas.microsoft.com/office/drawing/2014/main" xmlns="" id="{012AE83D-2990-A6E4-CC9C-06D342A67C09}"/>
               </a:ext>
             </a:extLst>
           </p:cNvPr>
@@ -3623,7 +3623,7 @@
           <p:cNvPr id="7" name="날짜 개체 틀 6">
             <a:extLst>
               <a:ext uri="{FF2B5EF4-FFF2-40B4-BE49-F238E27FC236}">
-                <a16:creationId xmlns:a16="http://schemas.microsoft.com/office/drawing/2014/main" id="{3C11F8C3-5AD3-730B-8ADB-304185DAA67E}"/>
+                <a16:creationId xmlns:a16="http://schemas.microsoft.com/office/drawing/2014/main" xmlns="" id="{3C11F8C3-5AD3-730B-8ADB-304185DAA67E}"/>
               </a:ext>
             </a:extLst>
           </p:cNvPr>
@@ -3641,7 +3641,7 @@
           <a:p>
             <a:fld id="{5850A429-5607-4C3C-9BC0-4142A9E07459}" type="datetimeFigureOut">
               <a:rPr lang="ko-KR" altLang="en-US" smtClean="0"/>
-              <a:t>2026-08-06</a:t>
+              <a:t>2026-08-07</a:t>
             </a:fld>
             <a:endParaRPr lang="ko-KR" altLang="en-US"/>
           </a:p>
@@ -3652,7 +3652,7 @@
           <p:cNvPr id="8" name="바닥글 개체 틀 7">
             <a:extLst>
               <a:ext uri="{FF2B5EF4-FFF2-40B4-BE49-F238E27FC236}">
-                <a16:creationId xmlns:a16="http://schemas.microsoft.com/office/drawing/2014/main" id="{EF36ABA7-53C4-C11E-CC9D-F5E59BDBBD9B}"/>
+                <a16:creationId xmlns:a16="http://schemas.microsoft.com/office/drawing/2014/main" xmlns="" id="{EF36ABA7-53C4-C11E-CC9D-F5E59BDBBD9B}"/>
               </a:ext>
             </a:extLst>
           </p:cNvPr>
@@ -3677,7 +3677,7 @@
           <p:cNvPr id="9" name="슬라이드 번호 개체 틀 8">
             <a:extLst>
               <a:ext uri="{FF2B5EF4-FFF2-40B4-BE49-F238E27FC236}">
-                <a16:creationId xmlns:a16="http://schemas.microsoft.com/office/drawing/2014/main" id="{5E29E145-D4AE-F9FB-A218-47B323C43E03}"/>
+                <a16:creationId xmlns:a16="http://schemas.microsoft.com/office/drawing/2014/main" xmlns="" id="{5E29E145-D4AE-F9FB-A218-47B323C43E03}"/>
               </a:ext>
             </a:extLst>
           </p:cNvPr>
@@ -3736,7 +3736,7 @@
           <p:cNvPr id="2" name="제목 1">
             <a:extLst>
               <a:ext uri="{FF2B5EF4-FFF2-40B4-BE49-F238E27FC236}">
-                <a16:creationId xmlns:a16="http://schemas.microsoft.com/office/drawing/2014/main" id="{13D855E6-5AD7-B657-346A-38D87715A5E7}"/>
+                <a16:creationId xmlns:a16="http://schemas.microsoft.com/office/drawing/2014/main" xmlns="" id="{13D855E6-5AD7-B657-346A-38D87715A5E7}"/>
               </a:ext>
             </a:extLst>
           </p:cNvPr>
@@ -3764,7 +3764,7 @@
           <p:cNvPr id="3" name="날짜 개체 틀 2">
             <a:extLst>
               <a:ext uri="{FF2B5EF4-FFF2-40B4-BE49-F238E27FC236}">
-                <a16:creationId xmlns:a16="http://schemas.microsoft.com/office/drawing/2014/main" id="{F3052B06-09E1-1CD0-A032-AEB30F69A0E7}"/>
+                <a16:creationId xmlns:a16="http://schemas.microsoft.com/office/drawing/2014/main" xmlns="" id="{F3052B06-09E1-1CD0-A032-AEB30F69A0E7}"/>
               </a:ext>
             </a:extLst>
           </p:cNvPr>
@@ -3782,7 +3782,7 @@
           <a:p>
             <a:fld id="{5850A429-5607-4C3C-9BC0-4142A9E07459}" type="datetimeFigureOut">
               <a:rPr lang="ko-KR" altLang="en-US" smtClean="0"/>
-              <a:t>2026-08-06</a:t>
+              <a:t>2026-08-07</a:t>
             </a:fld>
             <a:endParaRPr lang="ko-KR" altLang="en-US"/>
           </a:p>
@@ -3793,7 +3793,7 @@
           <p:cNvPr id="4" name="바닥글 개체 틀 3">
             <a:extLst>
               <a:ext uri="{FF2B5EF4-FFF2-40B4-BE49-F238E27FC236}">
-                <a16:creationId xmlns:a16="http://schemas.microsoft.com/office/drawing/2014/main" id="{DE18691A-8582-987D-DF06-E6D8B618E7BB}"/>
+                <a16:creationId xmlns:a16="http://schemas.microsoft.com/office/drawing/2014/main" xmlns="" id="{DE18691A-8582-987D-DF06-E6D8B618E7BB}"/>
               </a:ext>
             </a:extLst>
           </p:cNvPr>
@@ -3818,7 +3818,7 @@
           <p:cNvPr id="5" name="슬라이드 번호 개체 틀 4">
             <a:extLst>
               <a:ext uri="{FF2B5EF4-FFF2-40B4-BE49-F238E27FC236}">
-                <a16:creationId xmlns:a16="http://schemas.microsoft.com/office/drawing/2014/main" id="{6F997ACE-7D00-7B35-1F16-F56C5450EF85}"/>
+                <a16:creationId xmlns:a16="http://schemas.microsoft.com/office/drawing/2014/main" xmlns="" id="{6F997ACE-7D00-7B35-1F16-F56C5450EF85}"/>
               </a:ext>
             </a:extLst>
           </p:cNvPr>
@@ -3877,7 +3877,7 @@
           <p:cNvPr id="2" name="날짜 개체 틀 1">
             <a:extLst>
               <a:ext uri="{FF2B5EF4-FFF2-40B4-BE49-F238E27FC236}">
-                <a16:creationId xmlns:a16="http://schemas.microsoft.com/office/drawing/2014/main" id="{2703D88F-9D50-1761-731E-68DD1FC6B740}"/>
+                <a16:creationId xmlns:a16="http://schemas.microsoft.com/office/drawing/2014/main" xmlns="" id="{2703D88F-9D50-1761-731E-68DD1FC6B740}"/>
               </a:ext>
             </a:extLst>
           </p:cNvPr>
@@ -3895,7 +3895,7 @@
           <a:p>
             <a:fld id="{5850A429-5607-4C3C-9BC0-4142A9E07459}" type="datetimeFigureOut">
               <a:rPr lang="ko-KR" altLang="en-US" smtClean="0"/>
-              <a:t>2026-08-06</a:t>
+              <a:t>2026-08-07</a:t>
             </a:fld>
             <a:endParaRPr lang="ko-KR" altLang="en-US"/>
           </a:p>
@@ -3906,7 +3906,7 @@
           <p:cNvPr id="3" name="바닥글 개체 틀 2">
             <a:extLst>
               <a:ext uri="{FF2B5EF4-FFF2-40B4-BE49-F238E27FC236}">
-                <a16:creationId xmlns:a16="http://schemas.microsoft.com/office/drawing/2014/main" id="{70793086-842E-7906-6019-4284A9E469F4}"/>
+                <a16:creationId xmlns:a16="http://schemas.microsoft.com/office/drawing/2014/main" xmlns="" id="{70793086-842E-7906-6019-4284A9E469F4}"/>
               </a:ext>
             </a:extLst>
           </p:cNvPr>
@@ -3931,7 +3931,7 @@
           <p:cNvPr id="4" name="슬라이드 번호 개체 틀 3">
             <a:extLst>
               <a:ext uri="{FF2B5EF4-FFF2-40B4-BE49-F238E27FC236}">
-                <a16:creationId xmlns:a16="http://schemas.microsoft.com/office/drawing/2014/main" id="{6D4FE3DE-7F26-4352-74EE-A720C7AF5564}"/>
+                <a16:creationId xmlns:a16="http://schemas.microsoft.com/office/drawing/2014/main" xmlns="" id="{6D4FE3DE-7F26-4352-74EE-A720C7AF5564}"/>
               </a:ext>
             </a:extLst>
           </p:cNvPr>
@@ -3990,7 +3990,7 @@
           <p:cNvPr id="2" name="제목 1">
             <a:extLst>
               <a:ext uri="{FF2B5EF4-FFF2-40B4-BE49-F238E27FC236}">
-                <a16:creationId xmlns:a16="http://schemas.microsoft.com/office/drawing/2014/main" id="{0AFB6F63-D5C7-EB4A-A651-8DA5561AD0DC}"/>
+                <a16:creationId xmlns:a16="http://schemas.microsoft.com/office/drawing/2014/main" xmlns="" id="{0AFB6F63-D5C7-EB4A-A651-8DA5561AD0DC}"/>
               </a:ext>
             </a:extLst>
           </p:cNvPr>
@@ -4027,7 +4027,7 @@
           <p:cNvPr id="3" name="내용 개체 틀 2">
             <a:extLst>
               <a:ext uri="{FF2B5EF4-FFF2-40B4-BE49-F238E27FC236}">
-                <a16:creationId xmlns:a16="http://schemas.microsoft.com/office/drawing/2014/main" id="{2000FB2D-0CF3-1A3C-E704-F8CA96C2D5D5}"/>
+                <a16:creationId xmlns:a16="http://schemas.microsoft.com/office/drawing/2014/main" xmlns="" id="{2000FB2D-0CF3-1A3C-E704-F8CA96C2D5D5}"/>
               </a:ext>
             </a:extLst>
           </p:cNvPr>
@@ -4117,7 +4117,7 @@
           <p:cNvPr id="4" name="텍스트 개체 틀 3">
             <a:extLst>
               <a:ext uri="{FF2B5EF4-FFF2-40B4-BE49-F238E27FC236}">
-                <a16:creationId xmlns:a16="http://schemas.microsoft.com/office/drawing/2014/main" id="{88C3C47D-E633-BB5D-0FA3-41A5E3C28A6A}"/>
+                <a16:creationId xmlns:a16="http://schemas.microsoft.com/office/drawing/2014/main" xmlns="" id="{88C3C47D-E633-BB5D-0FA3-41A5E3C28A6A}"/>
               </a:ext>
             </a:extLst>
           </p:cNvPr>
@@ -4188,7 +4188,7 @@
           <p:cNvPr id="5" name="날짜 개체 틀 4">
             <a:extLst>
               <a:ext uri="{FF2B5EF4-FFF2-40B4-BE49-F238E27FC236}">
-                <a16:creationId xmlns:a16="http://schemas.microsoft.com/office/drawing/2014/main" id="{603DA118-0D2F-73A1-6311-85E95462C569}"/>
+                <a16:creationId xmlns:a16="http://schemas.microsoft.com/office/drawing/2014/main" xmlns="" id="{603DA118-0D2F-73A1-6311-85E95462C569}"/>
               </a:ext>
             </a:extLst>
           </p:cNvPr>
@@ -4206,7 +4206,7 @@
           <a:p>
             <a:fld id="{5850A429-5607-4C3C-9BC0-4142A9E07459}" type="datetimeFigureOut">
               <a:rPr lang="ko-KR" altLang="en-US" smtClean="0"/>
-              <a:t>2026-08-06</a:t>
+              <a:t>2026-08-07</a:t>
             </a:fld>
             <a:endParaRPr lang="ko-KR" altLang="en-US"/>
           </a:p>
@@ -4217,7 +4217,7 @@
           <p:cNvPr id="6" name="바닥글 개체 틀 5">
             <a:extLst>
               <a:ext uri="{FF2B5EF4-FFF2-40B4-BE49-F238E27FC236}">
-                <a16:creationId xmlns:a16="http://schemas.microsoft.com/office/drawing/2014/main" id="{DE46749A-348F-886F-32BD-A562F1A2A3B9}"/>
+                <a16:creationId xmlns:a16="http://schemas.microsoft.com/office/drawing/2014/main" xmlns="" id="{DE46749A-348F-886F-32BD-A562F1A2A3B9}"/>
               </a:ext>
             </a:extLst>
           </p:cNvPr>
@@ -4242,7 +4242,7 @@
           <p:cNvPr id="7" name="슬라이드 번호 개체 틀 6">
             <a:extLst>
               <a:ext uri="{FF2B5EF4-FFF2-40B4-BE49-F238E27FC236}">
-                <a16:creationId xmlns:a16="http://schemas.microsoft.com/office/drawing/2014/main" id="{0BF22D09-FBE9-294C-014E-9A808723A1A7}"/>
+                <a16:creationId xmlns:a16="http://schemas.microsoft.com/office/drawing/2014/main" xmlns="" id="{0BF22D09-FBE9-294C-014E-9A808723A1A7}"/>
               </a:ext>
             </a:extLst>
           </p:cNvPr>
@@ -4301,7 +4301,7 @@
           <p:cNvPr id="2" name="제목 1">
             <a:extLst>
               <a:ext uri="{FF2B5EF4-FFF2-40B4-BE49-F238E27FC236}">
-                <a16:creationId xmlns:a16="http://schemas.microsoft.com/office/drawing/2014/main" id="{DA50C132-3A30-7E9C-0BBB-1CD1A789CE68}"/>
+                <a16:creationId xmlns:a16="http://schemas.microsoft.com/office/drawing/2014/main" xmlns="" id="{DA50C132-3A30-7E9C-0BBB-1CD1A789CE68}"/>
               </a:ext>
             </a:extLst>
           </p:cNvPr>
@@ -4338,7 +4338,7 @@
           <p:cNvPr id="3" name="그림 개체 틀 2">
             <a:extLst>
               <a:ext uri="{FF2B5EF4-FFF2-40B4-BE49-F238E27FC236}">
-                <a16:creationId xmlns:a16="http://schemas.microsoft.com/office/drawing/2014/main" id="{2F31776A-D32D-34F5-8A99-A26F4F6535B9}"/>
+                <a16:creationId xmlns:a16="http://schemas.microsoft.com/office/drawing/2014/main" xmlns="" id="{2F31776A-D32D-34F5-8A99-A26F4F6535B9}"/>
               </a:ext>
             </a:extLst>
           </p:cNvPr>
@@ -4405,7 +4405,7 @@
           <p:cNvPr id="4" name="텍스트 개체 틀 3">
             <a:extLst>
               <a:ext uri="{FF2B5EF4-FFF2-40B4-BE49-F238E27FC236}">
-                <a16:creationId xmlns:a16="http://schemas.microsoft.com/office/drawing/2014/main" id="{3E500BF3-C366-20F6-6257-8233A0794521}"/>
+                <a16:creationId xmlns:a16="http://schemas.microsoft.com/office/drawing/2014/main" xmlns="" id="{3E500BF3-C366-20F6-6257-8233A0794521}"/>
               </a:ext>
             </a:extLst>
           </p:cNvPr>
@@ -4476,7 +4476,7 @@
           <p:cNvPr id="5" name="날짜 개체 틀 4">
             <a:extLst>
               <a:ext uri="{FF2B5EF4-FFF2-40B4-BE49-F238E27FC236}">
-                <a16:creationId xmlns:a16="http://schemas.microsoft.com/office/drawing/2014/main" id="{DB1C119C-B590-D055-6B10-AAE861F0D2B1}"/>
+                <a16:creationId xmlns:a16="http://schemas.microsoft.com/office/drawing/2014/main" xmlns="" id="{DB1C119C-B590-D055-6B10-AAE861F0D2B1}"/>
               </a:ext>
             </a:extLst>
           </p:cNvPr>
@@ -4494,7 +4494,7 @@
           <a:p>
             <a:fld id="{5850A429-5607-4C3C-9BC0-4142A9E07459}" type="datetimeFigureOut">
               <a:rPr lang="ko-KR" altLang="en-US" smtClean="0"/>
-              <a:t>2026-08-06</a:t>
+              <a:t>2026-08-07</a:t>
             </a:fld>
             <a:endParaRPr lang="ko-KR" altLang="en-US"/>
           </a:p>
@@ -4505,7 +4505,7 @@
           <p:cNvPr id="6" name="바닥글 개체 틀 5">
             <a:extLst>
               <a:ext uri="{FF2B5EF4-FFF2-40B4-BE49-F238E27FC236}">
-                <a16:creationId xmlns:a16="http://schemas.microsoft.com/office/drawing/2014/main" id="{00064F92-4550-973E-464E-89CA3E7EED4F}"/>
+                <a16:creationId xmlns:a16="http://schemas.microsoft.com/office/drawing/2014/main" xmlns="" id="{00064F92-4550-973E-464E-89CA3E7EED4F}"/>
               </a:ext>
             </a:extLst>
           </p:cNvPr>
@@ -4530,7 +4530,7 @@
           <p:cNvPr id="7" name="슬라이드 번호 개체 틀 6">
             <a:extLst>
               <a:ext uri="{FF2B5EF4-FFF2-40B4-BE49-F238E27FC236}">
-                <a16:creationId xmlns:a16="http://schemas.microsoft.com/office/drawing/2014/main" id="{708384D1-792D-8EA8-718E-F756CEE623A7}"/>
+                <a16:creationId xmlns:a16="http://schemas.microsoft.com/office/drawing/2014/main" xmlns="" id="{708384D1-792D-8EA8-718E-F756CEE623A7}"/>
               </a:ext>
             </a:extLst>
           </p:cNvPr>
@@ -4594,7 +4594,7 @@
           <p:cNvPr id="2" name="제목 개체 틀 1">
             <a:extLst>
               <a:ext uri="{FF2B5EF4-FFF2-40B4-BE49-F238E27FC236}">
-                <a16:creationId xmlns:a16="http://schemas.microsoft.com/office/drawing/2014/main" id="{C0AC0570-6E75-D8C0-582D-3A448969CF8B}"/>
+                <a16:creationId xmlns:a16="http://schemas.microsoft.com/office/drawing/2014/main" xmlns="" id="{C0AC0570-6E75-D8C0-582D-3A448969CF8B}"/>
               </a:ext>
             </a:extLst>
           </p:cNvPr>
@@ -4632,7 +4632,7 @@
           <p:cNvPr id="3" name="텍스트 개체 틀 2">
             <a:extLst>
               <a:ext uri="{FF2B5EF4-FFF2-40B4-BE49-F238E27FC236}">
-                <a16:creationId xmlns:a16="http://schemas.microsoft.com/office/drawing/2014/main" id="{79ADFDDF-DF3C-19FA-0ED8-5D640C08DB4B}"/>
+                <a16:creationId xmlns:a16="http://schemas.microsoft.com/office/drawing/2014/main" xmlns="" id="{79ADFDDF-DF3C-19FA-0ED8-5D640C08DB4B}"/>
               </a:ext>
             </a:extLst>
           </p:cNvPr>
@@ -4699,7 +4699,7 @@
           <p:cNvPr id="4" name="날짜 개체 틀 3">
             <a:extLst>
               <a:ext uri="{FF2B5EF4-FFF2-40B4-BE49-F238E27FC236}">
-                <a16:creationId xmlns:a16="http://schemas.microsoft.com/office/drawing/2014/main" id="{AB9AC677-7913-29B2-30F7-969771FA5D05}"/>
+                <a16:creationId xmlns:a16="http://schemas.microsoft.com/office/drawing/2014/main" xmlns="" id="{AB9AC677-7913-29B2-30F7-969771FA5D05}"/>
               </a:ext>
             </a:extLst>
           </p:cNvPr>
@@ -4735,7 +4735,7 @@
           <a:p>
             <a:fld id="{5850A429-5607-4C3C-9BC0-4142A9E07459}" type="datetimeFigureOut">
               <a:rPr lang="ko-KR" altLang="en-US" smtClean="0"/>
-              <a:t>2026-08-06</a:t>
+              <a:t>2026-08-07</a:t>
             </a:fld>
             <a:endParaRPr lang="ko-KR" altLang="en-US"/>
           </a:p>
@@ -4746,7 +4746,7 @@
           <p:cNvPr id="5" name="바닥글 개체 틀 4">
             <a:extLst>
               <a:ext uri="{FF2B5EF4-FFF2-40B4-BE49-F238E27FC236}">
-                <a16:creationId xmlns:a16="http://schemas.microsoft.com/office/drawing/2014/main" id="{3A6836E4-21B2-245A-8933-7F64F64AC382}"/>
+                <a16:creationId xmlns:a16="http://schemas.microsoft.com/office/drawing/2014/main" xmlns="" id="{3A6836E4-21B2-245A-8933-7F64F64AC382}"/>
               </a:ext>
             </a:extLst>
           </p:cNvPr>
@@ -4789,7 +4789,7 @@
           <p:cNvPr id="6" name="슬라이드 번호 개체 틀 5">
             <a:extLst>
               <a:ext uri="{FF2B5EF4-FFF2-40B4-BE49-F238E27FC236}">
-                <a16:creationId xmlns:a16="http://schemas.microsoft.com/office/drawing/2014/main" id="{6F2D0B4E-8F0D-F1B8-2A71-9862FC9749C5}"/>
+                <a16:creationId xmlns:a16="http://schemas.microsoft.com/office/drawing/2014/main" xmlns="" id="{6F2D0B4E-8F0D-F1B8-2A71-9862FC9749C5}"/>
               </a:ext>
             </a:extLst>
           </p:cNvPr>
@@ -5295,7 +5295,7 @@
         <p:cNvPr id="1" name="">
           <a:extLst>
             <a:ext uri="{FF2B5EF4-FFF2-40B4-BE49-F238E27FC236}">
-              <a16:creationId xmlns:a16="http://schemas.microsoft.com/office/drawing/2014/main" id="{94AC5628-6096-007D-4F9A-097D06EAA780}"/>
+              <a16:creationId xmlns:a16="http://schemas.microsoft.com/office/drawing/2014/main" xmlns="" id="{94AC5628-6096-007D-4F9A-097D06EAA780}"/>
             </a:ext>
           </a:extLst>
         </p:cNvPr>
@@ -5315,7 +5315,7 @@
           <p:cNvPr id="8" name="TextBox 7">
             <a:extLst>
               <a:ext uri="{FF2B5EF4-FFF2-40B4-BE49-F238E27FC236}">
-                <a16:creationId xmlns:a16="http://schemas.microsoft.com/office/drawing/2014/main" id="{BCBC9F85-F7A3-3F83-1806-6A8A789EB677}"/>
+                <a16:creationId xmlns:a16="http://schemas.microsoft.com/office/drawing/2014/main" xmlns="" id="{BCBC9F85-F7A3-3F83-1806-6A8A789EB677}"/>
               </a:ext>
             </a:extLst>
           </p:cNvPr>
@@ -5357,7 +5357,7 @@
           <p:cNvPr id="10" name="TextBox 9">
             <a:extLst>
               <a:ext uri="{FF2B5EF4-FFF2-40B4-BE49-F238E27FC236}">
-                <a16:creationId xmlns:a16="http://schemas.microsoft.com/office/drawing/2014/main" id="{FD273E2F-7739-7201-81F8-1F5E095D26E7}"/>
+                <a16:creationId xmlns:a16="http://schemas.microsoft.com/office/drawing/2014/main" xmlns="" id="{FD273E2F-7739-7201-81F8-1F5E095D26E7}"/>
               </a:ext>
             </a:extLst>
           </p:cNvPr>
@@ -5399,7 +5399,7 @@
           <p:cNvPr id="3" name="직선 연결선 2">
             <a:extLst>
               <a:ext uri="{FF2B5EF4-FFF2-40B4-BE49-F238E27FC236}">
-                <a16:creationId xmlns:a16="http://schemas.microsoft.com/office/drawing/2014/main" id="{B40C969E-FCF4-2ECC-59EC-50B8643A5B76}"/>
+                <a16:creationId xmlns:a16="http://schemas.microsoft.com/office/drawing/2014/main" xmlns="" id="{B40C969E-FCF4-2ECC-59EC-50B8643A5B76}"/>
               </a:ext>
             </a:extLst>
           </p:cNvPr>
@@ -5442,7 +5442,7 @@
           <p:cNvPr id="12" name="직사각형 11">
             <a:extLst>
               <a:ext uri="{FF2B5EF4-FFF2-40B4-BE49-F238E27FC236}">
-                <a16:creationId xmlns:a16="http://schemas.microsoft.com/office/drawing/2014/main" id="{3A205B8F-1C93-C984-E61E-45A53634FE3C}"/>
+                <a16:creationId xmlns:a16="http://schemas.microsoft.com/office/drawing/2014/main" xmlns="" id="{3A205B8F-1C93-C984-E61E-45A53634FE3C}"/>
               </a:ext>
             </a:extLst>
           </p:cNvPr>
@@ -5541,7 +5541,7 @@
           <p:cNvPr id="13" name="TextBox 12">
             <a:extLst>
               <a:ext uri="{FF2B5EF4-FFF2-40B4-BE49-F238E27FC236}">
-                <a16:creationId xmlns:a16="http://schemas.microsoft.com/office/drawing/2014/main" id="{C974F786-0106-0EA4-FB07-6C517269E920}"/>
+                <a16:creationId xmlns:a16="http://schemas.microsoft.com/office/drawing/2014/main" xmlns="" id="{C974F786-0106-0EA4-FB07-6C517269E920}"/>
               </a:ext>
             </a:extLst>
           </p:cNvPr>
@@ -5583,7 +5583,7 @@
           <p:cNvPr id="9" name="TextBox 8">
             <a:extLst>
               <a:ext uri="{FF2B5EF4-FFF2-40B4-BE49-F238E27FC236}">
-                <a16:creationId xmlns:a16="http://schemas.microsoft.com/office/drawing/2014/main" id="{7B785176-81DD-7D2E-530B-971CA461B933}"/>
+                <a16:creationId xmlns:a16="http://schemas.microsoft.com/office/drawing/2014/main" xmlns="" id="{7B785176-81DD-7D2E-530B-971CA461B933}"/>
               </a:ext>
             </a:extLst>
           </p:cNvPr>
@@ -5733,7 +5733,7 @@
           <p:cNvPr id="4" name="직사각형 3">
             <a:extLst>
               <a:ext uri="{FF2B5EF4-FFF2-40B4-BE49-F238E27FC236}">
-                <a16:creationId xmlns:a16="http://schemas.microsoft.com/office/drawing/2014/main" id="{05832E80-A59D-9F14-5DAB-D51BFF4C47A1}"/>
+                <a16:creationId xmlns:a16="http://schemas.microsoft.com/office/drawing/2014/main" xmlns="" id="{05832E80-A59D-9F14-5DAB-D51BFF4C47A1}"/>
               </a:ext>
             </a:extLst>
           </p:cNvPr>
@@ -5786,7 +5786,7 @@
           <p:cNvPr id="6" name="직사각형 5">
             <a:extLst>
               <a:ext uri="{FF2B5EF4-FFF2-40B4-BE49-F238E27FC236}">
-                <a16:creationId xmlns:a16="http://schemas.microsoft.com/office/drawing/2014/main" id="{57E9570B-25D7-061D-8946-9CCEBBC71B1A}"/>
+                <a16:creationId xmlns:a16="http://schemas.microsoft.com/office/drawing/2014/main" xmlns="" id="{57E9570B-25D7-061D-8946-9CCEBBC71B1A}"/>
               </a:ext>
             </a:extLst>
           </p:cNvPr>
@@ -5855,7 +5855,7 @@
         <p:cNvPr id="1" name="">
           <a:extLst>
             <a:ext uri="{FF2B5EF4-FFF2-40B4-BE49-F238E27FC236}">
-              <a16:creationId xmlns:a16="http://schemas.microsoft.com/office/drawing/2014/main" id="{D03477D4-BD5D-3DBD-B86A-E6378477802E}"/>
+              <a16:creationId xmlns:a16="http://schemas.microsoft.com/office/drawing/2014/main" xmlns="" id="{D03477D4-BD5D-3DBD-B86A-E6378477802E}"/>
             </a:ext>
           </a:extLst>
         </p:cNvPr>
@@ -5875,7 +5875,7 @@
           <p:cNvPr id="8" name="TextBox 7">
             <a:extLst>
               <a:ext uri="{FF2B5EF4-FFF2-40B4-BE49-F238E27FC236}">
-                <a16:creationId xmlns:a16="http://schemas.microsoft.com/office/drawing/2014/main" id="{4B3D4C48-C9B6-2723-62D6-3C3423234E28}"/>
+                <a16:creationId xmlns:a16="http://schemas.microsoft.com/office/drawing/2014/main" xmlns="" id="{4B3D4C48-C9B6-2723-62D6-3C3423234E28}"/>
               </a:ext>
             </a:extLst>
           </p:cNvPr>
@@ -5917,7 +5917,7 @@
           <p:cNvPr id="10" name="TextBox 9">
             <a:extLst>
               <a:ext uri="{FF2B5EF4-FFF2-40B4-BE49-F238E27FC236}">
-                <a16:creationId xmlns:a16="http://schemas.microsoft.com/office/drawing/2014/main" id="{CBE7561B-2601-8964-C60A-A06666E075AB}"/>
+                <a16:creationId xmlns:a16="http://schemas.microsoft.com/office/drawing/2014/main" xmlns="" id="{CBE7561B-2601-8964-C60A-A06666E075AB}"/>
               </a:ext>
             </a:extLst>
           </p:cNvPr>
@@ -5959,7 +5959,7 @@
           <p:cNvPr id="3" name="직선 연결선 2">
             <a:extLst>
               <a:ext uri="{FF2B5EF4-FFF2-40B4-BE49-F238E27FC236}">
-                <a16:creationId xmlns:a16="http://schemas.microsoft.com/office/drawing/2014/main" id="{FF4DFF75-B56F-0D06-5F2D-FAA6D843192E}"/>
+                <a16:creationId xmlns:a16="http://schemas.microsoft.com/office/drawing/2014/main" xmlns="" id="{FF4DFF75-B56F-0D06-5F2D-FAA6D843192E}"/>
               </a:ext>
             </a:extLst>
           </p:cNvPr>
@@ -6002,7 +6002,7 @@
           <p:cNvPr id="12" name="직사각형 11">
             <a:extLst>
               <a:ext uri="{FF2B5EF4-FFF2-40B4-BE49-F238E27FC236}">
-                <a16:creationId xmlns:a16="http://schemas.microsoft.com/office/drawing/2014/main" id="{0DF710DC-46C3-282A-F05D-2E1E8F2688E5}"/>
+                <a16:creationId xmlns:a16="http://schemas.microsoft.com/office/drawing/2014/main" xmlns="" id="{0DF710DC-46C3-282A-F05D-2E1E8F2688E5}"/>
               </a:ext>
             </a:extLst>
           </p:cNvPr>
@@ -6101,7 +6101,7 @@
           <p:cNvPr id="13" name="TextBox 12">
             <a:extLst>
               <a:ext uri="{FF2B5EF4-FFF2-40B4-BE49-F238E27FC236}">
-                <a16:creationId xmlns:a16="http://schemas.microsoft.com/office/drawing/2014/main" id="{75AE084B-0F8B-85C4-24B9-65173EE9AF3C}"/>
+                <a16:creationId xmlns:a16="http://schemas.microsoft.com/office/drawing/2014/main" xmlns="" id="{75AE084B-0F8B-85C4-24B9-65173EE9AF3C}"/>
               </a:ext>
             </a:extLst>
           </p:cNvPr>
@@ -6173,7 +6173,7 @@
         <p:cNvPr id="1" name="">
           <a:extLst>
             <a:ext uri="{FF2B5EF4-FFF2-40B4-BE49-F238E27FC236}">
-              <a16:creationId xmlns:a16="http://schemas.microsoft.com/office/drawing/2014/main" id="{D72E2D3C-D67E-389C-8B5D-2E66EC8AE8D9}"/>
+              <a16:creationId xmlns:a16="http://schemas.microsoft.com/office/drawing/2014/main" xmlns="" id="{D72E2D3C-D67E-389C-8B5D-2E66EC8AE8D9}"/>
             </a:ext>
           </a:extLst>
         </p:cNvPr>
@@ -6193,7 +6193,7 @@
           <p:cNvPr id="8" name="TextBox 7">
             <a:extLst>
               <a:ext uri="{FF2B5EF4-FFF2-40B4-BE49-F238E27FC236}">
-                <a16:creationId xmlns:a16="http://schemas.microsoft.com/office/drawing/2014/main" id="{890A0E75-A5AA-F7AB-A801-B2F2FF950B0E}"/>
+                <a16:creationId xmlns:a16="http://schemas.microsoft.com/office/drawing/2014/main" xmlns="" id="{890A0E75-A5AA-F7AB-A801-B2F2FF950B0E}"/>
               </a:ext>
             </a:extLst>
           </p:cNvPr>
@@ -6235,7 +6235,7 @@
           <p:cNvPr id="10" name="TextBox 9">
             <a:extLst>
               <a:ext uri="{FF2B5EF4-FFF2-40B4-BE49-F238E27FC236}">
-                <a16:creationId xmlns:a16="http://schemas.microsoft.com/office/drawing/2014/main" id="{AF587D1D-A0BD-C302-295B-E7751EB032EF}"/>
+                <a16:creationId xmlns:a16="http://schemas.microsoft.com/office/drawing/2014/main" xmlns="" id="{AF587D1D-A0BD-C302-295B-E7751EB032EF}"/>
               </a:ext>
             </a:extLst>
           </p:cNvPr>
@@ -6277,7 +6277,7 @@
           <p:cNvPr id="3" name="직선 연결선 2">
             <a:extLst>
               <a:ext uri="{FF2B5EF4-FFF2-40B4-BE49-F238E27FC236}">
-                <a16:creationId xmlns:a16="http://schemas.microsoft.com/office/drawing/2014/main" id="{7117F9F2-0758-5878-BE9B-248BB92DF383}"/>
+                <a16:creationId xmlns:a16="http://schemas.microsoft.com/office/drawing/2014/main" xmlns="" id="{7117F9F2-0758-5878-BE9B-248BB92DF383}"/>
               </a:ext>
             </a:extLst>
           </p:cNvPr>
@@ -6320,7 +6320,7 @@
           <p:cNvPr id="12" name="직사각형 11">
             <a:extLst>
               <a:ext uri="{FF2B5EF4-FFF2-40B4-BE49-F238E27FC236}">
-                <a16:creationId xmlns:a16="http://schemas.microsoft.com/office/drawing/2014/main" id="{DA601187-C0A6-B0D1-82CA-2DBC6FD5DB1E}"/>
+                <a16:creationId xmlns:a16="http://schemas.microsoft.com/office/drawing/2014/main" xmlns="" id="{DA601187-C0A6-B0D1-82CA-2DBC6FD5DB1E}"/>
               </a:ext>
             </a:extLst>
           </p:cNvPr>
@@ -6419,7 +6419,7 @@
           <p:cNvPr id="13" name="TextBox 12">
             <a:extLst>
               <a:ext uri="{FF2B5EF4-FFF2-40B4-BE49-F238E27FC236}">
-                <a16:creationId xmlns:a16="http://schemas.microsoft.com/office/drawing/2014/main" id="{4EB78774-6333-8AD0-E6D1-CAB9471C443D}"/>
+                <a16:creationId xmlns:a16="http://schemas.microsoft.com/office/drawing/2014/main" xmlns="" id="{4EB78774-6333-8AD0-E6D1-CAB9471C443D}"/>
               </a:ext>
             </a:extLst>
           </p:cNvPr>
@@ -6491,7 +6491,7 @@
         <p:cNvPr id="1" name="">
           <a:extLst>
             <a:ext uri="{FF2B5EF4-FFF2-40B4-BE49-F238E27FC236}">
-              <a16:creationId xmlns:a16="http://schemas.microsoft.com/office/drawing/2014/main" id="{19CD7694-15C9-2B5F-2454-CCD6068E8F16}"/>
+              <a16:creationId xmlns:a16="http://schemas.microsoft.com/office/drawing/2014/main" xmlns="" id="{19CD7694-15C9-2B5F-2454-CCD6068E8F16}"/>
             </a:ext>
           </a:extLst>
         </p:cNvPr>
@@ -6511,7 +6511,7 @@
           <p:cNvPr id="8" name="TextBox 7">
             <a:extLst>
               <a:ext uri="{FF2B5EF4-FFF2-40B4-BE49-F238E27FC236}">
-                <a16:creationId xmlns:a16="http://schemas.microsoft.com/office/drawing/2014/main" id="{4AEECA0C-9A32-F3E5-E975-1FDB1339F910}"/>
+                <a16:creationId xmlns:a16="http://schemas.microsoft.com/office/drawing/2014/main" xmlns="" id="{4AEECA0C-9A32-F3E5-E975-1FDB1339F910}"/>
               </a:ext>
             </a:extLst>
           </p:cNvPr>
@@ -6553,7 +6553,7 @@
           <p:cNvPr id="10" name="TextBox 9">
             <a:extLst>
               <a:ext uri="{FF2B5EF4-FFF2-40B4-BE49-F238E27FC236}">
-                <a16:creationId xmlns:a16="http://schemas.microsoft.com/office/drawing/2014/main" id="{5C94AD87-D564-2675-2F05-8F123D604850}"/>
+                <a16:creationId xmlns:a16="http://schemas.microsoft.com/office/drawing/2014/main" xmlns="" id="{5C94AD87-D564-2675-2F05-8F123D604850}"/>
               </a:ext>
             </a:extLst>
           </p:cNvPr>
@@ -6595,7 +6595,7 @@
           <p:cNvPr id="3" name="직선 연결선 2">
             <a:extLst>
               <a:ext uri="{FF2B5EF4-FFF2-40B4-BE49-F238E27FC236}">
-                <a16:creationId xmlns:a16="http://schemas.microsoft.com/office/drawing/2014/main" id="{AEC0AE64-6745-F3AF-9F4D-3B0CF04F6912}"/>
+                <a16:creationId xmlns:a16="http://schemas.microsoft.com/office/drawing/2014/main" xmlns="" id="{AEC0AE64-6745-F3AF-9F4D-3B0CF04F6912}"/>
               </a:ext>
             </a:extLst>
           </p:cNvPr>
@@ -6638,7 +6638,7 @@
           <p:cNvPr id="12" name="직사각형 11">
             <a:extLst>
               <a:ext uri="{FF2B5EF4-FFF2-40B4-BE49-F238E27FC236}">
-                <a16:creationId xmlns:a16="http://schemas.microsoft.com/office/drawing/2014/main" id="{02400626-BD59-190A-81E2-83D54499C5F9}"/>
+                <a16:creationId xmlns:a16="http://schemas.microsoft.com/office/drawing/2014/main" xmlns="" id="{02400626-BD59-190A-81E2-83D54499C5F9}"/>
               </a:ext>
             </a:extLst>
           </p:cNvPr>
@@ -6737,7 +6737,7 @@
           <p:cNvPr id="13" name="TextBox 12">
             <a:extLst>
               <a:ext uri="{FF2B5EF4-FFF2-40B4-BE49-F238E27FC236}">
-                <a16:creationId xmlns:a16="http://schemas.microsoft.com/office/drawing/2014/main" id="{61CE754C-ED0F-6AE7-84F9-D34590444436}"/>
+                <a16:creationId xmlns:a16="http://schemas.microsoft.com/office/drawing/2014/main" xmlns="" id="{61CE754C-ED0F-6AE7-84F9-D34590444436}"/>
               </a:ext>
             </a:extLst>
           </p:cNvPr>
@@ -6809,7 +6809,7 @@
         <p:cNvPr id="1" name="">
           <a:extLst>
             <a:ext uri="{FF2B5EF4-FFF2-40B4-BE49-F238E27FC236}">
-              <a16:creationId xmlns:a16="http://schemas.microsoft.com/office/drawing/2014/main" id="{49DA7EAA-204E-2F90-E52A-6C83B9013025}"/>
+              <a16:creationId xmlns:a16="http://schemas.microsoft.com/office/drawing/2014/main" xmlns="" id="{49DA7EAA-204E-2F90-E52A-6C83B9013025}"/>
             </a:ext>
           </a:extLst>
         </p:cNvPr>
@@ -6829,7 +6829,7 @@
           <p:cNvPr id="5" name="TextBox 4">
             <a:extLst>
               <a:ext uri="{FF2B5EF4-FFF2-40B4-BE49-F238E27FC236}">
-                <a16:creationId xmlns:a16="http://schemas.microsoft.com/office/drawing/2014/main" id="{4715F932-2F2C-4A3F-7F16-1B13D352985A}"/>
+                <a16:creationId xmlns:a16="http://schemas.microsoft.com/office/drawing/2014/main" xmlns="" id="{4715F932-2F2C-4A3F-7F16-1B13D352985A}"/>
               </a:ext>
             </a:extLst>
           </p:cNvPr>
@@ -6899,7 +6899,7 @@
           <p:nvPr>
             <p:extLst>
               <p:ext uri="{D42A27DB-BD31-4B8C-83A1-F6EECF244321}">
-                <p14:modId xmlns:p14="http://schemas.microsoft.com/office/powerpoint/2010/main" val="3688274248"/>
+                <p14:modId xmlns:p14="http://schemas.microsoft.com/office/powerpoint/2010/main" val="89076629"/>
               </p:ext>
             </p:extLst>
           </p:nvPr>
@@ -6918,21 +6918,21 @@
                 <a:gridCol w="791436">
                   <a:extLst>
                     <a:ext uri="{9D8B030D-6E8A-4147-A177-3AD203B41FA5}">
-                      <a16:colId xmlns:a16="http://schemas.microsoft.com/office/drawing/2014/main" val="20000"/>
+                      <a16:colId xmlns:a16="http://schemas.microsoft.com/office/drawing/2014/main" xmlns="" val="20000"/>
                     </a:ext>
                   </a:extLst>
                 </a:gridCol>
                 <a:gridCol w="4207281">
                   <a:extLst>
                     <a:ext uri="{9D8B030D-6E8A-4147-A177-3AD203B41FA5}">
-                      <a16:colId xmlns:a16="http://schemas.microsoft.com/office/drawing/2014/main" val="20001"/>
+                      <a16:colId xmlns:a16="http://schemas.microsoft.com/office/drawing/2014/main" xmlns="" val="20001"/>
                     </a:ext>
                   </a:extLst>
                 </a:gridCol>
                 <a:gridCol w="6320143">
                   <a:extLst>
                     <a:ext uri="{9D8B030D-6E8A-4147-A177-3AD203B41FA5}">
-                      <a16:colId xmlns:a16="http://schemas.microsoft.com/office/drawing/2014/main" val="20002"/>
+                      <a16:colId xmlns:a16="http://schemas.microsoft.com/office/drawing/2014/main" xmlns="" val="20002"/>
                     </a:ext>
                   </a:extLst>
                 </a:gridCol>
@@ -6988,7 +6988,7 @@
                 </a:tc>
                 <a:extLst>
                   <a:ext uri="{0D108BD9-81ED-4DB2-BD59-A6C34878D82A}">
-                    <a16:rowId xmlns:a16="http://schemas.microsoft.com/office/drawing/2014/main" val="10000"/>
+                    <a16:rowId xmlns:a16="http://schemas.microsoft.com/office/drawing/2014/main" xmlns="" val="10000"/>
                   </a:ext>
                 </a:extLst>
               </a:tr>
@@ -7167,7 +7167,7 @@
                 </a:tc>
                 <a:extLst>
                   <a:ext uri="{0D108BD9-81ED-4DB2-BD59-A6C34878D82A}">
-                    <a16:rowId xmlns:a16="http://schemas.microsoft.com/office/drawing/2014/main" val="10001"/>
+                    <a16:rowId xmlns:a16="http://schemas.microsoft.com/office/drawing/2014/main" xmlns="" val="10001"/>
                   </a:ext>
                 </a:extLst>
               </a:tr>
@@ -7387,7 +7387,7 @@
                 </a:tc>
                 <a:extLst>
                   <a:ext uri="{0D108BD9-81ED-4DB2-BD59-A6C34878D82A}">
-                    <a16:rowId xmlns:a16="http://schemas.microsoft.com/office/drawing/2014/main" val="10002"/>
+                    <a16:rowId xmlns:a16="http://schemas.microsoft.com/office/drawing/2014/main" xmlns="" val="10002"/>
                   </a:ext>
                 </a:extLst>
               </a:tr>
@@ -7562,7 +7562,7 @@
                 </a:tc>
                 <a:extLst>
                   <a:ext uri="{0D108BD9-81ED-4DB2-BD59-A6C34878D82A}">
-                    <a16:rowId xmlns:a16="http://schemas.microsoft.com/office/drawing/2014/main" val="10003"/>
+                    <a16:rowId xmlns:a16="http://schemas.microsoft.com/office/drawing/2014/main" xmlns="" val="10003"/>
                   </a:ext>
                 </a:extLst>
               </a:tr>
@@ -7761,7 +7761,7 @@
                 </a:tc>
                 <a:extLst>
                   <a:ext uri="{0D108BD9-81ED-4DB2-BD59-A6C34878D82A}">
-                    <a16:rowId xmlns:a16="http://schemas.microsoft.com/office/drawing/2014/main" val="10004"/>
+                    <a16:rowId xmlns:a16="http://schemas.microsoft.com/office/drawing/2014/main" xmlns="" val="10004"/>
                   </a:ext>
                 </a:extLst>
               </a:tr>
@@ -7966,7 +7966,7 @@
                 </a:tc>
                 <a:extLst>
                   <a:ext uri="{0D108BD9-81ED-4DB2-BD59-A6C34878D82A}">
-                    <a16:rowId xmlns:a16="http://schemas.microsoft.com/office/drawing/2014/main" val="10005"/>
+                    <a16:rowId xmlns:a16="http://schemas.microsoft.com/office/drawing/2014/main" xmlns="" val="10005"/>
                   </a:ext>
                 </a:extLst>
               </a:tr>
@@ -8064,21 +8064,21 @@
                     <a:p>
                       <a:pPr latinLnBrk="1"/>
                       <a:r>
-                        <a:rPr lang="en-US" altLang="ko-KR" sz="1400" strike="noStrike" dirty="0">
+                        <a:rPr lang="en-US" altLang="ko-KR" sz="1400" strike="sngStrike" dirty="0">
                           <a:latin typeface="나눔바른고딕" panose="020B0603020101020101" pitchFamily="34" charset="-127"/>
                           <a:ea typeface="나눔바른고딕" panose="020B0603020101020101" pitchFamily="34" charset="-127"/>
                         </a:rPr>
                         <a:t>IK</a:t>
                       </a:r>
                       <a:r>
-                        <a:rPr lang="en-US" altLang="ko-KR" sz="1400" strike="noStrike" baseline="0" dirty="0">
+                        <a:rPr lang="en-US" altLang="ko-KR" sz="1400" strike="sngStrike" baseline="0" dirty="0">
                           <a:latin typeface="나눔바른고딕" panose="020B0603020101020101" pitchFamily="34" charset="-127"/>
                           <a:ea typeface="나눔바른고딕" panose="020B0603020101020101" pitchFamily="34" charset="-127"/>
                         </a:rPr>
                         <a:t> </a:t>
                       </a:r>
                       <a:r>
-                        <a:rPr lang="ko-KR" altLang="en-US" sz="1400" strike="noStrike" baseline="0" dirty="0">
+                        <a:rPr lang="ko-KR" altLang="en-US" sz="1400" strike="sngStrike" baseline="0" dirty="0">
                           <a:latin typeface="나눔바른고딕" panose="020B0603020101020101" pitchFamily="34" charset="-127"/>
                           <a:ea typeface="나눔바른고딕" panose="020B0603020101020101" pitchFamily="34" charset="-127"/>
                         </a:rPr>
@@ -8092,21 +8092,21 @@
                         <a:t>, </a:t>
                       </a:r>
                       <a:r>
-                        <a:rPr lang="ko-KR" altLang="en-US" sz="1400" strike="noStrike" baseline="0" dirty="0">
+                        <a:rPr lang="ko-KR" altLang="en-US" sz="1400" strike="sngStrike" baseline="0" dirty="0">
                           <a:latin typeface="나눔바른고딕" panose="020B0603020101020101" pitchFamily="34" charset="-127"/>
                           <a:ea typeface="나눔바른고딕" panose="020B0603020101020101" pitchFamily="34" charset="-127"/>
                         </a:rPr>
                         <a:t>지형 높이 및 깊이 인식 </a:t>
                       </a:r>
                       <a:r>
-                        <a:rPr lang="ko-KR" altLang="en-US" sz="1400" strike="noStrike" baseline="0" dirty="0" err="1">
+                        <a:rPr lang="ko-KR" altLang="en-US" sz="1400" strike="sngStrike" baseline="0" dirty="0" err="1">
                           <a:latin typeface="나눔바른고딕" panose="020B0603020101020101" pitchFamily="34" charset="-127"/>
                           <a:ea typeface="나눔바른고딕" panose="020B0603020101020101" pitchFamily="34" charset="-127"/>
                         </a:rPr>
                         <a:t>경계값</a:t>
                       </a:r>
                       <a:r>
-                        <a:rPr lang="ko-KR" altLang="en-US" sz="1400" strike="noStrike" baseline="0" dirty="0">
+                        <a:rPr lang="ko-KR" altLang="en-US" sz="1400" strike="sngStrike" baseline="0" dirty="0">
                           <a:latin typeface="나눔바른고딕" panose="020B0603020101020101" pitchFamily="34" charset="-127"/>
                           <a:ea typeface="나눔바른고딕" panose="020B0603020101020101" pitchFamily="34" charset="-127"/>
                         </a:rPr>
@@ -8126,13 +8126,34 @@
                         </a:rPr>
                       </a:br>
                       <a:r>
-                        <a:rPr lang="ko-KR" altLang="en-US" sz="1400" strike="noStrike" baseline="0" dirty="0">
+                        <a:rPr lang="ko-KR" altLang="en-US" sz="1400" strike="sngStrike" baseline="0" dirty="0">
                           <a:latin typeface="나눔바른고딕" panose="020B0603020101020101" pitchFamily="34" charset="-127"/>
                           <a:ea typeface="나눔바른고딕" panose="020B0603020101020101" pitchFamily="34" charset="-127"/>
                         </a:rPr>
-                        <a:t>테스트 및 버그 수정</a:t>
+                        <a:t>테스트 및 버그 </a:t>
                       </a:r>
-                      <a:endParaRPr lang="ko-KR" altLang="en-US" sz="1400" strike="noStrike" dirty="0">
+                      <a:r>
+                        <a:rPr lang="ko-KR" altLang="en-US" sz="1400" strike="sngStrike" baseline="0" dirty="0" smtClean="0">
+                          <a:latin typeface="나눔바른고딕" panose="020B0603020101020101" pitchFamily="34" charset="-127"/>
+                          <a:ea typeface="나눔바른고딕" panose="020B0603020101020101" pitchFamily="34" charset="-127"/>
+                        </a:rPr>
+                        <a:t>수정</a:t>
+                      </a:r>
+                      <a:r>
+                        <a:rPr lang="en-US" altLang="ko-KR" sz="1400" strike="sngStrike" baseline="0" dirty="0" smtClean="0">
+                          <a:latin typeface="나눔바른고딕" panose="020B0603020101020101" pitchFamily="34" charset="-127"/>
+                          <a:ea typeface="나눔바른고딕" panose="020B0603020101020101" pitchFamily="34" charset="-127"/>
+                        </a:rPr>
+                        <a:t>, </a:t>
+                      </a:r>
+                      <a:r>
+                        <a:rPr lang="ko-KR" altLang="en-US" sz="1400" strike="sngStrike" baseline="0" dirty="0" smtClean="0">
+                          <a:latin typeface="나눔바른고딕" panose="020B0603020101020101" pitchFamily="34" charset="-127"/>
+                          <a:ea typeface="나눔바른고딕" panose="020B0603020101020101" pitchFamily="34" charset="-127"/>
+                        </a:rPr>
+                        <a:t>인식 결과 조건 처리 데이터화</a:t>
+                      </a:r>
+                      <a:endParaRPr lang="ko-KR" altLang="en-US" sz="1400" strike="sngStrike" dirty="0">
                         <a:latin typeface="나눔바른고딕" panose="020B0603020101020101" pitchFamily="34" charset="-127"/>
                         <a:ea typeface="나눔바른고딕" panose="020B0603020101020101" pitchFamily="34" charset="-127"/>
                       </a:endParaRPr>
@@ -8142,7 +8163,7 @@
                 </a:tc>
                 <a:extLst>
                   <a:ext uri="{0D108BD9-81ED-4DB2-BD59-A6C34878D82A}">
-                    <a16:rowId xmlns:a16="http://schemas.microsoft.com/office/drawing/2014/main" val="10006"/>
+                    <a16:rowId xmlns:a16="http://schemas.microsoft.com/office/drawing/2014/main" xmlns="" val="10006"/>
                   </a:ext>
                 </a:extLst>
               </a:tr>
@@ -8241,7 +8262,7 @@
                 </a:tc>
                 <a:extLst>
                   <a:ext uri="{0D108BD9-81ED-4DB2-BD59-A6C34878D82A}">
-                    <a16:rowId xmlns:a16="http://schemas.microsoft.com/office/drawing/2014/main" val="10007"/>
+                    <a16:rowId xmlns:a16="http://schemas.microsoft.com/office/drawing/2014/main" xmlns="" val="10007"/>
                   </a:ext>
                 </a:extLst>
               </a:tr>
@@ -8317,7 +8338,7 @@
                 </a:tc>
                 <a:extLst>
                   <a:ext uri="{0D108BD9-81ED-4DB2-BD59-A6C34878D82A}">
-                    <a16:rowId xmlns:a16="http://schemas.microsoft.com/office/drawing/2014/main" val="10008"/>
+                    <a16:rowId xmlns:a16="http://schemas.microsoft.com/office/drawing/2014/main" xmlns="" val="10008"/>
                   </a:ext>
                 </a:extLst>
               </a:tr>
@@ -8439,7 +8460,7 @@
         <p:cNvPr id="1" name="">
           <a:extLst>
             <a:ext uri="{FF2B5EF4-FFF2-40B4-BE49-F238E27FC236}">
-              <a16:creationId xmlns:a16="http://schemas.microsoft.com/office/drawing/2014/main" id="{49DA7EAA-204E-2F90-E52A-6C83B9013025}"/>
+              <a16:creationId xmlns:a16="http://schemas.microsoft.com/office/drawing/2014/main" xmlns="" id="{49DA7EAA-204E-2F90-E52A-6C83B9013025}"/>
             </a:ext>
           </a:extLst>
         </p:cNvPr>
@@ -8459,7 +8480,7 @@
           <p:cNvPr id="8" name="TextBox 7">
             <a:extLst>
               <a:ext uri="{FF2B5EF4-FFF2-40B4-BE49-F238E27FC236}">
-                <a16:creationId xmlns:a16="http://schemas.microsoft.com/office/drawing/2014/main" id="{701093AF-254C-83D7-8032-465A5FB513FB}"/>
+                <a16:creationId xmlns:a16="http://schemas.microsoft.com/office/drawing/2014/main" xmlns="" id="{701093AF-254C-83D7-8032-465A5FB513FB}"/>
               </a:ext>
             </a:extLst>
           </p:cNvPr>
@@ -8501,7 +8522,7 @@
           <p:cNvPr id="10" name="TextBox 9">
             <a:extLst>
               <a:ext uri="{FF2B5EF4-FFF2-40B4-BE49-F238E27FC236}">
-                <a16:creationId xmlns:a16="http://schemas.microsoft.com/office/drawing/2014/main" id="{2D538815-CBEF-E37B-5659-B5091F86B485}"/>
+                <a16:creationId xmlns:a16="http://schemas.microsoft.com/office/drawing/2014/main" xmlns="" id="{2D538815-CBEF-E37B-5659-B5091F86B485}"/>
               </a:ext>
             </a:extLst>
           </p:cNvPr>
@@ -8543,7 +8564,7 @@
           <p:cNvPr id="3" name="직선 연결선 2">
             <a:extLst>
               <a:ext uri="{FF2B5EF4-FFF2-40B4-BE49-F238E27FC236}">
-                <a16:creationId xmlns:a16="http://schemas.microsoft.com/office/drawing/2014/main" id="{76FFFECF-4B1C-95DF-32C3-2D2F19BEDAFB}"/>
+                <a16:creationId xmlns:a16="http://schemas.microsoft.com/office/drawing/2014/main" xmlns="" id="{76FFFECF-4B1C-95DF-32C3-2D2F19BEDAFB}"/>
               </a:ext>
             </a:extLst>
           </p:cNvPr>
@@ -8679,7 +8700,7 @@
           <p:cNvPr id="4" name="TextBox 3">
             <a:extLst>
               <a:ext uri="{FF2B5EF4-FFF2-40B4-BE49-F238E27FC236}">
-                <a16:creationId xmlns:a16="http://schemas.microsoft.com/office/drawing/2014/main" id="{BDC3BDF7-0C17-3E65-3F95-62AEFEB0CD86}"/>
+                <a16:creationId xmlns:a16="http://schemas.microsoft.com/office/drawing/2014/main" xmlns="" id="{BDC3BDF7-0C17-3E65-3F95-62AEFEB0CD86}"/>
               </a:ext>
             </a:extLst>
           </p:cNvPr>
@@ -8689,7 +8710,7 @@
         <p:spPr>
           <a:xfrm>
             <a:off x="302450" y="1342316"/>
-            <a:ext cx="5138684" cy="646331"/>
+            <a:ext cx="5138684" cy="900246"/>
           </a:xfrm>
           <a:prstGeom prst="rect">
             <a:avLst/>
@@ -8703,6 +8724,9 @@
           <a:lstStyle/>
           <a:p>
             <a:pPr marL="171450" indent="-171450">
+              <a:lnSpc>
+                <a:spcPct val="150000"/>
+              </a:lnSpc>
               <a:buFont typeface="Arial" panose="020B0604020202020204" pitchFamily="34" charset="0"/>
               <a:buChar char="•"/>
             </a:pPr>
@@ -8734,6 +8758,9 @@
           </a:p>
           <a:p>
             <a:pPr marL="171450" indent="-171450">
+              <a:lnSpc>
+                <a:spcPct val="150000"/>
+              </a:lnSpc>
               <a:buFont typeface="Arial" panose="020B0604020202020204" pitchFamily="34" charset="0"/>
               <a:buChar char="•"/>
             </a:pPr>
@@ -8779,6 +8806,9 @@
           </a:p>
           <a:p>
             <a:pPr marL="171450" indent="-171450">
+              <a:lnSpc>
+                <a:spcPct val="150000"/>
+              </a:lnSpc>
               <a:buFont typeface="Arial" panose="020B0604020202020204" pitchFamily="34" charset="0"/>
               <a:buChar char="•"/>
             </a:pPr>
@@ -8801,7 +8831,7 @@
           <p:cNvPr id="6" name="직사각형 5">
             <a:extLst>
               <a:ext uri="{FF2B5EF4-FFF2-40B4-BE49-F238E27FC236}">
-                <a16:creationId xmlns:a16="http://schemas.microsoft.com/office/drawing/2014/main" id="{2A46B86B-2A5E-39F7-A0B5-6BB8D1D20358}"/>
+                <a16:creationId xmlns:a16="http://schemas.microsoft.com/office/drawing/2014/main" xmlns="" id="{2A46B86B-2A5E-39F7-A0B5-6BB8D1D20358}"/>
               </a:ext>
             </a:extLst>
           </p:cNvPr>
@@ -8810,8 +8840,8 @@
         </p:nvSpPr>
         <p:spPr>
           <a:xfrm>
-            <a:off x="769545" y="2083785"/>
-            <a:ext cx="10058399" cy="4389439"/>
+            <a:off x="769545" y="2359742"/>
+            <a:ext cx="10058399" cy="4113482"/>
           </a:xfrm>
           <a:prstGeom prst="rect">
             <a:avLst/>
@@ -8892,7 +8922,7 @@
         <p:cNvPr id="1" name="">
           <a:extLst>
             <a:ext uri="{FF2B5EF4-FFF2-40B4-BE49-F238E27FC236}">
-              <a16:creationId xmlns:a16="http://schemas.microsoft.com/office/drawing/2014/main" id="{CD9567D0-8D8D-4F82-AAD7-B0FF119C0461}"/>
+              <a16:creationId xmlns:a16="http://schemas.microsoft.com/office/drawing/2014/main" xmlns="" id="{CD9567D0-8D8D-4F82-AAD7-B0FF119C0461}"/>
             </a:ext>
           </a:extLst>
         </p:cNvPr>
@@ -8912,7 +8942,7 @@
           <p:cNvPr id="8" name="TextBox 7">
             <a:extLst>
               <a:ext uri="{FF2B5EF4-FFF2-40B4-BE49-F238E27FC236}">
-                <a16:creationId xmlns:a16="http://schemas.microsoft.com/office/drawing/2014/main" id="{EA448F56-014E-4B94-FB44-E56AECD3FEB6}"/>
+                <a16:creationId xmlns:a16="http://schemas.microsoft.com/office/drawing/2014/main" xmlns="" id="{EA448F56-014E-4B94-FB44-E56AECD3FEB6}"/>
               </a:ext>
             </a:extLst>
           </p:cNvPr>
@@ -8954,7 +8984,7 @@
           <p:cNvPr id="10" name="TextBox 9">
             <a:extLst>
               <a:ext uri="{FF2B5EF4-FFF2-40B4-BE49-F238E27FC236}">
-                <a16:creationId xmlns:a16="http://schemas.microsoft.com/office/drawing/2014/main" id="{6316BC8B-3E9C-4B1A-E79B-6ACB06F238D1}"/>
+                <a16:creationId xmlns:a16="http://schemas.microsoft.com/office/drawing/2014/main" xmlns="" id="{6316BC8B-3E9C-4B1A-E79B-6ACB06F238D1}"/>
               </a:ext>
             </a:extLst>
           </p:cNvPr>
@@ -9010,7 +9040,7 @@
           <p:cNvPr id="3" name="직선 연결선 2">
             <a:extLst>
               <a:ext uri="{FF2B5EF4-FFF2-40B4-BE49-F238E27FC236}">
-                <a16:creationId xmlns:a16="http://schemas.microsoft.com/office/drawing/2014/main" id="{225FDA88-AB34-8322-EAD0-B9E3833A2962}"/>
+                <a16:creationId xmlns:a16="http://schemas.microsoft.com/office/drawing/2014/main" xmlns="" id="{225FDA88-AB34-8322-EAD0-B9E3833A2962}"/>
               </a:ext>
             </a:extLst>
           </p:cNvPr>
@@ -9053,7 +9083,7 @@
           <p:cNvPr id="12" name="직사각형 11">
             <a:extLst>
               <a:ext uri="{FF2B5EF4-FFF2-40B4-BE49-F238E27FC236}">
-                <a16:creationId xmlns:a16="http://schemas.microsoft.com/office/drawing/2014/main" id="{445848D8-1587-C15E-4275-1CAD486BF1EB}"/>
+                <a16:creationId xmlns:a16="http://schemas.microsoft.com/office/drawing/2014/main" xmlns="" id="{445848D8-1587-C15E-4275-1CAD486BF1EB}"/>
               </a:ext>
             </a:extLst>
           </p:cNvPr>
@@ -9152,7 +9182,7 @@
           <p:cNvPr id="11" name="TextBox 10">
             <a:extLst>
               <a:ext uri="{FF2B5EF4-FFF2-40B4-BE49-F238E27FC236}">
-                <a16:creationId xmlns:a16="http://schemas.microsoft.com/office/drawing/2014/main" id="{EB4EBD0C-7AD4-F15A-16EF-C7AFB68FB270}"/>
+                <a16:creationId xmlns:a16="http://schemas.microsoft.com/office/drawing/2014/main" xmlns="" id="{EB4EBD0C-7AD4-F15A-16EF-C7AFB68FB270}"/>
               </a:ext>
             </a:extLst>
           </p:cNvPr>
@@ -9162,7 +9192,7 @@
         <p:spPr>
           <a:xfrm>
             <a:off x="302450" y="1342316"/>
-            <a:ext cx="5138684" cy="1015663"/>
+            <a:ext cx="5138684" cy="1477328"/>
           </a:xfrm>
           <a:prstGeom prst="rect">
             <a:avLst/>
@@ -9175,12 +9205,24 @@
           </a:bodyPr>
           <a:lstStyle/>
           <a:p>
+            <a:pPr>
+              <a:lnSpc>
+                <a:spcPct val="150000"/>
+              </a:lnSpc>
+            </a:pPr>
+            <a:r>
+              <a:rPr lang="ko-KR" altLang="en-US" sz="1200" dirty="0" smtClean="0">
+                <a:latin typeface="나눔바른고딕" panose="020B0603020101020101" pitchFamily="34" charset="-127"/>
+                <a:ea typeface="나눔바른고딕" panose="020B0603020101020101" pitchFamily="34" charset="-127"/>
+              </a:rPr>
+              <a:t>지난 주 지형 </a:t>
+            </a:r>
             <a:r>
               <a:rPr lang="ko-KR" altLang="en-US" sz="1200" dirty="0">
                 <a:latin typeface="나눔바른고딕" panose="020B0603020101020101" pitchFamily="34" charset="-127"/>
                 <a:ea typeface="나눔바른고딕" panose="020B0603020101020101" pitchFamily="34" charset="-127"/>
               </a:rPr>
-              <a:t>지형 인식과 처리 결과 분리 후</a:t>
+              <a:t>인식과 처리 결과 분리 후</a:t>
             </a:r>
             <a:r>
               <a:rPr lang="en-US" altLang="ko-KR" sz="1200" dirty="0">
@@ -9202,12 +9244,22 @@
             </a:endParaRPr>
           </a:p>
           <a:p>
+            <a:pPr>
+              <a:lnSpc>
+                <a:spcPct val="150000"/>
+              </a:lnSpc>
+            </a:pPr>
             <a:endParaRPr lang="en-US" altLang="ko-KR" sz="1200" dirty="0">
               <a:latin typeface="나눔바른고딕" panose="020B0603020101020101" pitchFamily="34" charset="-127"/>
               <a:ea typeface="나눔바른고딕" panose="020B0603020101020101" pitchFamily="34" charset="-127"/>
             </a:endParaRPr>
           </a:p>
           <a:p>
+            <a:pPr>
+              <a:lnSpc>
+                <a:spcPct val="150000"/>
+              </a:lnSpc>
+            </a:pPr>
             <a:r>
               <a:rPr lang="ko-KR" altLang="en-US" sz="1200" dirty="0">
                 <a:latin typeface="나눔바른고딕" panose="020B0603020101020101" pitchFamily="34" charset="-127"/>
@@ -9222,6 +9274,9 @@
           </a:p>
           <a:p>
             <a:pPr marL="171450" indent="-171450">
+              <a:lnSpc>
+                <a:spcPct val="150000"/>
+              </a:lnSpc>
               <a:buFont typeface="Arial" panose="020B0604020202020204" pitchFamily="34" charset="0"/>
               <a:buChar char="•"/>
             </a:pPr>
@@ -9230,30 +9285,68 @@
                 <a:latin typeface="나눔바른고딕" panose="020B0603020101020101" pitchFamily="34" charset="-127"/>
                 <a:ea typeface="나눔바른고딕" panose="020B0603020101020101" pitchFamily="34" charset="-127"/>
               </a:rPr>
-              <a:t>지형 인식 트리 인식</a:t>
+              <a:t>지형 인식 트리 </a:t>
+            </a:r>
+            <a:endParaRPr lang="en-US" altLang="ko-KR" sz="1200" dirty="0" smtClean="0">
+              <a:latin typeface="나눔바른고딕" panose="020B0603020101020101" pitchFamily="34" charset="-127"/>
+              <a:ea typeface="나눔바른고딕" panose="020B0603020101020101" pitchFamily="34" charset="-127"/>
+            </a:endParaRPr>
+          </a:p>
+          <a:p>
+            <a:pPr marL="171450" indent="-171450">
+              <a:lnSpc>
+                <a:spcPct val="150000"/>
+              </a:lnSpc>
+              <a:buFont typeface="Arial" panose="020B0604020202020204" pitchFamily="34" charset="0"/>
+              <a:buChar char="•"/>
+            </a:pPr>
+            <a:r>
+              <a:rPr lang="ko-KR" altLang="en-US" sz="1200" dirty="0" smtClean="0">
+                <a:latin typeface="나눔바른고딕" panose="020B0603020101020101" pitchFamily="34" charset="-127"/>
+                <a:ea typeface="나눔바른고딕" panose="020B0603020101020101" pitchFamily="34" charset="-127"/>
+              </a:rPr>
+              <a:t>인식</a:t>
+            </a:r>
+            <a:r>
+              <a:rPr lang="en-US" altLang="ko-KR" sz="1200" dirty="0" smtClean="0">
+                <a:latin typeface="나눔바른고딕" panose="020B0603020101020101" pitchFamily="34" charset="-127"/>
+                <a:ea typeface="나눔바른고딕" panose="020B0603020101020101" pitchFamily="34" charset="-127"/>
+              </a:rPr>
+              <a:t> </a:t>
+            </a:r>
+            <a:r>
+              <a:rPr lang="ko-KR" altLang="en-US" sz="1200" dirty="0" smtClean="0">
+                <a:latin typeface="나눔바른고딕" panose="020B0603020101020101" pitchFamily="34" charset="-127"/>
+                <a:ea typeface="나눔바른고딕" panose="020B0603020101020101" pitchFamily="34" charset="-127"/>
+              </a:rPr>
+              <a:t>결과 </a:t>
+            </a:r>
+            <a:r>
+              <a:rPr lang="ko-KR" altLang="en-US" sz="1200" dirty="0">
+                <a:latin typeface="나눔바른고딕" panose="020B0603020101020101" pitchFamily="34" charset="-127"/>
+                <a:ea typeface="나눔바른고딕" panose="020B0603020101020101" pitchFamily="34" charset="-127"/>
+              </a:rPr>
+              <a:t>처리 </a:t>
+            </a:r>
+            <a:r>
+              <a:rPr lang="ko-KR" altLang="en-US" sz="1200" dirty="0" smtClean="0">
+                <a:latin typeface="나눔바른고딕" panose="020B0603020101020101" pitchFamily="34" charset="-127"/>
+                <a:ea typeface="나눔바른고딕" panose="020B0603020101020101" pitchFamily="34" charset="-127"/>
+              </a:rPr>
+              <a:t>조건과 출력할 모션 정보 </a:t>
+            </a:r>
+            <a:r>
+              <a:rPr lang="ko-KR" altLang="en-US" sz="1200" dirty="0" err="1" smtClean="0">
+                <a:latin typeface="나눔바른고딕" panose="020B0603020101020101" pitchFamily="34" charset="-127"/>
+                <a:ea typeface="나눔바른고딕" panose="020B0603020101020101" pitchFamily="34" charset="-127"/>
+              </a:rPr>
+              <a:t>매칭</a:t>
             </a:r>
             <a:endParaRPr lang="en-US" altLang="ko-KR" sz="1200" dirty="0">
               <a:latin typeface="나눔바른고딕" panose="020B0603020101020101" pitchFamily="34" charset="-127"/>
               <a:ea typeface="나눔바른고딕" panose="020B0603020101020101" pitchFamily="34" charset="-127"/>
             </a:endParaRPr>
           </a:p>
-          <a:p>
-            <a:pPr marL="171450" indent="-171450">
-              <a:buFont typeface="Arial" panose="020B0604020202020204" pitchFamily="34" charset="0"/>
-              <a:buChar char="•"/>
-            </a:pPr>
-            <a:r>
-              <a:rPr lang="ko-KR" altLang="en-US" sz="1200" dirty="0">
-                <a:latin typeface="나눔바른고딕" panose="020B0603020101020101" pitchFamily="34" charset="-127"/>
-                <a:ea typeface="나눔바른고딕" panose="020B0603020101020101" pitchFamily="34" charset="-127"/>
-              </a:rPr>
-              <a:t>결과 처리 조건 및 모션 매칭</a:t>
-            </a:r>
-            <a:endParaRPr lang="en-US" altLang="ko-KR" sz="1200" dirty="0">
-              <a:latin typeface="나눔바른고딕" panose="020B0603020101020101" pitchFamily="34" charset="-127"/>
-              <a:ea typeface="나눔바른고딕" panose="020B0603020101020101" pitchFamily="34" charset="-127"/>
-            </a:endParaRPr>
-          </a:p>
         </p:txBody>
       </p:sp>
       <p:sp>
@@ -9261,7 +9354,7 @@
           <p:cNvPr id="4" name="TextBox 3">
             <a:extLst>
               <a:ext uri="{FF2B5EF4-FFF2-40B4-BE49-F238E27FC236}">
-                <a16:creationId xmlns:a16="http://schemas.microsoft.com/office/drawing/2014/main" id="{FC09C16A-35D2-48AD-4061-2C115EAF7976}"/>
+                <a16:creationId xmlns:a16="http://schemas.microsoft.com/office/drawing/2014/main" xmlns="" id="{FC09C16A-35D2-48AD-4061-2C115EAF7976}"/>
               </a:ext>
             </a:extLst>
           </p:cNvPr>
@@ -9270,8 +9363,8 @@
         </p:nvSpPr>
         <p:spPr>
           <a:xfrm>
-            <a:off x="302450" y="3295120"/>
-            <a:ext cx="6822627" cy="830997"/>
+            <a:off x="302449" y="3055241"/>
+            <a:ext cx="5138686" cy="2585323"/>
           </a:xfrm>
           <a:prstGeom prst="rect">
             <a:avLst/>
@@ -9284,6 +9377,11 @@
           </a:bodyPr>
           <a:lstStyle/>
           <a:p>
+            <a:pPr>
+              <a:lnSpc>
+                <a:spcPct val="150000"/>
+              </a:lnSpc>
+            </a:pPr>
             <a:r>
               <a:rPr lang="ko-KR" altLang="en-US" sz="1200" dirty="0">
                 <a:latin typeface="나눔바른고딕" panose="020B0603020101020101" pitchFamily="34" charset="-127"/>
@@ -9298,6 +9396,9 @@
           </a:p>
           <a:p>
             <a:pPr marL="171450" indent="-171450">
+              <a:lnSpc>
+                <a:spcPct val="150000"/>
+              </a:lnSpc>
               <a:buFont typeface="Arial" panose="020B0604020202020204" pitchFamily="34" charset="0"/>
               <a:buChar char="•"/>
             </a:pPr>
@@ -9315,6 +9416,9 @@
           </a:p>
           <a:p>
             <a:pPr marL="171450" indent="-171450">
+              <a:lnSpc>
+                <a:spcPct val="150000"/>
+              </a:lnSpc>
               <a:buFont typeface="Arial" panose="020B0604020202020204" pitchFamily="34" charset="0"/>
               <a:buChar char="•"/>
             </a:pPr>
@@ -9326,32 +9430,25 @@
               <a:t>결과는 무수히 많아질 수 있는데 이걸 </a:t>
             </a:r>
             <a:r>
-              <a:rPr lang="ko-KR" altLang="en-US" sz="1200" dirty="0" err="1">
-                <a:latin typeface="나눔바른고딕" panose="020B0603020101020101" pitchFamily="34" charset="-127"/>
-                <a:ea typeface="나눔바른고딕" panose="020B0603020101020101" pitchFamily="34" charset="-127"/>
-              </a:rPr>
-              <a:t>일일히</a:t>
+              <a:rPr lang="en-US" altLang="ko-KR" sz="1200" dirty="0" smtClean="0">
+                <a:latin typeface="나눔바른고딕" panose="020B0603020101020101" pitchFamily="34" charset="-127"/>
+                <a:ea typeface="나눔바른고딕" panose="020B0603020101020101" pitchFamily="34" charset="-127"/>
+              </a:rPr>
+              <a:t>FSM</a:t>
             </a:r>
             <a:r>
               <a:rPr lang="ko-KR" altLang="en-US" sz="1200" dirty="0">
                 <a:latin typeface="나눔바른고딕" panose="020B0603020101020101" pitchFamily="34" charset="-127"/>
                 <a:ea typeface="나눔바른고딕" panose="020B0603020101020101" pitchFamily="34" charset="-127"/>
               </a:rPr>
-              <a:t> </a:t>
-            </a:r>
-            <a:r>
-              <a:rPr lang="en-US" altLang="ko-KR" sz="1200" dirty="0">
-                <a:latin typeface="나눔바른고딕" panose="020B0603020101020101" pitchFamily="34" charset="-127"/>
-                <a:ea typeface="나눔바른고딕" panose="020B0603020101020101" pitchFamily="34" charset="-127"/>
-              </a:rPr>
-              <a:t>FSM</a:t>
-            </a:r>
-            <a:r>
-              <a:rPr lang="ko-KR" altLang="en-US" sz="1200" dirty="0">
-                <a:latin typeface="나눔바른고딕" panose="020B0603020101020101" pitchFamily="34" charset="-127"/>
-                <a:ea typeface="나눔바른고딕" panose="020B0603020101020101" pitchFamily="34" charset="-127"/>
-              </a:rPr>
-              <a:t>으로 처리하고 있는 상황</a:t>
+              <a:t>으로 처리하고 있는 </a:t>
+            </a:r>
+            <a:r>
+              <a:rPr lang="ko-KR" altLang="en-US" sz="1200" dirty="0" smtClean="0">
+                <a:latin typeface="나눔바른고딕" panose="020B0603020101020101" pitchFamily="34" charset="-127"/>
+                <a:ea typeface="나눔바른고딕" panose="020B0603020101020101" pitchFamily="34" charset="-127"/>
+              </a:rPr>
+              <a:t>상황</a:t>
             </a:r>
             <a:endParaRPr lang="en-US" altLang="ko-KR" sz="1200" dirty="0">
               <a:latin typeface="나눔바른고딕" panose="020B0603020101020101" pitchFamily="34" charset="-127"/>
@@ -9359,16 +9456,39 @@
             </a:endParaRPr>
           </a:p>
           <a:p>
-            <a:pPr marL="628650" lvl="1" indent="-171450">
+            <a:pPr marL="171450" indent="-171450">
+              <a:lnSpc>
+                <a:spcPct val="150000"/>
+              </a:lnSpc>
               <a:buFont typeface="Arial" panose="020B0604020202020204" pitchFamily="34" charset="0"/>
               <a:buChar char="•"/>
             </a:pPr>
+            <a:endParaRPr lang="en-US" altLang="ko-KR" sz="1200" dirty="0" smtClean="0">
+              <a:latin typeface="나눔바른고딕" panose="020B0603020101020101" pitchFamily="34" charset="-127"/>
+              <a:ea typeface="나눔바른고딕" panose="020B0603020101020101" pitchFamily="34" charset="-127"/>
+            </a:endParaRPr>
+          </a:p>
+          <a:p>
+            <a:pPr marL="171450" indent="-171450">
+              <a:lnSpc>
+                <a:spcPct val="150000"/>
+              </a:lnSpc>
+              <a:buFont typeface="Arial" panose="020B0604020202020204" pitchFamily="34" charset="0"/>
+              <a:buChar char="•"/>
+            </a:pPr>
+            <a:r>
+              <a:rPr lang="ko-KR" altLang="en-US" sz="1200" dirty="0" smtClean="0">
+                <a:latin typeface="나눔바른고딕" panose="020B0603020101020101" pitchFamily="34" charset="-127"/>
+                <a:ea typeface="나눔바른고딕" panose="020B0603020101020101" pitchFamily="34" charset="-127"/>
+              </a:rPr>
+              <a:t>처리해야 </a:t>
+            </a:r>
             <a:r>
               <a:rPr lang="ko-KR" altLang="en-US" sz="1200" dirty="0">
                 <a:latin typeface="나눔바른고딕" panose="020B0603020101020101" pitchFamily="34" charset="-127"/>
                 <a:ea typeface="나눔바른고딕" panose="020B0603020101020101" pitchFamily="34" charset="-127"/>
               </a:rPr>
-              <a:t>처리해야 할 조건들</a:t>
+              <a:t>할 조건들</a:t>
             </a:r>
             <a:r>
               <a:rPr lang="en-US" altLang="ko-KR" sz="1200" dirty="0">
@@ -9382,7 +9502,27 @@
                 <a:latin typeface="나눔바른고딕" panose="020B0603020101020101" pitchFamily="34" charset="-127"/>
                 <a:ea typeface="나눔바른고딕" panose="020B0603020101020101" pitchFamily="34" charset="-127"/>
               </a:rPr>
-              <a:t>상황들은 많은데 이것들을 </a:t>
+              <a:t>상황들은 많은데 </a:t>
+            </a:r>
+            <a:r>
+              <a:rPr lang="en-US" altLang="ko-KR" sz="1200" dirty="0" smtClean="0">
+                <a:latin typeface="나눔바른고딕" panose="020B0603020101020101" pitchFamily="34" charset="-127"/>
+                <a:ea typeface="나눔바른고딕" panose="020B0603020101020101" pitchFamily="34" charset="-127"/>
+              </a:rPr>
+              <a:t/>
+            </a:r>
+            <a:br>
+              <a:rPr lang="en-US" altLang="ko-KR" sz="1200" dirty="0" smtClean="0">
+                <a:latin typeface="나눔바른고딕" panose="020B0603020101020101" pitchFamily="34" charset="-127"/>
+                <a:ea typeface="나눔바른고딕" panose="020B0603020101020101" pitchFamily="34" charset="-127"/>
+              </a:rPr>
+            </a:br>
+            <a:r>
+              <a:rPr lang="ko-KR" altLang="en-US" sz="1200" dirty="0" smtClean="0">
+                <a:latin typeface="나눔바른고딕" panose="020B0603020101020101" pitchFamily="34" charset="-127"/>
+                <a:ea typeface="나눔바른고딕" panose="020B0603020101020101" pitchFamily="34" charset="-127"/>
+              </a:rPr>
+              <a:t>이것들을 </a:t>
             </a:r>
             <a:r>
               <a:rPr lang="ko-KR" altLang="en-US" sz="1200" dirty="0" err="1">
@@ -9410,7 +9550,74 @@
                 <a:latin typeface="나눔바른고딕" panose="020B0603020101020101" pitchFamily="34" charset="-127"/>
                 <a:ea typeface="나눔바른고딕" panose="020B0603020101020101" pitchFamily="34" charset="-127"/>
               </a:rPr>
-              <a:t>에서 코드로 처리하는 것은 비효율적</a:t>
+              <a:t>에서 코드로 처리하는 것은 </a:t>
+            </a:r>
+            <a:r>
+              <a:rPr lang="ko-KR" altLang="en-US" sz="1200" dirty="0" smtClean="0">
+                <a:latin typeface="나눔바른고딕" panose="020B0603020101020101" pitchFamily="34" charset="-127"/>
+                <a:ea typeface="나눔바른고딕" panose="020B0603020101020101" pitchFamily="34" charset="-127"/>
+              </a:rPr>
+              <a:t>비효율적</a:t>
+            </a:r>
+            <a:endParaRPr lang="en-US" altLang="ko-KR" sz="1200" dirty="0" smtClean="0">
+              <a:latin typeface="나눔바른고딕" panose="020B0603020101020101" pitchFamily="34" charset="-127"/>
+              <a:ea typeface="나눔바른고딕" panose="020B0603020101020101" pitchFamily="34" charset="-127"/>
+            </a:endParaRPr>
+          </a:p>
+          <a:p>
+            <a:pPr marL="171450" indent="-171450">
+              <a:lnSpc>
+                <a:spcPct val="150000"/>
+              </a:lnSpc>
+              <a:buFont typeface="Arial" panose="020B0604020202020204" pitchFamily="34" charset="0"/>
+              <a:buChar char="•"/>
+            </a:pPr>
+            <a:endParaRPr lang="en-US" altLang="ko-KR" sz="1200" dirty="0" smtClean="0">
+              <a:latin typeface="나눔바른고딕" panose="020B0603020101020101" pitchFamily="34" charset="-127"/>
+              <a:ea typeface="나눔바른고딕" panose="020B0603020101020101" pitchFamily="34" charset="-127"/>
+            </a:endParaRPr>
+          </a:p>
+          <a:p>
+            <a:pPr marL="171450" indent="-171450">
+              <a:lnSpc>
+                <a:spcPct val="150000"/>
+              </a:lnSpc>
+              <a:buFont typeface="Arial" panose="020B0604020202020204" pitchFamily="34" charset="0"/>
+              <a:buChar char="•"/>
+            </a:pPr>
+            <a:r>
+              <a:rPr lang="ko-KR" altLang="en-US" sz="1200" dirty="0" smtClean="0">
+                <a:latin typeface="나눔바른고딕" panose="020B0603020101020101" pitchFamily="34" charset="-127"/>
+                <a:ea typeface="나눔바른고딕" panose="020B0603020101020101" pitchFamily="34" charset="-127"/>
+              </a:rPr>
+              <a:t>지형 인식의 경우</a:t>
+            </a:r>
+            <a:r>
+              <a:rPr lang="ko-KR" altLang="en-US" sz="1200" dirty="0" smtClean="0">
+                <a:latin typeface="나눔바른고딕" panose="020B0603020101020101" pitchFamily="34" charset="-127"/>
+                <a:ea typeface="나눔바른고딕" panose="020B0603020101020101" pitchFamily="34" charset="-127"/>
+              </a:rPr>
+              <a:t>의 추가는 용이하지만</a:t>
+            </a:r>
+            <a:r>
+              <a:rPr lang="en-US" altLang="ko-KR" sz="1200" dirty="0" smtClean="0">
+                <a:latin typeface="나눔바른고딕" panose="020B0603020101020101" pitchFamily="34" charset="-127"/>
+                <a:ea typeface="나눔바른고딕" panose="020B0603020101020101" pitchFamily="34" charset="-127"/>
+              </a:rPr>
+              <a:t>,</a:t>
+            </a:r>
+            <a:br>
+              <a:rPr lang="en-US" altLang="ko-KR" sz="1200" dirty="0" smtClean="0">
+                <a:latin typeface="나눔바른고딕" panose="020B0603020101020101" pitchFamily="34" charset="-127"/>
+                <a:ea typeface="나눔바른고딕" panose="020B0603020101020101" pitchFamily="34" charset="-127"/>
+              </a:rPr>
+            </a:br>
+            <a:r>
+              <a:rPr lang="ko-KR" altLang="en-US" sz="1200" dirty="0" smtClean="0">
+                <a:latin typeface="나눔바른고딕" panose="020B0603020101020101" pitchFamily="34" charset="-127"/>
+                <a:ea typeface="나눔바른고딕" panose="020B0603020101020101" pitchFamily="34" charset="-127"/>
+              </a:rPr>
+              <a:t>처리하는 방식이 이를 따라가지 못하는 형태</a:t>
             </a:r>
             <a:endParaRPr lang="en-US" altLang="ko-KR" sz="1200" dirty="0">
               <a:latin typeface="나눔바른고딕" panose="020B0603020101020101" pitchFamily="34" charset="-127"/>
@@ -9419,76 +9626,91 @@
           </a:p>
         </p:txBody>
       </p:sp>
-      <p:sp>
-        <p:nvSpPr>
-          <p:cNvPr id="6" name="TextBox 5">
-            <a:extLst>
-              <a:ext uri="{FF2B5EF4-FFF2-40B4-BE49-F238E27FC236}">
-                <a16:creationId xmlns:a16="http://schemas.microsoft.com/office/drawing/2014/main" id="{E8CCFE6E-0F8B-0AFD-783E-1814D9C177FA}"/>
-              </a:ext>
-            </a:extLst>
-          </p:cNvPr>
-          <p:cNvSpPr txBox="1"/>
+      <p:pic>
+        <p:nvPicPr>
+          <p:cNvPr id="2" name="그림 1"/>
+          <p:cNvPicPr>
+            <a:picLocks noChangeAspect="1"/>
+          </p:cNvPicPr>
           <p:nvPr/>
-        </p:nvSpPr>
+        </p:nvPicPr>
+        <p:blipFill>
+          <a:blip r:embed="rId3"/>
+          <a:stretch>
+            <a:fillRect/>
+          </a:stretch>
+        </p:blipFill>
         <p:spPr>
           <a:xfrm>
-            <a:off x="302449" y="5171961"/>
-            <a:ext cx="6822627" cy="461665"/>
+            <a:off x="7516974" y="1039909"/>
+            <a:ext cx="2693612" cy="2642645"/>
           </a:xfrm>
           <a:prstGeom prst="rect">
             <a:avLst/>
           </a:prstGeom>
-          <a:noFill/>
         </p:spPr>
-        <p:txBody>
-          <a:bodyPr wrap="square" rtlCol="0">
-            <a:spAutoFit/>
-          </a:bodyPr>
-          <a:lstStyle/>
-          <a:p>
-            <a:r>
-              <a:rPr lang="ko-KR" altLang="en-US" sz="1200" dirty="0">
-                <a:latin typeface="나눔바른고딕" panose="020B0603020101020101" pitchFamily="34" charset="-127"/>
-                <a:ea typeface="나눔바른고딕" panose="020B0603020101020101" pitchFamily="34" charset="-127"/>
-              </a:rPr>
-              <a:t>해결 방법</a:t>
-            </a:r>
-            <a:endParaRPr lang="en-US" altLang="ko-KR" sz="1200" dirty="0">
-              <a:latin typeface="나눔바른고딕" panose="020B0603020101020101" pitchFamily="34" charset="-127"/>
-              <a:ea typeface="나눔바른고딕" panose="020B0603020101020101" pitchFamily="34" charset="-127"/>
-            </a:endParaRPr>
-          </a:p>
-          <a:p>
-            <a:pPr marL="171450" indent="-171450">
-              <a:buFont typeface="Arial" panose="020B0604020202020204" pitchFamily="34" charset="0"/>
-              <a:buChar char="•"/>
-            </a:pPr>
-            <a:r>
-              <a:rPr lang="ko-KR" altLang="en-US" sz="1200" dirty="0">
-                <a:latin typeface="나눔바른고딕" panose="020B0603020101020101" pitchFamily="34" charset="-127"/>
-                <a:ea typeface="나눔바른고딕" panose="020B0603020101020101" pitchFamily="34" charset="-127"/>
-              </a:rPr>
-              <a:t>처리 결과를 </a:t>
-            </a:r>
-            <a:r>
-              <a:rPr lang="en-US" altLang="ko-KR" sz="1200" dirty="0">
-                <a:latin typeface="나눔바른고딕" panose="020B0603020101020101" pitchFamily="34" charset="-127"/>
-                <a:ea typeface="나눔바른고딕" panose="020B0603020101020101" pitchFamily="34" charset="-127"/>
-              </a:rPr>
-              <a:t>FSM</a:t>
-            </a:r>
-            <a:r>
-              <a:rPr lang="ko-KR" altLang="en-US" sz="1200" dirty="0">
-                <a:latin typeface="나눔바른고딕" panose="020B0603020101020101" pitchFamily="34" charset="-127"/>
-                <a:ea typeface="나눔바른고딕" panose="020B0603020101020101" pitchFamily="34" charset="-127"/>
-              </a:rPr>
-              <a:t>으로 하지 않고 마찬가지로 추가하기 용이한 방법으로 데이터화</a:t>
-            </a:r>
-            <a:endParaRPr lang="en-US" altLang="ko-KR" sz="1200" dirty="0">
-              <a:latin typeface="나눔바른고딕" panose="020B0603020101020101" pitchFamily="34" charset="-127"/>
-              <a:ea typeface="나눔바른고딕" panose="020B0603020101020101" pitchFamily="34" charset="-127"/>
-            </a:endParaRPr>
+      </p:pic>
+      <p:pic>
+        <p:nvPicPr>
+          <p:cNvPr id="5" name="그림 4"/>
+          <p:cNvPicPr>
+            <a:picLocks noChangeAspect="1"/>
+          </p:cNvPicPr>
+          <p:nvPr/>
+        </p:nvPicPr>
+        <p:blipFill>
+          <a:blip r:embed="rId4"/>
+          <a:stretch>
+            <a:fillRect/>
+          </a:stretch>
+        </p:blipFill>
+        <p:spPr>
+          <a:xfrm>
+            <a:off x="6683689" y="4426874"/>
+            <a:ext cx="4448671" cy="2065772"/>
+          </a:xfrm>
+          <a:prstGeom prst="rect">
+            <a:avLst/>
+          </a:prstGeom>
+        </p:spPr>
+      </p:pic>
+      <p:sp>
+        <p:nvSpPr>
+          <p:cNvPr id="7" name="아래쪽 화살표 6"/>
+          <p:cNvSpPr/>
+          <p:nvPr/>
+        </p:nvSpPr>
+        <p:spPr>
+          <a:xfrm>
+            <a:off x="8698213" y="3850001"/>
+            <a:ext cx="419624" cy="450374"/>
+          </a:xfrm>
+          <a:prstGeom prst="downArrow">
+            <a:avLst/>
+          </a:prstGeom>
+        </p:spPr>
+        <p:style>
+          <a:lnRef idx="2">
+            <a:schemeClr val="accent1">
+              <a:shade val="50000"/>
+            </a:schemeClr>
+          </a:lnRef>
+          <a:fillRef idx="1">
+            <a:schemeClr val="accent1"/>
+          </a:fillRef>
+          <a:effectRef idx="0">
+            <a:schemeClr val="accent1"/>
+          </a:effectRef>
+          <a:fontRef idx="minor">
+            <a:schemeClr val="lt1"/>
+          </a:fontRef>
+        </p:style>
+        <p:txBody>
+          <a:bodyPr rtlCol="0" anchor="ctr"/>
+          <a:lstStyle/>
+          <a:p>
+            <a:pPr algn="ctr"/>
+            <a:endParaRPr lang="ko-KR" altLang="en-US"/>
           </a:p>
         </p:txBody>
       </p:sp>
@@ -9513,7 +9735,7 @@
         <p:cNvPr id="1" name="">
           <a:extLst>
             <a:ext uri="{FF2B5EF4-FFF2-40B4-BE49-F238E27FC236}">
-              <a16:creationId xmlns:a16="http://schemas.microsoft.com/office/drawing/2014/main" id="{48549640-3534-B328-F19D-483A4CB1ABE8}"/>
+              <a16:creationId xmlns:a16="http://schemas.microsoft.com/office/drawing/2014/main" xmlns="" id="{CD9567D0-8D8D-4F82-AAD7-B0FF119C0461}"/>
             </a:ext>
           </a:extLst>
         </p:cNvPr>
@@ -9533,7 +9755,7 @@
           <p:cNvPr id="8" name="TextBox 7">
             <a:extLst>
               <a:ext uri="{FF2B5EF4-FFF2-40B4-BE49-F238E27FC236}">
-                <a16:creationId xmlns:a16="http://schemas.microsoft.com/office/drawing/2014/main" id="{B1A3C1A3-4416-EBEB-03C5-ADA3B9DDFD9F}"/>
+                <a16:creationId xmlns:a16="http://schemas.microsoft.com/office/drawing/2014/main" xmlns="" id="{EA448F56-014E-4B94-FB44-E56AECD3FEB6}"/>
               </a:ext>
             </a:extLst>
           </p:cNvPr>
@@ -9575,7 +9797,7 @@
           <p:cNvPr id="10" name="TextBox 9">
             <a:extLst>
               <a:ext uri="{FF2B5EF4-FFF2-40B4-BE49-F238E27FC236}">
-                <a16:creationId xmlns:a16="http://schemas.microsoft.com/office/drawing/2014/main" id="{B280500D-53D9-B8BE-35B6-A5F3FD71B9BB}"/>
+                <a16:creationId xmlns:a16="http://schemas.microsoft.com/office/drawing/2014/main" xmlns="" id="{6316BC8B-3E9C-4B1A-E79B-6ACB06F238D1}"/>
               </a:ext>
             </a:extLst>
           </p:cNvPr>
@@ -9631,7 +9853,7 @@
           <p:cNvPr id="3" name="직선 연결선 2">
             <a:extLst>
               <a:ext uri="{FF2B5EF4-FFF2-40B4-BE49-F238E27FC236}">
-                <a16:creationId xmlns:a16="http://schemas.microsoft.com/office/drawing/2014/main" id="{2337E7D7-473D-730B-07F1-97FF6521A5E0}"/>
+                <a16:creationId xmlns:a16="http://schemas.microsoft.com/office/drawing/2014/main" xmlns="" id="{225FDA88-AB34-8322-EAD0-B9E3833A2962}"/>
               </a:ext>
             </a:extLst>
           </p:cNvPr>
@@ -9674,7 +9896,7 @@
           <p:cNvPr id="12" name="직사각형 11">
             <a:extLst>
               <a:ext uri="{FF2B5EF4-FFF2-40B4-BE49-F238E27FC236}">
-                <a16:creationId xmlns:a16="http://schemas.microsoft.com/office/drawing/2014/main" id="{8B3FCCC0-FB7B-8632-1ACD-EB0F3BD1468A}"/>
+                <a16:creationId xmlns:a16="http://schemas.microsoft.com/office/drawing/2014/main" xmlns="" id="{445848D8-1587-C15E-4275-1CAD486BF1EB}"/>
               </a:ext>
             </a:extLst>
           </p:cNvPr>
@@ -9768,12 +9990,36 @@
           </a:p>
         </p:txBody>
       </p:sp>
-      <p:sp>
-        <p:nvSpPr>
-          <p:cNvPr id="11" name="TextBox 10">
-            <a:extLst>
-              <a:ext uri="{FF2B5EF4-FFF2-40B4-BE49-F238E27FC236}">
-                <a16:creationId xmlns:a16="http://schemas.microsoft.com/office/drawing/2014/main" id="{1ECF1401-017B-8423-172E-E3F163EFB8EB}"/>
+      <p:pic>
+        <p:nvPicPr>
+          <p:cNvPr id="9" name="그림 8"/>
+          <p:cNvPicPr>
+            <a:picLocks noChangeAspect="1"/>
+          </p:cNvPicPr>
+          <p:nvPr/>
+        </p:nvPicPr>
+        <p:blipFill>
+          <a:blip r:embed="rId3"/>
+          <a:stretch>
+            <a:fillRect/>
+          </a:stretch>
+        </p:blipFill>
+        <p:spPr>
+          <a:xfrm>
+            <a:off x="1036616" y="3161806"/>
+            <a:ext cx="4346545" cy="2871112"/>
+          </a:xfrm>
+          <a:prstGeom prst="rect">
+            <a:avLst/>
+          </a:prstGeom>
+        </p:spPr>
+      </p:pic>
+      <p:sp>
+        <p:nvSpPr>
+          <p:cNvPr id="13" name="TextBox 12">
+            <a:extLst>
+              <a:ext uri="{FF2B5EF4-FFF2-40B4-BE49-F238E27FC236}">
+                <a16:creationId xmlns:a16="http://schemas.microsoft.com/office/drawing/2014/main" xmlns="" id="{EB4EBD0C-7AD4-F15A-16EF-C7AFB68FB270}"/>
               </a:ext>
             </a:extLst>
           </p:cNvPr>
@@ -9782,8 +10028,8 @@
         </p:nvSpPr>
         <p:spPr>
           <a:xfrm>
-            <a:off x="302450" y="1342316"/>
-            <a:ext cx="5138684" cy="276999"/>
+            <a:off x="2527905" y="2489172"/>
+            <a:ext cx="1859815" cy="369582"/>
           </a:xfrm>
           <a:prstGeom prst="rect">
             <a:avLst/>
@@ -9796,12 +10042,38 @@
           </a:bodyPr>
           <a:lstStyle/>
           <a:p>
-            <a:r>
-              <a:rPr lang="ko-KR" altLang="en-US" sz="1200" dirty="0">
-                <a:latin typeface="나눔바른고딕" panose="020B0603020101020101" pitchFamily="34" charset="-127"/>
-                <a:ea typeface="나눔바른고딕" panose="020B0603020101020101" pitchFamily="34" charset="-127"/>
-              </a:rPr>
-              <a:t>지형 인식 트리의 데이터화</a:t>
+            <a:pPr algn="ctr">
+              <a:lnSpc>
+                <a:spcPct val="150000"/>
+              </a:lnSpc>
+            </a:pPr>
+            <a:r>
+              <a:rPr lang="en-US" altLang="ko-KR" sz="1200" dirty="0" smtClean="0">
+                <a:latin typeface="나눔바른고딕" panose="020B0603020101020101" pitchFamily="34" charset="-127"/>
+                <a:ea typeface="나눔바른고딕" panose="020B0603020101020101" pitchFamily="34" charset="-127"/>
+              </a:rPr>
+              <a:t>1. </a:t>
+            </a:r>
+            <a:r>
+              <a:rPr lang="ko-KR" altLang="en-US" sz="1200" dirty="0" smtClean="0">
+                <a:latin typeface="나눔바른고딕" panose="020B0603020101020101" pitchFamily="34" charset="-127"/>
+                <a:ea typeface="나눔바른고딕" panose="020B0603020101020101" pitchFamily="34" charset="-127"/>
+              </a:rPr>
+              <a:t>인식 단계 </a:t>
+            </a:r>
+            <a:r>
+              <a:rPr lang="en-US" altLang="ko-KR" sz="1200" dirty="0" smtClean="0">
+                <a:latin typeface="나눔바른고딕" panose="020B0603020101020101" pitchFamily="34" charset="-127"/>
+                <a:ea typeface="나눔바른고딕" panose="020B0603020101020101" pitchFamily="34" charset="-127"/>
+              </a:rPr>
+              <a:t>: </a:t>
+            </a:r>
+            <a:r>
+              <a:rPr lang="ko-KR" altLang="en-US" sz="1200" dirty="0" smtClean="0">
+                <a:latin typeface="나눔바른고딕" panose="020B0603020101020101" pitchFamily="34" charset="-127"/>
+                <a:ea typeface="나눔바른고딕" panose="020B0603020101020101" pitchFamily="34" charset="-127"/>
+              </a:rPr>
+              <a:t>장애물 측정</a:t>
             </a:r>
             <a:endParaRPr lang="en-US" altLang="ko-KR" sz="1200" dirty="0">
               <a:latin typeface="나눔바른고딕" panose="020B0603020101020101" pitchFamily="34" charset="-127"/>
@@ -9810,12 +10082,577 @@
           </a:p>
         </p:txBody>
       </p:sp>
+      <p:sp>
+        <p:nvSpPr>
+          <p:cNvPr id="14" name="TextBox 13">
+            <a:extLst>
+              <a:ext uri="{FF2B5EF4-FFF2-40B4-BE49-F238E27FC236}">
+                <a16:creationId xmlns:a16="http://schemas.microsoft.com/office/drawing/2014/main" xmlns="" id="{EB4EBD0C-7AD4-F15A-16EF-C7AFB68FB270}"/>
+              </a:ext>
+            </a:extLst>
+          </p:cNvPr>
+          <p:cNvSpPr txBox="1"/>
+          <p:nvPr/>
+        </p:nvSpPr>
+        <p:spPr>
+          <a:xfrm>
+            <a:off x="7039361" y="2489172"/>
+            <a:ext cx="2817887" cy="369332"/>
+          </a:xfrm>
+          <a:prstGeom prst="rect">
+            <a:avLst/>
+          </a:prstGeom>
+          <a:noFill/>
+        </p:spPr>
+        <p:txBody>
+          <a:bodyPr wrap="square" rtlCol="0">
+            <a:spAutoFit/>
+          </a:bodyPr>
+          <a:lstStyle/>
+          <a:p>
+            <a:pPr algn="ctr">
+              <a:lnSpc>
+                <a:spcPct val="150000"/>
+              </a:lnSpc>
+            </a:pPr>
+            <a:r>
+              <a:rPr lang="en-US" altLang="ko-KR" sz="1200" dirty="0" smtClean="0">
+                <a:latin typeface="나눔바른고딕" panose="020B0603020101020101" pitchFamily="34" charset="-127"/>
+                <a:ea typeface="나눔바른고딕" panose="020B0603020101020101" pitchFamily="34" charset="-127"/>
+              </a:rPr>
+              <a:t>2. </a:t>
+            </a:r>
+            <a:r>
+              <a:rPr lang="ko-KR" altLang="en-US" sz="1200" dirty="0" smtClean="0">
+                <a:latin typeface="나눔바른고딕" panose="020B0603020101020101" pitchFamily="34" charset="-127"/>
+                <a:ea typeface="나눔바른고딕" panose="020B0603020101020101" pitchFamily="34" charset="-127"/>
+              </a:rPr>
+              <a:t>결과 처리 단계 </a:t>
+            </a:r>
+            <a:r>
+              <a:rPr lang="en-US" altLang="ko-KR" sz="1200" dirty="0" smtClean="0">
+                <a:latin typeface="나눔바른고딕" panose="020B0603020101020101" pitchFamily="34" charset="-127"/>
+                <a:ea typeface="나눔바른고딕" panose="020B0603020101020101" pitchFamily="34" charset="-127"/>
+              </a:rPr>
+              <a:t>: </a:t>
+            </a:r>
+            <a:r>
+              <a:rPr lang="ko-KR" altLang="en-US" sz="1200" dirty="0" smtClean="0">
+                <a:latin typeface="나눔바른고딕" panose="020B0603020101020101" pitchFamily="34" charset="-127"/>
+                <a:ea typeface="나눔바른고딕" panose="020B0603020101020101" pitchFamily="34" charset="-127"/>
+              </a:rPr>
+              <a:t>조건에 맞는 모션 찾기</a:t>
+            </a:r>
+            <a:endParaRPr lang="en-US" altLang="ko-KR" sz="1200" dirty="0">
+              <a:latin typeface="나눔바른고딕" panose="020B0603020101020101" pitchFamily="34" charset="-127"/>
+              <a:ea typeface="나눔바른고딕" panose="020B0603020101020101" pitchFamily="34" charset="-127"/>
+            </a:endParaRPr>
+          </a:p>
+        </p:txBody>
+      </p:sp>
+      <p:pic>
+        <p:nvPicPr>
+          <p:cNvPr id="15" name="그림 14"/>
+          <p:cNvPicPr>
+            <a:picLocks noChangeAspect="1"/>
+          </p:cNvPicPr>
+          <p:nvPr/>
+        </p:nvPicPr>
+        <p:blipFill>
+          <a:blip r:embed="rId4"/>
+          <a:stretch>
+            <a:fillRect/>
+          </a:stretch>
+        </p:blipFill>
+        <p:spPr>
+          <a:xfrm>
+            <a:off x="6025538" y="2933248"/>
+            <a:ext cx="4845532" cy="3348575"/>
+          </a:xfrm>
+          <a:prstGeom prst="rect">
+            <a:avLst/>
+          </a:prstGeom>
+        </p:spPr>
+      </p:pic>
+      <p:sp>
+        <p:nvSpPr>
+          <p:cNvPr id="17" name="TextBox 16">
+            <a:extLst>
+              <a:ext uri="{FF2B5EF4-FFF2-40B4-BE49-F238E27FC236}">
+                <a16:creationId xmlns:a16="http://schemas.microsoft.com/office/drawing/2014/main" xmlns="" id="{E8CCFE6E-0F8B-0AFD-783E-1814D9C177FA}"/>
+              </a:ext>
+            </a:extLst>
+          </p:cNvPr>
+          <p:cNvSpPr txBox="1"/>
+          <p:nvPr/>
+        </p:nvSpPr>
+        <p:spPr>
+          <a:xfrm>
+            <a:off x="302449" y="1342316"/>
+            <a:ext cx="6822627" cy="623248"/>
+          </a:xfrm>
+          <a:prstGeom prst="rect">
+            <a:avLst/>
+          </a:prstGeom>
+          <a:noFill/>
+        </p:spPr>
+        <p:txBody>
+          <a:bodyPr wrap="square" rtlCol="0">
+            <a:spAutoFit/>
+          </a:bodyPr>
+          <a:lstStyle/>
+          <a:p>
+            <a:pPr>
+              <a:lnSpc>
+                <a:spcPct val="150000"/>
+              </a:lnSpc>
+            </a:pPr>
+            <a:r>
+              <a:rPr lang="ko-KR" altLang="en-US" sz="1200" dirty="0">
+                <a:latin typeface="나눔바른고딕" panose="020B0603020101020101" pitchFamily="34" charset="-127"/>
+                <a:ea typeface="나눔바른고딕" panose="020B0603020101020101" pitchFamily="34" charset="-127"/>
+              </a:rPr>
+              <a:t>해결 방법</a:t>
+            </a:r>
+            <a:endParaRPr lang="en-US" altLang="ko-KR" sz="1200" dirty="0">
+              <a:latin typeface="나눔바른고딕" panose="020B0603020101020101" pitchFamily="34" charset="-127"/>
+              <a:ea typeface="나눔바른고딕" panose="020B0603020101020101" pitchFamily="34" charset="-127"/>
+            </a:endParaRPr>
+          </a:p>
+          <a:p>
+            <a:pPr marL="171450" indent="-171450">
+              <a:lnSpc>
+                <a:spcPct val="150000"/>
+              </a:lnSpc>
+              <a:buFont typeface="Arial" panose="020B0604020202020204" pitchFamily="34" charset="0"/>
+              <a:buChar char="•"/>
+            </a:pPr>
+            <a:r>
+              <a:rPr lang="ko-KR" altLang="en-US" sz="1200" dirty="0">
+                <a:latin typeface="나눔바른고딕" panose="020B0603020101020101" pitchFamily="34" charset="-127"/>
+                <a:ea typeface="나눔바른고딕" panose="020B0603020101020101" pitchFamily="34" charset="-127"/>
+              </a:rPr>
+              <a:t>처리 결과를 </a:t>
+            </a:r>
+            <a:r>
+              <a:rPr lang="en-US" altLang="ko-KR" sz="1200" dirty="0">
+                <a:latin typeface="나눔바른고딕" panose="020B0603020101020101" pitchFamily="34" charset="-127"/>
+                <a:ea typeface="나눔바른고딕" panose="020B0603020101020101" pitchFamily="34" charset="-127"/>
+              </a:rPr>
+              <a:t>FSM</a:t>
+            </a:r>
+            <a:r>
+              <a:rPr lang="ko-KR" altLang="en-US" sz="1200" dirty="0">
+                <a:latin typeface="나눔바른고딕" panose="020B0603020101020101" pitchFamily="34" charset="-127"/>
+                <a:ea typeface="나눔바른고딕" panose="020B0603020101020101" pitchFamily="34" charset="-127"/>
+              </a:rPr>
+              <a:t>으로 하지 않고 </a:t>
+            </a:r>
+            <a:r>
+              <a:rPr lang="ko-KR" altLang="en-US" sz="1200" dirty="0" smtClean="0">
+                <a:latin typeface="나눔바른고딕" panose="020B0603020101020101" pitchFamily="34" charset="-127"/>
+                <a:ea typeface="나눔바른고딕" panose="020B0603020101020101" pitchFamily="34" charset="-127"/>
+              </a:rPr>
+              <a:t>마찬가지로 </a:t>
+            </a:r>
+            <a:r>
+              <a:rPr lang="ko-KR" altLang="en-US" sz="1200" dirty="0">
+                <a:latin typeface="나눔바른고딕" panose="020B0603020101020101" pitchFamily="34" charset="-127"/>
+                <a:ea typeface="나눔바른고딕" panose="020B0603020101020101" pitchFamily="34" charset="-127"/>
+              </a:rPr>
+              <a:t>추가하기 용이한 방법으로 데이터화</a:t>
+            </a:r>
+            <a:endParaRPr lang="en-US" altLang="ko-KR" sz="1200" dirty="0">
+              <a:latin typeface="나눔바른고딕" panose="020B0603020101020101" pitchFamily="34" charset="-127"/>
+              <a:ea typeface="나눔바른고딕" panose="020B0603020101020101" pitchFamily="34" charset="-127"/>
+            </a:endParaRPr>
+          </a:p>
+        </p:txBody>
+      </p:sp>
+    </p:spTree>
+    <p:extLst>
+      <p:ext uri="{BB962C8B-B14F-4D97-AF65-F5344CB8AC3E}">
+        <p14:creationId xmlns:p14="http://schemas.microsoft.com/office/powerpoint/2010/main" val="3884791155"/>
+      </p:ext>
+    </p:extLst>
+  </p:cSld>
+  <p:clrMapOvr>
+    <a:masterClrMapping/>
+  </p:clrMapOvr>
+</p:sld>
+</file>
+
+<file path=ppt/slides/slide5.xml><?xml version="1.0" encoding="utf-8"?>
+<p:sld xmlns:a="http://schemas.openxmlformats.org/drawingml/2006/main" xmlns:r="http://schemas.openxmlformats.org/officeDocument/2006/relationships" xmlns:p="http://schemas.openxmlformats.org/presentationml/2006/main">
+  <p:cSld>
+    <p:spTree>
+      <p:nvGrpSpPr>
+        <p:cNvPr id="1" name="">
+          <a:extLst>
+            <a:ext uri="{FF2B5EF4-FFF2-40B4-BE49-F238E27FC236}">
+              <a16:creationId xmlns:a16="http://schemas.microsoft.com/office/drawing/2014/main" xmlns="" id="{48549640-3534-B328-F19D-483A4CB1ABE8}"/>
+            </a:ext>
+          </a:extLst>
+        </p:cNvPr>
+        <p:cNvGrpSpPr/>
+        <p:nvPr/>
+      </p:nvGrpSpPr>
+      <p:grpSpPr>
+        <a:xfrm>
+          <a:off x="0" y="0"/>
+          <a:ext cx="0" cy="0"/>
+          <a:chOff x="0" y="0"/>
+          <a:chExt cx="0" cy="0"/>
+        </a:xfrm>
+      </p:grpSpPr>
+      <p:sp>
+        <p:nvSpPr>
+          <p:cNvPr id="8" name="TextBox 7">
+            <a:extLst>
+              <a:ext uri="{FF2B5EF4-FFF2-40B4-BE49-F238E27FC236}">
+                <a16:creationId xmlns:a16="http://schemas.microsoft.com/office/drawing/2014/main" xmlns="" id="{B1A3C1A3-4416-EBEB-03C5-ADA3B9DDFD9F}"/>
+              </a:ext>
+            </a:extLst>
+          </p:cNvPr>
+          <p:cNvSpPr txBox="1"/>
+          <p:nvPr/>
+        </p:nvSpPr>
+        <p:spPr>
+          <a:xfrm>
+            <a:off x="302451" y="315453"/>
+            <a:ext cx="4944140" cy="369332"/>
+          </a:xfrm>
+          <a:prstGeom prst="rect">
+            <a:avLst/>
+          </a:prstGeom>
+          <a:noFill/>
+        </p:spPr>
+        <p:txBody>
+          <a:bodyPr wrap="square" rtlCol="0">
+            <a:spAutoFit/>
+          </a:bodyPr>
+          <a:lstStyle/>
+          <a:p>
+            <a:r>
+              <a:rPr lang="ko-KR" altLang="en-US" dirty="0">
+                <a:latin typeface="나눔바른고딕" panose="020B0603020101020101" pitchFamily="34" charset="-127"/>
+                <a:ea typeface="나눔바른고딕" panose="020B0603020101020101" pitchFamily="34" charset="-127"/>
+              </a:rPr>
+              <a:t>이번 주 작업 내역</a:t>
+            </a:r>
+            <a:endParaRPr lang="en-US" altLang="ko-KR" dirty="0">
+              <a:latin typeface="나눔바른고딕" panose="020B0603020101020101" pitchFamily="34" charset="-127"/>
+              <a:ea typeface="나눔바른고딕" panose="020B0603020101020101" pitchFamily="34" charset="-127"/>
+            </a:endParaRPr>
+          </a:p>
+        </p:txBody>
+      </p:sp>
+      <p:sp>
+        <p:nvSpPr>
+          <p:cNvPr id="10" name="TextBox 9">
+            <a:extLst>
+              <a:ext uri="{FF2B5EF4-FFF2-40B4-BE49-F238E27FC236}">
+                <a16:creationId xmlns:a16="http://schemas.microsoft.com/office/drawing/2014/main" xmlns="" id="{B280500D-53D9-B8BE-35B6-A5F3FD71B9BB}"/>
+              </a:ext>
+            </a:extLst>
+          </p:cNvPr>
+          <p:cNvSpPr txBox="1"/>
+          <p:nvPr/>
+        </p:nvSpPr>
+        <p:spPr>
+          <a:xfrm>
+            <a:off x="302450" y="1003762"/>
+            <a:ext cx="5366830" cy="338554"/>
+          </a:xfrm>
+          <a:prstGeom prst="rect">
+            <a:avLst/>
+          </a:prstGeom>
+          <a:noFill/>
+        </p:spPr>
+        <p:txBody>
+          <a:bodyPr wrap="square" rtlCol="0">
+            <a:spAutoFit/>
+          </a:bodyPr>
+          <a:lstStyle/>
+          <a:p>
+            <a:r>
+              <a:rPr lang="ko-KR" altLang="en-US" sz="1600" dirty="0">
+                <a:latin typeface="나눔바른고딕" panose="020B0603020101020101" pitchFamily="34" charset="-127"/>
+                <a:ea typeface="나눔바른고딕" panose="020B0603020101020101" pitchFamily="34" charset="-127"/>
+              </a:rPr>
+              <a:t>지형 인식</a:t>
+            </a:r>
+            <a:r>
+              <a:rPr lang="en-US" altLang="ko-KR" sz="1600" dirty="0">
+                <a:latin typeface="나눔바른고딕" panose="020B0603020101020101" pitchFamily="34" charset="-127"/>
+                <a:ea typeface="나눔바른고딕" panose="020B0603020101020101" pitchFamily="34" charset="-127"/>
+              </a:rPr>
+              <a:t>, </a:t>
+            </a:r>
+            <a:r>
+              <a:rPr lang="ko-KR" altLang="en-US" sz="1600" dirty="0">
+                <a:latin typeface="나눔바른고딕" panose="020B0603020101020101" pitchFamily="34" charset="-127"/>
+                <a:ea typeface="나눔바른고딕" panose="020B0603020101020101" pitchFamily="34" charset="-127"/>
+              </a:rPr>
+              <a:t>인식 결과 데이터화</a:t>
+            </a:r>
+            <a:endParaRPr lang="en-US" altLang="ko-KR" sz="1600" dirty="0">
+              <a:latin typeface="나눔바른고딕" panose="020B0603020101020101" pitchFamily="34" charset="-127"/>
+              <a:ea typeface="나눔바른고딕" panose="020B0603020101020101" pitchFamily="34" charset="-127"/>
+            </a:endParaRPr>
+          </a:p>
+        </p:txBody>
+      </p:sp>
+      <p:cxnSp>
+        <p:nvCxnSpPr>
+          <p:cNvPr id="3" name="직선 연결선 2">
+            <a:extLst>
+              <a:ext uri="{FF2B5EF4-FFF2-40B4-BE49-F238E27FC236}">
+                <a16:creationId xmlns:a16="http://schemas.microsoft.com/office/drawing/2014/main" xmlns="" id="{2337E7D7-473D-730B-07F1-97FF6521A5E0}"/>
+              </a:ext>
+            </a:extLst>
+          </p:cNvPr>
+          <p:cNvCxnSpPr>
+            <a:cxnSpLocks/>
+          </p:cNvCxnSpPr>
+          <p:nvPr/>
+        </p:nvCxnSpPr>
+        <p:spPr>
+          <a:xfrm>
+            <a:off x="387511" y="818707"/>
+            <a:ext cx="11308303" cy="0"/>
+          </a:xfrm>
+          <a:prstGeom prst="line">
+            <a:avLst/>
+          </a:prstGeom>
+          <a:ln>
+            <a:solidFill>
+              <a:schemeClr val="tx2"/>
+            </a:solidFill>
+          </a:ln>
+        </p:spPr>
+        <p:style>
+          <a:lnRef idx="2">
+            <a:schemeClr val="accent1"/>
+          </a:lnRef>
+          <a:fillRef idx="0">
+            <a:schemeClr val="accent1"/>
+          </a:fillRef>
+          <a:effectRef idx="1">
+            <a:schemeClr val="accent1"/>
+          </a:effectRef>
+          <a:fontRef idx="minor">
+            <a:schemeClr val="tx1"/>
+          </a:fontRef>
+        </p:style>
+      </p:cxnSp>
+      <p:sp>
+        <p:nvSpPr>
+          <p:cNvPr id="12" name="직사각형 11">
+            <a:extLst>
+              <a:ext uri="{FF2B5EF4-FFF2-40B4-BE49-F238E27FC236}">
+                <a16:creationId xmlns:a16="http://schemas.microsoft.com/office/drawing/2014/main" xmlns="" id="{8B3FCCC0-FB7B-8632-1ACD-EB0F3BD1468A}"/>
+              </a:ext>
+            </a:extLst>
+          </p:cNvPr>
+          <p:cNvSpPr/>
+          <p:nvPr/>
+        </p:nvSpPr>
+        <p:spPr>
+          <a:xfrm>
+            <a:off x="10443172" y="118011"/>
+            <a:ext cx="1596912" cy="246221"/>
+          </a:xfrm>
+          <a:prstGeom prst="rect">
+            <a:avLst/>
+          </a:prstGeom>
+        </p:spPr>
+        <p:txBody>
+          <a:bodyPr wrap="none">
+            <a:spAutoFit/>
+          </a:bodyPr>
+          <a:lstStyle/>
+          <a:p>
+            <a:r>
+              <a:rPr lang="ko-KR" altLang="en-US" sz="1000" dirty="0" err="1">
+                <a:solidFill>
+                  <a:schemeClr val="bg1">
+                    <a:lumMod val="75000"/>
+                  </a:schemeClr>
+                </a:solidFill>
+                <a:latin typeface="나눔바른고딕" panose="020B0603020101020101" pitchFamily="34" charset="-127"/>
+                <a:ea typeface="나눔바른고딕" panose="020B0603020101020101" pitchFamily="34" charset="-127"/>
+              </a:rPr>
+              <a:t>펄어비스</a:t>
+            </a:r>
+            <a:r>
+              <a:rPr lang="ko-KR" altLang="en-US" sz="1000" dirty="0">
+                <a:solidFill>
+                  <a:schemeClr val="bg1">
+                    <a:lumMod val="75000"/>
+                  </a:schemeClr>
+                </a:solidFill>
+                <a:latin typeface="나눔바른고딕" panose="020B0603020101020101" pitchFamily="34" charset="-127"/>
+                <a:ea typeface="나눔바른고딕" panose="020B0603020101020101" pitchFamily="34" charset="-127"/>
+              </a:rPr>
+              <a:t> </a:t>
+            </a:r>
+            <a:r>
+              <a:rPr lang="en-US" altLang="ko-KR" sz="1000" dirty="0">
+                <a:solidFill>
+                  <a:schemeClr val="bg1">
+                    <a:lumMod val="75000"/>
+                  </a:schemeClr>
+                </a:solidFill>
+                <a:latin typeface="나눔바른고딕" panose="020B0603020101020101" pitchFamily="34" charset="-127"/>
+                <a:ea typeface="나눔바른고딕" panose="020B0603020101020101" pitchFamily="34" charset="-127"/>
+              </a:rPr>
+              <a:t>2026 </a:t>
+            </a:r>
+            <a:r>
+              <a:rPr lang="ko-KR" altLang="en-US" sz="1000" dirty="0">
+                <a:solidFill>
+                  <a:schemeClr val="bg1">
+                    <a:lumMod val="75000"/>
+                  </a:schemeClr>
+                </a:solidFill>
+                <a:latin typeface="나눔바른고딕" panose="020B0603020101020101" pitchFamily="34" charset="-127"/>
+                <a:ea typeface="나눔바른고딕" panose="020B0603020101020101" pitchFamily="34" charset="-127"/>
+              </a:rPr>
+              <a:t>여름 </a:t>
+            </a:r>
+            <a:r>
+              <a:rPr lang="ko-KR" altLang="en-US" sz="1000" dirty="0" err="1">
+                <a:solidFill>
+                  <a:schemeClr val="bg1">
+                    <a:lumMod val="75000"/>
+                  </a:schemeClr>
+                </a:solidFill>
+                <a:latin typeface="나눔바른고딕" panose="020B0603020101020101" pitchFamily="34" charset="-127"/>
+                <a:ea typeface="나눔바른고딕" panose="020B0603020101020101" pitchFamily="34" charset="-127"/>
+              </a:rPr>
+              <a:t>인턴십</a:t>
+            </a:r>
+            <a:endParaRPr lang="ko-KR" altLang="en-US" sz="1000" dirty="0">
+              <a:solidFill>
+                <a:schemeClr val="bg1">
+                  <a:lumMod val="75000"/>
+                </a:schemeClr>
+              </a:solidFill>
+              <a:latin typeface="나눔바른고딕" panose="020B0603020101020101" pitchFamily="34" charset="-127"/>
+              <a:ea typeface="나눔바른고딕" panose="020B0603020101020101" pitchFamily="34" charset="-127"/>
+            </a:endParaRPr>
+          </a:p>
+        </p:txBody>
+      </p:sp>
+      <p:sp>
+        <p:nvSpPr>
+          <p:cNvPr id="11" name="TextBox 10">
+            <a:extLst>
+              <a:ext uri="{FF2B5EF4-FFF2-40B4-BE49-F238E27FC236}">
+                <a16:creationId xmlns:a16="http://schemas.microsoft.com/office/drawing/2014/main" xmlns="" id="{1ECF1401-017B-8423-172E-E3F163EFB8EB}"/>
+              </a:ext>
+            </a:extLst>
+          </p:cNvPr>
+          <p:cNvSpPr txBox="1"/>
+          <p:nvPr/>
+        </p:nvSpPr>
+        <p:spPr>
+          <a:xfrm>
+            <a:off x="302450" y="1342316"/>
+            <a:ext cx="5138684" cy="623248"/>
+          </a:xfrm>
+          <a:prstGeom prst="rect">
+            <a:avLst/>
+          </a:prstGeom>
+          <a:noFill/>
+        </p:spPr>
+        <p:txBody>
+          <a:bodyPr wrap="square" rtlCol="0">
+            <a:spAutoFit/>
+          </a:bodyPr>
+          <a:lstStyle/>
+          <a:p>
+            <a:pPr>
+              <a:lnSpc>
+                <a:spcPct val="150000"/>
+              </a:lnSpc>
+            </a:pPr>
+            <a:r>
+              <a:rPr lang="ko-KR" altLang="en-US" sz="1200" dirty="0">
+                <a:latin typeface="나눔바른고딕" panose="020B0603020101020101" pitchFamily="34" charset="-127"/>
+                <a:ea typeface="나눔바른고딕" panose="020B0603020101020101" pitchFamily="34" charset="-127"/>
+              </a:rPr>
+              <a:t>지형 인식 </a:t>
+            </a:r>
+            <a:r>
+              <a:rPr lang="ko-KR" altLang="en-US" sz="1200" dirty="0" err="1">
+                <a:latin typeface="나눔바른고딕" panose="020B0603020101020101" pitchFamily="34" charset="-127"/>
+                <a:ea typeface="나눔바른고딕" panose="020B0603020101020101" pitchFamily="34" charset="-127"/>
+              </a:rPr>
+              <a:t>트리의</a:t>
+            </a:r>
+            <a:r>
+              <a:rPr lang="ko-KR" altLang="en-US" sz="1200" dirty="0">
+                <a:latin typeface="나눔바른고딕" panose="020B0603020101020101" pitchFamily="34" charset="-127"/>
+                <a:ea typeface="나눔바른고딕" panose="020B0603020101020101" pitchFamily="34" charset="-127"/>
+              </a:rPr>
+              <a:t> </a:t>
+            </a:r>
+            <a:r>
+              <a:rPr lang="ko-KR" altLang="en-US" sz="1200" dirty="0" smtClean="0">
+                <a:latin typeface="나눔바른고딕" panose="020B0603020101020101" pitchFamily="34" charset="-127"/>
+                <a:ea typeface="나눔바른고딕" panose="020B0603020101020101" pitchFamily="34" charset="-127"/>
+              </a:rPr>
+              <a:t>데이터화</a:t>
+            </a:r>
+            <a:endParaRPr lang="en-US" altLang="ko-KR" sz="1200" dirty="0">
+              <a:latin typeface="나눔바른고딕" panose="020B0603020101020101" pitchFamily="34" charset="-127"/>
+              <a:ea typeface="나눔바른고딕" panose="020B0603020101020101" pitchFamily="34" charset="-127"/>
+            </a:endParaRPr>
+          </a:p>
+          <a:p>
+            <a:pPr marL="171450" indent="-171450">
+              <a:lnSpc>
+                <a:spcPct val="150000"/>
+              </a:lnSpc>
+              <a:buFont typeface="Arial" panose="020B0604020202020204" pitchFamily="34" charset="0"/>
+              <a:buChar char="•"/>
+            </a:pPr>
+            <a:r>
+              <a:rPr lang="ko-KR" altLang="en-US" sz="1200" dirty="0" smtClean="0">
+                <a:latin typeface="나눔바른고딕" panose="020B0603020101020101" pitchFamily="34" charset="-127"/>
+                <a:ea typeface="나눔바른고딕" panose="020B0603020101020101" pitchFamily="34" charset="-127"/>
+              </a:rPr>
+              <a:t>주요 상태</a:t>
+            </a:r>
+            <a:r>
+              <a:rPr lang="en-US" altLang="ko-KR" sz="1200" dirty="0" smtClean="0">
+                <a:latin typeface="나눔바른고딕" panose="020B0603020101020101" pitchFamily="34" charset="-127"/>
+                <a:ea typeface="나눔바른고딕" panose="020B0603020101020101" pitchFamily="34" charset="-127"/>
+              </a:rPr>
+              <a:t>, </a:t>
+            </a:r>
+            <a:r>
+              <a:rPr lang="ko-KR" altLang="en-US" sz="1200" dirty="0" smtClean="0">
+                <a:latin typeface="나눔바른고딕" panose="020B0603020101020101" pitchFamily="34" charset="-127"/>
+                <a:ea typeface="나눔바른고딕" panose="020B0603020101020101" pitchFamily="34" charset="-127"/>
+              </a:rPr>
+              <a:t>변수 등을 통한 경우에 따른 지형 인식 동작 처리</a:t>
+            </a:r>
+            <a:endParaRPr lang="en-US" altLang="ko-KR" sz="1200" dirty="0">
+              <a:latin typeface="나눔바른고딕" panose="020B0603020101020101" pitchFamily="34" charset="-127"/>
+              <a:ea typeface="나눔바른고딕" panose="020B0603020101020101" pitchFamily="34" charset="-127"/>
+            </a:endParaRPr>
+          </a:p>
+        </p:txBody>
+      </p:sp>
       <p:grpSp>
         <p:nvGrpSpPr>
           <p:cNvPr id="30" name="그룹 29">
             <a:extLst>
               <a:ext uri="{FF2B5EF4-FFF2-40B4-BE49-F238E27FC236}">
-                <a16:creationId xmlns:a16="http://schemas.microsoft.com/office/drawing/2014/main" id="{A6DA15CE-5F24-FFF6-A074-18E1A83481E6}"/>
+                <a16:creationId xmlns:a16="http://schemas.microsoft.com/office/drawing/2014/main" xmlns="" id="{A6DA15CE-5F24-FFF6-A074-18E1A83481E6}"/>
               </a:ext>
             </a:extLst>
           </p:cNvPr>
@@ -9824,8 +10661,8 @@
         </p:nvGrpSpPr>
         <p:grpSpPr>
           <a:xfrm>
-            <a:off x="7535008" y="1480815"/>
-            <a:ext cx="3222192" cy="4621793"/>
+            <a:off x="7971964" y="1480815"/>
+            <a:ext cx="3517030" cy="5044698"/>
             <a:chOff x="7535008" y="1480815"/>
             <a:chExt cx="3222192" cy="4621793"/>
           </a:xfrm>
@@ -9835,7 +10672,7 @@
             <p:cNvPr id="4" name="그림 3">
               <a:extLst>
                 <a:ext uri="{FF2B5EF4-FFF2-40B4-BE49-F238E27FC236}">
-                  <a16:creationId xmlns:a16="http://schemas.microsoft.com/office/drawing/2014/main" id="{3A214DBD-1651-1475-989A-E14493702D2D}"/>
+                  <a16:creationId xmlns:a16="http://schemas.microsoft.com/office/drawing/2014/main" xmlns="" id="{3A214DBD-1651-1475-989A-E14493702D2D}"/>
                 </a:ext>
               </a:extLst>
             </p:cNvPr>
@@ -9865,7 +10702,7 @@
             <p:cNvPr id="7" name="직사각형 6">
               <a:extLst>
                 <a:ext uri="{FF2B5EF4-FFF2-40B4-BE49-F238E27FC236}">
-                  <a16:creationId xmlns:a16="http://schemas.microsoft.com/office/drawing/2014/main" id="{F9E65E49-A8A8-BBD3-74E0-04B6A2EFAA36}"/>
+                  <a16:creationId xmlns:a16="http://schemas.microsoft.com/office/drawing/2014/main" xmlns="" id="{F9E65E49-A8A8-BBD3-74E0-04B6A2EFAA36}"/>
                 </a:ext>
               </a:extLst>
             </p:cNvPr>
@@ -9920,7 +10757,7 @@
             <p:cNvPr id="13" name="직사각형 12">
               <a:extLst>
                 <a:ext uri="{FF2B5EF4-FFF2-40B4-BE49-F238E27FC236}">
-                  <a16:creationId xmlns:a16="http://schemas.microsoft.com/office/drawing/2014/main" id="{23AD9AF1-9D94-6237-6A92-1A3A5817628C}"/>
+                  <a16:creationId xmlns:a16="http://schemas.microsoft.com/office/drawing/2014/main" xmlns="" id="{23AD9AF1-9D94-6237-6A92-1A3A5817628C}"/>
                 </a:ext>
               </a:extLst>
             </p:cNvPr>
@@ -9975,7 +10812,7 @@
             <p:cNvPr id="15" name="연결선: 꺾임 14">
               <a:extLst>
                 <a:ext uri="{FF2B5EF4-FFF2-40B4-BE49-F238E27FC236}">
-                  <a16:creationId xmlns:a16="http://schemas.microsoft.com/office/drawing/2014/main" id="{DAB8CAF1-FB11-9067-1644-667819E60FB0}"/>
+                  <a16:creationId xmlns:a16="http://schemas.microsoft.com/office/drawing/2014/main" xmlns="" id="{DAB8CAF1-FB11-9067-1644-667819E60FB0}"/>
                 </a:ext>
               </a:extLst>
             </p:cNvPr>
@@ -10027,7 +10864,7 @@
             <p:cNvPr id="18" name="직사각형 17">
               <a:extLst>
                 <a:ext uri="{FF2B5EF4-FFF2-40B4-BE49-F238E27FC236}">
-                  <a16:creationId xmlns:a16="http://schemas.microsoft.com/office/drawing/2014/main" id="{2DC80D0A-EBA1-DF24-6345-7929413EC1D8}"/>
+                  <a16:creationId xmlns:a16="http://schemas.microsoft.com/office/drawing/2014/main" xmlns="" id="{2DC80D0A-EBA1-DF24-6345-7929413EC1D8}"/>
                 </a:ext>
               </a:extLst>
             </p:cNvPr>
@@ -10082,7 +10919,7 @@
             <p:cNvPr id="20" name="직사각형 19">
               <a:extLst>
                 <a:ext uri="{FF2B5EF4-FFF2-40B4-BE49-F238E27FC236}">
-                  <a16:creationId xmlns:a16="http://schemas.microsoft.com/office/drawing/2014/main" id="{3B3F4FF5-4D70-71E7-C892-86F125617051}"/>
+                  <a16:creationId xmlns:a16="http://schemas.microsoft.com/office/drawing/2014/main" xmlns="" id="{3B3F4FF5-4D70-71E7-C892-86F125617051}"/>
                 </a:ext>
               </a:extLst>
             </p:cNvPr>
@@ -10137,7 +10974,7 @@
             <p:cNvPr id="21" name="연결선: 꺾임 20">
               <a:extLst>
                 <a:ext uri="{FF2B5EF4-FFF2-40B4-BE49-F238E27FC236}">
-                  <a16:creationId xmlns:a16="http://schemas.microsoft.com/office/drawing/2014/main" id="{0E207835-0D29-1B22-9A3F-4DEAA7DB59AE}"/>
+                  <a16:creationId xmlns:a16="http://schemas.microsoft.com/office/drawing/2014/main" xmlns="" id="{0E207835-0D29-1B22-9A3F-4DEAA7DB59AE}"/>
                 </a:ext>
               </a:extLst>
             </p:cNvPr>
@@ -10184,72 +11021,148 @@
           </p:style>
         </p:cxnSp>
       </p:grpSp>
-      <p:sp>
-        <p:nvSpPr>
-          <p:cNvPr id="32" name="사각형: 둥근 모서리 31">
-            <a:extLst>
-              <a:ext uri="{FF2B5EF4-FFF2-40B4-BE49-F238E27FC236}">
-                <a16:creationId xmlns:a16="http://schemas.microsoft.com/office/drawing/2014/main" id="{409384A0-8E2E-5B98-5811-1EE512A460CF}"/>
-              </a:ext>
-            </a:extLst>
-          </p:cNvPr>
-          <p:cNvSpPr/>
+      <p:pic>
+        <p:nvPicPr>
+          <p:cNvPr id="6" name="그림 5"/>
+          <p:cNvPicPr>
+            <a:picLocks noChangeAspect="1"/>
+          </p:cNvPicPr>
           <p:nvPr/>
-        </p:nvSpPr>
+        </p:nvPicPr>
+        <p:blipFill>
+          <a:blip r:embed="rId4"/>
+          <a:stretch>
+            <a:fillRect/>
+          </a:stretch>
+        </p:blipFill>
         <p:spPr>
           <a:xfrm>
-            <a:off x="387511" y="2270938"/>
-            <a:ext cx="4364578" cy="3306300"/>
+            <a:off x="302450" y="2414154"/>
+            <a:ext cx="7498781" cy="3688454"/>
           </a:xfrm>
-          <a:prstGeom prst="roundRect">
+          <a:prstGeom prst="rect">
+            <a:avLst/>
+          </a:prstGeom>
+        </p:spPr>
+      </p:pic>
+      <p:cxnSp>
+        <p:nvCxnSpPr>
+          <p:cNvPr id="23" name="연결선: 꺾임 14">
+            <a:extLst>
+              <a:ext uri="{FF2B5EF4-FFF2-40B4-BE49-F238E27FC236}">
+                <a16:creationId xmlns:a16="http://schemas.microsoft.com/office/drawing/2014/main" xmlns="" id="{DAB8CAF1-FB11-9067-1644-667819E60FB0}"/>
+              </a:ext>
+            </a:extLst>
+          </p:cNvPr>
+          <p:cNvCxnSpPr>
+            <a:cxnSpLocks/>
+          </p:cNvCxnSpPr>
+          <p:nvPr/>
+        </p:nvCxnSpPr>
+        <p:spPr>
+          <a:xfrm flipV="1">
+            <a:off x="3657600" y="1898647"/>
+            <a:ext cx="4201872" cy="1389859"/>
+          </a:xfrm>
+          <a:prstGeom prst="bentConnector3">
             <a:avLst>
-              <a:gd name="adj" fmla="val 0"/>
+              <a:gd name="adj1" fmla="val 50000"/>
             </a:avLst>
           </a:prstGeom>
+          <a:ln>
+            <a:solidFill>
+              <a:schemeClr val="tx2">
+                <a:lumMod val="50000"/>
+                <a:lumOff val="50000"/>
+              </a:schemeClr>
+            </a:solidFill>
+            <a:tailEnd type="triangle"/>
+          </a:ln>
         </p:spPr>
         <p:style>
           <a:lnRef idx="2">
-            <a:schemeClr val="accent1">
-              <a:shade val="15000"/>
-            </a:schemeClr>
+            <a:schemeClr val="accent1"/>
           </a:lnRef>
-          <a:fillRef idx="1">
+          <a:fillRef idx="0">
             <a:schemeClr val="accent1"/>
           </a:fillRef>
-          <a:effectRef idx="0">
+          <a:effectRef idx="1">
             <a:schemeClr val="accent1"/>
           </a:effectRef>
           <a:fontRef idx="minor">
-            <a:schemeClr val="lt1"/>
+            <a:schemeClr val="tx1"/>
           </a:fontRef>
         </p:style>
-        <p:txBody>
-          <a:bodyPr rtlCol="0" anchor="ctr"/>
-          <a:lstStyle/>
-          <a:p>
-            <a:pPr algn="ctr"/>
-            <a:r>
-              <a:rPr lang="ko-KR" altLang="en-US" dirty="0">
-                <a:latin typeface="나눔바른고딕" panose="020B0603020101020101" pitchFamily="34" charset="-127"/>
-                <a:ea typeface="나눔바른고딕" panose="020B0603020101020101" pitchFamily="34" charset="-127"/>
-              </a:rPr>
-              <a:t>지형 </a:t>
-            </a:r>
-            <a:r>
-              <a:rPr lang="ko-KR" altLang="en-US" dirty="0" err="1">
-                <a:latin typeface="나눔바른고딕" panose="020B0603020101020101" pitchFamily="34" charset="-127"/>
-                <a:ea typeface="나눔바른고딕" panose="020B0603020101020101" pitchFamily="34" charset="-127"/>
-              </a:rPr>
-              <a:t>인식트리</a:t>
-            </a:r>
-            <a:r>
-              <a:rPr lang="ko-KR" altLang="en-US" dirty="0">
-                <a:latin typeface="나눔바른고딕" panose="020B0603020101020101" pitchFamily="34" charset="-127"/>
-                <a:ea typeface="나눔바른고딕" panose="020B0603020101020101" pitchFamily="34" charset="-127"/>
-              </a:rPr>
-              <a:t> 간이 구조</a:t>
-            </a:r>
-            <a:endParaRPr lang="en-US" altLang="ko-KR" dirty="0">
+      </p:cxnSp>
+      <p:sp>
+        <p:nvSpPr>
+          <p:cNvPr id="25" name="TextBox 24">
+            <a:extLst>
+              <a:ext uri="{FF2B5EF4-FFF2-40B4-BE49-F238E27FC236}">
+                <a16:creationId xmlns:a16="http://schemas.microsoft.com/office/drawing/2014/main" xmlns="" id="{1ECF1401-017B-8423-172E-E3F163EFB8EB}"/>
+              </a:ext>
+            </a:extLst>
+          </p:cNvPr>
+          <p:cNvSpPr txBox="1"/>
+          <p:nvPr/>
+        </p:nvSpPr>
+        <p:spPr>
+          <a:xfrm>
+            <a:off x="2662547" y="6179264"/>
+            <a:ext cx="5138684" cy="346249"/>
+          </a:xfrm>
+          <a:prstGeom prst="rect">
+            <a:avLst/>
+          </a:prstGeom>
+          <a:noFill/>
+        </p:spPr>
+        <p:txBody>
+          <a:bodyPr wrap="square" rtlCol="0">
+            <a:spAutoFit/>
+          </a:bodyPr>
+          <a:lstStyle/>
+          <a:p>
+            <a:pPr algn="ctr">
+              <a:lnSpc>
+                <a:spcPct val="150000"/>
+              </a:lnSpc>
+            </a:pPr>
+            <a:r>
+              <a:rPr lang="ko-KR" altLang="en-US" sz="1200" dirty="0" err="1" smtClean="0">
+                <a:latin typeface="나눔바른고딕" panose="020B0603020101020101" pitchFamily="34" charset="-127"/>
+                <a:ea typeface="나눔바른고딕" panose="020B0603020101020101" pitchFamily="34" charset="-127"/>
+              </a:rPr>
+              <a:t>콘텐츠</a:t>
+            </a:r>
+            <a:r>
+              <a:rPr lang="ko-KR" altLang="en-US" sz="1200" dirty="0" smtClean="0">
+                <a:latin typeface="나눔바른고딕" panose="020B0603020101020101" pitchFamily="34" charset="-127"/>
+                <a:ea typeface="나눔바른고딕" panose="020B0603020101020101" pitchFamily="34" charset="-127"/>
+              </a:rPr>
+              <a:t> 단에서</a:t>
+            </a:r>
+            <a:r>
+              <a:rPr lang="en-US" altLang="ko-KR" sz="1200" dirty="0" smtClean="0">
+                <a:latin typeface="나눔바른고딕" panose="020B0603020101020101" pitchFamily="34" charset="-127"/>
+                <a:ea typeface="나눔바른고딕" panose="020B0603020101020101" pitchFamily="34" charset="-127"/>
+              </a:rPr>
+              <a:t> </a:t>
+            </a:r>
+            <a:r>
+              <a:rPr lang="ko-KR" altLang="en-US" sz="1200" dirty="0" err="1" smtClean="0">
+                <a:latin typeface="나눔바른고딕" panose="020B0603020101020101" pitchFamily="34" charset="-127"/>
+                <a:ea typeface="나눔바른고딕" panose="020B0603020101020101" pitchFamily="34" charset="-127"/>
+              </a:rPr>
+              <a:t>노드들을</a:t>
+            </a:r>
+            <a:r>
+              <a:rPr lang="ko-KR" altLang="en-US" sz="1200" dirty="0" smtClean="0">
+                <a:latin typeface="나눔바른고딕" panose="020B0603020101020101" pitchFamily="34" charset="-127"/>
+                <a:ea typeface="나눔바른고딕" panose="020B0603020101020101" pitchFamily="34" charset="-127"/>
+              </a:rPr>
+              <a:t> 상속해서 상황에 맞게 세부 동작을 구현</a:t>
+            </a:r>
+            <a:endParaRPr lang="en-US" altLang="ko-KR" sz="1200" dirty="0">
               <a:latin typeface="나눔바른고딕" panose="020B0603020101020101" pitchFamily="34" charset="-127"/>
               <a:ea typeface="나눔바른고딕" panose="020B0603020101020101" pitchFamily="34" charset="-127"/>
             </a:endParaRPr>
@@ -10266,10 +11179,17 @@
   <p:clrMapOvr>
     <a:masterClrMapping/>
   </p:clrMapOvr>
+  <p:timing>
+    <p:tnLst>
+      <p:par>
+        <p:cTn id="1" dur="indefinite" restart="never" nodeType="tmRoot"/>
+      </p:par>
+    </p:tnLst>
+  </p:timing>
 </p:sld>
 </file>
 
-<file path=ppt/slides/slide5.xml><?xml version="1.0" encoding="utf-8"?>
+<file path=ppt/slides/slide6.xml><?xml version="1.0" encoding="utf-8"?>
 <p:sld xmlns:a="http://schemas.openxmlformats.org/drawingml/2006/main" xmlns:r="http://schemas.openxmlformats.org/officeDocument/2006/relationships" xmlns:p="http://schemas.openxmlformats.org/presentationml/2006/main">
   <p:cSld>
     <p:spTree>
@@ -10277,7 +11197,7 @@
         <p:cNvPr id="1" name="">
           <a:extLst>
             <a:ext uri="{FF2B5EF4-FFF2-40B4-BE49-F238E27FC236}">
-              <a16:creationId xmlns:a16="http://schemas.microsoft.com/office/drawing/2014/main" id="{A0D40794-C860-43E7-F9ED-71A8381C4F19}"/>
+              <a16:creationId xmlns:a16="http://schemas.microsoft.com/office/drawing/2014/main" xmlns="" id="{A0D40794-C860-43E7-F9ED-71A8381C4F19}"/>
             </a:ext>
           </a:extLst>
         </p:cNvPr>
@@ -10292,12 +11212,65 @@
           <a:chExt cx="0" cy="0"/>
         </a:xfrm>
       </p:grpSpPr>
+      <p:pic>
+        <p:nvPicPr>
+          <p:cNvPr id="26" name="그림 25">
+            <a:extLst>
+              <a:ext uri="{FF2B5EF4-FFF2-40B4-BE49-F238E27FC236}">
+                <a16:creationId xmlns:a16="http://schemas.microsoft.com/office/drawing/2014/main" xmlns="" id="{94998307-14E9-A7BB-377D-CF5C660A48B2}"/>
+              </a:ext>
+            </a:extLst>
+          </p:cNvPr>
+          <p:cNvPicPr>
+            <a:picLocks noChangeAspect="1"/>
+          </p:cNvPicPr>
+          <p:nvPr/>
+        </p:nvPicPr>
+        <p:blipFill rotWithShape="1">
+          <a:blip r:embed="rId3"/>
+          <a:srcRect l="7776" t="22743" r="17893" b="47427"/>
+          <a:stretch/>
+        </p:blipFill>
+        <p:spPr>
+          <a:xfrm>
+            <a:off x="6380985" y="939381"/>
+            <a:ext cx="2158073" cy="1167434"/>
+          </a:xfrm>
+          <a:prstGeom prst="rect">
+            <a:avLst/>
+          </a:prstGeom>
+        </p:spPr>
+      </p:pic>
+      <p:pic>
+        <p:nvPicPr>
+          <p:cNvPr id="2" name="그림 1"/>
+          <p:cNvPicPr>
+            <a:picLocks noChangeAspect="1"/>
+          </p:cNvPicPr>
+          <p:nvPr/>
+        </p:nvPicPr>
+        <p:blipFill>
+          <a:blip r:embed="rId4"/>
+          <a:stretch>
+            <a:fillRect/>
+          </a:stretch>
+        </p:blipFill>
+        <p:spPr>
+          <a:xfrm>
+            <a:off x="334366" y="2165898"/>
+            <a:ext cx="6046619" cy="4139760"/>
+          </a:xfrm>
+          <a:prstGeom prst="rect">
+            <a:avLst/>
+          </a:prstGeom>
+        </p:spPr>
+      </p:pic>
       <p:sp>
         <p:nvSpPr>
           <p:cNvPr id="8" name="TextBox 7">
             <a:extLst>
               <a:ext uri="{FF2B5EF4-FFF2-40B4-BE49-F238E27FC236}">
-                <a16:creationId xmlns:a16="http://schemas.microsoft.com/office/drawing/2014/main" id="{82B74064-1CF1-64B6-B967-87A34DBEBA5B}"/>
+                <a16:creationId xmlns:a16="http://schemas.microsoft.com/office/drawing/2014/main" xmlns="" id="{82B74064-1CF1-64B6-B967-87A34DBEBA5B}"/>
               </a:ext>
             </a:extLst>
           </p:cNvPr>
@@ -10339,7 +11312,7 @@
           <p:cNvPr id="10" name="TextBox 9">
             <a:extLst>
               <a:ext uri="{FF2B5EF4-FFF2-40B4-BE49-F238E27FC236}">
-                <a16:creationId xmlns:a16="http://schemas.microsoft.com/office/drawing/2014/main" id="{60EDB4A4-AD43-7437-1751-585C2EE07962}"/>
+                <a16:creationId xmlns:a16="http://schemas.microsoft.com/office/drawing/2014/main" xmlns="" id="{60EDB4A4-AD43-7437-1751-585C2EE07962}"/>
               </a:ext>
             </a:extLst>
           </p:cNvPr>
@@ -10395,7 +11368,7 @@
           <p:cNvPr id="3" name="직선 연결선 2">
             <a:extLst>
               <a:ext uri="{FF2B5EF4-FFF2-40B4-BE49-F238E27FC236}">
-                <a16:creationId xmlns:a16="http://schemas.microsoft.com/office/drawing/2014/main" id="{5881176A-B630-2E6B-975F-F70B31FECDCA}"/>
+                <a16:creationId xmlns:a16="http://schemas.microsoft.com/office/drawing/2014/main" xmlns="" id="{5881176A-B630-2E6B-975F-F70B31FECDCA}"/>
               </a:ext>
             </a:extLst>
           </p:cNvPr>
@@ -10438,7 +11411,7 @@
           <p:cNvPr id="12" name="직사각형 11">
             <a:extLst>
               <a:ext uri="{FF2B5EF4-FFF2-40B4-BE49-F238E27FC236}">
-                <a16:creationId xmlns:a16="http://schemas.microsoft.com/office/drawing/2014/main" id="{1076178A-F76B-2754-F98B-62FC7E00E197}"/>
+                <a16:creationId xmlns:a16="http://schemas.microsoft.com/office/drawing/2014/main" xmlns="" id="{1076178A-F76B-2754-F98B-62FC7E00E197}"/>
               </a:ext>
             </a:extLst>
           </p:cNvPr>
@@ -10537,7 +11510,7 @@
           <p:cNvPr id="11" name="TextBox 10">
             <a:extLst>
               <a:ext uri="{FF2B5EF4-FFF2-40B4-BE49-F238E27FC236}">
-                <a16:creationId xmlns:a16="http://schemas.microsoft.com/office/drawing/2014/main" id="{D2EE7006-8FDB-6FA8-36D5-06293A0CF1E2}"/>
+                <a16:creationId xmlns:a16="http://schemas.microsoft.com/office/drawing/2014/main" xmlns="" id="{D2EE7006-8FDB-6FA8-36D5-06293A0CF1E2}"/>
               </a:ext>
             </a:extLst>
           </p:cNvPr>
@@ -10547,7 +11520,7 @@
         <p:spPr>
           <a:xfrm>
             <a:off x="302450" y="1342316"/>
-            <a:ext cx="5138684" cy="276999"/>
+            <a:ext cx="5138684" cy="646331"/>
           </a:xfrm>
           <a:prstGeom prst="rect">
             <a:avLst/>
@@ -10560,12 +11533,44 @@
           </a:bodyPr>
           <a:lstStyle/>
           <a:p>
+            <a:pPr>
+              <a:lnSpc>
+                <a:spcPct val="150000"/>
+              </a:lnSpc>
+            </a:pPr>
             <a:r>
               <a:rPr lang="ko-KR" altLang="en-US" sz="1200" dirty="0">
                 <a:latin typeface="나눔바른고딕" panose="020B0603020101020101" pitchFamily="34" charset="-127"/>
                 <a:ea typeface="나눔바른고딕" panose="020B0603020101020101" pitchFamily="34" charset="-127"/>
               </a:rPr>
-              <a:t>처리 결과 조건 데이터화</a:t>
+              <a:t>처리 결과 조건 </a:t>
+            </a:r>
+            <a:r>
+              <a:rPr lang="ko-KR" altLang="en-US" sz="1200" dirty="0" smtClean="0">
+                <a:latin typeface="나눔바른고딕" panose="020B0603020101020101" pitchFamily="34" charset="-127"/>
+                <a:ea typeface="나눔바른고딕" panose="020B0603020101020101" pitchFamily="34" charset="-127"/>
+              </a:rPr>
+              <a:t>데이터화</a:t>
+            </a:r>
+            <a:endParaRPr lang="en-US" altLang="ko-KR" sz="1200" dirty="0" smtClean="0">
+              <a:latin typeface="나눔바른고딕" panose="020B0603020101020101" pitchFamily="34" charset="-127"/>
+              <a:ea typeface="나눔바른고딕" panose="020B0603020101020101" pitchFamily="34" charset="-127"/>
+            </a:endParaRPr>
+          </a:p>
+          <a:p>
+            <a:pPr marL="171450" indent="-171450">
+              <a:lnSpc>
+                <a:spcPct val="150000"/>
+              </a:lnSpc>
+              <a:buFont typeface="Arial" panose="020B0604020202020204" pitchFamily="34" charset="0"/>
+              <a:buChar char="•"/>
+            </a:pPr>
+            <a:r>
+              <a:rPr lang="ko-KR" altLang="en-US" sz="1200" dirty="0" smtClean="0">
+                <a:latin typeface="나눔바른고딕" panose="020B0603020101020101" pitchFamily="34" charset="-127"/>
+                <a:ea typeface="나눔바른고딕" panose="020B0603020101020101" pitchFamily="34" charset="-127"/>
+              </a:rPr>
+              <a:t>특정 모션이 선택되기 위한 조건들의 묶음</a:t>
             </a:r>
             <a:endParaRPr lang="en-US" altLang="ko-KR" sz="1200" dirty="0">
               <a:latin typeface="나눔바른고딕" panose="020B0603020101020101" pitchFamily="34" charset="-127"/>
@@ -10574,33 +11579,292 @@
           </a:p>
         </p:txBody>
       </p:sp>
-      <p:sp>
-        <p:nvSpPr>
-          <p:cNvPr id="18" name="사각형: 둥근 모서리 17">
-            <a:extLst>
-              <a:ext uri="{FF2B5EF4-FFF2-40B4-BE49-F238E27FC236}">
-                <a16:creationId xmlns:a16="http://schemas.microsoft.com/office/drawing/2014/main" id="{53F6B5E3-D78F-2C0F-FE33-E72FA876B3FA}"/>
-              </a:ext>
-            </a:extLst>
-          </p:cNvPr>
+      <p:pic>
+        <p:nvPicPr>
+          <p:cNvPr id="30" name="그림 29">
+            <a:extLst>
+              <a:ext uri="{FF2B5EF4-FFF2-40B4-BE49-F238E27FC236}">
+                <a16:creationId xmlns:a16="http://schemas.microsoft.com/office/drawing/2014/main" xmlns="" id="{626AF803-A46C-A563-26C1-DC47EB5CBE95}"/>
+              </a:ext>
+            </a:extLst>
+          </p:cNvPr>
+          <p:cNvPicPr>
+            <a:picLocks noChangeAspect="1"/>
+          </p:cNvPicPr>
+          <p:nvPr/>
+        </p:nvPicPr>
+        <p:blipFill rotWithShape="1">
+          <a:blip r:embed="rId5"/>
+          <a:srcRect b="48025"/>
+          <a:stretch/>
+        </p:blipFill>
+        <p:spPr>
+          <a:xfrm>
+            <a:off x="9036454" y="4677414"/>
+            <a:ext cx="2813435" cy="1779495"/>
+          </a:xfrm>
+          <a:prstGeom prst="rect">
+            <a:avLst/>
+          </a:prstGeom>
+        </p:spPr>
+      </p:pic>
+      <p:sp>
+        <p:nvSpPr>
+          <p:cNvPr id="32" name="TextBox 31">
+            <a:extLst>
+              <a:ext uri="{FF2B5EF4-FFF2-40B4-BE49-F238E27FC236}">
+                <a16:creationId xmlns:a16="http://schemas.microsoft.com/office/drawing/2014/main" xmlns="" id="{59294F2D-ECCD-F62C-6CB8-6A61C54D819A}"/>
+              </a:ext>
+            </a:extLst>
+          </p:cNvPr>
+          <p:cNvSpPr txBox="1"/>
+          <p:nvPr/>
+        </p:nvSpPr>
+        <p:spPr>
+          <a:xfrm>
+            <a:off x="7870285" y="4888203"/>
+            <a:ext cx="668773" cy="246221"/>
+          </a:xfrm>
+          <a:prstGeom prst="rect">
+            <a:avLst/>
+          </a:prstGeom>
+          <a:noFill/>
+        </p:spPr>
+        <p:txBody>
+          <a:bodyPr wrap="none" rtlCol="0">
+            <a:spAutoFit/>
+          </a:bodyPr>
+          <a:lstStyle/>
+          <a:p>
+            <a:pPr algn="r"/>
+            <a:r>
+              <a:rPr lang="ko-KR" altLang="en-US" sz="1000" dirty="0">
+                <a:latin typeface="나눔바른고딕" panose="020B0603020101020101" pitchFamily="50" charset="-127"/>
+                <a:ea typeface="나눔바른고딕" panose="020B0603020101020101" pitchFamily="50" charset="-127"/>
+              </a:rPr>
+              <a:t>개별 조건</a:t>
+            </a:r>
+          </a:p>
+        </p:txBody>
+      </p:sp>
+      <p:sp>
+        <p:nvSpPr>
+          <p:cNvPr id="34" name="TextBox 33">
+            <a:extLst>
+              <a:ext uri="{FF2B5EF4-FFF2-40B4-BE49-F238E27FC236}">
+                <a16:creationId xmlns:a16="http://schemas.microsoft.com/office/drawing/2014/main" xmlns="" id="{DC5D9207-25EB-035F-5DCB-626072ECDBD4}"/>
+              </a:ext>
+            </a:extLst>
+          </p:cNvPr>
+          <p:cNvSpPr txBox="1"/>
+          <p:nvPr/>
+        </p:nvSpPr>
+        <p:spPr>
+          <a:xfrm>
+            <a:off x="9003461" y="4053170"/>
+            <a:ext cx="925254" cy="246221"/>
+          </a:xfrm>
+          <a:prstGeom prst="rect">
+            <a:avLst/>
+          </a:prstGeom>
+          <a:noFill/>
+        </p:spPr>
+        <p:txBody>
+          <a:bodyPr wrap="none" rtlCol="0">
+            <a:spAutoFit/>
+          </a:bodyPr>
+          <a:lstStyle/>
+          <a:p>
+            <a:r>
+              <a:rPr lang="ko-KR" altLang="en-US" sz="1000" dirty="0">
+                <a:latin typeface="나눔바른고딕" panose="020B0603020101020101" pitchFamily="50" charset="-127"/>
+                <a:ea typeface="나눔바른고딕" panose="020B0603020101020101" pitchFamily="50" charset="-127"/>
+              </a:rPr>
+              <a:t>개별 조건 합성</a:t>
+            </a:r>
+          </a:p>
+        </p:txBody>
+      </p:sp>
+      <p:sp>
+        <p:nvSpPr>
+          <p:cNvPr id="36" name="TextBox 35">
+            <a:extLst>
+              <a:ext uri="{FF2B5EF4-FFF2-40B4-BE49-F238E27FC236}">
+                <a16:creationId xmlns:a16="http://schemas.microsoft.com/office/drawing/2014/main" xmlns="" id="{3EDC0331-B6CA-958E-7125-B577FD65F081}"/>
+              </a:ext>
+            </a:extLst>
+          </p:cNvPr>
+          <p:cNvSpPr txBox="1"/>
+          <p:nvPr/>
+        </p:nvSpPr>
+        <p:spPr>
+          <a:xfrm>
+            <a:off x="9003461" y="6472075"/>
+            <a:ext cx="1067921" cy="246221"/>
+          </a:xfrm>
+          <a:prstGeom prst="rect">
+            <a:avLst/>
+          </a:prstGeom>
+          <a:noFill/>
+        </p:spPr>
+        <p:txBody>
+          <a:bodyPr wrap="none" rtlCol="0">
+            <a:spAutoFit/>
+          </a:bodyPr>
+          <a:lstStyle/>
+          <a:p>
+            <a:r>
+              <a:rPr lang="ko-KR" altLang="en-US" sz="1000" dirty="0">
+                <a:latin typeface="나눔바른고딕" panose="020B0603020101020101" pitchFamily="50" charset="-127"/>
+                <a:ea typeface="나눔바른고딕" panose="020B0603020101020101" pitchFamily="50" charset="-127"/>
+              </a:rPr>
+              <a:t>조건 </a:t>
+            </a:r>
+            <a:r>
+              <a:rPr lang="en-US" altLang="ko-KR" sz="1000" dirty="0">
+                <a:latin typeface="나눔바른고딕" panose="020B0603020101020101" pitchFamily="50" charset="-127"/>
+                <a:ea typeface="나눔바른고딕" panose="020B0603020101020101" pitchFamily="50" charset="-127"/>
+              </a:rPr>
+              <a:t>– </a:t>
+            </a:r>
+            <a:r>
+              <a:rPr lang="ko-KR" altLang="en-US" sz="1000" dirty="0">
+                <a:latin typeface="나눔바른고딕" panose="020B0603020101020101" pitchFamily="50" charset="-127"/>
+                <a:ea typeface="나눔바른고딕" panose="020B0603020101020101" pitchFamily="50" charset="-127"/>
+              </a:rPr>
+              <a:t>액션 매핑</a:t>
+            </a:r>
+          </a:p>
+        </p:txBody>
+      </p:sp>
+      <p:pic>
+        <p:nvPicPr>
+          <p:cNvPr id="4" name="그림 3"/>
+          <p:cNvPicPr>
+            <a:picLocks noChangeAspect="1"/>
+          </p:cNvPicPr>
+          <p:nvPr/>
+        </p:nvPicPr>
+        <p:blipFill rotWithShape="1">
+          <a:blip r:embed="rId6"/>
+          <a:srcRect b="32937"/>
+          <a:stretch/>
+        </p:blipFill>
+        <p:spPr>
+          <a:xfrm>
+            <a:off x="6380985" y="3629097"/>
+            <a:ext cx="2158073" cy="1178945"/>
+          </a:xfrm>
+          <a:prstGeom prst="rect">
+            <a:avLst/>
+          </a:prstGeom>
+        </p:spPr>
+      </p:pic>
+      <p:pic>
+        <p:nvPicPr>
+          <p:cNvPr id="5" name="그림 4"/>
+          <p:cNvPicPr>
+            <a:picLocks noChangeAspect="1"/>
+          </p:cNvPicPr>
+          <p:nvPr/>
+        </p:nvPicPr>
+        <p:blipFill>
+          <a:blip r:embed="rId7"/>
+          <a:stretch>
+            <a:fillRect/>
+          </a:stretch>
+        </p:blipFill>
+        <p:spPr>
+          <a:xfrm>
+            <a:off x="6380985" y="2165898"/>
+            <a:ext cx="2158073" cy="1383038"/>
+          </a:xfrm>
+          <a:prstGeom prst="rect">
+            <a:avLst/>
+          </a:prstGeom>
+        </p:spPr>
+      </p:pic>
+      <p:pic>
+        <p:nvPicPr>
+          <p:cNvPr id="6" name="그림 5"/>
+          <p:cNvPicPr>
+            <a:picLocks noChangeAspect="1"/>
+          </p:cNvPicPr>
+          <p:nvPr/>
+        </p:nvPicPr>
+        <p:blipFill>
+          <a:blip r:embed="rId8"/>
+          <a:stretch>
+            <a:fillRect/>
+          </a:stretch>
+        </p:blipFill>
+        <p:spPr>
+          <a:xfrm>
+            <a:off x="9041570" y="939382"/>
+            <a:ext cx="2944414" cy="3066562"/>
+          </a:xfrm>
+          <a:prstGeom prst="rect">
+            <a:avLst/>
+          </a:prstGeom>
+        </p:spPr>
+      </p:pic>
+      <p:sp>
+        <p:nvSpPr>
+          <p:cNvPr id="7" name="오른쪽 중괄호 6"/>
           <p:cNvSpPr/>
           <p:nvPr/>
         </p:nvSpPr>
         <p:spPr>
           <a:xfrm>
-            <a:off x="387511" y="2270938"/>
-            <a:ext cx="4364578" cy="3306300"/>
+            <a:off x="8635406" y="1523098"/>
+            <a:ext cx="256599" cy="2992127"/>
           </a:xfrm>
-          <a:prstGeom prst="roundRect">
-            <a:avLst>
-              <a:gd name="adj" fmla="val 0"/>
-            </a:avLst>
+          <a:prstGeom prst="rightBrace">
+            <a:avLst/>
+          </a:prstGeom>
+        </p:spPr>
+        <p:style>
+          <a:lnRef idx="2">
+            <a:schemeClr val="accent1"/>
+          </a:lnRef>
+          <a:fillRef idx="0">
+            <a:schemeClr val="accent1"/>
+          </a:fillRef>
+          <a:effectRef idx="1">
+            <a:schemeClr val="accent1"/>
+          </a:effectRef>
+          <a:fontRef idx="minor">
+            <a:schemeClr val="tx1"/>
+          </a:fontRef>
+        </p:style>
+        <p:txBody>
+          <a:bodyPr rtlCol="0" anchor="ctr"/>
+          <a:lstStyle/>
+          <a:p>
+            <a:pPr algn="ctr"/>
+            <a:endParaRPr lang="ko-KR" altLang="en-US"/>
+          </a:p>
+        </p:txBody>
+      </p:sp>
+      <p:sp>
+        <p:nvSpPr>
+          <p:cNvPr id="9" name="아래쪽 화살표 8"/>
+          <p:cNvSpPr/>
+          <p:nvPr/>
+        </p:nvSpPr>
+        <p:spPr>
+          <a:xfrm>
+            <a:off x="10396470" y="4080291"/>
+            <a:ext cx="195629" cy="522776"/>
+          </a:xfrm>
+          <a:prstGeom prst="downArrow">
+            <a:avLst/>
           </a:prstGeom>
         </p:spPr>
         <p:style>
           <a:lnRef idx="2">
             <a:schemeClr val="accent1">
-              <a:shade val="15000"/>
+              <a:shade val="50000"/>
             </a:schemeClr>
           </a:lnRef>
           <a:fillRef idx="1">
@@ -10618,240 +11882,7 @@
           <a:lstStyle/>
           <a:p>
             <a:pPr algn="ctr"/>
-            <a:r>
-              <a:rPr lang="ko-KR" altLang="en-US">
-                <a:latin typeface="나눔바른고딕" panose="020B0603020101020101" pitchFamily="34" charset="-127"/>
-                <a:ea typeface="나눔바른고딕" panose="020B0603020101020101" pitchFamily="34" charset="-127"/>
-              </a:rPr>
-              <a:t>처리 조건 간이 구조</a:t>
-            </a:r>
-            <a:endParaRPr lang="en-US" altLang="ko-KR" dirty="0">
-              <a:latin typeface="나눔바른고딕" panose="020B0603020101020101" pitchFamily="34" charset="-127"/>
-              <a:ea typeface="나눔바른고딕" panose="020B0603020101020101" pitchFamily="34" charset="-127"/>
-            </a:endParaRPr>
-          </a:p>
-        </p:txBody>
-      </p:sp>
-      <p:pic>
-        <p:nvPicPr>
-          <p:cNvPr id="26" name="그림 25">
-            <a:extLst>
-              <a:ext uri="{FF2B5EF4-FFF2-40B4-BE49-F238E27FC236}">
-                <a16:creationId xmlns:a16="http://schemas.microsoft.com/office/drawing/2014/main" id="{94998307-14E9-A7BB-377D-CF5C660A48B2}"/>
-              </a:ext>
-            </a:extLst>
-          </p:cNvPr>
-          <p:cNvPicPr>
-            <a:picLocks noChangeAspect="1"/>
-          </p:cNvPicPr>
-          <p:nvPr/>
-        </p:nvPicPr>
-        <p:blipFill>
-          <a:blip r:embed="rId3"/>
-          <a:srcRect t="22743" r="17893"/>
-          <a:stretch>
-            <a:fillRect/>
-          </a:stretch>
-        </p:blipFill>
-        <p:spPr>
-          <a:xfrm>
-            <a:off x="5246591" y="2201256"/>
-            <a:ext cx="2383853" cy="3023606"/>
-          </a:xfrm>
-          <a:prstGeom prst="rect">
-            <a:avLst/>
-          </a:prstGeom>
-        </p:spPr>
-      </p:pic>
-      <p:pic>
-        <p:nvPicPr>
-          <p:cNvPr id="28" name="그림 27">
-            <a:extLst>
-              <a:ext uri="{FF2B5EF4-FFF2-40B4-BE49-F238E27FC236}">
-                <a16:creationId xmlns:a16="http://schemas.microsoft.com/office/drawing/2014/main" id="{18C09418-DC5F-4DF6-0E94-14DC09E30333}"/>
-              </a:ext>
-            </a:extLst>
-          </p:cNvPr>
-          <p:cNvPicPr>
-            <a:picLocks noChangeAspect="1"/>
-          </p:cNvPicPr>
-          <p:nvPr/>
-        </p:nvPicPr>
-        <p:blipFill>
-          <a:blip r:embed="rId4"/>
-          <a:srcRect t="38076" b="29068"/>
-          <a:stretch>
-            <a:fillRect/>
-          </a:stretch>
-        </p:blipFill>
-        <p:spPr>
-          <a:xfrm>
-            <a:off x="7719071" y="3670301"/>
-            <a:ext cx="4693919" cy="1285877"/>
-          </a:xfrm>
-          <a:prstGeom prst="rect">
-            <a:avLst/>
-          </a:prstGeom>
-        </p:spPr>
-      </p:pic>
-      <p:pic>
-        <p:nvPicPr>
-          <p:cNvPr id="30" name="그림 29">
-            <a:extLst>
-              <a:ext uri="{FF2B5EF4-FFF2-40B4-BE49-F238E27FC236}">
-                <a16:creationId xmlns:a16="http://schemas.microsoft.com/office/drawing/2014/main" id="{626AF803-A46C-A563-26C1-DC47EB5CBE95}"/>
-              </a:ext>
-            </a:extLst>
-          </p:cNvPr>
-          <p:cNvPicPr>
-            <a:picLocks noChangeAspect="1"/>
-          </p:cNvPicPr>
-          <p:nvPr/>
-        </p:nvPicPr>
-        <p:blipFill>
-          <a:blip r:embed="rId5"/>
-          <a:stretch>
-            <a:fillRect/>
-          </a:stretch>
-        </p:blipFill>
-        <p:spPr>
-          <a:xfrm>
-            <a:off x="12709959" y="2806574"/>
-            <a:ext cx="2813435" cy="3423758"/>
-          </a:xfrm>
-          <a:prstGeom prst="rect">
-            <a:avLst/>
-          </a:prstGeom>
-        </p:spPr>
-      </p:pic>
-      <p:sp>
-        <p:nvSpPr>
-          <p:cNvPr id="32" name="TextBox 31">
-            <a:extLst>
-              <a:ext uri="{FF2B5EF4-FFF2-40B4-BE49-F238E27FC236}">
-                <a16:creationId xmlns:a16="http://schemas.microsoft.com/office/drawing/2014/main" id="{59294F2D-ECCD-F62C-6CB8-6A61C54D819A}"/>
-              </a:ext>
-            </a:extLst>
-          </p:cNvPr>
-          <p:cNvSpPr txBox="1"/>
-          <p:nvPr/>
-        </p:nvSpPr>
-        <p:spPr>
-          <a:xfrm>
-            <a:off x="6027400" y="5269463"/>
-            <a:ext cx="668773" cy="246221"/>
-          </a:xfrm>
-          <a:prstGeom prst="rect">
-            <a:avLst/>
-          </a:prstGeom>
-          <a:noFill/>
-        </p:spPr>
-        <p:txBody>
-          <a:bodyPr wrap="none" rtlCol="0">
-            <a:spAutoFit/>
-          </a:bodyPr>
-          <a:lstStyle/>
-          <a:p>
-            <a:pPr algn="ctr"/>
-            <a:r>
-              <a:rPr lang="ko-KR" altLang="en-US" sz="1000" dirty="0">
-                <a:latin typeface="나눔바른고딕" panose="020B0603020101020101" pitchFamily="50" charset="-127"/>
-                <a:ea typeface="나눔바른고딕" panose="020B0603020101020101" pitchFamily="50" charset="-127"/>
-              </a:rPr>
-              <a:t>개별 조건</a:t>
-            </a:r>
-          </a:p>
-        </p:txBody>
-      </p:sp>
-      <p:sp>
-        <p:nvSpPr>
-          <p:cNvPr id="34" name="TextBox 33">
-            <a:extLst>
-              <a:ext uri="{FF2B5EF4-FFF2-40B4-BE49-F238E27FC236}">
-                <a16:creationId xmlns:a16="http://schemas.microsoft.com/office/drawing/2014/main" id="{DC5D9207-25EB-035F-5DCB-626072ECDBD4}"/>
-              </a:ext>
-            </a:extLst>
-          </p:cNvPr>
-          <p:cNvSpPr txBox="1"/>
-          <p:nvPr/>
-        </p:nvSpPr>
-        <p:spPr>
-          <a:xfrm>
-            <a:off x="9606628" y="4988166"/>
-            <a:ext cx="925254" cy="246221"/>
-          </a:xfrm>
-          <a:prstGeom prst="rect">
-            <a:avLst/>
-          </a:prstGeom>
-          <a:noFill/>
-        </p:spPr>
-        <p:txBody>
-          <a:bodyPr wrap="none" rtlCol="0">
-            <a:spAutoFit/>
-          </a:bodyPr>
-          <a:lstStyle/>
-          <a:p>
-            <a:pPr algn="ctr"/>
-            <a:r>
-              <a:rPr lang="ko-KR" altLang="en-US" sz="1000" dirty="0">
-                <a:latin typeface="나눔바른고딕" panose="020B0603020101020101" pitchFamily="50" charset="-127"/>
-                <a:ea typeface="나눔바른고딕" panose="020B0603020101020101" pitchFamily="50" charset="-127"/>
-              </a:rPr>
-              <a:t>개별 조건 합성</a:t>
-            </a:r>
-          </a:p>
-        </p:txBody>
-      </p:sp>
-      <p:sp>
-        <p:nvSpPr>
-          <p:cNvPr id="36" name="TextBox 35">
-            <a:extLst>
-              <a:ext uri="{FF2B5EF4-FFF2-40B4-BE49-F238E27FC236}">
-                <a16:creationId xmlns:a16="http://schemas.microsoft.com/office/drawing/2014/main" id="{3EDC0331-B6CA-958E-7125-B577FD65F081}"/>
-              </a:ext>
-            </a:extLst>
-          </p:cNvPr>
-          <p:cNvSpPr txBox="1"/>
-          <p:nvPr/>
-        </p:nvSpPr>
-        <p:spPr>
-          <a:xfrm>
-            <a:off x="13582718" y="6319467"/>
-            <a:ext cx="1067921" cy="246221"/>
-          </a:xfrm>
-          <a:prstGeom prst="rect">
-            <a:avLst/>
-          </a:prstGeom>
-          <a:noFill/>
-        </p:spPr>
-        <p:txBody>
-          <a:bodyPr wrap="none" rtlCol="0">
-            <a:spAutoFit/>
-          </a:bodyPr>
-          <a:lstStyle/>
-          <a:p>
-            <a:pPr algn="ctr"/>
-            <a:r>
-              <a:rPr lang="ko-KR" altLang="en-US" sz="1000" dirty="0">
-                <a:latin typeface="나눔바른고딕" panose="020B0603020101020101" pitchFamily="50" charset="-127"/>
-                <a:ea typeface="나눔바른고딕" panose="020B0603020101020101" pitchFamily="50" charset="-127"/>
-              </a:rPr>
-              <a:t>조건 </a:t>
-            </a:r>
-            <a:r>
-              <a:rPr lang="en-US" altLang="ko-KR" sz="1000" dirty="0">
-                <a:latin typeface="나눔바른고딕" panose="020B0603020101020101" pitchFamily="50" charset="-127"/>
-                <a:ea typeface="나눔바른고딕" panose="020B0603020101020101" pitchFamily="50" charset="-127"/>
-              </a:rPr>
-              <a:t>– </a:t>
-            </a:r>
-            <a:r>
-              <a:rPr lang="ko-KR" altLang="en-US" sz="1000" dirty="0">
-                <a:latin typeface="나눔바른고딕" panose="020B0603020101020101" pitchFamily="50" charset="-127"/>
-                <a:ea typeface="나눔바른고딕" panose="020B0603020101020101" pitchFamily="50" charset="-127"/>
-              </a:rPr>
-              <a:t>액션 매핑</a:t>
-            </a:r>
+            <a:endParaRPr lang="ko-KR" altLang="en-US"/>
           </a:p>
         </p:txBody>
       </p:sp>
@@ -10865,10 +11896,17 @@
   <p:clrMapOvr>
     <a:masterClrMapping/>
   </p:clrMapOvr>
+  <p:timing>
+    <p:tnLst>
+      <p:par>
+        <p:cTn id="1" dur="indefinite" restart="never" nodeType="tmRoot"/>
+      </p:par>
+    </p:tnLst>
+  </p:timing>
 </p:sld>
 </file>
 
-<file path=ppt/slides/slide6.xml><?xml version="1.0" encoding="utf-8"?>
+<file path=ppt/slides/slide7.xml><?xml version="1.0" encoding="utf-8"?>
 <p:sld xmlns:a="http://schemas.openxmlformats.org/drawingml/2006/main" xmlns:r="http://schemas.openxmlformats.org/officeDocument/2006/relationships" xmlns:p="http://schemas.openxmlformats.org/presentationml/2006/main">
   <p:cSld>
     <p:spTree>
@@ -10876,7 +11914,7 @@
         <p:cNvPr id="1" name="">
           <a:extLst>
             <a:ext uri="{FF2B5EF4-FFF2-40B4-BE49-F238E27FC236}">
-              <a16:creationId xmlns:a16="http://schemas.microsoft.com/office/drawing/2014/main" id="{A48995AF-D319-2365-EC57-EAE534183DB9}"/>
+              <a16:creationId xmlns:a16="http://schemas.microsoft.com/office/drawing/2014/main" xmlns="" id="{3B6C87CA-FBA0-1129-2CD2-B7595C90C9C5}"/>
             </a:ext>
           </a:extLst>
         </p:cNvPr>
@@ -10896,7 +11934,7 @@
           <p:cNvPr id="8" name="TextBox 7">
             <a:extLst>
               <a:ext uri="{FF2B5EF4-FFF2-40B4-BE49-F238E27FC236}">
-                <a16:creationId xmlns:a16="http://schemas.microsoft.com/office/drawing/2014/main" id="{4DAE5240-9B2D-78CF-0442-8B81D93E3D0A}"/>
+                <a16:creationId xmlns:a16="http://schemas.microsoft.com/office/drawing/2014/main" xmlns="" id="{077FE9DB-6D36-3752-E690-70E8B6E2179F}"/>
               </a:ext>
             </a:extLst>
           </p:cNvPr>
@@ -10938,7 +11976,7 @@
           <p:cNvPr id="10" name="TextBox 9">
             <a:extLst>
               <a:ext uri="{FF2B5EF4-FFF2-40B4-BE49-F238E27FC236}">
-                <a16:creationId xmlns:a16="http://schemas.microsoft.com/office/drawing/2014/main" id="{8E2D7367-BCF0-D483-53D4-D8A697B6BDE5}"/>
+                <a16:creationId xmlns:a16="http://schemas.microsoft.com/office/drawing/2014/main" xmlns="" id="{85139DE7-8E55-0D67-0B7E-3427D1146A81}"/>
               </a:ext>
             </a:extLst>
           </p:cNvPr>
@@ -10994,7 +12032,7 @@
           <p:cNvPr id="3" name="직선 연결선 2">
             <a:extLst>
               <a:ext uri="{FF2B5EF4-FFF2-40B4-BE49-F238E27FC236}">
-                <a16:creationId xmlns:a16="http://schemas.microsoft.com/office/drawing/2014/main" id="{152A268F-3E5E-2B11-0AD7-A86D14C66136}"/>
+                <a16:creationId xmlns:a16="http://schemas.microsoft.com/office/drawing/2014/main" xmlns="" id="{1F5D6D6D-B1AA-D0F0-5BEC-5A1116B9B75D}"/>
               </a:ext>
             </a:extLst>
           </p:cNvPr>
@@ -11037,7 +12075,7 @@
           <p:cNvPr id="12" name="직사각형 11">
             <a:extLst>
               <a:ext uri="{FF2B5EF4-FFF2-40B4-BE49-F238E27FC236}">
-                <a16:creationId xmlns:a16="http://schemas.microsoft.com/office/drawing/2014/main" id="{9258C093-2B88-545E-EF7D-3487CC8A13F5}"/>
+                <a16:creationId xmlns:a16="http://schemas.microsoft.com/office/drawing/2014/main" xmlns="" id="{F02250AE-83E3-72FA-BE0F-035FE27B7CE3}"/>
               </a:ext>
             </a:extLst>
           </p:cNvPr>
@@ -11136,7 +12174,7 @@
           <p:cNvPr id="11" name="TextBox 10">
             <a:extLst>
               <a:ext uri="{FF2B5EF4-FFF2-40B4-BE49-F238E27FC236}">
-                <a16:creationId xmlns:a16="http://schemas.microsoft.com/office/drawing/2014/main" id="{452C1419-AADF-3530-B23B-76E90DC1FACE}"/>
+                <a16:creationId xmlns:a16="http://schemas.microsoft.com/office/drawing/2014/main" xmlns="" id="{2D3FF80F-4A63-E7D7-CC28-F6B2D2F05A83}"/>
               </a:ext>
             </a:extLst>
           </p:cNvPr>
@@ -11146,7 +12184,7 @@
         <p:spPr>
           <a:xfrm>
             <a:off x="302450" y="1342316"/>
-            <a:ext cx="3078925" cy="276999"/>
+            <a:ext cx="5138684" cy="276999"/>
           </a:xfrm>
           <a:prstGeom prst="rect">
             <a:avLst/>
@@ -11164,77 +12202,108 @@
                 <a:latin typeface="나눔바른고딕" panose="020B0603020101020101" pitchFamily="34" charset="-127"/>
                 <a:ea typeface="나눔바른고딕" panose="020B0603020101020101" pitchFamily="34" charset="-127"/>
               </a:rPr>
-              <a:t>애니메이션 클립 </a:t>
-            </a:r>
-            <a:r>
-              <a:rPr lang="en-US" altLang="ko-KR" sz="1200" dirty="0">
-                <a:latin typeface="나눔바른고딕" panose="020B0603020101020101" pitchFamily="34" charset="-127"/>
-                <a:ea typeface="나눔바른고딕" panose="020B0603020101020101" pitchFamily="34" charset="-127"/>
-              </a:rPr>
-              <a:t>– </a:t>
-            </a:r>
-            <a:r>
-              <a:rPr lang="ko-KR" altLang="en-US" sz="1200" dirty="0">
-                <a:latin typeface="나눔바른고딕" panose="020B0603020101020101" pitchFamily="34" charset="-127"/>
-                <a:ea typeface="나눔바른고딕" panose="020B0603020101020101" pitchFamily="34" charset="-127"/>
-              </a:rPr>
-              <a:t>모션 태그 맵핑 데이터화</a:t>
-            </a:r>
-            <a:r>
-              <a:rPr lang="en-US" altLang="ko-KR" sz="1200" dirty="0">
-                <a:latin typeface="나눔바른고딕" panose="020B0603020101020101" pitchFamily="34" charset="-127"/>
-                <a:ea typeface="나눔바른고딕" panose="020B0603020101020101" pitchFamily="34" charset="-127"/>
-              </a:rPr>
-              <a:t> </a:t>
-            </a:r>
-          </a:p>
-        </p:txBody>
-      </p:sp>
-      <p:pic>
-        <p:nvPicPr>
-          <p:cNvPr id="4" name="그림 3">
-            <a:extLst>
-              <a:ext uri="{FF2B5EF4-FFF2-40B4-BE49-F238E27FC236}">
-                <a16:creationId xmlns:a16="http://schemas.microsoft.com/office/drawing/2014/main" id="{B1D6041B-BAA4-0EE6-F386-3883261487F7}"/>
-              </a:ext>
-            </a:extLst>
-          </p:cNvPr>
-          <p:cNvPicPr>
-            <a:picLocks noChangeAspect="1"/>
-          </p:cNvPicPr>
+              <a:t>작동 과정</a:t>
+            </a:r>
+            <a:endParaRPr lang="en-US" altLang="ko-KR" sz="1200" dirty="0">
+              <a:latin typeface="나눔바른고딕" panose="020B0603020101020101" pitchFamily="34" charset="-127"/>
+              <a:ea typeface="나눔바른고딕" panose="020B0603020101020101" pitchFamily="34" charset="-127"/>
+            </a:endParaRPr>
+          </a:p>
+        </p:txBody>
+      </p:sp>
+      <p:sp>
+        <p:nvSpPr>
+          <p:cNvPr id="4" name="사각형: 둥근 모서리 3">
+            <a:extLst>
+              <a:ext uri="{FF2B5EF4-FFF2-40B4-BE49-F238E27FC236}">
+                <a16:creationId xmlns:a16="http://schemas.microsoft.com/office/drawing/2014/main" xmlns="" id="{0740C2F9-7A33-5697-3852-4CC9C7440513}"/>
+              </a:ext>
+            </a:extLst>
+          </p:cNvPr>
+          <p:cNvSpPr/>
           <p:nvPr/>
-        </p:nvPicPr>
-        <p:blipFill>
-          <a:blip r:embed="rId3"/>
-          <a:srcRect b="68523"/>
-          <a:stretch>
-            <a:fillRect/>
-          </a:stretch>
-        </p:blipFill>
+        </p:nvSpPr>
         <p:spPr>
           <a:xfrm>
-            <a:off x="7376349" y="3122060"/>
-            <a:ext cx="2454887" cy="1703940"/>
+            <a:off x="3486991" y="2209384"/>
+            <a:ext cx="4364578" cy="3306300"/>
           </a:xfrm>
-          <a:prstGeom prst="rect">
-            <a:avLst/>
+          <a:prstGeom prst="roundRect">
+            <a:avLst>
+              <a:gd name="adj" fmla="val 0"/>
+            </a:avLst>
           </a:prstGeom>
         </p:spPr>
-      </p:pic>
+        <p:style>
+          <a:lnRef idx="2">
+            <a:schemeClr val="accent1">
+              <a:shade val="15000"/>
+            </a:schemeClr>
+          </a:lnRef>
+          <a:fillRef idx="1">
+            <a:schemeClr val="accent1"/>
+          </a:fillRef>
+          <a:effectRef idx="0">
+            <a:schemeClr val="accent1"/>
+          </a:effectRef>
+          <a:fontRef idx="minor">
+            <a:schemeClr val="lt1"/>
+          </a:fontRef>
+        </p:style>
+        <p:txBody>
+          <a:bodyPr rtlCol="0" anchor="ctr"/>
+          <a:lstStyle/>
+          <a:p>
+            <a:pPr algn="ctr"/>
+            <a:r>
+              <a:rPr lang="ko-KR" altLang="en-US" dirty="0">
+                <a:latin typeface="나눔바른고딕" panose="020B0603020101020101" pitchFamily="34" charset="-127"/>
+                <a:ea typeface="나눔바른고딕" panose="020B0603020101020101" pitchFamily="34" charset="-127"/>
+              </a:rPr>
+              <a:t>데이터 연결과</a:t>
+            </a:r>
+            <a:endParaRPr lang="en-US" altLang="ko-KR" dirty="0">
+              <a:latin typeface="나눔바른고딕" panose="020B0603020101020101" pitchFamily="34" charset="-127"/>
+              <a:ea typeface="나눔바른고딕" panose="020B0603020101020101" pitchFamily="34" charset="-127"/>
+            </a:endParaRPr>
+          </a:p>
+          <a:p>
+            <a:pPr algn="ctr"/>
+            <a:r>
+              <a:rPr lang="ko-KR" altLang="en-US" dirty="0">
+                <a:latin typeface="나눔바른고딕" panose="020B0603020101020101" pitchFamily="34" charset="-127"/>
+                <a:ea typeface="나눔바른고딕" panose="020B0603020101020101" pitchFamily="34" charset="-127"/>
+              </a:rPr>
+              <a:t>처리 컴포넌트 흐름</a:t>
+            </a:r>
+            <a:endParaRPr lang="en-US" altLang="ko-KR" dirty="0">
+              <a:latin typeface="나눔바른고딕" panose="020B0603020101020101" pitchFamily="34" charset="-127"/>
+              <a:ea typeface="나눔바른고딕" panose="020B0603020101020101" pitchFamily="34" charset="-127"/>
+            </a:endParaRPr>
+          </a:p>
+        </p:txBody>
+      </p:sp>
     </p:spTree>
     <p:extLst>
       <p:ext uri="{BB962C8B-B14F-4D97-AF65-F5344CB8AC3E}">
-        <p14:creationId xmlns:p14="http://schemas.microsoft.com/office/powerpoint/2010/main" val="2635338949"/>
+        <p14:creationId xmlns:p14="http://schemas.microsoft.com/office/powerpoint/2010/main" val="3612144987"/>
       </p:ext>
     </p:extLst>
   </p:cSld>
   <p:clrMapOvr>
     <a:masterClrMapping/>
   </p:clrMapOvr>
+  <p:timing>
+    <p:tnLst>
+      <p:par>
+        <p:cTn id="1" dur="indefinite" restart="never" nodeType="tmRoot"/>
+      </p:par>
+    </p:tnLst>
+  </p:timing>
 </p:sld>
 </file>
 
-<file path=ppt/slides/slide7.xml><?xml version="1.0" encoding="utf-8"?>
+<file path=ppt/slides/slide8.xml><?xml version="1.0" encoding="utf-8"?>
 <p:sld xmlns:a="http://schemas.openxmlformats.org/drawingml/2006/main" xmlns:r="http://schemas.openxmlformats.org/officeDocument/2006/relationships" xmlns:p="http://schemas.openxmlformats.org/presentationml/2006/main">
   <p:cSld>
     <p:spTree>
@@ -11242,7 +12311,7 @@
         <p:cNvPr id="1" name="">
           <a:extLst>
             <a:ext uri="{FF2B5EF4-FFF2-40B4-BE49-F238E27FC236}">
-              <a16:creationId xmlns:a16="http://schemas.microsoft.com/office/drawing/2014/main" id="{3B6C87CA-FBA0-1129-2CD2-B7595C90C9C5}"/>
+              <a16:creationId xmlns:a16="http://schemas.microsoft.com/office/drawing/2014/main" xmlns="" id="{D1D0A15A-753E-D76E-7EA6-D7EC3C7C4084}"/>
             </a:ext>
           </a:extLst>
         </p:cNvPr>
@@ -11262,7 +12331,7 @@
           <p:cNvPr id="8" name="TextBox 7">
             <a:extLst>
               <a:ext uri="{FF2B5EF4-FFF2-40B4-BE49-F238E27FC236}">
-                <a16:creationId xmlns:a16="http://schemas.microsoft.com/office/drawing/2014/main" id="{077FE9DB-6D36-3752-E690-70E8B6E2179F}"/>
+                <a16:creationId xmlns:a16="http://schemas.microsoft.com/office/drawing/2014/main" xmlns="" id="{8CAEF54E-C261-DAEA-E241-FDBE88008C12}"/>
               </a:ext>
             </a:extLst>
           </p:cNvPr>
@@ -11304,7 +12373,7 @@
           <p:cNvPr id="10" name="TextBox 9">
             <a:extLst>
               <a:ext uri="{FF2B5EF4-FFF2-40B4-BE49-F238E27FC236}">
-                <a16:creationId xmlns:a16="http://schemas.microsoft.com/office/drawing/2014/main" id="{85139DE7-8E55-0D67-0B7E-3427D1146A81}"/>
+                <a16:creationId xmlns:a16="http://schemas.microsoft.com/office/drawing/2014/main" xmlns="" id="{C2834159-A529-642E-DA72-BC14004E6795}"/>
               </a:ext>
             </a:extLst>
           </p:cNvPr>
@@ -11314,7 +12383,7 @@
         <p:spPr>
           <a:xfrm>
             <a:off x="302450" y="1003762"/>
-            <a:ext cx="5366830" cy="338554"/>
+            <a:ext cx="2694247" cy="338554"/>
           </a:xfrm>
           <a:prstGeom prst="rect">
             <a:avLst/>
@@ -11332,21 +12401,7 @@
                 <a:latin typeface="나눔바른고딕" panose="020B0603020101020101" pitchFamily="34" charset="-127"/>
                 <a:ea typeface="나눔바른고딕" panose="020B0603020101020101" pitchFamily="34" charset="-127"/>
               </a:rPr>
-              <a:t>지형 인식</a:t>
-            </a:r>
-            <a:r>
-              <a:rPr lang="en-US" altLang="ko-KR" sz="1600" dirty="0">
-                <a:latin typeface="나눔바른고딕" panose="020B0603020101020101" pitchFamily="34" charset="-127"/>
-                <a:ea typeface="나눔바른고딕" panose="020B0603020101020101" pitchFamily="34" charset="-127"/>
-              </a:rPr>
-              <a:t>, </a:t>
-            </a:r>
-            <a:r>
-              <a:rPr lang="ko-KR" altLang="en-US" sz="1600" dirty="0">
-                <a:latin typeface="나눔바른고딕" panose="020B0603020101020101" pitchFamily="34" charset="-127"/>
-                <a:ea typeface="나눔바른고딕" panose="020B0603020101020101" pitchFamily="34" charset="-127"/>
-              </a:rPr>
-              <a:t>인식 결과 데이터화</a:t>
+              <a:t>지형 타입 추가</a:t>
             </a:r>
             <a:endParaRPr lang="en-US" altLang="ko-KR" sz="1600" dirty="0">
               <a:latin typeface="나눔바른고딕" panose="020B0603020101020101" pitchFamily="34" charset="-127"/>
@@ -11360,7 +12415,7 @@
           <p:cNvPr id="3" name="직선 연결선 2">
             <a:extLst>
               <a:ext uri="{FF2B5EF4-FFF2-40B4-BE49-F238E27FC236}">
-                <a16:creationId xmlns:a16="http://schemas.microsoft.com/office/drawing/2014/main" id="{1F5D6D6D-B1AA-D0F0-5BEC-5A1116B9B75D}"/>
+                <a16:creationId xmlns:a16="http://schemas.microsoft.com/office/drawing/2014/main" xmlns="" id="{DA84CF49-B3AE-55A6-B5C8-1AFB49183522}"/>
               </a:ext>
             </a:extLst>
           </p:cNvPr>
@@ -11403,7 +12458,7 @@
           <p:cNvPr id="12" name="직사각형 11">
             <a:extLst>
               <a:ext uri="{FF2B5EF4-FFF2-40B4-BE49-F238E27FC236}">
-                <a16:creationId xmlns:a16="http://schemas.microsoft.com/office/drawing/2014/main" id="{F02250AE-83E3-72FA-BE0F-035FE27B7CE3}"/>
+                <a16:creationId xmlns:a16="http://schemas.microsoft.com/office/drawing/2014/main" xmlns="" id="{20BE5BF5-965D-78BB-5728-A037B8A2E486}"/>
               </a:ext>
             </a:extLst>
           </p:cNvPr>
@@ -11499,10 +12554,10 @@
       </p:sp>
       <p:sp>
         <p:nvSpPr>
-          <p:cNvPr id="11" name="TextBox 10">
-            <a:extLst>
-              <a:ext uri="{FF2B5EF4-FFF2-40B4-BE49-F238E27FC236}">
-                <a16:creationId xmlns:a16="http://schemas.microsoft.com/office/drawing/2014/main" id="{2D3FF80F-4A63-E7D7-CC28-F6B2D2F05A83}"/>
+          <p:cNvPr id="13" name="TextBox 12">
+            <a:extLst>
+              <a:ext uri="{FF2B5EF4-FFF2-40B4-BE49-F238E27FC236}">
+                <a16:creationId xmlns:a16="http://schemas.microsoft.com/office/drawing/2014/main" xmlns="" id="{83366076-5195-604B-D474-8C276C9406C6}"/>
               </a:ext>
             </a:extLst>
           </p:cNvPr>
@@ -11511,8 +12566,8 @@
         </p:nvSpPr>
         <p:spPr>
           <a:xfrm>
-            <a:off x="302450" y="1342316"/>
-            <a:ext cx="5138684" cy="276999"/>
+            <a:off x="302449" y="1342316"/>
+            <a:ext cx="7464813" cy="276999"/>
           </a:xfrm>
           <a:prstGeom prst="rect">
             <a:avLst/>
@@ -11530,7 +12585,7 @@
                 <a:latin typeface="나눔바른고딕" panose="020B0603020101020101" pitchFamily="34" charset="-127"/>
                 <a:ea typeface="나눔바른고딕" panose="020B0603020101020101" pitchFamily="34" charset="-127"/>
               </a:rPr>
-              <a:t>작동 과정</a:t>
+              <a:t>장애물에 돌출부 유형 추가</a:t>
             </a:r>
             <a:endParaRPr lang="en-US" altLang="ko-KR" sz="1200" dirty="0">
               <a:latin typeface="나눔바른고딕" panose="020B0603020101020101" pitchFamily="34" charset="-127"/>
@@ -11541,10 +12596,160 @@
       </p:sp>
       <p:sp>
         <p:nvSpPr>
-          <p:cNvPr id="4" name="사각형: 둥근 모서리 3">
-            <a:extLst>
-              <a:ext uri="{FF2B5EF4-FFF2-40B4-BE49-F238E27FC236}">
-                <a16:creationId xmlns:a16="http://schemas.microsoft.com/office/drawing/2014/main" id="{0740C2F9-7A33-5697-3852-4CC9C7440513}"/>
+          <p:cNvPr id="9" name="TextBox 8">
+            <a:extLst>
+              <a:ext uri="{FF2B5EF4-FFF2-40B4-BE49-F238E27FC236}">
+                <a16:creationId xmlns:a16="http://schemas.microsoft.com/office/drawing/2014/main" xmlns="" id="{AD3C5630-512F-1962-4801-A817035479B0}"/>
+              </a:ext>
+            </a:extLst>
+          </p:cNvPr>
+          <p:cNvSpPr txBox="1"/>
+          <p:nvPr/>
+        </p:nvSpPr>
+        <p:spPr>
+          <a:xfrm>
+            <a:off x="302449" y="1727036"/>
+            <a:ext cx="6520758" cy="1015663"/>
+          </a:xfrm>
+          <a:prstGeom prst="rect">
+            <a:avLst/>
+          </a:prstGeom>
+          <a:noFill/>
+        </p:spPr>
+        <p:txBody>
+          <a:bodyPr wrap="square">
+            <a:spAutoFit/>
+          </a:bodyPr>
+          <a:lstStyle/>
+          <a:p>
+            <a:r>
+              <a:rPr lang="ko-KR" altLang="en-US" sz="1200" dirty="0" err="1">
+                <a:latin typeface="나눔바른고딕" panose="020B0603020101020101" pitchFamily="34" charset="-127"/>
+                <a:ea typeface="나눔바른고딕" panose="020B0603020101020101" pitchFamily="34" charset="-127"/>
+              </a:rPr>
+              <a:t>파쿠르</a:t>
+            </a:r>
+            <a:r>
+              <a:rPr lang="ko-KR" altLang="en-US" sz="1200" dirty="0">
+                <a:latin typeface="나눔바른고딕" panose="020B0603020101020101" pitchFamily="34" charset="-127"/>
+                <a:ea typeface="나눔바른고딕" panose="020B0603020101020101" pitchFamily="34" charset="-127"/>
+              </a:rPr>
+              <a:t> 시</a:t>
+            </a:r>
+            <a:r>
+              <a:rPr lang="en-US" altLang="ko-KR" sz="1200" dirty="0">
+                <a:latin typeface="나눔바른고딕" panose="020B0603020101020101" pitchFamily="34" charset="-127"/>
+                <a:ea typeface="나눔바른고딕" panose="020B0603020101020101" pitchFamily="34" charset="-127"/>
+              </a:rPr>
+              <a:t>, </a:t>
+            </a:r>
+            <a:r>
+              <a:rPr lang="ko-KR" altLang="en-US" sz="1200" dirty="0">
+                <a:latin typeface="나눔바른고딕" panose="020B0603020101020101" pitchFamily="34" charset="-127"/>
+                <a:ea typeface="나눔바른고딕" panose="020B0603020101020101" pitchFamily="34" charset="-127"/>
+              </a:rPr>
+              <a:t>대체로 매끈한 면보다는 돌출된 부분을 이용</a:t>
+            </a:r>
+            <a:endParaRPr lang="en-US" altLang="ko-KR" sz="1200" dirty="0">
+              <a:latin typeface="나눔바른고딕" panose="020B0603020101020101" pitchFamily="34" charset="-127"/>
+              <a:ea typeface="나눔바른고딕" panose="020B0603020101020101" pitchFamily="34" charset="-127"/>
+            </a:endParaRPr>
+          </a:p>
+          <a:p>
+            <a:r>
+              <a:rPr lang="ko-KR" altLang="en-US" sz="1200" dirty="0">
+                <a:latin typeface="나눔바른고딕" panose="020B0603020101020101" pitchFamily="34" charset="-127"/>
+                <a:ea typeface="나눔바른고딕" panose="020B0603020101020101" pitchFamily="34" charset="-127"/>
+              </a:rPr>
+              <a:t>이 부분을 모사하고자 돌출부 유형을 추가</a:t>
+            </a:r>
+            <a:endParaRPr lang="en-US" altLang="ko-KR" sz="1200" dirty="0">
+              <a:latin typeface="나눔바른고딕" panose="020B0603020101020101" pitchFamily="34" charset="-127"/>
+              <a:ea typeface="나눔바른고딕" panose="020B0603020101020101" pitchFamily="34" charset="-127"/>
+            </a:endParaRPr>
+          </a:p>
+          <a:p>
+            <a:endParaRPr lang="en-US" altLang="ko-KR" sz="1200" dirty="0">
+              <a:latin typeface="나눔바른고딕" panose="020B0603020101020101" pitchFamily="34" charset="-127"/>
+              <a:ea typeface="나눔바른고딕" panose="020B0603020101020101" pitchFamily="34" charset="-127"/>
+            </a:endParaRPr>
+          </a:p>
+          <a:p>
+            <a:r>
+              <a:rPr lang="ko-KR" altLang="en-US" sz="1200" dirty="0">
+                <a:latin typeface="나눔바른고딕" panose="020B0603020101020101" pitchFamily="34" charset="-127"/>
+                <a:ea typeface="나눔바른고딕" panose="020B0603020101020101" pitchFamily="34" charset="-127"/>
+              </a:rPr>
+              <a:t>독립적으로 있진 않고</a:t>
+            </a:r>
+            <a:r>
+              <a:rPr lang="en-US" altLang="ko-KR" sz="1200" dirty="0">
+                <a:latin typeface="나눔바른고딕" panose="020B0603020101020101" pitchFamily="34" charset="-127"/>
+                <a:ea typeface="나눔바른고딕" panose="020B0603020101020101" pitchFamily="34" charset="-127"/>
+              </a:rPr>
+              <a:t>, </a:t>
+            </a:r>
+            <a:r>
+              <a:rPr lang="ko-KR" altLang="en-US" sz="1200" dirty="0">
+                <a:latin typeface="나눔바른고딕" panose="020B0603020101020101" pitchFamily="34" charset="-127"/>
+                <a:ea typeface="나눔바른고딕" panose="020B0603020101020101" pitchFamily="34" charset="-127"/>
+              </a:rPr>
+              <a:t>다른 장애물에 부속으로 추가된 형태</a:t>
+            </a:r>
+            <a:endParaRPr lang="en-US" altLang="ko-KR" sz="1200" dirty="0">
+              <a:latin typeface="나눔바른고딕" panose="020B0603020101020101" pitchFamily="34" charset="-127"/>
+              <a:ea typeface="나눔바른고딕" panose="020B0603020101020101" pitchFamily="34" charset="-127"/>
+            </a:endParaRPr>
+          </a:p>
+          <a:p>
+            <a:r>
+              <a:rPr lang="ko-KR" altLang="en-US" sz="1200" dirty="0">
+                <a:latin typeface="나눔바른고딕" panose="020B0603020101020101" pitchFamily="34" charset="-127"/>
+                <a:ea typeface="나눔바른고딕" panose="020B0603020101020101" pitchFamily="34" charset="-127"/>
+              </a:rPr>
+              <a:t>장애물 인식 시</a:t>
+            </a:r>
+            <a:r>
+              <a:rPr lang="en-US" altLang="ko-KR" sz="1200" dirty="0">
+                <a:latin typeface="나눔바른고딕" panose="020B0603020101020101" pitchFamily="34" charset="-127"/>
+                <a:ea typeface="나눔바른고딕" panose="020B0603020101020101" pitchFamily="34" charset="-127"/>
+              </a:rPr>
+              <a:t>, </a:t>
+            </a:r>
+            <a:r>
+              <a:rPr lang="ko-KR" altLang="en-US" sz="1200" dirty="0">
+                <a:latin typeface="나눔바른고딕" panose="020B0603020101020101" pitchFamily="34" charset="-127"/>
+                <a:ea typeface="나눔바른고딕" panose="020B0603020101020101" pitchFamily="34" charset="-127"/>
+              </a:rPr>
+              <a:t>우선해서 인식처리 </a:t>
+            </a:r>
+            <a:r>
+              <a:rPr lang="en-US" altLang="ko-KR" sz="1200" dirty="0">
+                <a:latin typeface="나눔바른고딕" panose="020B0603020101020101" pitchFamily="34" charset="-127"/>
+                <a:ea typeface="나눔바른고딕" panose="020B0603020101020101" pitchFamily="34" charset="-127"/>
+              </a:rPr>
+              <a:t>-&gt; </a:t>
+            </a:r>
+            <a:r>
+              <a:rPr lang="ko-KR" altLang="en-US" sz="1200" dirty="0">
+                <a:latin typeface="나눔바른고딕" panose="020B0603020101020101" pitchFamily="34" charset="-127"/>
+                <a:ea typeface="나눔바른고딕" panose="020B0603020101020101" pitchFamily="34" charset="-127"/>
+              </a:rPr>
+              <a:t>인식 과정에서 우선순위 적용</a:t>
+            </a:r>
+            <a:endParaRPr lang="en-US" altLang="ko-KR" sz="1200" dirty="0">
+              <a:latin typeface="나눔바른고딕" panose="020B0603020101020101" pitchFamily="34" charset="-127"/>
+              <a:ea typeface="나눔바른고딕" panose="020B0603020101020101" pitchFamily="34" charset="-127"/>
+            </a:endParaRPr>
+          </a:p>
+        </p:txBody>
+      </p:sp>
+      <p:sp>
+        <p:nvSpPr>
+          <p:cNvPr id="2" name="직사각형 1">
+            <a:extLst>
+              <a:ext uri="{FF2B5EF4-FFF2-40B4-BE49-F238E27FC236}">
+                <a16:creationId xmlns:a16="http://schemas.microsoft.com/office/drawing/2014/main" xmlns="" id="{882AF4B5-EDA2-1820-BA45-BE5BEC846ABC}"/>
               </a:ext>
             </a:extLst>
           </p:cNvPr>
@@ -11553,13 +12758,11 @@
         </p:nvSpPr>
         <p:spPr>
           <a:xfrm>
-            <a:off x="3486991" y="2209384"/>
-            <a:ext cx="4364578" cy="3306300"/>
+            <a:off x="1733738" y="3365626"/>
+            <a:ext cx="4246075" cy="2576884"/>
           </a:xfrm>
-          <a:prstGeom prst="roundRect">
-            <a:avLst>
-              <a:gd name="adj" fmla="val 0"/>
-            </a:avLst>
+          <a:prstGeom prst="rect">
+            <a:avLst/>
           </a:prstGeom>
         </p:spPr>
         <p:style>
@@ -11584,47 +12787,84 @@
           <a:p>
             <a:pPr algn="ctr"/>
             <a:r>
-              <a:rPr lang="ko-KR" altLang="en-US" dirty="0">
-                <a:latin typeface="나눔바른고딕" panose="020B0603020101020101" pitchFamily="34" charset="-127"/>
-                <a:ea typeface="나눔바른고딕" panose="020B0603020101020101" pitchFamily="34" charset="-127"/>
-              </a:rPr>
-              <a:t>데이터 연결과</a:t>
-            </a:r>
-            <a:endParaRPr lang="en-US" altLang="ko-KR" dirty="0">
-              <a:latin typeface="나눔바른고딕" panose="020B0603020101020101" pitchFamily="34" charset="-127"/>
-              <a:ea typeface="나눔바른고딕" panose="020B0603020101020101" pitchFamily="34" charset="-127"/>
-            </a:endParaRPr>
-          </a:p>
+              <a:rPr lang="ko-KR" altLang="en-US" dirty="0"/>
+              <a:t>예시 이미지</a:t>
+            </a:r>
+            <a:endParaRPr lang="en-US" altLang="ko-KR" dirty="0"/>
+          </a:p>
+        </p:txBody>
+      </p:sp>
+      <p:sp>
+        <p:nvSpPr>
+          <p:cNvPr id="6" name="직사각형 5">
+            <a:extLst>
+              <a:ext uri="{FF2B5EF4-FFF2-40B4-BE49-F238E27FC236}">
+                <a16:creationId xmlns:a16="http://schemas.microsoft.com/office/drawing/2014/main" xmlns="" id="{8CD54640-16D0-6184-2B2B-58AF16D76054}"/>
+              </a:ext>
+            </a:extLst>
+          </p:cNvPr>
+          <p:cNvSpPr/>
+          <p:nvPr/>
+        </p:nvSpPr>
+        <p:spPr>
+          <a:xfrm>
+            <a:off x="6268016" y="3365626"/>
+            <a:ext cx="4246075" cy="2576884"/>
+          </a:xfrm>
+          <a:prstGeom prst="rect">
+            <a:avLst/>
+          </a:prstGeom>
+        </p:spPr>
+        <p:style>
+          <a:lnRef idx="2">
+            <a:schemeClr val="accent1">
+              <a:shade val="15000"/>
+            </a:schemeClr>
+          </a:lnRef>
+          <a:fillRef idx="1">
+            <a:schemeClr val="accent1"/>
+          </a:fillRef>
+          <a:effectRef idx="0">
+            <a:schemeClr val="accent1"/>
+          </a:effectRef>
+          <a:fontRef idx="minor">
+            <a:schemeClr val="lt1"/>
+          </a:fontRef>
+        </p:style>
+        <p:txBody>
+          <a:bodyPr rtlCol="0" anchor="ctr"/>
+          <a:lstStyle/>
           <a:p>
             <a:pPr algn="ctr"/>
             <a:r>
-              <a:rPr lang="ko-KR" altLang="en-US" dirty="0">
-                <a:latin typeface="나눔바른고딕" panose="020B0603020101020101" pitchFamily="34" charset="-127"/>
-                <a:ea typeface="나눔바른고딕" panose="020B0603020101020101" pitchFamily="34" charset="-127"/>
-              </a:rPr>
-              <a:t>처리 컴포넌트 흐름</a:t>
-            </a:r>
-            <a:endParaRPr lang="en-US" altLang="ko-KR" dirty="0">
-              <a:latin typeface="나눔바른고딕" panose="020B0603020101020101" pitchFamily="34" charset="-127"/>
-              <a:ea typeface="나눔바른고딕" panose="020B0603020101020101" pitchFamily="34" charset="-127"/>
-            </a:endParaRPr>
+              <a:rPr lang="ko-KR" altLang="en-US" dirty="0"/>
+              <a:t>예시 이미지</a:t>
+            </a:r>
+            <a:endParaRPr lang="en-US" altLang="ko-KR" dirty="0"/>
           </a:p>
         </p:txBody>
       </p:sp>
     </p:spTree>
     <p:extLst>
       <p:ext uri="{BB962C8B-B14F-4D97-AF65-F5344CB8AC3E}">
-        <p14:creationId xmlns:p14="http://schemas.microsoft.com/office/powerpoint/2010/main" val="3612144987"/>
+        <p14:creationId xmlns:p14="http://schemas.microsoft.com/office/powerpoint/2010/main" val="519208358"/>
       </p:ext>
     </p:extLst>
   </p:cSld>
   <p:clrMapOvr>
     <a:masterClrMapping/>
   </p:clrMapOvr>
+  <p:timing>
+    <p:tnLst>
+      <p:par>
+        <p:cTn id="1" dur="indefinite" restart="never" nodeType="tmRoot"/>
+      </p:par>
+    </p:tnLst>
+  </p:timing>
 </p:sld>
 </file>
 
-<file path=ppt/slides/slide8.xml><?xml version="1.0" encoding="utf-8"?>
+<file path=ppt/slides/slide9.xml><?xml version="1.0" encoding="utf-8"?>
 <p:sld xmlns:a="http://schemas.openxmlformats.org/drawingml/2006/main" xmlns:r="http://schemas.openxmlformats.org/officeDocument/2006/relationships" xmlns:p="http://schemas.openxmlformats.org/presentationml/2006/main">
   <p:cSld>
     <p:spTree>
@@ -11632,7 +12872,7 @@
         <p:cNvPr id="1" name="">
           <a:extLst>
             <a:ext uri="{FF2B5EF4-FFF2-40B4-BE49-F238E27FC236}">
-              <a16:creationId xmlns:a16="http://schemas.microsoft.com/office/drawing/2014/main" id="{D1D0A15A-753E-D76E-7EA6-D7EC3C7C4084}"/>
+              <a16:creationId xmlns:a16="http://schemas.microsoft.com/office/drawing/2014/main" xmlns="" id="{1FA86296-173C-4AC2-A55F-D30AFCB90C55}"/>
             </a:ext>
           </a:extLst>
         </p:cNvPr>
@@ -11652,7 +12892,7 @@
           <p:cNvPr id="8" name="TextBox 7">
             <a:extLst>
               <a:ext uri="{FF2B5EF4-FFF2-40B4-BE49-F238E27FC236}">
-                <a16:creationId xmlns:a16="http://schemas.microsoft.com/office/drawing/2014/main" id="{8CAEF54E-C261-DAEA-E241-FDBE88008C12}"/>
+                <a16:creationId xmlns:a16="http://schemas.microsoft.com/office/drawing/2014/main" xmlns="" id="{0887BFEF-E1BD-42E7-5862-15A8B92AD0E2}"/>
               </a:ext>
             </a:extLst>
           </p:cNvPr>
@@ -11694,7 +12934,7 @@
           <p:cNvPr id="10" name="TextBox 9">
             <a:extLst>
               <a:ext uri="{FF2B5EF4-FFF2-40B4-BE49-F238E27FC236}">
-                <a16:creationId xmlns:a16="http://schemas.microsoft.com/office/drawing/2014/main" id="{C2834159-A529-642E-DA72-BC14004E6795}"/>
+                <a16:creationId xmlns:a16="http://schemas.microsoft.com/office/drawing/2014/main" xmlns="" id="{E584577B-DDFD-04C0-8325-711E292A17D8}"/>
               </a:ext>
             </a:extLst>
           </p:cNvPr>
@@ -11736,7 +12976,7 @@
           <p:cNvPr id="3" name="직선 연결선 2">
             <a:extLst>
               <a:ext uri="{FF2B5EF4-FFF2-40B4-BE49-F238E27FC236}">
-                <a16:creationId xmlns:a16="http://schemas.microsoft.com/office/drawing/2014/main" id="{DA84CF49-B3AE-55A6-B5C8-1AFB49183522}"/>
+                <a16:creationId xmlns:a16="http://schemas.microsoft.com/office/drawing/2014/main" xmlns="" id="{B8A80CFC-DFA8-D9B5-4A33-5D6D856774E9}"/>
               </a:ext>
             </a:extLst>
           </p:cNvPr>
@@ -11779,7 +13019,7 @@
           <p:cNvPr id="12" name="직사각형 11">
             <a:extLst>
               <a:ext uri="{FF2B5EF4-FFF2-40B4-BE49-F238E27FC236}">
-                <a16:creationId xmlns:a16="http://schemas.microsoft.com/office/drawing/2014/main" id="{20BE5BF5-965D-78BB-5728-A037B8A2E486}"/>
+                <a16:creationId xmlns:a16="http://schemas.microsoft.com/office/drawing/2014/main" xmlns="" id="{8CE27908-B35F-A041-B2CF-3D7698DCD08E}"/>
               </a:ext>
             </a:extLst>
           </p:cNvPr>
@@ -11878,7 +13118,7 @@
           <p:cNvPr id="13" name="TextBox 12">
             <a:extLst>
               <a:ext uri="{FF2B5EF4-FFF2-40B4-BE49-F238E27FC236}">
-                <a16:creationId xmlns:a16="http://schemas.microsoft.com/office/drawing/2014/main" id="{83366076-5195-604B-D474-8C276C9406C6}"/>
+                <a16:creationId xmlns:a16="http://schemas.microsoft.com/office/drawing/2014/main" xmlns="" id="{60689D22-0DA1-7A1E-CECB-EC31F0063E61}"/>
               </a:ext>
             </a:extLst>
           </p:cNvPr>
@@ -11920,7 +13160,7 @@
           <p:cNvPr id="9" name="TextBox 8">
             <a:extLst>
               <a:ext uri="{FF2B5EF4-FFF2-40B4-BE49-F238E27FC236}">
-                <a16:creationId xmlns:a16="http://schemas.microsoft.com/office/drawing/2014/main" id="{AD3C5630-512F-1962-4801-A817035479B0}"/>
+                <a16:creationId xmlns:a16="http://schemas.microsoft.com/office/drawing/2014/main" xmlns="" id="{982E8436-9881-CBB7-FD72-2A84E303A454}"/>
               </a:ext>
             </a:extLst>
           </p:cNvPr>
@@ -12067,564 +13307,10 @@
       </p:sp>
       <p:sp>
         <p:nvSpPr>
-          <p:cNvPr id="2" name="직사각형 1">
-            <a:extLst>
-              <a:ext uri="{FF2B5EF4-FFF2-40B4-BE49-F238E27FC236}">
-                <a16:creationId xmlns:a16="http://schemas.microsoft.com/office/drawing/2014/main" id="{882AF4B5-EDA2-1820-BA45-BE5BEC846ABC}"/>
-              </a:ext>
-            </a:extLst>
-          </p:cNvPr>
-          <p:cNvSpPr/>
-          <p:nvPr/>
-        </p:nvSpPr>
-        <p:spPr>
-          <a:xfrm>
-            <a:off x="1733738" y="3365626"/>
-            <a:ext cx="4246075" cy="2576884"/>
-          </a:xfrm>
-          <a:prstGeom prst="rect">
-            <a:avLst/>
-          </a:prstGeom>
-        </p:spPr>
-        <p:style>
-          <a:lnRef idx="2">
-            <a:schemeClr val="accent1">
-              <a:shade val="15000"/>
-            </a:schemeClr>
-          </a:lnRef>
-          <a:fillRef idx="1">
-            <a:schemeClr val="accent1"/>
-          </a:fillRef>
-          <a:effectRef idx="0">
-            <a:schemeClr val="accent1"/>
-          </a:effectRef>
-          <a:fontRef idx="minor">
-            <a:schemeClr val="lt1"/>
-          </a:fontRef>
-        </p:style>
-        <p:txBody>
-          <a:bodyPr rtlCol="0" anchor="ctr"/>
-          <a:lstStyle/>
-          <a:p>
-            <a:pPr algn="ctr"/>
-            <a:r>
-              <a:rPr lang="ko-KR" altLang="en-US" dirty="0"/>
-              <a:t>예시 이미지</a:t>
-            </a:r>
-            <a:endParaRPr lang="en-US" altLang="ko-KR" dirty="0"/>
-          </a:p>
-        </p:txBody>
-      </p:sp>
-      <p:sp>
-        <p:nvSpPr>
-          <p:cNvPr id="6" name="직사각형 5">
-            <a:extLst>
-              <a:ext uri="{FF2B5EF4-FFF2-40B4-BE49-F238E27FC236}">
-                <a16:creationId xmlns:a16="http://schemas.microsoft.com/office/drawing/2014/main" id="{8CD54640-16D0-6184-2B2B-58AF16D76054}"/>
-              </a:ext>
-            </a:extLst>
-          </p:cNvPr>
-          <p:cNvSpPr/>
-          <p:nvPr/>
-        </p:nvSpPr>
-        <p:spPr>
-          <a:xfrm>
-            <a:off x="6268016" y="3365626"/>
-            <a:ext cx="4246075" cy="2576884"/>
-          </a:xfrm>
-          <a:prstGeom prst="rect">
-            <a:avLst/>
-          </a:prstGeom>
-        </p:spPr>
-        <p:style>
-          <a:lnRef idx="2">
-            <a:schemeClr val="accent1">
-              <a:shade val="15000"/>
-            </a:schemeClr>
-          </a:lnRef>
-          <a:fillRef idx="1">
-            <a:schemeClr val="accent1"/>
-          </a:fillRef>
-          <a:effectRef idx="0">
-            <a:schemeClr val="accent1"/>
-          </a:effectRef>
-          <a:fontRef idx="minor">
-            <a:schemeClr val="lt1"/>
-          </a:fontRef>
-        </p:style>
-        <p:txBody>
-          <a:bodyPr rtlCol="0" anchor="ctr"/>
-          <a:lstStyle/>
-          <a:p>
-            <a:pPr algn="ctr"/>
-            <a:r>
-              <a:rPr lang="ko-KR" altLang="en-US" dirty="0"/>
-              <a:t>예시 이미지</a:t>
-            </a:r>
-            <a:endParaRPr lang="en-US" altLang="ko-KR" dirty="0"/>
-          </a:p>
-        </p:txBody>
-      </p:sp>
-    </p:spTree>
-    <p:extLst>
-      <p:ext uri="{BB962C8B-B14F-4D97-AF65-F5344CB8AC3E}">
-        <p14:creationId xmlns:p14="http://schemas.microsoft.com/office/powerpoint/2010/main" val="519208358"/>
-      </p:ext>
-    </p:extLst>
-  </p:cSld>
-  <p:clrMapOvr>
-    <a:masterClrMapping/>
-  </p:clrMapOvr>
-</p:sld>
-</file>
-
-<file path=ppt/slides/slide9.xml><?xml version="1.0" encoding="utf-8"?>
-<p:sld xmlns:a="http://schemas.openxmlformats.org/drawingml/2006/main" xmlns:r="http://schemas.openxmlformats.org/officeDocument/2006/relationships" xmlns:p="http://schemas.openxmlformats.org/presentationml/2006/main">
-  <p:cSld>
-    <p:spTree>
-      <p:nvGrpSpPr>
-        <p:cNvPr id="1" name="">
-          <a:extLst>
-            <a:ext uri="{FF2B5EF4-FFF2-40B4-BE49-F238E27FC236}">
-              <a16:creationId xmlns:a16="http://schemas.microsoft.com/office/drawing/2014/main" id="{1FA86296-173C-4AC2-A55F-D30AFCB90C55}"/>
-            </a:ext>
-          </a:extLst>
-        </p:cNvPr>
-        <p:cNvGrpSpPr/>
-        <p:nvPr/>
-      </p:nvGrpSpPr>
-      <p:grpSpPr>
-        <a:xfrm>
-          <a:off x="0" y="0"/>
-          <a:ext cx="0" cy="0"/>
-          <a:chOff x="0" y="0"/>
-          <a:chExt cx="0" cy="0"/>
-        </a:xfrm>
-      </p:grpSpPr>
-      <p:sp>
-        <p:nvSpPr>
-          <p:cNvPr id="8" name="TextBox 7">
-            <a:extLst>
-              <a:ext uri="{FF2B5EF4-FFF2-40B4-BE49-F238E27FC236}">
-                <a16:creationId xmlns:a16="http://schemas.microsoft.com/office/drawing/2014/main" id="{0887BFEF-E1BD-42E7-5862-15A8B92AD0E2}"/>
-              </a:ext>
-            </a:extLst>
-          </p:cNvPr>
-          <p:cNvSpPr txBox="1"/>
-          <p:nvPr/>
-        </p:nvSpPr>
-        <p:spPr>
-          <a:xfrm>
-            <a:off x="302451" y="315453"/>
-            <a:ext cx="4944140" cy="369332"/>
-          </a:xfrm>
-          <a:prstGeom prst="rect">
-            <a:avLst/>
-          </a:prstGeom>
-          <a:noFill/>
-        </p:spPr>
-        <p:txBody>
-          <a:bodyPr wrap="square" rtlCol="0">
-            <a:spAutoFit/>
-          </a:bodyPr>
-          <a:lstStyle/>
-          <a:p>
-            <a:r>
-              <a:rPr lang="ko-KR" altLang="en-US" dirty="0">
-                <a:latin typeface="나눔바른고딕" panose="020B0603020101020101" pitchFamily="34" charset="-127"/>
-                <a:ea typeface="나눔바른고딕" panose="020B0603020101020101" pitchFamily="34" charset="-127"/>
-              </a:rPr>
-              <a:t>이번 주 작업 내역</a:t>
-            </a:r>
-            <a:endParaRPr lang="en-US" altLang="ko-KR" dirty="0">
-              <a:latin typeface="나눔바른고딕" panose="020B0603020101020101" pitchFamily="34" charset="-127"/>
-              <a:ea typeface="나눔바른고딕" panose="020B0603020101020101" pitchFamily="34" charset="-127"/>
-            </a:endParaRPr>
-          </a:p>
-        </p:txBody>
-      </p:sp>
-      <p:sp>
-        <p:nvSpPr>
-          <p:cNvPr id="10" name="TextBox 9">
-            <a:extLst>
-              <a:ext uri="{FF2B5EF4-FFF2-40B4-BE49-F238E27FC236}">
-                <a16:creationId xmlns:a16="http://schemas.microsoft.com/office/drawing/2014/main" id="{E584577B-DDFD-04C0-8325-711E292A17D8}"/>
-              </a:ext>
-            </a:extLst>
-          </p:cNvPr>
-          <p:cNvSpPr txBox="1"/>
-          <p:nvPr/>
-        </p:nvSpPr>
-        <p:spPr>
-          <a:xfrm>
-            <a:off x="302450" y="1003762"/>
-            <a:ext cx="2694247" cy="338554"/>
-          </a:xfrm>
-          <a:prstGeom prst="rect">
-            <a:avLst/>
-          </a:prstGeom>
-          <a:noFill/>
-        </p:spPr>
-        <p:txBody>
-          <a:bodyPr wrap="square" rtlCol="0">
-            <a:spAutoFit/>
-          </a:bodyPr>
-          <a:lstStyle/>
-          <a:p>
-            <a:r>
-              <a:rPr lang="ko-KR" altLang="en-US" sz="1600" dirty="0">
-                <a:latin typeface="나눔바른고딕" panose="020B0603020101020101" pitchFamily="34" charset="-127"/>
-                <a:ea typeface="나눔바른고딕" panose="020B0603020101020101" pitchFamily="34" charset="-127"/>
-              </a:rPr>
-              <a:t>지형 타입 추가</a:t>
-            </a:r>
-            <a:endParaRPr lang="en-US" altLang="ko-KR" sz="1600" dirty="0">
-              <a:latin typeface="나눔바른고딕" panose="020B0603020101020101" pitchFamily="34" charset="-127"/>
-              <a:ea typeface="나눔바른고딕" panose="020B0603020101020101" pitchFamily="34" charset="-127"/>
-            </a:endParaRPr>
-          </a:p>
-        </p:txBody>
-      </p:sp>
-      <p:cxnSp>
-        <p:nvCxnSpPr>
-          <p:cNvPr id="3" name="직선 연결선 2">
-            <a:extLst>
-              <a:ext uri="{FF2B5EF4-FFF2-40B4-BE49-F238E27FC236}">
-                <a16:creationId xmlns:a16="http://schemas.microsoft.com/office/drawing/2014/main" id="{B8A80CFC-DFA8-D9B5-4A33-5D6D856774E9}"/>
-              </a:ext>
-            </a:extLst>
-          </p:cNvPr>
-          <p:cNvCxnSpPr>
-            <a:cxnSpLocks/>
-          </p:cNvCxnSpPr>
-          <p:nvPr/>
-        </p:nvCxnSpPr>
-        <p:spPr>
-          <a:xfrm>
-            <a:off x="387511" y="818707"/>
-            <a:ext cx="11308303" cy="0"/>
-          </a:xfrm>
-          <a:prstGeom prst="line">
-            <a:avLst/>
-          </a:prstGeom>
-          <a:ln>
-            <a:solidFill>
-              <a:schemeClr val="tx2"/>
-            </a:solidFill>
-          </a:ln>
-        </p:spPr>
-        <p:style>
-          <a:lnRef idx="2">
-            <a:schemeClr val="accent1"/>
-          </a:lnRef>
-          <a:fillRef idx="0">
-            <a:schemeClr val="accent1"/>
-          </a:fillRef>
-          <a:effectRef idx="1">
-            <a:schemeClr val="accent1"/>
-          </a:effectRef>
-          <a:fontRef idx="minor">
-            <a:schemeClr val="tx1"/>
-          </a:fontRef>
-        </p:style>
-      </p:cxnSp>
-      <p:sp>
-        <p:nvSpPr>
-          <p:cNvPr id="12" name="직사각형 11">
-            <a:extLst>
-              <a:ext uri="{FF2B5EF4-FFF2-40B4-BE49-F238E27FC236}">
-                <a16:creationId xmlns:a16="http://schemas.microsoft.com/office/drawing/2014/main" id="{8CE27908-B35F-A041-B2CF-3D7698DCD08E}"/>
-              </a:ext>
-            </a:extLst>
-          </p:cNvPr>
-          <p:cNvSpPr/>
-          <p:nvPr/>
-        </p:nvSpPr>
-        <p:spPr>
-          <a:xfrm>
-            <a:off x="10443172" y="118011"/>
-            <a:ext cx="1596912" cy="246221"/>
-          </a:xfrm>
-          <a:prstGeom prst="rect">
-            <a:avLst/>
-          </a:prstGeom>
-        </p:spPr>
-        <p:txBody>
-          <a:bodyPr wrap="none">
-            <a:spAutoFit/>
-          </a:bodyPr>
-          <a:lstStyle/>
-          <a:p>
-            <a:r>
-              <a:rPr lang="ko-KR" altLang="en-US" sz="1000" dirty="0" err="1">
-                <a:solidFill>
-                  <a:schemeClr val="bg1">
-                    <a:lumMod val="75000"/>
-                  </a:schemeClr>
-                </a:solidFill>
-                <a:latin typeface="나눔바른고딕" panose="020B0603020101020101" pitchFamily="34" charset="-127"/>
-                <a:ea typeface="나눔바른고딕" panose="020B0603020101020101" pitchFamily="34" charset="-127"/>
-              </a:rPr>
-              <a:t>펄어비스</a:t>
-            </a:r>
-            <a:r>
-              <a:rPr lang="ko-KR" altLang="en-US" sz="1000" dirty="0">
-                <a:solidFill>
-                  <a:schemeClr val="bg1">
-                    <a:lumMod val="75000"/>
-                  </a:schemeClr>
-                </a:solidFill>
-                <a:latin typeface="나눔바른고딕" panose="020B0603020101020101" pitchFamily="34" charset="-127"/>
-                <a:ea typeface="나눔바른고딕" panose="020B0603020101020101" pitchFamily="34" charset="-127"/>
-              </a:rPr>
-              <a:t> </a:t>
-            </a:r>
-            <a:r>
-              <a:rPr lang="en-US" altLang="ko-KR" sz="1000" dirty="0">
-                <a:solidFill>
-                  <a:schemeClr val="bg1">
-                    <a:lumMod val="75000"/>
-                  </a:schemeClr>
-                </a:solidFill>
-                <a:latin typeface="나눔바른고딕" panose="020B0603020101020101" pitchFamily="34" charset="-127"/>
-                <a:ea typeface="나눔바른고딕" panose="020B0603020101020101" pitchFamily="34" charset="-127"/>
-              </a:rPr>
-              <a:t>2026 </a:t>
-            </a:r>
-            <a:r>
-              <a:rPr lang="ko-KR" altLang="en-US" sz="1000" dirty="0">
-                <a:solidFill>
-                  <a:schemeClr val="bg1">
-                    <a:lumMod val="75000"/>
-                  </a:schemeClr>
-                </a:solidFill>
-                <a:latin typeface="나눔바른고딕" panose="020B0603020101020101" pitchFamily="34" charset="-127"/>
-                <a:ea typeface="나눔바른고딕" panose="020B0603020101020101" pitchFamily="34" charset="-127"/>
-              </a:rPr>
-              <a:t>여름 </a:t>
-            </a:r>
-            <a:r>
-              <a:rPr lang="ko-KR" altLang="en-US" sz="1000" dirty="0" err="1">
-                <a:solidFill>
-                  <a:schemeClr val="bg1">
-                    <a:lumMod val="75000"/>
-                  </a:schemeClr>
-                </a:solidFill>
-                <a:latin typeface="나눔바른고딕" panose="020B0603020101020101" pitchFamily="34" charset="-127"/>
-                <a:ea typeface="나눔바른고딕" panose="020B0603020101020101" pitchFamily="34" charset="-127"/>
-              </a:rPr>
-              <a:t>인턴십</a:t>
-            </a:r>
-            <a:endParaRPr lang="ko-KR" altLang="en-US" sz="1000" dirty="0">
-              <a:solidFill>
-                <a:schemeClr val="bg1">
-                  <a:lumMod val="75000"/>
-                </a:schemeClr>
-              </a:solidFill>
-              <a:latin typeface="나눔바른고딕" panose="020B0603020101020101" pitchFamily="34" charset="-127"/>
-              <a:ea typeface="나눔바른고딕" panose="020B0603020101020101" pitchFamily="34" charset="-127"/>
-            </a:endParaRPr>
-          </a:p>
-        </p:txBody>
-      </p:sp>
-      <p:sp>
-        <p:nvSpPr>
-          <p:cNvPr id="13" name="TextBox 12">
-            <a:extLst>
-              <a:ext uri="{FF2B5EF4-FFF2-40B4-BE49-F238E27FC236}">
-                <a16:creationId xmlns:a16="http://schemas.microsoft.com/office/drawing/2014/main" id="{60689D22-0DA1-7A1E-CECB-EC31F0063E61}"/>
-              </a:ext>
-            </a:extLst>
-          </p:cNvPr>
-          <p:cNvSpPr txBox="1"/>
-          <p:nvPr/>
-        </p:nvSpPr>
-        <p:spPr>
-          <a:xfrm>
-            <a:off x="302449" y="1342316"/>
-            <a:ext cx="7464813" cy="276999"/>
-          </a:xfrm>
-          <a:prstGeom prst="rect">
-            <a:avLst/>
-          </a:prstGeom>
-          <a:noFill/>
-        </p:spPr>
-        <p:txBody>
-          <a:bodyPr wrap="square" rtlCol="0">
-            <a:spAutoFit/>
-          </a:bodyPr>
-          <a:lstStyle/>
-          <a:p>
-            <a:r>
-              <a:rPr lang="ko-KR" altLang="en-US" sz="1200" dirty="0">
-                <a:latin typeface="나눔바른고딕" panose="020B0603020101020101" pitchFamily="34" charset="-127"/>
-                <a:ea typeface="나눔바른고딕" panose="020B0603020101020101" pitchFamily="34" charset="-127"/>
-              </a:rPr>
-              <a:t>장애물에 돌출부 유형 추가</a:t>
-            </a:r>
-            <a:endParaRPr lang="en-US" altLang="ko-KR" sz="1200" dirty="0">
-              <a:latin typeface="나눔바른고딕" panose="020B0603020101020101" pitchFamily="34" charset="-127"/>
-              <a:ea typeface="나눔바른고딕" panose="020B0603020101020101" pitchFamily="34" charset="-127"/>
-            </a:endParaRPr>
-          </a:p>
-        </p:txBody>
-      </p:sp>
-      <p:sp>
-        <p:nvSpPr>
-          <p:cNvPr id="9" name="TextBox 8">
-            <a:extLst>
-              <a:ext uri="{FF2B5EF4-FFF2-40B4-BE49-F238E27FC236}">
-                <a16:creationId xmlns:a16="http://schemas.microsoft.com/office/drawing/2014/main" id="{982E8436-9881-CBB7-FD72-2A84E303A454}"/>
-              </a:ext>
-            </a:extLst>
-          </p:cNvPr>
-          <p:cNvSpPr txBox="1"/>
-          <p:nvPr/>
-        </p:nvSpPr>
-        <p:spPr>
-          <a:xfrm>
-            <a:off x="302449" y="1727036"/>
-            <a:ext cx="6520758" cy="1015663"/>
-          </a:xfrm>
-          <a:prstGeom prst="rect">
-            <a:avLst/>
-          </a:prstGeom>
-          <a:noFill/>
-        </p:spPr>
-        <p:txBody>
-          <a:bodyPr wrap="square">
-            <a:spAutoFit/>
-          </a:bodyPr>
-          <a:lstStyle/>
-          <a:p>
-            <a:r>
-              <a:rPr lang="ko-KR" altLang="en-US" sz="1200" dirty="0" err="1">
-                <a:latin typeface="나눔바른고딕" panose="020B0603020101020101" pitchFamily="34" charset="-127"/>
-                <a:ea typeface="나눔바른고딕" panose="020B0603020101020101" pitchFamily="34" charset="-127"/>
-              </a:rPr>
-              <a:t>파쿠르</a:t>
-            </a:r>
-            <a:r>
-              <a:rPr lang="ko-KR" altLang="en-US" sz="1200" dirty="0">
-                <a:latin typeface="나눔바른고딕" panose="020B0603020101020101" pitchFamily="34" charset="-127"/>
-                <a:ea typeface="나눔바른고딕" panose="020B0603020101020101" pitchFamily="34" charset="-127"/>
-              </a:rPr>
-              <a:t> 시</a:t>
-            </a:r>
-            <a:r>
-              <a:rPr lang="en-US" altLang="ko-KR" sz="1200" dirty="0">
-                <a:latin typeface="나눔바른고딕" panose="020B0603020101020101" pitchFamily="34" charset="-127"/>
-                <a:ea typeface="나눔바른고딕" panose="020B0603020101020101" pitchFamily="34" charset="-127"/>
-              </a:rPr>
-              <a:t>, </a:t>
-            </a:r>
-            <a:r>
-              <a:rPr lang="ko-KR" altLang="en-US" sz="1200" dirty="0">
-                <a:latin typeface="나눔바른고딕" panose="020B0603020101020101" pitchFamily="34" charset="-127"/>
-                <a:ea typeface="나눔바른고딕" panose="020B0603020101020101" pitchFamily="34" charset="-127"/>
-              </a:rPr>
-              <a:t>대체로 매끈한 면보다는 돌출된 부분을 이용</a:t>
-            </a:r>
-            <a:endParaRPr lang="en-US" altLang="ko-KR" sz="1200" dirty="0">
-              <a:latin typeface="나눔바른고딕" panose="020B0603020101020101" pitchFamily="34" charset="-127"/>
-              <a:ea typeface="나눔바른고딕" panose="020B0603020101020101" pitchFamily="34" charset="-127"/>
-            </a:endParaRPr>
-          </a:p>
-          <a:p>
-            <a:r>
-              <a:rPr lang="ko-KR" altLang="en-US" sz="1200" dirty="0">
-                <a:latin typeface="나눔바른고딕" panose="020B0603020101020101" pitchFamily="34" charset="-127"/>
-                <a:ea typeface="나눔바른고딕" panose="020B0603020101020101" pitchFamily="34" charset="-127"/>
-              </a:rPr>
-              <a:t>이 부분을 모사하고자 돌출부 유형을 추가</a:t>
-            </a:r>
-            <a:endParaRPr lang="en-US" altLang="ko-KR" sz="1200" dirty="0">
-              <a:latin typeface="나눔바른고딕" panose="020B0603020101020101" pitchFamily="34" charset="-127"/>
-              <a:ea typeface="나눔바른고딕" panose="020B0603020101020101" pitchFamily="34" charset="-127"/>
-            </a:endParaRPr>
-          </a:p>
-          <a:p>
-            <a:endParaRPr lang="en-US" altLang="ko-KR" sz="1200" dirty="0">
-              <a:latin typeface="나눔바른고딕" panose="020B0603020101020101" pitchFamily="34" charset="-127"/>
-              <a:ea typeface="나눔바른고딕" panose="020B0603020101020101" pitchFamily="34" charset="-127"/>
-            </a:endParaRPr>
-          </a:p>
-          <a:p>
-            <a:r>
-              <a:rPr lang="ko-KR" altLang="en-US" sz="1200" dirty="0">
-                <a:latin typeface="나눔바른고딕" panose="020B0603020101020101" pitchFamily="34" charset="-127"/>
-                <a:ea typeface="나눔바른고딕" panose="020B0603020101020101" pitchFamily="34" charset="-127"/>
-              </a:rPr>
-              <a:t>독립적으로 있진 않고</a:t>
-            </a:r>
-            <a:r>
-              <a:rPr lang="en-US" altLang="ko-KR" sz="1200" dirty="0">
-                <a:latin typeface="나눔바른고딕" panose="020B0603020101020101" pitchFamily="34" charset="-127"/>
-                <a:ea typeface="나눔바른고딕" panose="020B0603020101020101" pitchFamily="34" charset="-127"/>
-              </a:rPr>
-              <a:t>, </a:t>
-            </a:r>
-            <a:r>
-              <a:rPr lang="ko-KR" altLang="en-US" sz="1200" dirty="0">
-                <a:latin typeface="나눔바른고딕" panose="020B0603020101020101" pitchFamily="34" charset="-127"/>
-                <a:ea typeface="나눔바른고딕" panose="020B0603020101020101" pitchFamily="34" charset="-127"/>
-              </a:rPr>
-              <a:t>다른 장애물에 부속으로 추가된 형태</a:t>
-            </a:r>
-            <a:endParaRPr lang="en-US" altLang="ko-KR" sz="1200" dirty="0">
-              <a:latin typeface="나눔바른고딕" panose="020B0603020101020101" pitchFamily="34" charset="-127"/>
-              <a:ea typeface="나눔바른고딕" panose="020B0603020101020101" pitchFamily="34" charset="-127"/>
-            </a:endParaRPr>
-          </a:p>
-          <a:p>
-            <a:r>
-              <a:rPr lang="ko-KR" altLang="en-US" sz="1200" dirty="0">
-                <a:latin typeface="나눔바른고딕" panose="020B0603020101020101" pitchFamily="34" charset="-127"/>
-                <a:ea typeface="나눔바른고딕" panose="020B0603020101020101" pitchFamily="34" charset="-127"/>
-              </a:rPr>
-              <a:t>장애물 인식 시</a:t>
-            </a:r>
-            <a:r>
-              <a:rPr lang="en-US" altLang="ko-KR" sz="1200" dirty="0">
-                <a:latin typeface="나눔바른고딕" panose="020B0603020101020101" pitchFamily="34" charset="-127"/>
-                <a:ea typeface="나눔바른고딕" panose="020B0603020101020101" pitchFamily="34" charset="-127"/>
-              </a:rPr>
-              <a:t>, </a:t>
-            </a:r>
-            <a:r>
-              <a:rPr lang="ko-KR" altLang="en-US" sz="1200" dirty="0">
-                <a:latin typeface="나눔바른고딕" panose="020B0603020101020101" pitchFamily="34" charset="-127"/>
-                <a:ea typeface="나눔바른고딕" panose="020B0603020101020101" pitchFamily="34" charset="-127"/>
-              </a:rPr>
-              <a:t>우선해서 인식처리 </a:t>
-            </a:r>
-            <a:r>
-              <a:rPr lang="en-US" altLang="ko-KR" sz="1200" dirty="0">
-                <a:latin typeface="나눔바른고딕" panose="020B0603020101020101" pitchFamily="34" charset="-127"/>
-                <a:ea typeface="나눔바른고딕" panose="020B0603020101020101" pitchFamily="34" charset="-127"/>
-              </a:rPr>
-              <a:t>-&gt; </a:t>
-            </a:r>
-            <a:r>
-              <a:rPr lang="ko-KR" altLang="en-US" sz="1200" dirty="0">
-                <a:latin typeface="나눔바른고딕" panose="020B0603020101020101" pitchFamily="34" charset="-127"/>
-                <a:ea typeface="나눔바른고딕" panose="020B0603020101020101" pitchFamily="34" charset="-127"/>
-              </a:rPr>
-              <a:t>인식 과정에서 우선순위 적용</a:t>
-            </a:r>
-            <a:endParaRPr lang="en-US" altLang="ko-KR" sz="1200" dirty="0">
-              <a:latin typeface="나눔바른고딕" panose="020B0603020101020101" pitchFamily="34" charset="-127"/>
-              <a:ea typeface="나눔바른고딕" panose="020B0603020101020101" pitchFamily="34" charset="-127"/>
-            </a:endParaRPr>
-          </a:p>
-        </p:txBody>
-      </p:sp>
-      <p:sp>
-        <p:nvSpPr>
           <p:cNvPr id="4" name="직사각형 3">
             <a:extLst>
               <a:ext uri="{FF2B5EF4-FFF2-40B4-BE49-F238E27FC236}">
-                <a16:creationId xmlns:a16="http://schemas.microsoft.com/office/drawing/2014/main" id="{5CEF6D9A-E641-4C3C-D3A0-1AB138A6686E}"/>
+                <a16:creationId xmlns:a16="http://schemas.microsoft.com/office/drawing/2014/main" xmlns="" id="{5CEF6D9A-E641-4C3C-D3A0-1AB138A6686E}"/>
               </a:ext>
             </a:extLst>
           </p:cNvPr>
@@ -12674,7 +13360,7 @@
           <p:cNvPr id="11" name="직사각형 10">
             <a:extLst>
               <a:ext uri="{FF2B5EF4-FFF2-40B4-BE49-F238E27FC236}">
-                <a16:creationId xmlns:a16="http://schemas.microsoft.com/office/drawing/2014/main" id="{3753B949-0A30-2B30-B95A-A5D6F341C4BC}"/>
+                <a16:creationId xmlns:a16="http://schemas.microsoft.com/office/drawing/2014/main" xmlns="" id="{3753B949-0A30-2B30-B95A-A5D6F341C4BC}"/>
               </a:ext>
             </a:extLst>
           </p:cNvPr>

--- a/PPT/week6.pptx
+++ b/PPT/week6.pptx
@@ -12211,78 +12211,6 @@
           </a:p>
         </p:txBody>
       </p:sp>
-      <p:sp>
-        <p:nvSpPr>
-          <p:cNvPr id="4" name="사각형: 둥근 모서리 3">
-            <a:extLst>
-              <a:ext uri="{FF2B5EF4-FFF2-40B4-BE49-F238E27FC236}">
-                <a16:creationId xmlns:a16="http://schemas.microsoft.com/office/drawing/2014/main" xmlns="" id="{0740C2F9-7A33-5697-3852-4CC9C7440513}"/>
-              </a:ext>
-            </a:extLst>
-          </p:cNvPr>
-          <p:cNvSpPr/>
-          <p:nvPr/>
-        </p:nvSpPr>
-        <p:spPr>
-          <a:xfrm>
-            <a:off x="3486991" y="2209384"/>
-            <a:ext cx="4364578" cy="3306300"/>
-          </a:xfrm>
-          <a:prstGeom prst="roundRect">
-            <a:avLst>
-              <a:gd name="adj" fmla="val 0"/>
-            </a:avLst>
-          </a:prstGeom>
-        </p:spPr>
-        <p:style>
-          <a:lnRef idx="2">
-            <a:schemeClr val="accent1">
-              <a:shade val="15000"/>
-            </a:schemeClr>
-          </a:lnRef>
-          <a:fillRef idx="1">
-            <a:schemeClr val="accent1"/>
-          </a:fillRef>
-          <a:effectRef idx="0">
-            <a:schemeClr val="accent1"/>
-          </a:effectRef>
-          <a:fontRef idx="minor">
-            <a:schemeClr val="lt1"/>
-          </a:fontRef>
-        </p:style>
-        <p:txBody>
-          <a:bodyPr rtlCol="0" anchor="ctr"/>
-          <a:lstStyle/>
-          <a:p>
-            <a:pPr algn="ctr"/>
-            <a:r>
-              <a:rPr lang="ko-KR" altLang="en-US" dirty="0">
-                <a:latin typeface="나눔바른고딕" panose="020B0603020101020101" pitchFamily="34" charset="-127"/>
-                <a:ea typeface="나눔바른고딕" panose="020B0603020101020101" pitchFamily="34" charset="-127"/>
-              </a:rPr>
-              <a:t>데이터 연결과</a:t>
-            </a:r>
-            <a:endParaRPr lang="en-US" altLang="ko-KR" dirty="0">
-              <a:latin typeface="나눔바른고딕" panose="020B0603020101020101" pitchFamily="34" charset="-127"/>
-              <a:ea typeface="나눔바른고딕" panose="020B0603020101020101" pitchFamily="34" charset="-127"/>
-            </a:endParaRPr>
-          </a:p>
-          <a:p>
-            <a:pPr algn="ctr"/>
-            <a:r>
-              <a:rPr lang="ko-KR" altLang="en-US" dirty="0">
-                <a:latin typeface="나눔바른고딕" panose="020B0603020101020101" pitchFamily="34" charset="-127"/>
-                <a:ea typeface="나눔바른고딕" panose="020B0603020101020101" pitchFamily="34" charset="-127"/>
-              </a:rPr>
-              <a:t>처리 컴포넌트 흐름</a:t>
-            </a:r>
-            <a:endParaRPr lang="en-US" altLang="ko-KR" dirty="0">
-              <a:latin typeface="나눔바른고딕" panose="020B0603020101020101" pitchFamily="34" charset="-127"/>
-              <a:ea typeface="나눔바른고딕" panose="020B0603020101020101" pitchFamily="34" charset="-127"/>
-            </a:endParaRPr>
-          </a:p>
-        </p:txBody>
-      </p:sp>
     </p:spTree>
     <p:extLst>
       <p:ext uri="{BB962C8B-B14F-4D97-AF65-F5344CB8AC3E}">

--- a/PPT/week6.pptx
+++ b/PPT/week6.pptx
@@ -16,23 +16,23 @@
     <p:sldId id="282" r:id="rId7"/>
     <p:sldId id="284" r:id="rId8"/>
     <p:sldId id="279" r:id="rId9"/>
-    <p:sldId id="285" r:id="rId10"/>
-    <p:sldId id="286" r:id="rId11"/>
-    <p:sldId id="287" r:id="rId12"/>
-    <p:sldId id="288" r:id="rId13"/>
-    <p:sldId id="289" r:id="rId14"/>
+    <p:sldId id="286" r:id="rId10"/>
+    <p:sldId id="287" r:id="rId11"/>
+    <p:sldId id="288" r:id="rId12"/>
+    <p:sldId id="289" r:id="rId13"/>
+    <p:sldId id="291" r:id="rId14"/>
     <p:sldId id="265" r:id="rId15"/>
   </p:sldIdLst>
   <p:sldSz cx="12192000" cy="6858000"/>
   <p:notesSz cx="6858000" cy="9144000"/>
   <p:embeddedFontLst>
     <p:embeddedFont>
-      <p:font typeface="맑은 고딕" panose="020B0503020000020004" pitchFamily="34" charset="-127"/>
+      <p:font typeface="나눔바른고딕" panose="020B0603020101020101" pitchFamily="50" charset="-127"/>
       <p:regular r:id="rId17"/>
       <p:bold r:id="rId18"/>
     </p:embeddedFont>
     <p:embeddedFont>
-      <p:font typeface="나눔바른고딕" panose="020B0603020101020101" pitchFamily="34" charset="-127"/>
+      <p:font typeface="맑은 고딕" panose="020B0503020000020004" pitchFamily="50" charset="-127"/>
       <p:regular r:id="rId19"/>
       <p:bold r:id="rId20"/>
     </p:embeddedFont>
@@ -581,7 +581,7 @@
         <p:cNvPr id="1" name="">
           <a:extLst>
             <a:ext uri="{FF2B5EF4-FFF2-40B4-BE49-F238E27FC236}">
-              <a16:creationId xmlns:a16="http://schemas.microsoft.com/office/drawing/2014/main" xmlns="" id="{0350ECA6-11FC-1DB9-A06D-63BBB0A7C527}"/>
+              <a16:creationId xmlns:a16="http://schemas.microsoft.com/office/drawing/2014/main" id="{96DA3B39-8894-5F9A-934E-FCF5B21FE094}"/>
             </a:ext>
           </a:extLst>
         </p:cNvPr>
@@ -601,7 +601,7 @@
           <p:cNvPr id="2" name="슬라이드 이미지 개체 틀 1">
             <a:extLst>
               <a:ext uri="{FF2B5EF4-FFF2-40B4-BE49-F238E27FC236}">
-                <a16:creationId xmlns:a16="http://schemas.microsoft.com/office/drawing/2014/main" xmlns="" id="{5941A8E8-300D-2CD2-F859-3730FEB50C7F}"/>
+                <a16:creationId xmlns:a16="http://schemas.microsoft.com/office/drawing/2014/main" id="{B4F1F109-881F-1045-0558-BD4713E8A010}"/>
               </a:ext>
             </a:extLst>
           </p:cNvPr>
@@ -619,7 +619,7 @@
           <p:cNvPr id="3" name="슬라이드 노트 개체 틀 2">
             <a:extLst>
               <a:ext uri="{FF2B5EF4-FFF2-40B4-BE49-F238E27FC236}">
-                <a16:creationId xmlns:a16="http://schemas.microsoft.com/office/drawing/2014/main" xmlns="" id="{FDE2D11D-E2A8-65CA-3163-987BE0049037}"/>
+                <a16:creationId xmlns:a16="http://schemas.microsoft.com/office/drawing/2014/main" id="{50B3D547-C55C-7D84-2362-21E153F0B1F1}"/>
               </a:ext>
             </a:extLst>
           </p:cNvPr>
@@ -644,7 +644,7 @@
           <p:cNvPr id="4" name="슬라이드 번호 개체 틀 3">
             <a:extLst>
               <a:ext uri="{FF2B5EF4-FFF2-40B4-BE49-F238E27FC236}">
-                <a16:creationId xmlns:a16="http://schemas.microsoft.com/office/drawing/2014/main" xmlns="" id="{908F4815-000D-BD80-CD19-2FA5D55D5A3C}"/>
+                <a16:creationId xmlns:a16="http://schemas.microsoft.com/office/drawing/2014/main" id="{F25ED412-6A91-4910-2C5B-30D9A592C4D9}"/>
               </a:ext>
             </a:extLst>
           </p:cNvPr>
@@ -671,7 +671,7 @@
     </p:spTree>
     <p:extLst>
       <p:ext uri="{BB962C8B-B14F-4D97-AF65-F5344CB8AC3E}">
-        <p14:creationId xmlns:p14="http://schemas.microsoft.com/office/powerpoint/2010/main" val="1945320686"/>
+        <p14:creationId xmlns:p14="http://schemas.microsoft.com/office/powerpoint/2010/main" val="516652441"/>
       </p:ext>
     </p:extLst>
   </p:cSld>
@@ -689,7 +689,7 @@
         <p:cNvPr id="1" name="">
           <a:extLst>
             <a:ext uri="{FF2B5EF4-FFF2-40B4-BE49-F238E27FC236}">
-              <a16:creationId xmlns:a16="http://schemas.microsoft.com/office/drawing/2014/main" xmlns="" id="{96DA3B39-8894-5F9A-934E-FCF5B21FE094}"/>
+              <a16:creationId xmlns:a16="http://schemas.microsoft.com/office/drawing/2014/main" id="{50DC35D4-0EB2-D96E-FEC2-15DE35D2997C}"/>
             </a:ext>
           </a:extLst>
         </p:cNvPr>
@@ -709,7 +709,7 @@
           <p:cNvPr id="2" name="슬라이드 이미지 개체 틀 1">
             <a:extLst>
               <a:ext uri="{FF2B5EF4-FFF2-40B4-BE49-F238E27FC236}">
-                <a16:creationId xmlns:a16="http://schemas.microsoft.com/office/drawing/2014/main" xmlns="" id="{B4F1F109-881F-1045-0558-BD4713E8A010}"/>
+                <a16:creationId xmlns:a16="http://schemas.microsoft.com/office/drawing/2014/main" id="{99637B56-09F8-D88B-57B1-AA984EE2B7FD}"/>
               </a:ext>
             </a:extLst>
           </p:cNvPr>
@@ -727,7 +727,7 @@
           <p:cNvPr id="3" name="슬라이드 노트 개체 틀 2">
             <a:extLst>
               <a:ext uri="{FF2B5EF4-FFF2-40B4-BE49-F238E27FC236}">
-                <a16:creationId xmlns:a16="http://schemas.microsoft.com/office/drawing/2014/main" xmlns="" id="{50B3D547-C55C-7D84-2362-21E153F0B1F1}"/>
+                <a16:creationId xmlns:a16="http://schemas.microsoft.com/office/drawing/2014/main" id="{B385C1FD-EB20-045C-494E-90A4493EC558}"/>
               </a:ext>
             </a:extLst>
           </p:cNvPr>
@@ -752,7 +752,7 @@
           <p:cNvPr id="4" name="슬라이드 번호 개체 틀 3">
             <a:extLst>
               <a:ext uri="{FF2B5EF4-FFF2-40B4-BE49-F238E27FC236}">
-                <a16:creationId xmlns:a16="http://schemas.microsoft.com/office/drawing/2014/main" xmlns="" id="{F25ED412-6A91-4910-2C5B-30D9A592C4D9}"/>
+                <a16:creationId xmlns:a16="http://schemas.microsoft.com/office/drawing/2014/main" id="{356638F2-87D8-5072-51A8-E438416CD848}"/>
               </a:ext>
             </a:extLst>
           </p:cNvPr>
@@ -779,7 +779,7 @@
     </p:spTree>
     <p:extLst>
       <p:ext uri="{BB962C8B-B14F-4D97-AF65-F5344CB8AC3E}">
-        <p14:creationId xmlns:p14="http://schemas.microsoft.com/office/powerpoint/2010/main" val="516652441"/>
+        <p14:creationId xmlns:p14="http://schemas.microsoft.com/office/powerpoint/2010/main" val="3217989971"/>
       </p:ext>
     </p:extLst>
   </p:cSld>
@@ -797,7 +797,7 @@
         <p:cNvPr id="1" name="">
           <a:extLst>
             <a:ext uri="{FF2B5EF4-FFF2-40B4-BE49-F238E27FC236}">
-              <a16:creationId xmlns:a16="http://schemas.microsoft.com/office/drawing/2014/main" xmlns="" id="{50DC35D4-0EB2-D96E-FEC2-15DE35D2997C}"/>
+              <a16:creationId xmlns:a16="http://schemas.microsoft.com/office/drawing/2014/main" id="{49FA5D9E-EBF8-7EDE-6DBD-410656757188}"/>
             </a:ext>
           </a:extLst>
         </p:cNvPr>
@@ -817,7 +817,7 @@
           <p:cNvPr id="2" name="슬라이드 이미지 개체 틀 1">
             <a:extLst>
               <a:ext uri="{FF2B5EF4-FFF2-40B4-BE49-F238E27FC236}">
-                <a16:creationId xmlns:a16="http://schemas.microsoft.com/office/drawing/2014/main" xmlns="" id="{99637B56-09F8-D88B-57B1-AA984EE2B7FD}"/>
+                <a16:creationId xmlns:a16="http://schemas.microsoft.com/office/drawing/2014/main" id="{2AD97346-6882-4C4C-3437-6691BE651A11}"/>
               </a:ext>
             </a:extLst>
           </p:cNvPr>
@@ -835,7 +835,7 @@
           <p:cNvPr id="3" name="슬라이드 노트 개체 틀 2">
             <a:extLst>
               <a:ext uri="{FF2B5EF4-FFF2-40B4-BE49-F238E27FC236}">
-                <a16:creationId xmlns:a16="http://schemas.microsoft.com/office/drawing/2014/main" xmlns="" id="{B385C1FD-EB20-045C-494E-90A4493EC558}"/>
+                <a16:creationId xmlns:a16="http://schemas.microsoft.com/office/drawing/2014/main" id="{450B543C-D5ED-4598-665B-0CA9AED8B008}"/>
               </a:ext>
             </a:extLst>
           </p:cNvPr>
@@ -860,7 +860,7 @@
           <p:cNvPr id="4" name="슬라이드 번호 개체 틀 3">
             <a:extLst>
               <a:ext uri="{FF2B5EF4-FFF2-40B4-BE49-F238E27FC236}">
-                <a16:creationId xmlns:a16="http://schemas.microsoft.com/office/drawing/2014/main" xmlns="" id="{356638F2-87D8-5072-51A8-E438416CD848}"/>
+                <a16:creationId xmlns:a16="http://schemas.microsoft.com/office/drawing/2014/main" id="{A7F41674-6522-414D-3636-8C77D0DE0898}"/>
               </a:ext>
             </a:extLst>
           </p:cNvPr>
@@ -887,7 +887,7 @@
     </p:spTree>
     <p:extLst>
       <p:ext uri="{BB962C8B-B14F-4D97-AF65-F5344CB8AC3E}">
-        <p14:creationId xmlns:p14="http://schemas.microsoft.com/office/powerpoint/2010/main" val="3217989971"/>
+        <p14:creationId xmlns:p14="http://schemas.microsoft.com/office/powerpoint/2010/main" val="918353510"/>
       </p:ext>
     </p:extLst>
   </p:cSld>
@@ -1082,7 +1082,7 @@
         <p:cNvPr id="1" name="">
           <a:extLst>
             <a:ext uri="{FF2B5EF4-FFF2-40B4-BE49-F238E27FC236}">
-              <a16:creationId xmlns:a16="http://schemas.microsoft.com/office/drawing/2014/main" xmlns="" id="{6FA38960-BC67-841A-1008-8ED7410D5C24}"/>
+              <a16:creationId xmlns:a16="http://schemas.microsoft.com/office/drawing/2014/main" id="{6FA38960-BC67-841A-1008-8ED7410D5C24}"/>
             </a:ext>
           </a:extLst>
         </p:cNvPr>
@@ -1102,7 +1102,7 @@
           <p:cNvPr id="2" name="슬라이드 이미지 개체 틀 1">
             <a:extLst>
               <a:ext uri="{FF2B5EF4-FFF2-40B4-BE49-F238E27FC236}">
-                <a16:creationId xmlns:a16="http://schemas.microsoft.com/office/drawing/2014/main" xmlns="" id="{E2A2A7C5-4DBD-6DA0-D4C4-9F158145444E}"/>
+                <a16:creationId xmlns:a16="http://schemas.microsoft.com/office/drawing/2014/main" id="{E2A2A7C5-4DBD-6DA0-D4C4-9F158145444E}"/>
               </a:ext>
             </a:extLst>
           </p:cNvPr>
@@ -1120,7 +1120,7 @@
           <p:cNvPr id="3" name="슬라이드 노트 개체 틀 2">
             <a:extLst>
               <a:ext uri="{FF2B5EF4-FFF2-40B4-BE49-F238E27FC236}">
-                <a16:creationId xmlns:a16="http://schemas.microsoft.com/office/drawing/2014/main" xmlns="" id="{CFDC0F1D-EE0C-3681-61B0-1DEA4C2B6566}"/>
+                <a16:creationId xmlns:a16="http://schemas.microsoft.com/office/drawing/2014/main" id="{CFDC0F1D-EE0C-3681-61B0-1DEA4C2B6566}"/>
               </a:ext>
             </a:extLst>
           </p:cNvPr>
@@ -1145,7 +1145,7 @@
           <p:cNvPr id="4" name="슬라이드 번호 개체 틀 3">
             <a:extLst>
               <a:ext uri="{FF2B5EF4-FFF2-40B4-BE49-F238E27FC236}">
-                <a16:creationId xmlns:a16="http://schemas.microsoft.com/office/drawing/2014/main" xmlns="" id="{A52BD183-004B-E054-798A-87423BE18FA6}"/>
+                <a16:creationId xmlns:a16="http://schemas.microsoft.com/office/drawing/2014/main" id="{A52BD183-004B-E054-798A-87423BE18FA6}"/>
               </a:ext>
             </a:extLst>
           </p:cNvPr>
@@ -1190,7 +1190,7 @@
         <p:cNvPr id="1" name="">
           <a:extLst>
             <a:ext uri="{FF2B5EF4-FFF2-40B4-BE49-F238E27FC236}">
-              <a16:creationId xmlns:a16="http://schemas.microsoft.com/office/drawing/2014/main" xmlns="" id="{6FA38960-BC67-841A-1008-8ED7410D5C24}"/>
+              <a16:creationId xmlns:a16="http://schemas.microsoft.com/office/drawing/2014/main" id="{6FA38960-BC67-841A-1008-8ED7410D5C24}"/>
             </a:ext>
           </a:extLst>
         </p:cNvPr>
@@ -1210,7 +1210,7 @@
           <p:cNvPr id="2" name="슬라이드 이미지 개체 틀 1">
             <a:extLst>
               <a:ext uri="{FF2B5EF4-FFF2-40B4-BE49-F238E27FC236}">
-                <a16:creationId xmlns:a16="http://schemas.microsoft.com/office/drawing/2014/main" xmlns="" id="{E2A2A7C5-4DBD-6DA0-D4C4-9F158145444E}"/>
+                <a16:creationId xmlns:a16="http://schemas.microsoft.com/office/drawing/2014/main" id="{E2A2A7C5-4DBD-6DA0-D4C4-9F158145444E}"/>
               </a:ext>
             </a:extLst>
           </p:cNvPr>
@@ -1228,7 +1228,7 @@
           <p:cNvPr id="3" name="슬라이드 노트 개체 틀 2">
             <a:extLst>
               <a:ext uri="{FF2B5EF4-FFF2-40B4-BE49-F238E27FC236}">
-                <a16:creationId xmlns:a16="http://schemas.microsoft.com/office/drawing/2014/main" xmlns="" id="{CFDC0F1D-EE0C-3681-61B0-1DEA4C2B6566}"/>
+                <a16:creationId xmlns:a16="http://schemas.microsoft.com/office/drawing/2014/main" id="{CFDC0F1D-EE0C-3681-61B0-1DEA4C2B6566}"/>
               </a:ext>
             </a:extLst>
           </p:cNvPr>
@@ -1253,7 +1253,7 @@
           <p:cNvPr id="4" name="슬라이드 번호 개체 틀 3">
             <a:extLst>
               <a:ext uri="{FF2B5EF4-FFF2-40B4-BE49-F238E27FC236}">
-                <a16:creationId xmlns:a16="http://schemas.microsoft.com/office/drawing/2014/main" xmlns="" id="{A52BD183-004B-E054-798A-87423BE18FA6}"/>
+                <a16:creationId xmlns:a16="http://schemas.microsoft.com/office/drawing/2014/main" id="{A52BD183-004B-E054-798A-87423BE18FA6}"/>
               </a:ext>
             </a:extLst>
           </p:cNvPr>
@@ -1298,7 +1298,7 @@
         <p:cNvPr id="1" name="">
           <a:extLst>
             <a:ext uri="{FF2B5EF4-FFF2-40B4-BE49-F238E27FC236}">
-              <a16:creationId xmlns:a16="http://schemas.microsoft.com/office/drawing/2014/main" xmlns="" id="{CDA8A9F5-7FAD-EA63-4B9A-5846B7E22875}"/>
+              <a16:creationId xmlns:a16="http://schemas.microsoft.com/office/drawing/2014/main" id="{CDA8A9F5-7FAD-EA63-4B9A-5846B7E22875}"/>
             </a:ext>
           </a:extLst>
         </p:cNvPr>
@@ -1318,7 +1318,7 @@
           <p:cNvPr id="2" name="슬라이드 이미지 개체 틀 1">
             <a:extLst>
               <a:ext uri="{FF2B5EF4-FFF2-40B4-BE49-F238E27FC236}">
-                <a16:creationId xmlns:a16="http://schemas.microsoft.com/office/drawing/2014/main" xmlns="" id="{E202E732-321E-64DE-26A7-11C0FFAC9731}"/>
+                <a16:creationId xmlns:a16="http://schemas.microsoft.com/office/drawing/2014/main" id="{E202E732-321E-64DE-26A7-11C0FFAC9731}"/>
               </a:ext>
             </a:extLst>
           </p:cNvPr>
@@ -1336,7 +1336,7 @@
           <p:cNvPr id="3" name="슬라이드 노트 개체 틀 2">
             <a:extLst>
               <a:ext uri="{FF2B5EF4-FFF2-40B4-BE49-F238E27FC236}">
-                <a16:creationId xmlns:a16="http://schemas.microsoft.com/office/drawing/2014/main" xmlns="" id="{0414D46E-19A2-3FE0-BD28-64F8E1AA2D44}"/>
+                <a16:creationId xmlns:a16="http://schemas.microsoft.com/office/drawing/2014/main" id="{0414D46E-19A2-3FE0-BD28-64F8E1AA2D44}"/>
               </a:ext>
             </a:extLst>
           </p:cNvPr>
@@ -1361,7 +1361,7 @@
           <p:cNvPr id="4" name="슬라이드 번호 개체 틀 3">
             <a:extLst>
               <a:ext uri="{FF2B5EF4-FFF2-40B4-BE49-F238E27FC236}">
-                <a16:creationId xmlns:a16="http://schemas.microsoft.com/office/drawing/2014/main" xmlns="" id="{DEE4F259-EAD0-3E0A-4FEE-20170219770C}"/>
+                <a16:creationId xmlns:a16="http://schemas.microsoft.com/office/drawing/2014/main" id="{DEE4F259-EAD0-3E0A-4FEE-20170219770C}"/>
               </a:ext>
             </a:extLst>
           </p:cNvPr>
@@ -1406,7 +1406,7 @@
         <p:cNvPr id="1" name="">
           <a:extLst>
             <a:ext uri="{FF2B5EF4-FFF2-40B4-BE49-F238E27FC236}">
-              <a16:creationId xmlns:a16="http://schemas.microsoft.com/office/drawing/2014/main" xmlns="" id="{2AEF1E15-50B0-7CD5-5CD9-AF14260601F9}"/>
+              <a16:creationId xmlns:a16="http://schemas.microsoft.com/office/drawing/2014/main" id="{2AEF1E15-50B0-7CD5-5CD9-AF14260601F9}"/>
             </a:ext>
           </a:extLst>
         </p:cNvPr>
@@ -1426,7 +1426,7 @@
           <p:cNvPr id="2" name="슬라이드 이미지 개체 틀 1">
             <a:extLst>
               <a:ext uri="{FF2B5EF4-FFF2-40B4-BE49-F238E27FC236}">
-                <a16:creationId xmlns:a16="http://schemas.microsoft.com/office/drawing/2014/main" xmlns="" id="{2C5E0A1A-0F25-DCCA-903B-AF336B347216}"/>
+                <a16:creationId xmlns:a16="http://schemas.microsoft.com/office/drawing/2014/main" id="{2C5E0A1A-0F25-DCCA-903B-AF336B347216}"/>
               </a:ext>
             </a:extLst>
           </p:cNvPr>
@@ -1444,7 +1444,7 @@
           <p:cNvPr id="3" name="슬라이드 노트 개체 틀 2">
             <a:extLst>
               <a:ext uri="{FF2B5EF4-FFF2-40B4-BE49-F238E27FC236}">
-                <a16:creationId xmlns:a16="http://schemas.microsoft.com/office/drawing/2014/main" xmlns="" id="{378C4E44-1823-534F-C317-628BA12DF2CE}"/>
+                <a16:creationId xmlns:a16="http://schemas.microsoft.com/office/drawing/2014/main" id="{378C4E44-1823-534F-C317-628BA12DF2CE}"/>
               </a:ext>
             </a:extLst>
           </p:cNvPr>
@@ -1469,7 +1469,7 @@
           <p:cNvPr id="4" name="슬라이드 번호 개체 틀 3">
             <a:extLst>
               <a:ext uri="{FF2B5EF4-FFF2-40B4-BE49-F238E27FC236}">
-                <a16:creationId xmlns:a16="http://schemas.microsoft.com/office/drawing/2014/main" xmlns="" id="{DD898966-BE35-B09B-403B-482EAD85F6D8}"/>
+                <a16:creationId xmlns:a16="http://schemas.microsoft.com/office/drawing/2014/main" id="{DD898966-BE35-B09B-403B-482EAD85F6D8}"/>
               </a:ext>
             </a:extLst>
           </p:cNvPr>
@@ -1514,7 +1514,7 @@
         <p:cNvPr id="1" name="">
           <a:extLst>
             <a:ext uri="{FF2B5EF4-FFF2-40B4-BE49-F238E27FC236}">
-              <a16:creationId xmlns:a16="http://schemas.microsoft.com/office/drawing/2014/main" xmlns="" id="{E7C90BDA-805E-3810-7AC0-6461A3B05D9D}"/>
+              <a16:creationId xmlns:a16="http://schemas.microsoft.com/office/drawing/2014/main" id="{E7C90BDA-805E-3810-7AC0-6461A3B05D9D}"/>
             </a:ext>
           </a:extLst>
         </p:cNvPr>
@@ -1534,7 +1534,7 @@
           <p:cNvPr id="2" name="슬라이드 이미지 개체 틀 1">
             <a:extLst>
               <a:ext uri="{FF2B5EF4-FFF2-40B4-BE49-F238E27FC236}">
-                <a16:creationId xmlns:a16="http://schemas.microsoft.com/office/drawing/2014/main" xmlns="" id="{1E6C3313-1968-467F-E98C-5C86AAD5D8DE}"/>
+                <a16:creationId xmlns:a16="http://schemas.microsoft.com/office/drawing/2014/main" id="{1E6C3313-1968-467F-E98C-5C86AAD5D8DE}"/>
               </a:ext>
             </a:extLst>
           </p:cNvPr>
@@ -1552,7 +1552,7 @@
           <p:cNvPr id="3" name="슬라이드 노트 개체 틀 2">
             <a:extLst>
               <a:ext uri="{FF2B5EF4-FFF2-40B4-BE49-F238E27FC236}">
-                <a16:creationId xmlns:a16="http://schemas.microsoft.com/office/drawing/2014/main" xmlns="" id="{06C7B1B1-2165-67D8-CD12-9DB8174DA0EE}"/>
+                <a16:creationId xmlns:a16="http://schemas.microsoft.com/office/drawing/2014/main" id="{06C7B1B1-2165-67D8-CD12-9DB8174DA0EE}"/>
               </a:ext>
             </a:extLst>
           </p:cNvPr>
@@ -1577,7 +1577,7 @@
           <p:cNvPr id="4" name="슬라이드 번호 개체 틀 3">
             <a:extLst>
               <a:ext uri="{FF2B5EF4-FFF2-40B4-BE49-F238E27FC236}">
-                <a16:creationId xmlns:a16="http://schemas.microsoft.com/office/drawing/2014/main" xmlns="" id="{E0E81CD0-9089-C7DA-75CD-CA965606E2DA}"/>
+                <a16:creationId xmlns:a16="http://schemas.microsoft.com/office/drawing/2014/main" id="{E0E81CD0-9089-C7DA-75CD-CA965606E2DA}"/>
               </a:ext>
             </a:extLst>
           </p:cNvPr>
@@ -1622,7 +1622,7 @@
         <p:cNvPr id="1" name="">
           <a:extLst>
             <a:ext uri="{FF2B5EF4-FFF2-40B4-BE49-F238E27FC236}">
-              <a16:creationId xmlns:a16="http://schemas.microsoft.com/office/drawing/2014/main" xmlns="" id="{B96581C7-E434-47DB-6ACF-69FCF793A96B}"/>
+              <a16:creationId xmlns:a16="http://schemas.microsoft.com/office/drawing/2014/main" id="{B96581C7-E434-47DB-6ACF-69FCF793A96B}"/>
             </a:ext>
           </a:extLst>
         </p:cNvPr>
@@ -1642,7 +1642,7 @@
           <p:cNvPr id="2" name="슬라이드 이미지 개체 틀 1">
             <a:extLst>
               <a:ext uri="{FF2B5EF4-FFF2-40B4-BE49-F238E27FC236}">
-                <a16:creationId xmlns:a16="http://schemas.microsoft.com/office/drawing/2014/main" xmlns="" id="{ADD29801-CBD4-2FA8-2EA2-88B9857B6C3D}"/>
+                <a16:creationId xmlns:a16="http://schemas.microsoft.com/office/drawing/2014/main" id="{ADD29801-CBD4-2FA8-2EA2-88B9857B6C3D}"/>
               </a:ext>
             </a:extLst>
           </p:cNvPr>
@@ -1660,7 +1660,7 @@
           <p:cNvPr id="3" name="슬라이드 노트 개체 틀 2">
             <a:extLst>
               <a:ext uri="{FF2B5EF4-FFF2-40B4-BE49-F238E27FC236}">
-                <a16:creationId xmlns:a16="http://schemas.microsoft.com/office/drawing/2014/main" xmlns="" id="{305474EC-565F-6D80-B904-9D4B868429EA}"/>
+                <a16:creationId xmlns:a16="http://schemas.microsoft.com/office/drawing/2014/main" id="{305474EC-565F-6D80-B904-9D4B868429EA}"/>
               </a:ext>
             </a:extLst>
           </p:cNvPr>
@@ -1685,7 +1685,7 @@
           <p:cNvPr id="4" name="슬라이드 번호 개체 틀 3">
             <a:extLst>
               <a:ext uri="{FF2B5EF4-FFF2-40B4-BE49-F238E27FC236}">
-                <a16:creationId xmlns:a16="http://schemas.microsoft.com/office/drawing/2014/main" xmlns="" id="{6D2390A5-EAE6-1386-7936-D6AF28666EB2}"/>
+                <a16:creationId xmlns:a16="http://schemas.microsoft.com/office/drawing/2014/main" id="{6D2390A5-EAE6-1386-7936-D6AF28666EB2}"/>
               </a:ext>
             </a:extLst>
           </p:cNvPr>
@@ -1730,7 +1730,7 @@
         <p:cNvPr id="1" name="">
           <a:extLst>
             <a:ext uri="{FF2B5EF4-FFF2-40B4-BE49-F238E27FC236}">
-              <a16:creationId xmlns:a16="http://schemas.microsoft.com/office/drawing/2014/main" xmlns="" id="{34E1B068-BCF9-DF67-6E29-01EF82BB4015}"/>
+              <a16:creationId xmlns:a16="http://schemas.microsoft.com/office/drawing/2014/main" id="{B1BDADBC-6CCF-EA69-5FBA-13CF2A01CFCE}"/>
             </a:ext>
           </a:extLst>
         </p:cNvPr>
@@ -1750,7 +1750,7 @@
           <p:cNvPr id="2" name="슬라이드 이미지 개체 틀 1">
             <a:extLst>
               <a:ext uri="{FF2B5EF4-FFF2-40B4-BE49-F238E27FC236}">
-                <a16:creationId xmlns:a16="http://schemas.microsoft.com/office/drawing/2014/main" xmlns="" id="{925E688F-A200-C65E-6A69-AFC1F3DB5EE0}"/>
+                <a16:creationId xmlns:a16="http://schemas.microsoft.com/office/drawing/2014/main" id="{72BCCC5F-F401-9A94-2426-2B481E6D9B74}"/>
               </a:ext>
             </a:extLst>
           </p:cNvPr>
@@ -1768,7 +1768,7 @@
           <p:cNvPr id="3" name="슬라이드 노트 개체 틀 2">
             <a:extLst>
               <a:ext uri="{FF2B5EF4-FFF2-40B4-BE49-F238E27FC236}">
-                <a16:creationId xmlns:a16="http://schemas.microsoft.com/office/drawing/2014/main" xmlns="" id="{B0141520-229E-D6BA-1D69-806FABD37E88}"/>
+                <a16:creationId xmlns:a16="http://schemas.microsoft.com/office/drawing/2014/main" id="{D147BFC0-7061-2FD7-CC0E-5E10DDF4D5F9}"/>
               </a:ext>
             </a:extLst>
           </p:cNvPr>
@@ -1793,7 +1793,7 @@
           <p:cNvPr id="4" name="슬라이드 번호 개체 틀 3">
             <a:extLst>
               <a:ext uri="{FF2B5EF4-FFF2-40B4-BE49-F238E27FC236}">
-                <a16:creationId xmlns:a16="http://schemas.microsoft.com/office/drawing/2014/main" xmlns="" id="{CD6B0D90-DC5B-3AE6-13C9-4AD3D2986211}"/>
+                <a16:creationId xmlns:a16="http://schemas.microsoft.com/office/drawing/2014/main" id="{6F8764C0-AB41-E0B8-5881-76F2E6C708E1}"/>
               </a:ext>
             </a:extLst>
           </p:cNvPr>
@@ -1820,7 +1820,7 @@
     </p:spTree>
     <p:extLst>
       <p:ext uri="{BB962C8B-B14F-4D97-AF65-F5344CB8AC3E}">
-        <p14:creationId xmlns:p14="http://schemas.microsoft.com/office/powerpoint/2010/main" val="3220186758"/>
+        <p14:creationId xmlns:p14="http://schemas.microsoft.com/office/powerpoint/2010/main" val="1367799058"/>
       </p:ext>
     </p:extLst>
   </p:cSld>
@@ -1838,7 +1838,7 @@
         <p:cNvPr id="1" name="">
           <a:extLst>
             <a:ext uri="{FF2B5EF4-FFF2-40B4-BE49-F238E27FC236}">
-              <a16:creationId xmlns:a16="http://schemas.microsoft.com/office/drawing/2014/main" xmlns="" id="{B1BDADBC-6CCF-EA69-5FBA-13CF2A01CFCE}"/>
+              <a16:creationId xmlns:a16="http://schemas.microsoft.com/office/drawing/2014/main" id="{0350ECA6-11FC-1DB9-A06D-63BBB0A7C527}"/>
             </a:ext>
           </a:extLst>
         </p:cNvPr>
@@ -1858,7 +1858,7 @@
           <p:cNvPr id="2" name="슬라이드 이미지 개체 틀 1">
             <a:extLst>
               <a:ext uri="{FF2B5EF4-FFF2-40B4-BE49-F238E27FC236}">
-                <a16:creationId xmlns:a16="http://schemas.microsoft.com/office/drawing/2014/main" xmlns="" id="{72BCCC5F-F401-9A94-2426-2B481E6D9B74}"/>
+                <a16:creationId xmlns:a16="http://schemas.microsoft.com/office/drawing/2014/main" id="{5941A8E8-300D-2CD2-F859-3730FEB50C7F}"/>
               </a:ext>
             </a:extLst>
           </p:cNvPr>
@@ -1876,7 +1876,7 @@
           <p:cNvPr id="3" name="슬라이드 노트 개체 틀 2">
             <a:extLst>
               <a:ext uri="{FF2B5EF4-FFF2-40B4-BE49-F238E27FC236}">
-                <a16:creationId xmlns:a16="http://schemas.microsoft.com/office/drawing/2014/main" xmlns="" id="{D147BFC0-7061-2FD7-CC0E-5E10DDF4D5F9}"/>
+                <a16:creationId xmlns:a16="http://schemas.microsoft.com/office/drawing/2014/main" id="{FDE2D11D-E2A8-65CA-3163-987BE0049037}"/>
               </a:ext>
             </a:extLst>
           </p:cNvPr>
@@ -1901,7 +1901,7 @@
           <p:cNvPr id="4" name="슬라이드 번호 개체 틀 3">
             <a:extLst>
               <a:ext uri="{FF2B5EF4-FFF2-40B4-BE49-F238E27FC236}">
-                <a16:creationId xmlns:a16="http://schemas.microsoft.com/office/drawing/2014/main" xmlns="" id="{6F8764C0-AB41-E0B8-5881-76F2E6C708E1}"/>
+                <a16:creationId xmlns:a16="http://schemas.microsoft.com/office/drawing/2014/main" id="{908F4815-000D-BD80-CD19-2FA5D55D5A3C}"/>
               </a:ext>
             </a:extLst>
           </p:cNvPr>
@@ -1928,7 +1928,7 @@
     </p:spTree>
     <p:extLst>
       <p:ext uri="{BB962C8B-B14F-4D97-AF65-F5344CB8AC3E}">
-        <p14:creationId xmlns:p14="http://schemas.microsoft.com/office/powerpoint/2010/main" val="1367799058"/>
+        <p14:creationId xmlns:p14="http://schemas.microsoft.com/office/powerpoint/2010/main" val="1945320686"/>
       </p:ext>
     </p:extLst>
   </p:cSld>
@@ -1960,7 +1960,7 @@
           <p:cNvPr id="2" name="제목 1">
             <a:extLst>
               <a:ext uri="{FF2B5EF4-FFF2-40B4-BE49-F238E27FC236}">
-                <a16:creationId xmlns:a16="http://schemas.microsoft.com/office/drawing/2014/main" xmlns="" id="{47C6A88D-EDAF-CEC2-712F-FA6A7E4FF53C}"/>
+                <a16:creationId xmlns:a16="http://schemas.microsoft.com/office/drawing/2014/main" id="{47C6A88D-EDAF-CEC2-712F-FA6A7E4FF53C}"/>
               </a:ext>
             </a:extLst>
           </p:cNvPr>
@@ -1997,7 +1997,7 @@
           <p:cNvPr id="3" name="부제목 2">
             <a:extLst>
               <a:ext uri="{FF2B5EF4-FFF2-40B4-BE49-F238E27FC236}">
-                <a16:creationId xmlns:a16="http://schemas.microsoft.com/office/drawing/2014/main" xmlns="" id="{1F7A10E8-4E5D-A611-E577-EBA5676A507E}"/>
+                <a16:creationId xmlns:a16="http://schemas.microsoft.com/office/drawing/2014/main" id="{1F7A10E8-4E5D-A611-E577-EBA5676A507E}"/>
               </a:ext>
             </a:extLst>
           </p:cNvPr>
@@ -2067,7 +2067,7 @@
           <p:cNvPr id="4" name="날짜 개체 틀 3">
             <a:extLst>
               <a:ext uri="{FF2B5EF4-FFF2-40B4-BE49-F238E27FC236}">
-                <a16:creationId xmlns:a16="http://schemas.microsoft.com/office/drawing/2014/main" xmlns="" id="{FA4EF1CD-FA03-944B-0EC0-2AABE3B0C471}"/>
+                <a16:creationId xmlns:a16="http://schemas.microsoft.com/office/drawing/2014/main" id="{FA4EF1CD-FA03-944B-0EC0-2AABE3B0C471}"/>
               </a:ext>
             </a:extLst>
           </p:cNvPr>
@@ -2096,7 +2096,7 @@
           <p:cNvPr id="5" name="바닥글 개체 틀 4">
             <a:extLst>
               <a:ext uri="{FF2B5EF4-FFF2-40B4-BE49-F238E27FC236}">
-                <a16:creationId xmlns:a16="http://schemas.microsoft.com/office/drawing/2014/main" xmlns="" id="{D7E1904F-F41F-7809-481D-7E79FCD2132E}"/>
+                <a16:creationId xmlns:a16="http://schemas.microsoft.com/office/drawing/2014/main" id="{D7E1904F-F41F-7809-481D-7E79FCD2132E}"/>
               </a:ext>
             </a:extLst>
           </p:cNvPr>
@@ -2121,7 +2121,7 @@
           <p:cNvPr id="6" name="슬라이드 번호 개체 틀 5">
             <a:extLst>
               <a:ext uri="{FF2B5EF4-FFF2-40B4-BE49-F238E27FC236}">
-                <a16:creationId xmlns:a16="http://schemas.microsoft.com/office/drawing/2014/main" xmlns="" id="{46C721DE-9DEE-BACB-B354-8E260F43215D}"/>
+                <a16:creationId xmlns:a16="http://schemas.microsoft.com/office/drawing/2014/main" id="{46C721DE-9DEE-BACB-B354-8E260F43215D}"/>
               </a:ext>
             </a:extLst>
           </p:cNvPr>
@@ -2180,7 +2180,7 @@
           <p:cNvPr id="2" name="제목 1">
             <a:extLst>
               <a:ext uri="{FF2B5EF4-FFF2-40B4-BE49-F238E27FC236}">
-                <a16:creationId xmlns:a16="http://schemas.microsoft.com/office/drawing/2014/main" xmlns="" id="{8EC6E50E-2954-B290-1563-C4936B9E8431}"/>
+                <a16:creationId xmlns:a16="http://schemas.microsoft.com/office/drawing/2014/main" id="{8EC6E50E-2954-B290-1563-C4936B9E8431}"/>
               </a:ext>
             </a:extLst>
           </p:cNvPr>
@@ -2208,7 +2208,7 @@
           <p:cNvPr id="3" name="세로 텍스트 개체 틀 2">
             <a:extLst>
               <a:ext uri="{FF2B5EF4-FFF2-40B4-BE49-F238E27FC236}">
-                <a16:creationId xmlns:a16="http://schemas.microsoft.com/office/drawing/2014/main" xmlns="" id="{5B6A99E4-1414-E268-7B72-A4C896708AE3}"/>
+                <a16:creationId xmlns:a16="http://schemas.microsoft.com/office/drawing/2014/main" id="{5B6A99E4-1414-E268-7B72-A4C896708AE3}"/>
               </a:ext>
             </a:extLst>
           </p:cNvPr>
@@ -2265,7 +2265,7 @@
           <p:cNvPr id="4" name="날짜 개체 틀 3">
             <a:extLst>
               <a:ext uri="{FF2B5EF4-FFF2-40B4-BE49-F238E27FC236}">
-                <a16:creationId xmlns:a16="http://schemas.microsoft.com/office/drawing/2014/main" xmlns="" id="{3A9BB3C2-1FA4-4151-9ADB-996284F1BDE2}"/>
+                <a16:creationId xmlns:a16="http://schemas.microsoft.com/office/drawing/2014/main" id="{3A9BB3C2-1FA4-4151-9ADB-996284F1BDE2}"/>
               </a:ext>
             </a:extLst>
           </p:cNvPr>
@@ -2294,7 +2294,7 @@
           <p:cNvPr id="5" name="바닥글 개체 틀 4">
             <a:extLst>
               <a:ext uri="{FF2B5EF4-FFF2-40B4-BE49-F238E27FC236}">
-                <a16:creationId xmlns:a16="http://schemas.microsoft.com/office/drawing/2014/main" xmlns="" id="{8A27C81A-BE4E-27CE-6CE4-0AE5876D470A}"/>
+                <a16:creationId xmlns:a16="http://schemas.microsoft.com/office/drawing/2014/main" id="{8A27C81A-BE4E-27CE-6CE4-0AE5876D470A}"/>
               </a:ext>
             </a:extLst>
           </p:cNvPr>
@@ -2319,7 +2319,7 @@
           <p:cNvPr id="6" name="슬라이드 번호 개체 틀 5">
             <a:extLst>
               <a:ext uri="{FF2B5EF4-FFF2-40B4-BE49-F238E27FC236}">
-                <a16:creationId xmlns:a16="http://schemas.microsoft.com/office/drawing/2014/main" xmlns="" id="{B4E3C814-C417-2E3F-F02B-1B9ED6941FBD}"/>
+                <a16:creationId xmlns:a16="http://schemas.microsoft.com/office/drawing/2014/main" id="{B4E3C814-C417-2E3F-F02B-1B9ED6941FBD}"/>
               </a:ext>
             </a:extLst>
           </p:cNvPr>
@@ -2378,7 +2378,7 @@
           <p:cNvPr id="2" name="세로 제목 1">
             <a:extLst>
               <a:ext uri="{FF2B5EF4-FFF2-40B4-BE49-F238E27FC236}">
-                <a16:creationId xmlns:a16="http://schemas.microsoft.com/office/drawing/2014/main" xmlns="" id="{AC1D687F-54E9-57A3-FDA2-5A8060E79A80}"/>
+                <a16:creationId xmlns:a16="http://schemas.microsoft.com/office/drawing/2014/main" id="{AC1D687F-54E9-57A3-FDA2-5A8060E79A80}"/>
               </a:ext>
             </a:extLst>
           </p:cNvPr>
@@ -2411,7 +2411,7 @@
           <p:cNvPr id="3" name="세로 텍스트 개체 틀 2">
             <a:extLst>
               <a:ext uri="{FF2B5EF4-FFF2-40B4-BE49-F238E27FC236}">
-                <a16:creationId xmlns:a16="http://schemas.microsoft.com/office/drawing/2014/main" xmlns="" id="{BC846A14-940B-8FE8-A769-3DABAE11AD25}"/>
+                <a16:creationId xmlns:a16="http://schemas.microsoft.com/office/drawing/2014/main" id="{BC846A14-940B-8FE8-A769-3DABAE11AD25}"/>
               </a:ext>
             </a:extLst>
           </p:cNvPr>
@@ -2473,7 +2473,7 @@
           <p:cNvPr id="4" name="날짜 개체 틀 3">
             <a:extLst>
               <a:ext uri="{FF2B5EF4-FFF2-40B4-BE49-F238E27FC236}">
-                <a16:creationId xmlns:a16="http://schemas.microsoft.com/office/drawing/2014/main" xmlns="" id="{393732A3-4427-5A76-3A9C-DBE87A4364DD}"/>
+                <a16:creationId xmlns:a16="http://schemas.microsoft.com/office/drawing/2014/main" id="{393732A3-4427-5A76-3A9C-DBE87A4364DD}"/>
               </a:ext>
             </a:extLst>
           </p:cNvPr>
@@ -2502,7 +2502,7 @@
           <p:cNvPr id="5" name="바닥글 개체 틀 4">
             <a:extLst>
               <a:ext uri="{FF2B5EF4-FFF2-40B4-BE49-F238E27FC236}">
-                <a16:creationId xmlns:a16="http://schemas.microsoft.com/office/drawing/2014/main" xmlns="" id="{16A5B672-F383-0FF5-2D72-72E1E7F0F0D3}"/>
+                <a16:creationId xmlns:a16="http://schemas.microsoft.com/office/drawing/2014/main" id="{16A5B672-F383-0FF5-2D72-72E1E7F0F0D3}"/>
               </a:ext>
             </a:extLst>
           </p:cNvPr>
@@ -2527,7 +2527,7 @@
           <p:cNvPr id="6" name="슬라이드 번호 개체 틀 5">
             <a:extLst>
               <a:ext uri="{FF2B5EF4-FFF2-40B4-BE49-F238E27FC236}">
-                <a16:creationId xmlns:a16="http://schemas.microsoft.com/office/drawing/2014/main" xmlns="" id="{DE28928A-9906-D889-A8B7-B97D729CDB76}"/>
+                <a16:creationId xmlns:a16="http://schemas.microsoft.com/office/drawing/2014/main" id="{DE28928A-9906-D889-A8B7-B97D729CDB76}"/>
               </a:ext>
             </a:extLst>
           </p:cNvPr>
@@ -2586,7 +2586,7 @@
           <p:cNvPr id="2" name="제목 1">
             <a:extLst>
               <a:ext uri="{FF2B5EF4-FFF2-40B4-BE49-F238E27FC236}">
-                <a16:creationId xmlns:a16="http://schemas.microsoft.com/office/drawing/2014/main" xmlns="" id="{54F5793F-94FE-56B0-E0CB-A317DA7FB4BC}"/>
+                <a16:creationId xmlns:a16="http://schemas.microsoft.com/office/drawing/2014/main" id="{54F5793F-94FE-56B0-E0CB-A317DA7FB4BC}"/>
               </a:ext>
             </a:extLst>
           </p:cNvPr>
@@ -2614,7 +2614,7 @@
           <p:cNvPr id="3" name="내용 개체 틀 2">
             <a:extLst>
               <a:ext uri="{FF2B5EF4-FFF2-40B4-BE49-F238E27FC236}">
-                <a16:creationId xmlns:a16="http://schemas.microsoft.com/office/drawing/2014/main" xmlns="" id="{BFAF79B8-2AD1-69C6-D4D5-21827C6802F8}"/>
+                <a16:creationId xmlns:a16="http://schemas.microsoft.com/office/drawing/2014/main" id="{BFAF79B8-2AD1-69C6-D4D5-21827C6802F8}"/>
               </a:ext>
             </a:extLst>
           </p:cNvPr>
@@ -2671,7 +2671,7 @@
           <p:cNvPr id="4" name="날짜 개체 틀 3">
             <a:extLst>
               <a:ext uri="{FF2B5EF4-FFF2-40B4-BE49-F238E27FC236}">
-                <a16:creationId xmlns:a16="http://schemas.microsoft.com/office/drawing/2014/main" xmlns="" id="{6718AF63-4F49-82B6-24FC-BB457FC964FC}"/>
+                <a16:creationId xmlns:a16="http://schemas.microsoft.com/office/drawing/2014/main" id="{6718AF63-4F49-82B6-24FC-BB457FC964FC}"/>
               </a:ext>
             </a:extLst>
           </p:cNvPr>
@@ -2700,7 +2700,7 @@
           <p:cNvPr id="5" name="바닥글 개체 틀 4">
             <a:extLst>
               <a:ext uri="{FF2B5EF4-FFF2-40B4-BE49-F238E27FC236}">
-                <a16:creationId xmlns:a16="http://schemas.microsoft.com/office/drawing/2014/main" xmlns="" id="{AA45FF19-25D7-1FF3-E311-2C2E07B26764}"/>
+                <a16:creationId xmlns:a16="http://schemas.microsoft.com/office/drawing/2014/main" id="{AA45FF19-25D7-1FF3-E311-2C2E07B26764}"/>
               </a:ext>
             </a:extLst>
           </p:cNvPr>
@@ -2725,7 +2725,7 @@
           <p:cNvPr id="6" name="슬라이드 번호 개체 틀 5">
             <a:extLst>
               <a:ext uri="{FF2B5EF4-FFF2-40B4-BE49-F238E27FC236}">
-                <a16:creationId xmlns:a16="http://schemas.microsoft.com/office/drawing/2014/main" xmlns="" id="{6F43D8BF-52A4-97EB-612B-F9899664EFD5}"/>
+                <a16:creationId xmlns:a16="http://schemas.microsoft.com/office/drawing/2014/main" id="{6F43D8BF-52A4-97EB-612B-F9899664EFD5}"/>
               </a:ext>
             </a:extLst>
           </p:cNvPr>
@@ -2784,7 +2784,7 @@
           <p:cNvPr id="2" name="제목 1">
             <a:extLst>
               <a:ext uri="{FF2B5EF4-FFF2-40B4-BE49-F238E27FC236}">
-                <a16:creationId xmlns:a16="http://schemas.microsoft.com/office/drawing/2014/main" xmlns="" id="{1EB95909-78E9-5BAC-68EA-7DCA2A1271F7}"/>
+                <a16:creationId xmlns:a16="http://schemas.microsoft.com/office/drawing/2014/main" id="{1EB95909-78E9-5BAC-68EA-7DCA2A1271F7}"/>
               </a:ext>
             </a:extLst>
           </p:cNvPr>
@@ -2821,7 +2821,7 @@
           <p:cNvPr id="3" name="텍스트 개체 틀 2">
             <a:extLst>
               <a:ext uri="{FF2B5EF4-FFF2-40B4-BE49-F238E27FC236}">
-                <a16:creationId xmlns:a16="http://schemas.microsoft.com/office/drawing/2014/main" xmlns="" id="{D6B98DAF-2A47-3ECD-807C-96FB70CF9854}"/>
+                <a16:creationId xmlns:a16="http://schemas.microsoft.com/office/drawing/2014/main" id="{D6B98DAF-2A47-3ECD-807C-96FB70CF9854}"/>
               </a:ext>
             </a:extLst>
           </p:cNvPr>
@@ -2946,7 +2946,7 @@
           <p:cNvPr id="4" name="날짜 개체 틀 3">
             <a:extLst>
               <a:ext uri="{FF2B5EF4-FFF2-40B4-BE49-F238E27FC236}">
-                <a16:creationId xmlns:a16="http://schemas.microsoft.com/office/drawing/2014/main" xmlns="" id="{A3AD9670-C268-56FC-281A-FE1F59541EB9}"/>
+                <a16:creationId xmlns:a16="http://schemas.microsoft.com/office/drawing/2014/main" id="{A3AD9670-C268-56FC-281A-FE1F59541EB9}"/>
               </a:ext>
             </a:extLst>
           </p:cNvPr>
@@ -2975,7 +2975,7 @@
           <p:cNvPr id="5" name="바닥글 개체 틀 4">
             <a:extLst>
               <a:ext uri="{FF2B5EF4-FFF2-40B4-BE49-F238E27FC236}">
-                <a16:creationId xmlns:a16="http://schemas.microsoft.com/office/drawing/2014/main" xmlns="" id="{A4946F37-FE38-E38E-7339-DC6E4EFA5B3B}"/>
+                <a16:creationId xmlns:a16="http://schemas.microsoft.com/office/drawing/2014/main" id="{A4946F37-FE38-E38E-7339-DC6E4EFA5B3B}"/>
               </a:ext>
             </a:extLst>
           </p:cNvPr>
@@ -3000,7 +3000,7 @@
           <p:cNvPr id="6" name="슬라이드 번호 개체 틀 5">
             <a:extLst>
               <a:ext uri="{FF2B5EF4-FFF2-40B4-BE49-F238E27FC236}">
-                <a16:creationId xmlns:a16="http://schemas.microsoft.com/office/drawing/2014/main" xmlns="" id="{7C17C39B-6348-28CC-59AF-B1A65BE2F149}"/>
+                <a16:creationId xmlns:a16="http://schemas.microsoft.com/office/drawing/2014/main" id="{7C17C39B-6348-28CC-59AF-B1A65BE2F149}"/>
               </a:ext>
             </a:extLst>
           </p:cNvPr>
@@ -3059,7 +3059,7 @@
           <p:cNvPr id="2" name="제목 1">
             <a:extLst>
               <a:ext uri="{FF2B5EF4-FFF2-40B4-BE49-F238E27FC236}">
-                <a16:creationId xmlns:a16="http://schemas.microsoft.com/office/drawing/2014/main" xmlns="" id="{0D0EFA0F-10D7-865F-1370-4EA34C786709}"/>
+                <a16:creationId xmlns:a16="http://schemas.microsoft.com/office/drawing/2014/main" id="{0D0EFA0F-10D7-865F-1370-4EA34C786709}"/>
               </a:ext>
             </a:extLst>
           </p:cNvPr>
@@ -3087,7 +3087,7 @@
           <p:cNvPr id="3" name="내용 개체 틀 2">
             <a:extLst>
               <a:ext uri="{FF2B5EF4-FFF2-40B4-BE49-F238E27FC236}">
-                <a16:creationId xmlns:a16="http://schemas.microsoft.com/office/drawing/2014/main" xmlns="" id="{0498CDB5-9D2B-5F68-9DD8-ED20454B1044}"/>
+                <a16:creationId xmlns:a16="http://schemas.microsoft.com/office/drawing/2014/main" id="{0498CDB5-9D2B-5F68-9DD8-ED20454B1044}"/>
               </a:ext>
             </a:extLst>
           </p:cNvPr>
@@ -3149,7 +3149,7 @@
           <p:cNvPr id="4" name="내용 개체 틀 3">
             <a:extLst>
               <a:ext uri="{FF2B5EF4-FFF2-40B4-BE49-F238E27FC236}">
-                <a16:creationId xmlns:a16="http://schemas.microsoft.com/office/drawing/2014/main" xmlns="" id="{570EB1B7-8EDE-2794-EA53-E0C1972FAF1A}"/>
+                <a16:creationId xmlns:a16="http://schemas.microsoft.com/office/drawing/2014/main" id="{570EB1B7-8EDE-2794-EA53-E0C1972FAF1A}"/>
               </a:ext>
             </a:extLst>
           </p:cNvPr>
@@ -3211,7 +3211,7 @@
           <p:cNvPr id="5" name="날짜 개체 틀 4">
             <a:extLst>
               <a:ext uri="{FF2B5EF4-FFF2-40B4-BE49-F238E27FC236}">
-                <a16:creationId xmlns:a16="http://schemas.microsoft.com/office/drawing/2014/main" xmlns="" id="{31FBCFA4-CF51-706E-F9F0-8B66CA1A0E1B}"/>
+                <a16:creationId xmlns:a16="http://schemas.microsoft.com/office/drawing/2014/main" id="{31FBCFA4-CF51-706E-F9F0-8B66CA1A0E1B}"/>
               </a:ext>
             </a:extLst>
           </p:cNvPr>
@@ -3240,7 +3240,7 @@
           <p:cNvPr id="6" name="바닥글 개체 틀 5">
             <a:extLst>
               <a:ext uri="{FF2B5EF4-FFF2-40B4-BE49-F238E27FC236}">
-                <a16:creationId xmlns:a16="http://schemas.microsoft.com/office/drawing/2014/main" xmlns="" id="{FD56636A-469F-7FE9-480E-955BCC0E6D70}"/>
+                <a16:creationId xmlns:a16="http://schemas.microsoft.com/office/drawing/2014/main" id="{FD56636A-469F-7FE9-480E-955BCC0E6D70}"/>
               </a:ext>
             </a:extLst>
           </p:cNvPr>
@@ -3265,7 +3265,7 @@
           <p:cNvPr id="7" name="슬라이드 번호 개체 틀 6">
             <a:extLst>
               <a:ext uri="{FF2B5EF4-FFF2-40B4-BE49-F238E27FC236}">
-                <a16:creationId xmlns:a16="http://schemas.microsoft.com/office/drawing/2014/main" xmlns="" id="{3971D272-167D-EE36-E685-CD8BFE8CC9A6}"/>
+                <a16:creationId xmlns:a16="http://schemas.microsoft.com/office/drawing/2014/main" id="{3971D272-167D-EE36-E685-CD8BFE8CC9A6}"/>
               </a:ext>
             </a:extLst>
           </p:cNvPr>
@@ -3324,7 +3324,7 @@
           <p:cNvPr id="2" name="제목 1">
             <a:extLst>
               <a:ext uri="{FF2B5EF4-FFF2-40B4-BE49-F238E27FC236}">
-                <a16:creationId xmlns:a16="http://schemas.microsoft.com/office/drawing/2014/main" xmlns="" id="{9AC7230E-A2F3-4027-B6F6-9C5C289B1314}"/>
+                <a16:creationId xmlns:a16="http://schemas.microsoft.com/office/drawing/2014/main" id="{9AC7230E-A2F3-4027-B6F6-9C5C289B1314}"/>
               </a:ext>
             </a:extLst>
           </p:cNvPr>
@@ -3357,7 +3357,7 @@
           <p:cNvPr id="3" name="텍스트 개체 틀 2">
             <a:extLst>
               <a:ext uri="{FF2B5EF4-FFF2-40B4-BE49-F238E27FC236}">
-                <a16:creationId xmlns:a16="http://schemas.microsoft.com/office/drawing/2014/main" xmlns="" id="{0C685356-7419-AD93-377A-8D9A0293423E}"/>
+                <a16:creationId xmlns:a16="http://schemas.microsoft.com/office/drawing/2014/main" id="{0C685356-7419-AD93-377A-8D9A0293423E}"/>
               </a:ext>
             </a:extLst>
           </p:cNvPr>
@@ -3428,7 +3428,7 @@
           <p:cNvPr id="4" name="내용 개체 틀 3">
             <a:extLst>
               <a:ext uri="{FF2B5EF4-FFF2-40B4-BE49-F238E27FC236}">
-                <a16:creationId xmlns:a16="http://schemas.microsoft.com/office/drawing/2014/main" xmlns="" id="{CC36E6CA-94A6-3223-C91A-F6E9648C8EAD}"/>
+                <a16:creationId xmlns:a16="http://schemas.microsoft.com/office/drawing/2014/main" id="{CC36E6CA-94A6-3223-C91A-F6E9648C8EAD}"/>
               </a:ext>
             </a:extLst>
           </p:cNvPr>
@@ -3490,7 +3490,7 @@
           <p:cNvPr id="5" name="텍스트 개체 틀 4">
             <a:extLst>
               <a:ext uri="{FF2B5EF4-FFF2-40B4-BE49-F238E27FC236}">
-                <a16:creationId xmlns:a16="http://schemas.microsoft.com/office/drawing/2014/main" xmlns="" id="{F4DFD790-787A-88A3-300F-C173DAD2E1AF}"/>
+                <a16:creationId xmlns:a16="http://schemas.microsoft.com/office/drawing/2014/main" id="{F4DFD790-787A-88A3-300F-C173DAD2E1AF}"/>
               </a:ext>
             </a:extLst>
           </p:cNvPr>
@@ -3561,7 +3561,7 @@
           <p:cNvPr id="6" name="내용 개체 틀 5">
             <a:extLst>
               <a:ext uri="{FF2B5EF4-FFF2-40B4-BE49-F238E27FC236}">
-                <a16:creationId xmlns:a16="http://schemas.microsoft.com/office/drawing/2014/main" xmlns="" id="{012AE83D-2990-A6E4-CC9C-06D342A67C09}"/>
+                <a16:creationId xmlns:a16="http://schemas.microsoft.com/office/drawing/2014/main" id="{012AE83D-2990-A6E4-CC9C-06D342A67C09}"/>
               </a:ext>
             </a:extLst>
           </p:cNvPr>
@@ -3623,7 +3623,7 @@
           <p:cNvPr id="7" name="날짜 개체 틀 6">
             <a:extLst>
               <a:ext uri="{FF2B5EF4-FFF2-40B4-BE49-F238E27FC236}">
-                <a16:creationId xmlns:a16="http://schemas.microsoft.com/office/drawing/2014/main" xmlns="" id="{3C11F8C3-5AD3-730B-8ADB-304185DAA67E}"/>
+                <a16:creationId xmlns:a16="http://schemas.microsoft.com/office/drawing/2014/main" id="{3C11F8C3-5AD3-730B-8ADB-304185DAA67E}"/>
               </a:ext>
             </a:extLst>
           </p:cNvPr>
@@ -3652,7 +3652,7 @@
           <p:cNvPr id="8" name="바닥글 개체 틀 7">
             <a:extLst>
               <a:ext uri="{FF2B5EF4-FFF2-40B4-BE49-F238E27FC236}">
-                <a16:creationId xmlns:a16="http://schemas.microsoft.com/office/drawing/2014/main" xmlns="" id="{EF36ABA7-53C4-C11E-CC9D-F5E59BDBBD9B}"/>
+                <a16:creationId xmlns:a16="http://schemas.microsoft.com/office/drawing/2014/main" id="{EF36ABA7-53C4-C11E-CC9D-F5E59BDBBD9B}"/>
               </a:ext>
             </a:extLst>
           </p:cNvPr>
@@ -3677,7 +3677,7 @@
           <p:cNvPr id="9" name="슬라이드 번호 개체 틀 8">
             <a:extLst>
               <a:ext uri="{FF2B5EF4-FFF2-40B4-BE49-F238E27FC236}">
-                <a16:creationId xmlns:a16="http://schemas.microsoft.com/office/drawing/2014/main" xmlns="" id="{5E29E145-D4AE-F9FB-A218-47B323C43E03}"/>
+                <a16:creationId xmlns:a16="http://schemas.microsoft.com/office/drawing/2014/main" id="{5E29E145-D4AE-F9FB-A218-47B323C43E03}"/>
               </a:ext>
             </a:extLst>
           </p:cNvPr>
@@ -3736,7 +3736,7 @@
           <p:cNvPr id="2" name="제목 1">
             <a:extLst>
               <a:ext uri="{FF2B5EF4-FFF2-40B4-BE49-F238E27FC236}">
-                <a16:creationId xmlns:a16="http://schemas.microsoft.com/office/drawing/2014/main" xmlns="" id="{13D855E6-5AD7-B657-346A-38D87715A5E7}"/>
+                <a16:creationId xmlns:a16="http://schemas.microsoft.com/office/drawing/2014/main" id="{13D855E6-5AD7-B657-346A-38D87715A5E7}"/>
               </a:ext>
             </a:extLst>
           </p:cNvPr>
@@ -3764,7 +3764,7 @@
           <p:cNvPr id="3" name="날짜 개체 틀 2">
             <a:extLst>
               <a:ext uri="{FF2B5EF4-FFF2-40B4-BE49-F238E27FC236}">
-                <a16:creationId xmlns:a16="http://schemas.microsoft.com/office/drawing/2014/main" xmlns="" id="{F3052B06-09E1-1CD0-A032-AEB30F69A0E7}"/>
+                <a16:creationId xmlns:a16="http://schemas.microsoft.com/office/drawing/2014/main" id="{F3052B06-09E1-1CD0-A032-AEB30F69A0E7}"/>
               </a:ext>
             </a:extLst>
           </p:cNvPr>
@@ -3793,7 +3793,7 @@
           <p:cNvPr id="4" name="바닥글 개체 틀 3">
             <a:extLst>
               <a:ext uri="{FF2B5EF4-FFF2-40B4-BE49-F238E27FC236}">
-                <a16:creationId xmlns:a16="http://schemas.microsoft.com/office/drawing/2014/main" xmlns="" id="{DE18691A-8582-987D-DF06-E6D8B618E7BB}"/>
+                <a16:creationId xmlns:a16="http://schemas.microsoft.com/office/drawing/2014/main" id="{DE18691A-8582-987D-DF06-E6D8B618E7BB}"/>
               </a:ext>
             </a:extLst>
           </p:cNvPr>
@@ -3818,7 +3818,7 @@
           <p:cNvPr id="5" name="슬라이드 번호 개체 틀 4">
             <a:extLst>
               <a:ext uri="{FF2B5EF4-FFF2-40B4-BE49-F238E27FC236}">
-                <a16:creationId xmlns:a16="http://schemas.microsoft.com/office/drawing/2014/main" xmlns="" id="{6F997ACE-7D00-7B35-1F16-F56C5450EF85}"/>
+                <a16:creationId xmlns:a16="http://schemas.microsoft.com/office/drawing/2014/main" id="{6F997ACE-7D00-7B35-1F16-F56C5450EF85}"/>
               </a:ext>
             </a:extLst>
           </p:cNvPr>
@@ -3877,7 +3877,7 @@
           <p:cNvPr id="2" name="날짜 개체 틀 1">
             <a:extLst>
               <a:ext uri="{FF2B5EF4-FFF2-40B4-BE49-F238E27FC236}">
-                <a16:creationId xmlns:a16="http://schemas.microsoft.com/office/drawing/2014/main" xmlns="" id="{2703D88F-9D50-1761-731E-68DD1FC6B740}"/>
+                <a16:creationId xmlns:a16="http://schemas.microsoft.com/office/drawing/2014/main" id="{2703D88F-9D50-1761-731E-68DD1FC6B740}"/>
               </a:ext>
             </a:extLst>
           </p:cNvPr>
@@ -3906,7 +3906,7 @@
           <p:cNvPr id="3" name="바닥글 개체 틀 2">
             <a:extLst>
               <a:ext uri="{FF2B5EF4-FFF2-40B4-BE49-F238E27FC236}">
-                <a16:creationId xmlns:a16="http://schemas.microsoft.com/office/drawing/2014/main" xmlns="" id="{70793086-842E-7906-6019-4284A9E469F4}"/>
+                <a16:creationId xmlns:a16="http://schemas.microsoft.com/office/drawing/2014/main" id="{70793086-842E-7906-6019-4284A9E469F4}"/>
               </a:ext>
             </a:extLst>
           </p:cNvPr>
@@ -3931,7 +3931,7 @@
           <p:cNvPr id="4" name="슬라이드 번호 개체 틀 3">
             <a:extLst>
               <a:ext uri="{FF2B5EF4-FFF2-40B4-BE49-F238E27FC236}">
-                <a16:creationId xmlns:a16="http://schemas.microsoft.com/office/drawing/2014/main" xmlns="" id="{6D4FE3DE-7F26-4352-74EE-A720C7AF5564}"/>
+                <a16:creationId xmlns:a16="http://schemas.microsoft.com/office/drawing/2014/main" id="{6D4FE3DE-7F26-4352-74EE-A720C7AF5564}"/>
               </a:ext>
             </a:extLst>
           </p:cNvPr>
@@ -3990,7 +3990,7 @@
           <p:cNvPr id="2" name="제목 1">
             <a:extLst>
               <a:ext uri="{FF2B5EF4-FFF2-40B4-BE49-F238E27FC236}">
-                <a16:creationId xmlns:a16="http://schemas.microsoft.com/office/drawing/2014/main" xmlns="" id="{0AFB6F63-D5C7-EB4A-A651-8DA5561AD0DC}"/>
+                <a16:creationId xmlns:a16="http://schemas.microsoft.com/office/drawing/2014/main" id="{0AFB6F63-D5C7-EB4A-A651-8DA5561AD0DC}"/>
               </a:ext>
             </a:extLst>
           </p:cNvPr>
@@ -4027,7 +4027,7 @@
           <p:cNvPr id="3" name="내용 개체 틀 2">
             <a:extLst>
               <a:ext uri="{FF2B5EF4-FFF2-40B4-BE49-F238E27FC236}">
-                <a16:creationId xmlns:a16="http://schemas.microsoft.com/office/drawing/2014/main" xmlns="" id="{2000FB2D-0CF3-1A3C-E704-F8CA96C2D5D5}"/>
+                <a16:creationId xmlns:a16="http://schemas.microsoft.com/office/drawing/2014/main" id="{2000FB2D-0CF3-1A3C-E704-F8CA96C2D5D5}"/>
               </a:ext>
             </a:extLst>
           </p:cNvPr>
@@ -4117,7 +4117,7 @@
           <p:cNvPr id="4" name="텍스트 개체 틀 3">
             <a:extLst>
               <a:ext uri="{FF2B5EF4-FFF2-40B4-BE49-F238E27FC236}">
-                <a16:creationId xmlns:a16="http://schemas.microsoft.com/office/drawing/2014/main" xmlns="" id="{88C3C47D-E633-BB5D-0FA3-41A5E3C28A6A}"/>
+                <a16:creationId xmlns:a16="http://schemas.microsoft.com/office/drawing/2014/main" id="{88C3C47D-E633-BB5D-0FA3-41A5E3C28A6A}"/>
               </a:ext>
             </a:extLst>
           </p:cNvPr>
@@ -4188,7 +4188,7 @@
           <p:cNvPr id="5" name="날짜 개체 틀 4">
             <a:extLst>
               <a:ext uri="{FF2B5EF4-FFF2-40B4-BE49-F238E27FC236}">
-                <a16:creationId xmlns:a16="http://schemas.microsoft.com/office/drawing/2014/main" xmlns="" id="{603DA118-0D2F-73A1-6311-85E95462C569}"/>
+                <a16:creationId xmlns:a16="http://schemas.microsoft.com/office/drawing/2014/main" id="{603DA118-0D2F-73A1-6311-85E95462C569}"/>
               </a:ext>
             </a:extLst>
           </p:cNvPr>
@@ -4217,7 +4217,7 @@
           <p:cNvPr id="6" name="바닥글 개체 틀 5">
             <a:extLst>
               <a:ext uri="{FF2B5EF4-FFF2-40B4-BE49-F238E27FC236}">
-                <a16:creationId xmlns:a16="http://schemas.microsoft.com/office/drawing/2014/main" xmlns="" id="{DE46749A-348F-886F-32BD-A562F1A2A3B9}"/>
+                <a16:creationId xmlns:a16="http://schemas.microsoft.com/office/drawing/2014/main" id="{DE46749A-348F-886F-32BD-A562F1A2A3B9}"/>
               </a:ext>
             </a:extLst>
           </p:cNvPr>
@@ -4242,7 +4242,7 @@
           <p:cNvPr id="7" name="슬라이드 번호 개체 틀 6">
             <a:extLst>
               <a:ext uri="{FF2B5EF4-FFF2-40B4-BE49-F238E27FC236}">
-                <a16:creationId xmlns:a16="http://schemas.microsoft.com/office/drawing/2014/main" xmlns="" id="{0BF22D09-FBE9-294C-014E-9A808723A1A7}"/>
+                <a16:creationId xmlns:a16="http://schemas.microsoft.com/office/drawing/2014/main" id="{0BF22D09-FBE9-294C-014E-9A808723A1A7}"/>
               </a:ext>
             </a:extLst>
           </p:cNvPr>
@@ -4301,7 +4301,7 @@
           <p:cNvPr id="2" name="제목 1">
             <a:extLst>
               <a:ext uri="{FF2B5EF4-FFF2-40B4-BE49-F238E27FC236}">
-                <a16:creationId xmlns:a16="http://schemas.microsoft.com/office/drawing/2014/main" xmlns="" id="{DA50C132-3A30-7E9C-0BBB-1CD1A789CE68}"/>
+                <a16:creationId xmlns:a16="http://schemas.microsoft.com/office/drawing/2014/main" id="{DA50C132-3A30-7E9C-0BBB-1CD1A789CE68}"/>
               </a:ext>
             </a:extLst>
           </p:cNvPr>
@@ -4338,7 +4338,7 @@
           <p:cNvPr id="3" name="그림 개체 틀 2">
             <a:extLst>
               <a:ext uri="{FF2B5EF4-FFF2-40B4-BE49-F238E27FC236}">
-                <a16:creationId xmlns:a16="http://schemas.microsoft.com/office/drawing/2014/main" xmlns="" id="{2F31776A-D32D-34F5-8A99-A26F4F6535B9}"/>
+                <a16:creationId xmlns:a16="http://schemas.microsoft.com/office/drawing/2014/main" id="{2F31776A-D32D-34F5-8A99-A26F4F6535B9}"/>
               </a:ext>
             </a:extLst>
           </p:cNvPr>
@@ -4405,7 +4405,7 @@
           <p:cNvPr id="4" name="텍스트 개체 틀 3">
             <a:extLst>
               <a:ext uri="{FF2B5EF4-FFF2-40B4-BE49-F238E27FC236}">
-                <a16:creationId xmlns:a16="http://schemas.microsoft.com/office/drawing/2014/main" xmlns="" id="{3E500BF3-C366-20F6-6257-8233A0794521}"/>
+                <a16:creationId xmlns:a16="http://schemas.microsoft.com/office/drawing/2014/main" id="{3E500BF3-C366-20F6-6257-8233A0794521}"/>
               </a:ext>
             </a:extLst>
           </p:cNvPr>
@@ -4476,7 +4476,7 @@
           <p:cNvPr id="5" name="날짜 개체 틀 4">
             <a:extLst>
               <a:ext uri="{FF2B5EF4-FFF2-40B4-BE49-F238E27FC236}">
-                <a16:creationId xmlns:a16="http://schemas.microsoft.com/office/drawing/2014/main" xmlns="" id="{DB1C119C-B590-D055-6B10-AAE861F0D2B1}"/>
+                <a16:creationId xmlns:a16="http://schemas.microsoft.com/office/drawing/2014/main" id="{DB1C119C-B590-D055-6B10-AAE861F0D2B1}"/>
               </a:ext>
             </a:extLst>
           </p:cNvPr>
@@ -4505,7 +4505,7 @@
           <p:cNvPr id="6" name="바닥글 개체 틀 5">
             <a:extLst>
               <a:ext uri="{FF2B5EF4-FFF2-40B4-BE49-F238E27FC236}">
-                <a16:creationId xmlns:a16="http://schemas.microsoft.com/office/drawing/2014/main" xmlns="" id="{00064F92-4550-973E-464E-89CA3E7EED4F}"/>
+                <a16:creationId xmlns:a16="http://schemas.microsoft.com/office/drawing/2014/main" id="{00064F92-4550-973E-464E-89CA3E7EED4F}"/>
               </a:ext>
             </a:extLst>
           </p:cNvPr>
@@ -4530,7 +4530,7 @@
           <p:cNvPr id="7" name="슬라이드 번호 개체 틀 6">
             <a:extLst>
               <a:ext uri="{FF2B5EF4-FFF2-40B4-BE49-F238E27FC236}">
-                <a16:creationId xmlns:a16="http://schemas.microsoft.com/office/drawing/2014/main" xmlns="" id="{708384D1-792D-8EA8-718E-F756CEE623A7}"/>
+                <a16:creationId xmlns:a16="http://schemas.microsoft.com/office/drawing/2014/main" id="{708384D1-792D-8EA8-718E-F756CEE623A7}"/>
               </a:ext>
             </a:extLst>
           </p:cNvPr>
@@ -4594,7 +4594,7 @@
           <p:cNvPr id="2" name="제목 개체 틀 1">
             <a:extLst>
               <a:ext uri="{FF2B5EF4-FFF2-40B4-BE49-F238E27FC236}">
-                <a16:creationId xmlns:a16="http://schemas.microsoft.com/office/drawing/2014/main" xmlns="" id="{C0AC0570-6E75-D8C0-582D-3A448969CF8B}"/>
+                <a16:creationId xmlns:a16="http://schemas.microsoft.com/office/drawing/2014/main" id="{C0AC0570-6E75-D8C0-582D-3A448969CF8B}"/>
               </a:ext>
             </a:extLst>
           </p:cNvPr>
@@ -4632,7 +4632,7 @@
           <p:cNvPr id="3" name="텍스트 개체 틀 2">
             <a:extLst>
               <a:ext uri="{FF2B5EF4-FFF2-40B4-BE49-F238E27FC236}">
-                <a16:creationId xmlns:a16="http://schemas.microsoft.com/office/drawing/2014/main" xmlns="" id="{79ADFDDF-DF3C-19FA-0ED8-5D640C08DB4B}"/>
+                <a16:creationId xmlns:a16="http://schemas.microsoft.com/office/drawing/2014/main" id="{79ADFDDF-DF3C-19FA-0ED8-5D640C08DB4B}"/>
               </a:ext>
             </a:extLst>
           </p:cNvPr>
@@ -4699,7 +4699,7 @@
           <p:cNvPr id="4" name="날짜 개체 틀 3">
             <a:extLst>
               <a:ext uri="{FF2B5EF4-FFF2-40B4-BE49-F238E27FC236}">
-                <a16:creationId xmlns:a16="http://schemas.microsoft.com/office/drawing/2014/main" xmlns="" id="{AB9AC677-7913-29B2-30F7-969771FA5D05}"/>
+                <a16:creationId xmlns:a16="http://schemas.microsoft.com/office/drawing/2014/main" id="{AB9AC677-7913-29B2-30F7-969771FA5D05}"/>
               </a:ext>
             </a:extLst>
           </p:cNvPr>
@@ -4746,7 +4746,7 @@
           <p:cNvPr id="5" name="바닥글 개체 틀 4">
             <a:extLst>
               <a:ext uri="{FF2B5EF4-FFF2-40B4-BE49-F238E27FC236}">
-                <a16:creationId xmlns:a16="http://schemas.microsoft.com/office/drawing/2014/main" xmlns="" id="{3A6836E4-21B2-245A-8933-7F64F64AC382}"/>
+                <a16:creationId xmlns:a16="http://schemas.microsoft.com/office/drawing/2014/main" id="{3A6836E4-21B2-245A-8933-7F64F64AC382}"/>
               </a:ext>
             </a:extLst>
           </p:cNvPr>
@@ -4789,7 +4789,7 @@
           <p:cNvPr id="6" name="슬라이드 번호 개체 틀 5">
             <a:extLst>
               <a:ext uri="{FF2B5EF4-FFF2-40B4-BE49-F238E27FC236}">
-                <a16:creationId xmlns:a16="http://schemas.microsoft.com/office/drawing/2014/main" xmlns="" id="{6F2D0B4E-8F0D-F1B8-2A71-9862FC9749C5}"/>
+                <a16:creationId xmlns:a16="http://schemas.microsoft.com/office/drawing/2014/main" id="{6F2D0B4E-8F0D-F1B8-2A71-9862FC9749C5}"/>
               </a:ext>
             </a:extLst>
           </p:cNvPr>
@@ -5295,7 +5295,7 @@
         <p:cNvPr id="1" name="">
           <a:extLst>
             <a:ext uri="{FF2B5EF4-FFF2-40B4-BE49-F238E27FC236}">
-              <a16:creationId xmlns:a16="http://schemas.microsoft.com/office/drawing/2014/main" xmlns="" id="{94AC5628-6096-007D-4F9A-097D06EAA780}"/>
+              <a16:creationId xmlns:a16="http://schemas.microsoft.com/office/drawing/2014/main" id="{D03477D4-BD5D-3DBD-B86A-E6378477802E}"/>
             </a:ext>
           </a:extLst>
         </p:cNvPr>
@@ -5315,7 +5315,7 @@
           <p:cNvPr id="8" name="TextBox 7">
             <a:extLst>
               <a:ext uri="{FF2B5EF4-FFF2-40B4-BE49-F238E27FC236}">
-                <a16:creationId xmlns:a16="http://schemas.microsoft.com/office/drawing/2014/main" xmlns="" id="{BCBC9F85-F7A3-3F83-1806-6A8A789EB677}"/>
+                <a16:creationId xmlns:a16="http://schemas.microsoft.com/office/drawing/2014/main" id="{4B3D4C48-C9B6-2723-62D6-3C3423234E28}"/>
               </a:ext>
             </a:extLst>
           </p:cNvPr>
@@ -5357,7 +5357,7 @@
           <p:cNvPr id="10" name="TextBox 9">
             <a:extLst>
               <a:ext uri="{FF2B5EF4-FFF2-40B4-BE49-F238E27FC236}">
-                <a16:creationId xmlns:a16="http://schemas.microsoft.com/office/drawing/2014/main" xmlns="" id="{FD273E2F-7739-7201-81F8-1F5E095D26E7}"/>
+                <a16:creationId xmlns:a16="http://schemas.microsoft.com/office/drawing/2014/main" id="{CBE7561B-2601-8964-C60A-A06666E075AB}"/>
               </a:ext>
             </a:extLst>
           </p:cNvPr>
@@ -5385,7 +5385,7 @@
                 <a:latin typeface="나눔바른고딕" panose="020B0603020101020101" pitchFamily="34" charset="-127"/>
                 <a:ea typeface="나눔바른고딕" panose="020B0603020101020101" pitchFamily="34" charset="-127"/>
               </a:rPr>
-              <a:t>지형 타입 추가</a:t>
+              <a:t>전반적인 테스트</a:t>
             </a:r>
             <a:endParaRPr lang="en-US" altLang="ko-KR" sz="1600" dirty="0">
               <a:latin typeface="나눔바른고딕" panose="020B0603020101020101" pitchFamily="34" charset="-127"/>
@@ -5399,7 +5399,7 @@
           <p:cNvPr id="3" name="직선 연결선 2">
             <a:extLst>
               <a:ext uri="{FF2B5EF4-FFF2-40B4-BE49-F238E27FC236}">
-                <a16:creationId xmlns:a16="http://schemas.microsoft.com/office/drawing/2014/main" xmlns="" id="{B40C969E-FCF4-2ECC-59EC-50B8643A5B76}"/>
+                <a16:creationId xmlns:a16="http://schemas.microsoft.com/office/drawing/2014/main" id="{FF4DFF75-B56F-0D06-5F2D-FAA6D843192E}"/>
               </a:ext>
             </a:extLst>
           </p:cNvPr>
@@ -5442,7 +5442,7 @@
           <p:cNvPr id="12" name="직사각형 11">
             <a:extLst>
               <a:ext uri="{FF2B5EF4-FFF2-40B4-BE49-F238E27FC236}">
-                <a16:creationId xmlns:a16="http://schemas.microsoft.com/office/drawing/2014/main" xmlns="" id="{3A205B8F-1C93-C984-E61E-45A53634FE3C}"/>
+                <a16:creationId xmlns:a16="http://schemas.microsoft.com/office/drawing/2014/main" id="{0DF710DC-46C3-282A-F05D-2E1E8F2688E5}"/>
               </a:ext>
             </a:extLst>
           </p:cNvPr>
@@ -5541,7 +5541,7 @@
           <p:cNvPr id="13" name="TextBox 12">
             <a:extLst>
               <a:ext uri="{FF2B5EF4-FFF2-40B4-BE49-F238E27FC236}">
-                <a16:creationId xmlns:a16="http://schemas.microsoft.com/office/drawing/2014/main" xmlns="" id="{C974F786-0106-0EA4-FB07-6C517269E920}"/>
+                <a16:creationId xmlns:a16="http://schemas.microsoft.com/office/drawing/2014/main" id="{75AE084B-0F8B-85C4-24B9-65173EE9AF3C}"/>
               </a:ext>
             </a:extLst>
           </p:cNvPr>
@@ -5550,8 +5550,8 @@
         </p:nvSpPr>
         <p:spPr>
           <a:xfrm>
-            <a:off x="302449" y="1342316"/>
-            <a:ext cx="7464813" cy="276999"/>
+            <a:off x="302450" y="1342316"/>
+            <a:ext cx="3676884" cy="346249"/>
           </a:xfrm>
           <a:prstGeom prst="rect">
             <a:avLst/>
@@ -5564,12 +5564,31 @@
           </a:bodyPr>
           <a:lstStyle/>
           <a:p>
+            <a:pPr>
+              <a:lnSpc>
+                <a:spcPct val="150000"/>
+              </a:lnSpc>
+            </a:pPr>
             <a:r>
               <a:rPr lang="ko-KR" altLang="en-US" sz="1200" dirty="0">
                 <a:latin typeface="나눔바른고딕" panose="020B0603020101020101" pitchFamily="34" charset="-127"/>
                 <a:ea typeface="나눔바른고딕" panose="020B0603020101020101" pitchFamily="34" charset="-127"/>
               </a:rPr>
-              <a:t>장애물에 돌출부 유형 추가</a:t>
+              <a:t>유형 </a:t>
+            </a:r>
+            <a:r>
+              <a:rPr lang="en-US" altLang="ko-KR" sz="1200" dirty="0">
+                <a:latin typeface="나눔바른고딕" panose="020B0603020101020101" pitchFamily="34" charset="-127"/>
+                <a:ea typeface="나눔바른고딕" panose="020B0603020101020101" pitchFamily="34" charset="-127"/>
+              </a:rPr>
+              <a:t>1. </a:t>
+            </a:r>
+            <a:r>
+              <a:rPr lang="ko-KR" altLang="en-US" sz="1200" dirty="0">
+                <a:latin typeface="나눔바른고딕" panose="020B0603020101020101" pitchFamily="34" charset="-127"/>
+                <a:ea typeface="나눔바른고딕" panose="020B0603020101020101" pitchFamily="34" charset="-127"/>
+              </a:rPr>
+              <a:t>벽면</a:t>
             </a:r>
             <a:endParaRPr lang="en-US" altLang="ko-KR" sz="1200" dirty="0">
               <a:latin typeface="나눔바른고딕" panose="020B0603020101020101" pitchFamily="34" charset="-127"/>
@@ -5580,10 +5599,10 @@
       </p:sp>
       <p:sp>
         <p:nvSpPr>
-          <p:cNvPr id="9" name="TextBox 8">
-            <a:extLst>
-              <a:ext uri="{FF2B5EF4-FFF2-40B4-BE49-F238E27FC236}">
-                <a16:creationId xmlns:a16="http://schemas.microsoft.com/office/drawing/2014/main" xmlns="" id="{7B785176-81DD-7D2E-530B-971CA461B933}"/>
+          <p:cNvPr id="4" name="TextBox 3">
+            <a:extLst>
+              <a:ext uri="{FF2B5EF4-FFF2-40B4-BE49-F238E27FC236}">
+                <a16:creationId xmlns:a16="http://schemas.microsoft.com/office/drawing/2014/main" id="{F1E7917E-4784-41A9-2093-EBB09E20FA92}"/>
               </a:ext>
             </a:extLst>
           </p:cNvPr>
@@ -5593,7 +5612,7 @@
         <p:spPr>
           <a:xfrm>
             <a:off x="302449" y="1727036"/>
-            <a:ext cx="6520758" cy="1015663"/>
+            <a:ext cx="6520758" cy="534762"/>
           </a:xfrm>
           <a:prstGeom prst="rect">
             <a:avLst/>
@@ -5606,134 +5625,67 @@
           </a:bodyPr>
           <a:lstStyle/>
           <a:p>
-            <a:r>
-              <a:rPr lang="ko-KR" altLang="en-US" sz="1200" dirty="0" err="1">
-                <a:latin typeface="나눔바른고딕" panose="020B0603020101020101" pitchFamily="34" charset="-127"/>
-                <a:ea typeface="나눔바른고딕" panose="020B0603020101020101" pitchFamily="34" charset="-127"/>
-              </a:rPr>
-              <a:t>파쿠르</a:t>
-            </a:r>
-            <a:r>
-              <a:rPr lang="ko-KR" altLang="en-US" sz="1200" dirty="0">
-                <a:latin typeface="나눔바른고딕" panose="020B0603020101020101" pitchFamily="34" charset="-127"/>
-                <a:ea typeface="나눔바른고딕" panose="020B0603020101020101" pitchFamily="34" charset="-127"/>
-              </a:rPr>
-              <a:t> 시</a:t>
-            </a:r>
-            <a:r>
-              <a:rPr lang="en-US" altLang="ko-KR" sz="1200" dirty="0">
-                <a:latin typeface="나눔바른고딕" panose="020B0603020101020101" pitchFamily="34" charset="-127"/>
-                <a:ea typeface="나눔바른고딕" panose="020B0603020101020101" pitchFamily="34" charset="-127"/>
-              </a:rPr>
-              <a:t>, </a:t>
-            </a:r>
-            <a:r>
-              <a:rPr lang="ko-KR" altLang="en-US" sz="1200" dirty="0">
-                <a:latin typeface="나눔바른고딕" panose="020B0603020101020101" pitchFamily="34" charset="-127"/>
-                <a:ea typeface="나눔바른고딕" panose="020B0603020101020101" pitchFamily="34" charset="-127"/>
-              </a:rPr>
-              <a:t>대체로 매끈한 면보다는 돌출된 부분을 이용</a:t>
-            </a:r>
-            <a:endParaRPr lang="en-US" altLang="ko-KR" sz="1200" dirty="0">
+            <a:pPr marL="171450" indent="-171450">
+              <a:lnSpc>
+                <a:spcPct val="150000"/>
+              </a:lnSpc>
+              <a:buFont typeface="Arial" panose="020B0604020202020204" pitchFamily="34" charset="0"/>
+              <a:buChar char="•"/>
+            </a:pPr>
+            <a:r>
+              <a:rPr lang="ko-KR" altLang="en-US" sz="1000" dirty="0">
+                <a:latin typeface="나눔바른고딕" panose="020B0603020101020101" pitchFamily="34" charset="-127"/>
+                <a:ea typeface="나눔바른고딕" panose="020B0603020101020101" pitchFamily="34" charset="-127"/>
+              </a:rPr>
+              <a:t>벽과 벽이 직각으로 만나는 지점</a:t>
+            </a:r>
+            <a:r>
+              <a:rPr lang="en-US" altLang="ko-KR" sz="1000" dirty="0">
+                <a:latin typeface="나눔바른고딕" panose="020B0603020101020101" pitchFamily="34" charset="-127"/>
+                <a:ea typeface="나눔바른고딕" panose="020B0603020101020101" pitchFamily="34" charset="-127"/>
+              </a:rPr>
+              <a:t> </a:t>
+            </a:r>
+            <a:r>
+              <a:rPr lang="ko-KR" altLang="en-US" sz="1000" dirty="0">
+                <a:latin typeface="나눔바른고딕" panose="020B0603020101020101" pitchFamily="34" charset="-127"/>
+                <a:ea typeface="나눔바른고딕" panose="020B0603020101020101" pitchFamily="34" charset="-127"/>
+              </a:rPr>
+              <a:t>처리</a:t>
+            </a:r>
+            <a:endParaRPr lang="en-US" altLang="ko-KR" sz="1000" dirty="0">
               <a:latin typeface="나눔바른고딕" panose="020B0603020101020101" pitchFamily="34" charset="-127"/>
               <a:ea typeface="나눔바른고딕" panose="020B0603020101020101" pitchFamily="34" charset="-127"/>
             </a:endParaRPr>
           </a:p>
           <a:p>
-            <a:r>
-              <a:rPr lang="ko-KR" altLang="en-US" sz="1200" dirty="0">
-                <a:latin typeface="나눔바른고딕" panose="020B0603020101020101" pitchFamily="34" charset="-127"/>
-                <a:ea typeface="나눔바른고딕" panose="020B0603020101020101" pitchFamily="34" charset="-127"/>
-              </a:rPr>
-              <a:t>이 부분을 모사하고자 돌출부 유형을 추가</a:t>
-            </a:r>
-            <a:endParaRPr lang="en-US" altLang="ko-KR" sz="1200" dirty="0">
+            <a:pPr marL="171450" indent="-171450">
+              <a:lnSpc>
+                <a:spcPct val="150000"/>
+              </a:lnSpc>
+              <a:buFont typeface="Arial" panose="020B0604020202020204" pitchFamily="34" charset="0"/>
+              <a:buChar char="•"/>
+            </a:pPr>
+            <a:r>
+              <a:rPr lang="ko-KR" altLang="en-US" sz="1000" dirty="0">
+                <a:latin typeface="나눔바른고딕" panose="020B0603020101020101" pitchFamily="34" charset="-127"/>
+                <a:ea typeface="나눔바른고딕" panose="020B0603020101020101" pitchFamily="34" charset="-127"/>
+              </a:rPr>
+              <a:t>벽에서 타 유형의 장애물로 이동 처리</a:t>
+            </a:r>
+            <a:endParaRPr lang="en-US" altLang="ko-KR" sz="1000" dirty="0">
               <a:latin typeface="나눔바른고딕" panose="020B0603020101020101" pitchFamily="34" charset="-127"/>
               <a:ea typeface="나눔바른고딕" panose="020B0603020101020101" pitchFamily="34" charset="-127"/>
             </a:endParaRPr>
           </a:p>
-          <a:p>
-            <a:endParaRPr lang="en-US" altLang="ko-KR" sz="1200" dirty="0">
-              <a:latin typeface="나눔바른고딕" panose="020B0603020101020101" pitchFamily="34" charset="-127"/>
-              <a:ea typeface="나눔바른고딕" panose="020B0603020101020101" pitchFamily="34" charset="-127"/>
-            </a:endParaRPr>
-          </a:p>
-          <a:p>
-            <a:r>
-              <a:rPr lang="ko-KR" altLang="en-US" sz="1200" dirty="0">
-                <a:latin typeface="나눔바른고딕" panose="020B0603020101020101" pitchFamily="34" charset="-127"/>
-                <a:ea typeface="나눔바른고딕" panose="020B0603020101020101" pitchFamily="34" charset="-127"/>
-              </a:rPr>
-              <a:t>독립적으로 있진 않고</a:t>
-            </a:r>
-            <a:r>
-              <a:rPr lang="en-US" altLang="ko-KR" sz="1200" dirty="0">
-                <a:latin typeface="나눔바른고딕" panose="020B0603020101020101" pitchFamily="34" charset="-127"/>
-                <a:ea typeface="나눔바른고딕" panose="020B0603020101020101" pitchFamily="34" charset="-127"/>
-              </a:rPr>
-              <a:t>, </a:t>
-            </a:r>
-            <a:r>
-              <a:rPr lang="ko-KR" altLang="en-US" sz="1200" dirty="0">
-                <a:latin typeface="나눔바른고딕" panose="020B0603020101020101" pitchFamily="34" charset="-127"/>
-                <a:ea typeface="나눔바른고딕" panose="020B0603020101020101" pitchFamily="34" charset="-127"/>
-              </a:rPr>
-              <a:t>다른 장애물에 부속으로 추가된 형태</a:t>
-            </a:r>
-            <a:endParaRPr lang="en-US" altLang="ko-KR" sz="1200" dirty="0">
-              <a:latin typeface="나눔바른고딕" panose="020B0603020101020101" pitchFamily="34" charset="-127"/>
-              <a:ea typeface="나눔바른고딕" panose="020B0603020101020101" pitchFamily="34" charset="-127"/>
-            </a:endParaRPr>
-          </a:p>
-          <a:p>
-            <a:r>
-              <a:rPr lang="ko-KR" altLang="en-US" sz="1200" dirty="0">
-                <a:latin typeface="나눔바른고딕" panose="020B0603020101020101" pitchFamily="34" charset="-127"/>
-                <a:ea typeface="나눔바른고딕" panose="020B0603020101020101" pitchFamily="34" charset="-127"/>
-              </a:rPr>
-              <a:t>장애물 인식 시</a:t>
-            </a:r>
-            <a:r>
-              <a:rPr lang="en-US" altLang="ko-KR" sz="1200" dirty="0">
-                <a:latin typeface="나눔바른고딕" panose="020B0603020101020101" pitchFamily="34" charset="-127"/>
-                <a:ea typeface="나눔바른고딕" panose="020B0603020101020101" pitchFamily="34" charset="-127"/>
-              </a:rPr>
-              <a:t>, </a:t>
-            </a:r>
-            <a:r>
-              <a:rPr lang="ko-KR" altLang="en-US" sz="1200" dirty="0">
-                <a:latin typeface="나눔바른고딕" panose="020B0603020101020101" pitchFamily="34" charset="-127"/>
-                <a:ea typeface="나눔바른고딕" panose="020B0603020101020101" pitchFamily="34" charset="-127"/>
-              </a:rPr>
-              <a:t>우선해서 인식처리 </a:t>
-            </a:r>
-            <a:r>
-              <a:rPr lang="en-US" altLang="ko-KR" sz="1200" dirty="0">
-                <a:latin typeface="나눔바른고딕" panose="020B0603020101020101" pitchFamily="34" charset="-127"/>
-                <a:ea typeface="나눔바른고딕" panose="020B0603020101020101" pitchFamily="34" charset="-127"/>
-              </a:rPr>
-              <a:t>-&gt; </a:t>
-            </a:r>
-            <a:r>
-              <a:rPr lang="ko-KR" altLang="en-US" sz="1200" dirty="0">
-                <a:latin typeface="나눔바른고딕" panose="020B0603020101020101" pitchFamily="34" charset="-127"/>
-                <a:ea typeface="나눔바른고딕" panose="020B0603020101020101" pitchFamily="34" charset="-127"/>
-              </a:rPr>
-              <a:t>인식 과정에서 우선순위 적용</a:t>
-            </a:r>
-            <a:endParaRPr lang="en-US" altLang="ko-KR" sz="1200" dirty="0">
-              <a:latin typeface="나눔바른고딕" panose="020B0603020101020101" pitchFamily="34" charset="-127"/>
-              <a:ea typeface="나눔바른고딕" panose="020B0603020101020101" pitchFamily="34" charset="-127"/>
-            </a:endParaRPr>
-          </a:p>
-        </p:txBody>
-      </p:sp>
-      <p:sp>
-        <p:nvSpPr>
-          <p:cNvPr id="4" name="직사각형 3">
-            <a:extLst>
-              <a:ext uri="{FF2B5EF4-FFF2-40B4-BE49-F238E27FC236}">
-                <a16:creationId xmlns:a16="http://schemas.microsoft.com/office/drawing/2014/main" xmlns="" id="{05832E80-A59D-9F14-5DAB-D51BFF4C47A1}"/>
+        </p:txBody>
+      </p:sp>
+      <p:sp>
+        <p:nvSpPr>
+          <p:cNvPr id="6" name="직사각형 5">
+            <a:extLst>
+              <a:ext uri="{FF2B5EF4-FFF2-40B4-BE49-F238E27FC236}">
+                <a16:creationId xmlns:a16="http://schemas.microsoft.com/office/drawing/2014/main" id="{3F35F08D-DD82-F45A-D8E5-8EA725EDCBBA}"/>
               </a:ext>
             </a:extLst>
           </p:cNvPr>
@@ -5742,8 +5694,8 @@
         </p:nvSpPr>
         <p:spPr>
           <a:xfrm>
-            <a:off x="1333769" y="3429000"/>
-            <a:ext cx="4246075" cy="2576884"/>
+            <a:off x="492659" y="2938799"/>
+            <a:ext cx="3526891" cy="3100493"/>
           </a:xfrm>
           <a:prstGeom prst="rect">
             <a:avLst/>
@@ -5772,21 +5724,18 @@
             <a:pPr algn="ctr"/>
             <a:r>
               <a:rPr lang="ko-KR" altLang="en-US" dirty="0"/>
-              <a:t>적용 영상 </a:t>
-            </a:r>
-            <a:r>
-              <a:rPr lang="en-US" altLang="ko-KR" dirty="0"/>
-              <a:t>1</a:t>
-            </a:r>
-          </a:p>
-        </p:txBody>
-      </p:sp>
-      <p:sp>
-        <p:nvSpPr>
-          <p:cNvPr id="6" name="직사각형 5">
-            <a:extLst>
-              <a:ext uri="{FF2B5EF4-FFF2-40B4-BE49-F238E27FC236}">
-                <a16:creationId xmlns:a16="http://schemas.microsoft.com/office/drawing/2014/main" xmlns="" id="{57E9570B-25D7-061D-8946-9CCEBBC71B1A}"/>
+              <a:t>적용 영상</a:t>
+            </a:r>
+            <a:endParaRPr lang="en-US" altLang="ko-KR" dirty="0"/>
+          </a:p>
+        </p:txBody>
+      </p:sp>
+      <p:sp>
+        <p:nvSpPr>
+          <p:cNvPr id="9" name="직사각형 8">
+            <a:extLst>
+              <a:ext uri="{FF2B5EF4-FFF2-40B4-BE49-F238E27FC236}">
+                <a16:creationId xmlns:a16="http://schemas.microsoft.com/office/drawing/2014/main" id="{3E4D5AC4-8D06-5712-A101-F0119000DEBA}"/>
               </a:ext>
             </a:extLst>
           </p:cNvPr>
@@ -5795,8 +5744,8 @@
         </p:nvSpPr>
         <p:spPr>
           <a:xfrm>
-            <a:off x="6096000" y="3429000"/>
-            <a:ext cx="4246075" cy="2576884"/>
+            <a:off x="4387668" y="2938799"/>
+            <a:ext cx="3321413" cy="3100493"/>
           </a:xfrm>
           <a:prstGeom prst="rect">
             <a:avLst/>
@@ -5825,19 +5774,235 @@
             <a:pPr algn="ctr"/>
             <a:r>
               <a:rPr lang="ko-KR" altLang="en-US" dirty="0"/>
-              <a:t>적용 영상 </a:t>
-            </a:r>
-            <a:r>
-              <a:rPr lang="en-US" altLang="ko-KR" dirty="0"/>
-              <a:t>2</a:t>
-            </a:r>
+              <a:t>적용 영상</a:t>
+            </a:r>
+            <a:endParaRPr lang="en-US" altLang="ko-KR" dirty="0"/>
+          </a:p>
+        </p:txBody>
+      </p:sp>
+      <p:sp>
+        <p:nvSpPr>
+          <p:cNvPr id="14" name="직사각형 13">
+            <a:extLst>
+              <a:ext uri="{FF2B5EF4-FFF2-40B4-BE49-F238E27FC236}">
+                <a16:creationId xmlns:a16="http://schemas.microsoft.com/office/drawing/2014/main" id="{98CCA766-9AC9-2EEC-B9DD-7787F79AA636}"/>
+              </a:ext>
+            </a:extLst>
+          </p:cNvPr>
+          <p:cNvSpPr/>
+          <p:nvPr/>
+        </p:nvSpPr>
+        <p:spPr>
+          <a:xfrm>
+            <a:off x="8077199" y="2938798"/>
+            <a:ext cx="3321413" cy="3100493"/>
+          </a:xfrm>
+          <a:prstGeom prst="rect">
+            <a:avLst/>
+          </a:prstGeom>
+        </p:spPr>
+        <p:style>
+          <a:lnRef idx="2">
+            <a:schemeClr val="accent1">
+              <a:shade val="15000"/>
+            </a:schemeClr>
+          </a:lnRef>
+          <a:fillRef idx="1">
+            <a:schemeClr val="accent1"/>
+          </a:fillRef>
+          <a:effectRef idx="0">
+            <a:schemeClr val="accent1"/>
+          </a:effectRef>
+          <a:fontRef idx="minor">
+            <a:schemeClr val="lt1"/>
+          </a:fontRef>
+        </p:style>
+        <p:txBody>
+          <a:bodyPr rtlCol="0" anchor="ctr"/>
+          <a:lstStyle/>
+          <a:p>
+            <a:pPr algn="ctr"/>
+            <a:r>
+              <a:rPr lang="ko-KR" altLang="en-US" dirty="0"/>
+              <a:t>적용 영상</a:t>
+            </a:r>
+            <a:endParaRPr lang="en-US" altLang="ko-KR" dirty="0"/>
+          </a:p>
+        </p:txBody>
+      </p:sp>
+      <p:sp>
+        <p:nvSpPr>
+          <p:cNvPr id="16" name="TextBox 15">
+            <a:extLst>
+              <a:ext uri="{FF2B5EF4-FFF2-40B4-BE49-F238E27FC236}">
+                <a16:creationId xmlns:a16="http://schemas.microsoft.com/office/drawing/2014/main" id="{AB6026D7-A120-FF74-5E5D-93C3739BC359}"/>
+              </a:ext>
+            </a:extLst>
+          </p:cNvPr>
+          <p:cNvSpPr txBox="1"/>
+          <p:nvPr/>
+        </p:nvSpPr>
+        <p:spPr>
+          <a:xfrm>
+            <a:off x="1635472" y="2578851"/>
+            <a:ext cx="1241264" cy="303929"/>
+          </a:xfrm>
+          <a:prstGeom prst="rect">
+            <a:avLst/>
+          </a:prstGeom>
+          <a:noFill/>
+        </p:spPr>
+        <p:txBody>
+          <a:bodyPr wrap="square">
+            <a:spAutoFit/>
+          </a:bodyPr>
+          <a:lstStyle/>
+          <a:p>
+            <a:pPr algn="ctr">
+              <a:lnSpc>
+                <a:spcPct val="150000"/>
+              </a:lnSpc>
+            </a:pPr>
+            <a:r>
+              <a:rPr lang="ko-KR" altLang="en-US" sz="1000" dirty="0">
+                <a:latin typeface="나눔바른고딕" panose="020B0603020101020101" pitchFamily="34" charset="-127"/>
+                <a:ea typeface="나눔바른고딕" panose="020B0603020101020101" pitchFamily="34" charset="-127"/>
+              </a:rPr>
+              <a:t>직각 인접 지점 처리</a:t>
+            </a:r>
+            <a:endParaRPr lang="en-US" altLang="ko-KR" sz="1000" dirty="0">
+              <a:latin typeface="나눔바른고딕" panose="020B0603020101020101" pitchFamily="34" charset="-127"/>
+              <a:ea typeface="나눔바른고딕" panose="020B0603020101020101" pitchFamily="34" charset="-127"/>
+            </a:endParaRPr>
+          </a:p>
+        </p:txBody>
+      </p:sp>
+      <p:sp>
+        <p:nvSpPr>
+          <p:cNvPr id="18" name="TextBox 17">
+            <a:extLst>
+              <a:ext uri="{FF2B5EF4-FFF2-40B4-BE49-F238E27FC236}">
+                <a16:creationId xmlns:a16="http://schemas.microsoft.com/office/drawing/2014/main" id="{3BC51132-2956-62DF-6A9A-6D4F365FAE02}"/>
+              </a:ext>
+            </a:extLst>
+          </p:cNvPr>
+          <p:cNvSpPr txBox="1"/>
+          <p:nvPr/>
+        </p:nvSpPr>
+        <p:spPr>
+          <a:xfrm>
+            <a:off x="5267496" y="2578849"/>
+            <a:ext cx="1459017" cy="303929"/>
+          </a:xfrm>
+          <a:prstGeom prst="rect">
+            <a:avLst/>
+          </a:prstGeom>
+          <a:noFill/>
+        </p:spPr>
+        <p:txBody>
+          <a:bodyPr wrap="square">
+            <a:spAutoFit/>
+          </a:bodyPr>
+          <a:lstStyle/>
+          <a:p>
+            <a:pPr algn="ctr">
+              <a:lnSpc>
+                <a:spcPct val="150000"/>
+              </a:lnSpc>
+            </a:pPr>
+            <a:r>
+              <a:rPr lang="ko-KR" altLang="en-US" sz="1000" dirty="0">
+                <a:latin typeface="나눔바른고딕" panose="020B0603020101020101" pitchFamily="34" charset="-127"/>
+                <a:ea typeface="나눔바른고딕" panose="020B0603020101020101" pitchFamily="34" charset="-127"/>
+              </a:rPr>
+              <a:t>벽</a:t>
+            </a:r>
+            <a:r>
+              <a:rPr lang="en-US" altLang="ko-KR" sz="1000" dirty="0">
+                <a:latin typeface="나눔바른고딕" panose="020B0603020101020101" pitchFamily="34" charset="-127"/>
+                <a:ea typeface="나눔바른고딕" panose="020B0603020101020101" pitchFamily="34" charset="-127"/>
+              </a:rPr>
+              <a:t>-</a:t>
+            </a:r>
+            <a:r>
+              <a:rPr lang="ko-KR" altLang="en-US" sz="1000" dirty="0">
+                <a:latin typeface="나눔바른고딕" panose="020B0603020101020101" pitchFamily="34" charset="-127"/>
+                <a:ea typeface="나눔바른고딕" panose="020B0603020101020101" pitchFamily="34" charset="-127"/>
+              </a:rPr>
+              <a:t>사이드 장애물 처리</a:t>
+            </a:r>
+            <a:endParaRPr lang="en-US" altLang="ko-KR" sz="1000" dirty="0">
+              <a:latin typeface="나눔바른고딕" panose="020B0603020101020101" pitchFamily="34" charset="-127"/>
+              <a:ea typeface="나눔바른고딕" panose="020B0603020101020101" pitchFamily="34" charset="-127"/>
+            </a:endParaRPr>
+          </a:p>
+        </p:txBody>
+      </p:sp>
+      <p:sp>
+        <p:nvSpPr>
+          <p:cNvPr id="22" name="TextBox 21">
+            <a:extLst>
+              <a:ext uri="{FF2B5EF4-FFF2-40B4-BE49-F238E27FC236}">
+                <a16:creationId xmlns:a16="http://schemas.microsoft.com/office/drawing/2014/main" id="{815C08F5-5D1C-98CC-488F-527FB900C200}"/>
+              </a:ext>
+            </a:extLst>
+          </p:cNvPr>
+          <p:cNvSpPr txBox="1"/>
+          <p:nvPr/>
+        </p:nvSpPr>
+        <p:spPr>
+          <a:xfrm>
+            <a:off x="9117273" y="2578850"/>
+            <a:ext cx="1241264" cy="303929"/>
+          </a:xfrm>
+          <a:prstGeom prst="rect">
+            <a:avLst/>
+          </a:prstGeom>
+          <a:noFill/>
+        </p:spPr>
+        <p:txBody>
+          <a:bodyPr wrap="square">
+            <a:spAutoFit/>
+          </a:bodyPr>
+          <a:lstStyle/>
+          <a:p>
+            <a:pPr algn="ctr">
+              <a:lnSpc>
+                <a:spcPct val="150000"/>
+              </a:lnSpc>
+            </a:pPr>
+            <a:r>
+              <a:rPr lang="ko-KR" altLang="en-US" sz="1000" dirty="0">
+                <a:latin typeface="나눔바른고딕" panose="020B0603020101020101" pitchFamily="34" charset="-127"/>
+                <a:ea typeface="나눔바른고딕" panose="020B0603020101020101" pitchFamily="34" charset="-127"/>
+              </a:rPr>
+              <a:t>벽</a:t>
+            </a:r>
+            <a:r>
+              <a:rPr lang="en-US" altLang="ko-KR" sz="1000" dirty="0">
+                <a:latin typeface="나눔바른고딕" panose="020B0603020101020101" pitchFamily="34" charset="-127"/>
+                <a:ea typeface="나눔바른고딕" panose="020B0603020101020101" pitchFamily="34" charset="-127"/>
+              </a:rPr>
+              <a:t>-Beam </a:t>
+            </a:r>
+            <a:r>
+              <a:rPr lang="ko-KR" altLang="en-US" sz="1000" dirty="0">
+                <a:latin typeface="나눔바른고딕" panose="020B0603020101020101" pitchFamily="34" charset="-127"/>
+                <a:ea typeface="나눔바른고딕" panose="020B0603020101020101" pitchFamily="34" charset="-127"/>
+              </a:rPr>
+              <a:t>지형 이동</a:t>
+            </a:r>
+            <a:endParaRPr lang="en-US" altLang="ko-KR" sz="1000" dirty="0">
+              <a:latin typeface="나눔바른고딕" panose="020B0603020101020101" pitchFamily="34" charset="-127"/>
+              <a:ea typeface="나눔바른고딕" panose="020B0603020101020101" pitchFamily="34" charset="-127"/>
+            </a:endParaRPr>
           </a:p>
         </p:txBody>
       </p:sp>
     </p:spTree>
     <p:extLst>
       <p:ext uri="{BB962C8B-B14F-4D97-AF65-F5344CB8AC3E}">
-        <p14:creationId xmlns:p14="http://schemas.microsoft.com/office/powerpoint/2010/main" val="1939725433"/>
+        <p14:creationId xmlns:p14="http://schemas.microsoft.com/office/powerpoint/2010/main" val="115514861"/>
       </p:ext>
     </p:extLst>
   </p:cSld>
@@ -5855,7 +6020,7 @@
         <p:cNvPr id="1" name="">
           <a:extLst>
             <a:ext uri="{FF2B5EF4-FFF2-40B4-BE49-F238E27FC236}">
-              <a16:creationId xmlns:a16="http://schemas.microsoft.com/office/drawing/2014/main" xmlns="" id="{D03477D4-BD5D-3DBD-B86A-E6378477802E}"/>
+              <a16:creationId xmlns:a16="http://schemas.microsoft.com/office/drawing/2014/main" id="{D72E2D3C-D67E-389C-8B5D-2E66EC8AE8D9}"/>
             </a:ext>
           </a:extLst>
         </p:cNvPr>
@@ -5875,7 +6040,7 @@
           <p:cNvPr id="8" name="TextBox 7">
             <a:extLst>
               <a:ext uri="{FF2B5EF4-FFF2-40B4-BE49-F238E27FC236}">
-                <a16:creationId xmlns:a16="http://schemas.microsoft.com/office/drawing/2014/main" xmlns="" id="{4B3D4C48-C9B6-2723-62D6-3C3423234E28}"/>
+                <a16:creationId xmlns:a16="http://schemas.microsoft.com/office/drawing/2014/main" id="{890A0E75-A5AA-F7AB-A801-B2F2FF950B0E}"/>
               </a:ext>
             </a:extLst>
           </p:cNvPr>
@@ -5917,7 +6082,7 @@
           <p:cNvPr id="10" name="TextBox 9">
             <a:extLst>
               <a:ext uri="{FF2B5EF4-FFF2-40B4-BE49-F238E27FC236}">
-                <a16:creationId xmlns:a16="http://schemas.microsoft.com/office/drawing/2014/main" xmlns="" id="{CBE7561B-2601-8964-C60A-A06666E075AB}"/>
+                <a16:creationId xmlns:a16="http://schemas.microsoft.com/office/drawing/2014/main" id="{AF587D1D-A0BD-C302-295B-E7751EB032EF}"/>
               </a:ext>
             </a:extLst>
           </p:cNvPr>
@@ -5959,7 +6124,7 @@
           <p:cNvPr id="3" name="직선 연결선 2">
             <a:extLst>
               <a:ext uri="{FF2B5EF4-FFF2-40B4-BE49-F238E27FC236}">
-                <a16:creationId xmlns:a16="http://schemas.microsoft.com/office/drawing/2014/main" xmlns="" id="{FF4DFF75-B56F-0D06-5F2D-FAA6D843192E}"/>
+                <a16:creationId xmlns:a16="http://schemas.microsoft.com/office/drawing/2014/main" id="{7117F9F2-0758-5878-BE9B-248BB92DF383}"/>
               </a:ext>
             </a:extLst>
           </p:cNvPr>
@@ -6002,7 +6167,7 @@
           <p:cNvPr id="12" name="직사각형 11">
             <a:extLst>
               <a:ext uri="{FF2B5EF4-FFF2-40B4-BE49-F238E27FC236}">
-                <a16:creationId xmlns:a16="http://schemas.microsoft.com/office/drawing/2014/main" xmlns="" id="{0DF710DC-46C3-282A-F05D-2E1E8F2688E5}"/>
+                <a16:creationId xmlns:a16="http://schemas.microsoft.com/office/drawing/2014/main" id="{DA601187-C0A6-B0D1-82CA-2DBC6FD5DB1E}"/>
               </a:ext>
             </a:extLst>
           </p:cNvPr>
@@ -6101,7 +6266,7 @@
           <p:cNvPr id="13" name="TextBox 12">
             <a:extLst>
               <a:ext uri="{FF2B5EF4-FFF2-40B4-BE49-F238E27FC236}">
-                <a16:creationId xmlns:a16="http://schemas.microsoft.com/office/drawing/2014/main" xmlns="" id="{75AE084B-0F8B-85C4-24B9-65173EE9AF3C}"/>
+                <a16:creationId xmlns:a16="http://schemas.microsoft.com/office/drawing/2014/main" id="{4EB78774-6333-8AD0-E6D1-CAB9471C443D}"/>
               </a:ext>
             </a:extLst>
           </p:cNvPr>
@@ -6111,7 +6276,7 @@
         <p:spPr>
           <a:xfrm>
             <a:off x="302449" y="1342316"/>
-            <a:ext cx="7464813" cy="276999"/>
+            <a:ext cx="7464813" cy="346249"/>
           </a:xfrm>
           <a:prstGeom prst="rect">
             <a:avLst/>
@@ -6124,6 +6289,11 @@
           </a:bodyPr>
           <a:lstStyle/>
           <a:p>
+            <a:pPr>
+              <a:lnSpc>
+                <a:spcPct val="150000"/>
+              </a:lnSpc>
+            </a:pPr>
             <a:r>
               <a:rPr lang="ko-KR" altLang="en-US" sz="1200" dirty="0">
                 <a:latin typeface="나눔바른고딕" panose="020B0603020101020101" pitchFamily="34" charset="-127"/>
@@ -6136,14 +6306,14 @@
                 <a:latin typeface="나눔바른고딕" panose="020B0603020101020101" pitchFamily="34" charset="-127"/>
                 <a:ea typeface="나눔바른고딕" panose="020B0603020101020101" pitchFamily="34" charset="-127"/>
               </a:rPr>
-              <a:t>1. </a:t>
+              <a:t>2. </a:t>
             </a:r>
             <a:r>
               <a:rPr lang="ko-KR" altLang="en-US" sz="1200" dirty="0">
                 <a:latin typeface="나눔바른고딕" panose="020B0603020101020101" pitchFamily="34" charset="-127"/>
                 <a:ea typeface="나눔바른고딕" panose="020B0603020101020101" pitchFamily="34" charset="-127"/>
               </a:rPr>
-              <a:t>단순 절벽</a:t>
+              <a:t>옥상에서 장애물 처리 및 낙하</a:t>
             </a:r>
             <a:endParaRPr lang="en-US" altLang="ko-KR" sz="1200" dirty="0">
               <a:latin typeface="나눔바른고딕" panose="020B0603020101020101" pitchFamily="34" charset="-127"/>
@@ -6152,10 +6322,179 @@
           </a:p>
         </p:txBody>
       </p:sp>
+      <p:sp>
+        <p:nvSpPr>
+          <p:cNvPr id="4" name="TextBox 3">
+            <a:extLst>
+              <a:ext uri="{FF2B5EF4-FFF2-40B4-BE49-F238E27FC236}">
+                <a16:creationId xmlns:a16="http://schemas.microsoft.com/office/drawing/2014/main" id="{183CFF83-8DBC-3394-F974-884765AC9270}"/>
+              </a:ext>
+            </a:extLst>
+          </p:cNvPr>
+          <p:cNvSpPr txBox="1"/>
+          <p:nvPr/>
+        </p:nvSpPr>
+        <p:spPr>
+          <a:xfrm>
+            <a:off x="302449" y="1727036"/>
+            <a:ext cx="6520758" cy="534762"/>
+          </a:xfrm>
+          <a:prstGeom prst="rect">
+            <a:avLst/>
+          </a:prstGeom>
+          <a:noFill/>
+        </p:spPr>
+        <p:txBody>
+          <a:bodyPr wrap="square">
+            <a:spAutoFit/>
+          </a:bodyPr>
+          <a:lstStyle/>
+          <a:p>
+            <a:pPr marL="171450" indent="-171450">
+              <a:lnSpc>
+                <a:spcPct val="150000"/>
+              </a:lnSpc>
+              <a:buFont typeface="Arial" panose="020B0604020202020204" pitchFamily="34" charset="0"/>
+              <a:buChar char="•"/>
+            </a:pPr>
+            <a:r>
+              <a:rPr lang="ko-KR" altLang="en-US" sz="1000" dirty="0">
+                <a:latin typeface="나눔바른고딕" panose="020B0603020101020101" pitchFamily="34" charset="-127"/>
+                <a:ea typeface="나눔바른고딕" panose="020B0603020101020101" pitchFamily="34" charset="-127"/>
+              </a:rPr>
+              <a:t>옥상으로 오를 때 처리</a:t>
+            </a:r>
+            <a:endParaRPr lang="en-US" altLang="ko-KR" sz="1000" dirty="0">
+              <a:latin typeface="나눔바른고딕" panose="020B0603020101020101" pitchFamily="34" charset="-127"/>
+              <a:ea typeface="나눔바른고딕" panose="020B0603020101020101" pitchFamily="34" charset="-127"/>
+            </a:endParaRPr>
+          </a:p>
+          <a:p>
+            <a:pPr marL="171450" indent="-171450">
+              <a:lnSpc>
+                <a:spcPct val="150000"/>
+              </a:lnSpc>
+              <a:buFont typeface="Arial" panose="020B0604020202020204" pitchFamily="34" charset="0"/>
+              <a:buChar char="•"/>
+            </a:pPr>
+            <a:r>
+              <a:rPr lang="ko-KR" altLang="en-US" sz="1000" dirty="0">
+                <a:latin typeface="나눔바른고딕" panose="020B0603020101020101" pitchFamily="34" charset="-127"/>
+                <a:ea typeface="나눔바른고딕" panose="020B0603020101020101" pitchFamily="34" charset="-127"/>
+              </a:rPr>
+              <a:t>옥상이라 생각하고 오른 후 낙하 처리</a:t>
+            </a:r>
+            <a:endParaRPr lang="en-US" altLang="ko-KR" sz="1000" dirty="0">
+              <a:latin typeface="나눔바른고딕" panose="020B0603020101020101" pitchFamily="34" charset="-127"/>
+              <a:ea typeface="나눔바른고딕" panose="020B0603020101020101" pitchFamily="34" charset="-127"/>
+            </a:endParaRPr>
+          </a:p>
+        </p:txBody>
+      </p:sp>
+      <p:sp>
+        <p:nvSpPr>
+          <p:cNvPr id="6" name="직사각형 5">
+            <a:extLst>
+              <a:ext uri="{FF2B5EF4-FFF2-40B4-BE49-F238E27FC236}">
+                <a16:creationId xmlns:a16="http://schemas.microsoft.com/office/drawing/2014/main" id="{A8F0E71C-2973-95DC-9192-059ED12DC5CA}"/>
+              </a:ext>
+            </a:extLst>
+          </p:cNvPr>
+          <p:cNvSpPr/>
+          <p:nvPr/>
+        </p:nvSpPr>
+        <p:spPr>
+          <a:xfrm>
+            <a:off x="978434" y="2938799"/>
+            <a:ext cx="4879441" cy="3100493"/>
+          </a:xfrm>
+          <a:prstGeom prst="rect">
+            <a:avLst/>
+          </a:prstGeom>
+        </p:spPr>
+        <p:style>
+          <a:lnRef idx="2">
+            <a:schemeClr val="accent1">
+              <a:shade val="15000"/>
+            </a:schemeClr>
+          </a:lnRef>
+          <a:fillRef idx="1">
+            <a:schemeClr val="accent1"/>
+          </a:fillRef>
+          <a:effectRef idx="0">
+            <a:schemeClr val="accent1"/>
+          </a:effectRef>
+          <a:fontRef idx="minor">
+            <a:schemeClr val="lt1"/>
+          </a:fontRef>
+        </p:style>
+        <p:txBody>
+          <a:bodyPr rtlCol="0" anchor="ctr"/>
+          <a:lstStyle/>
+          <a:p>
+            <a:pPr algn="ctr"/>
+            <a:r>
+              <a:rPr lang="ko-KR" altLang="en-US" dirty="0"/>
+              <a:t>적용 영상</a:t>
+            </a:r>
+            <a:endParaRPr lang="en-US" altLang="ko-KR" dirty="0"/>
+          </a:p>
+        </p:txBody>
+      </p:sp>
+      <p:sp>
+        <p:nvSpPr>
+          <p:cNvPr id="9" name="직사각형 8">
+            <a:extLst>
+              <a:ext uri="{FF2B5EF4-FFF2-40B4-BE49-F238E27FC236}">
+                <a16:creationId xmlns:a16="http://schemas.microsoft.com/office/drawing/2014/main" id="{8984EF3C-919E-9A76-250C-754406747D81}"/>
+              </a:ext>
+            </a:extLst>
+          </p:cNvPr>
+          <p:cNvSpPr/>
+          <p:nvPr/>
+        </p:nvSpPr>
+        <p:spPr>
+          <a:xfrm>
+            <a:off x="6479812" y="2938799"/>
+            <a:ext cx="4879441" cy="3100493"/>
+          </a:xfrm>
+          <a:prstGeom prst="rect">
+            <a:avLst/>
+          </a:prstGeom>
+        </p:spPr>
+        <p:style>
+          <a:lnRef idx="2">
+            <a:schemeClr val="accent1">
+              <a:shade val="15000"/>
+            </a:schemeClr>
+          </a:lnRef>
+          <a:fillRef idx="1">
+            <a:schemeClr val="accent1"/>
+          </a:fillRef>
+          <a:effectRef idx="0">
+            <a:schemeClr val="accent1"/>
+          </a:effectRef>
+          <a:fontRef idx="minor">
+            <a:schemeClr val="lt1"/>
+          </a:fontRef>
+        </p:style>
+        <p:txBody>
+          <a:bodyPr rtlCol="0" anchor="ctr"/>
+          <a:lstStyle/>
+          <a:p>
+            <a:pPr algn="ctr"/>
+            <a:r>
+              <a:rPr lang="ko-KR" altLang="en-US" dirty="0"/>
+              <a:t>적용 영상</a:t>
+            </a:r>
+            <a:endParaRPr lang="en-US" altLang="ko-KR" dirty="0"/>
+          </a:p>
+        </p:txBody>
+      </p:sp>
     </p:spTree>
     <p:extLst>
       <p:ext uri="{BB962C8B-B14F-4D97-AF65-F5344CB8AC3E}">
-        <p14:creationId xmlns:p14="http://schemas.microsoft.com/office/powerpoint/2010/main" val="115514861"/>
+        <p14:creationId xmlns:p14="http://schemas.microsoft.com/office/powerpoint/2010/main" val="4035459805"/>
       </p:ext>
     </p:extLst>
   </p:cSld>
@@ -6173,7 +6512,7 @@
         <p:cNvPr id="1" name="">
           <a:extLst>
             <a:ext uri="{FF2B5EF4-FFF2-40B4-BE49-F238E27FC236}">
-              <a16:creationId xmlns:a16="http://schemas.microsoft.com/office/drawing/2014/main" xmlns="" id="{D72E2D3C-D67E-389C-8B5D-2E66EC8AE8D9}"/>
+              <a16:creationId xmlns:a16="http://schemas.microsoft.com/office/drawing/2014/main" id="{19CD7694-15C9-2B5F-2454-CCD6068E8F16}"/>
             </a:ext>
           </a:extLst>
         </p:cNvPr>
@@ -6193,7 +6532,7 @@
           <p:cNvPr id="8" name="TextBox 7">
             <a:extLst>
               <a:ext uri="{FF2B5EF4-FFF2-40B4-BE49-F238E27FC236}">
-                <a16:creationId xmlns:a16="http://schemas.microsoft.com/office/drawing/2014/main" xmlns="" id="{890A0E75-A5AA-F7AB-A801-B2F2FF950B0E}"/>
+                <a16:creationId xmlns:a16="http://schemas.microsoft.com/office/drawing/2014/main" id="{4AEECA0C-9A32-F3E5-E975-1FDB1339F910}"/>
               </a:ext>
             </a:extLst>
           </p:cNvPr>
@@ -6235,7 +6574,7 @@
           <p:cNvPr id="10" name="TextBox 9">
             <a:extLst>
               <a:ext uri="{FF2B5EF4-FFF2-40B4-BE49-F238E27FC236}">
-                <a16:creationId xmlns:a16="http://schemas.microsoft.com/office/drawing/2014/main" xmlns="" id="{AF587D1D-A0BD-C302-295B-E7751EB032EF}"/>
+                <a16:creationId xmlns:a16="http://schemas.microsoft.com/office/drawing/2014/main" id="{5C94AD87-D564-2675-2F05-8F123D604850}"/>
               </a:ext>
             </a:extLst>
           </p:cNvPr>
@@ -6277,7 +6616,7 @@
           <p:cNvPr id="3" name="직선 연결선 2">
             <a:extLst>
               <a:ext uri="{FF2B5EF4-FFF2-40B4-BE49-F238E27FC236}">
-                <a16:creationId xmlns:a16="http://schemas.microsoft.com/office/drawing/2014/main" xmlns="" id="{7117F9F2-0758-5878-BE9B-248BB92DF383}"/>
+                <a16:creationId xmlns:a16="http://schemas.microsoft.com/office/drawing/2014/main" id="{AEC0AE64-6745-F3AF-9F4D-3B0CF04F6912}"/>
               </a:ext>
             </a:extLst>
           </p:cNvPr>
@@ -6320,7 +6659,7 @@
           <p:cNvPr id="12" name="직사각형 11">
             <a:extLst>
               <a:ext uri="{FF2B5EF4-FFF2-40B4-BE49-F238E27FC236}">
-                <a16:creationId xmlns:a16="http://schemas.microsoft.com/office/drawing/2014/main" xmlns="" id="{DA601187-C0A6-B0D1-82CA-2DBC6FD5DB1E}"/>
+                <a16:creationId xmlns:a16="http://schemas.microsoft.com/office/drawing/2014/main" id="{02400626-BD59-190A-81E2-83D54499C5F9}"/>
               </a:ext>
             </a:extLst>
           </p:cNvPr>
@@ -6419,7 +6758,7 @@
           <p:cNvPr id="13" name="TextBox 12">
             <a:extLst>
               <a:ext uri="{FF2B5EF4-FFF2-40B4-BE49-F238E27FC236}">
-                <a16:creationId xmlns:a16="http://schemas.microsoft.com/office/drawing/2014/main" xmlns="" id="{4EB78774-6333-8AD0-E6D1-CAB9471C443D}"/>
+                <a16:creationId xmlns:a16="http://schemas.microsoft.com/office/drawing/2014/main" id="{61CE754C-ED0F-6AE7-84F9-D34590444436}"/>
               </a:ext>
             </a:extLst>
           </p:cNvPr>
@@ -6429,7 +6768,7 @@
         <p:spPr>
           <a:xfrm>
             <a:off x="302449" y="1342316"/>
-            <a:ext cx="7464813" cy="276999"/>
+            <a:ext cx="7464813" cy="346249"/>
           </a:xfrm>
           <a:prstGeom prst="rect">
             <a:avLst/>
@@ -6442,6 +6781,11 @@
           </a:bodyPr>
           <a:lstStyle/>
           <a:p>
+            <a:pPr>
+              <a:lnSpc>
+                <a:spcPct val="150000"/>
+              </a:lnSpc>
+            </a:pPr>
             <a:r>
               <a:rPr lang="ko-KR" altLang="en-US" sz="1200" dirty="0">
                 <a:latin typeface="나눔바른고딕" panose="020B0603020101020101" pitchFamily="34" charset="-127"/>
@@ -6454,14 +6798,14 @@
                 <a:latin typeface="나눔바른고딕" panose="020B0603020101020101" pitchFamily="34" charset="-127"/>
                 <a:ea typeface="나눔바른고딕" panose="020B0603020101020101" pitchFamily="34" charset="-127"/>
               </a:rPr>
-              <a:t>2. </a:t>
+              <a:t>3. </a:t>
             </a:r>
             <a:r>
               <a:rPr lang="ko-KR" altLang="en-US" sz="1200" dirty="0">
                 <a:latin typeface="나눔바른고딕" panose="020B0603020101020101" pitchFamily="34" charset="-127"/>
                 <a:ea typeface="나눔바른고딕" panose="020B0603020101020101" pitchFamily="34" charset="-127"/>
               </a:rPr>
-              <a:t>옥상에서 장애물 처리 및 낙하</a:t>
+              <a:t>공중에서 타 장애물 캐치</a:t>
             </a:r>
             <a:endParaRPr lang="en-US" altLang="ko-KR" sz="1200" dirty="0">
               <a:latin typeface="나눔바른고딕" panose="020B0603020101020101" pitchFamily="34" charset="-127"/>
@@ -6470,10 +6814,237 @@
           </a:p>
         </p:txBody>
       </p:sp>
+      <p:sp>
+        <p:nvSpPr>
+          <p:cNvPr id="4" name="TextBox 3">
+            <a:extLst>
+              <a:ext uri="{FF2B5EF4-FFF2-40B4-BE49-F238E27FC236}">
+                <a16:creationId xmlns:a16="http://schemas.microsoft.com/office/drawing/2014/main" id="{4C509943-A52F-72DA-8819-BCDD85377B73}"/>
+              </a:ext>
+            </a:extLst>
+          </p:cNvPr>
+          <p:cNvSpPr txBox="1"/>
+          <p:nvPr/>
+        </p:nvSpPr>
+        <p:spPr>
+          <a:xfrm>
+            <a:off x="302449" y="1727036"/>
+            <a:ext cx="6520758" cy="303929"/>
+          </a:xfrm>
+          <a:prstGeom prst="rect">
+            <a:avLst/>
+          </a:prstGeom>
+          <a:noFill/>
+        </p:spPr>
+        <p:txBody>
+          <a:bodyPr wrap="square">
+            <a:spAutoFit/>
+          </a:bodyPr>
+          <a:lstStyle/>
+          <a:p>
+            <a:pPr marL="171450" indent="-171450">
+              <a:lnSpc>
+                <a:spcPct val="150000"/>
+              </a:lnSpc>
+              <a:buFont typeface="Arial" panose="020B0604020202020204" pitchFamily="34" charset="0"/>
+              <a:buChar char="•"/>
+            </a:pPr>
+            <a:r>
+              <a:rPr lang="ko-KR" altLang="en-US" sz="1000" dirty="0">
+                <a:latin typeface="나눔바른고딕" panose="020B0603020101020101" pitchFamily="34" charset="-127"/>
+                <a:ea typeface="나눔바른고딕" panose="020B0603020101020101" pitchFamily="34" charset="-127"/>
+              </a:rPr>
+              <a:t>낙하 중</a:t>
+            </a:r>
+            <a:r>
+              <a:rPr lang="en-US" altLang="ko-KR" sz="1000" dirty="0">
+                <a:latin typeface="나눔바른고딕" panose="020B0603020101020101" pitchFamily="34" charset="-127"/>
+                <a:ea typeface="나눔바른고딕" panose="020B0603020101020101" pitchFamily="34" charset="-127"/>
+              </a:rPr>
+              <a:t> </a:t>
+            </a:r>
+            <a:r>
+              <a:rPr lang="ko-KR" altLang="en-US" sz="1000" dirty="0">
+                <a:latin typeface="나눔바른고딕" panose="020B0603020101020101" pitchFamily="34" charset="-127"/>
+                <a:ea typeface="나눔바른고딕" panose="020B0603020101020101" pitchFamily="34" charset="-127"/>
+              </a:rPr>
+              <a:t>벽면</a:t>
+            </a:r>
+            <a:r>
+              <a:rPr lang="en-US" altLang="ko-KR" sz="1000" dirty="0">
+                <a:latin typeface="나눔바른고딕" panose="020B0603020101020101" pitchFamily="34" charset="-127"/>
+                <a:ea typeface="나눔바른고딕" panose="020B0603020101020101" pitchFamily="34" charset="-127"/>
+              </a:rPr>
+              <a:t>, Vault, Mantle </a:t>
+            </a:r>
+            <a:r>
+              <a:rPr lang="ko-KR" altLang="en-US" sz="1000" dirty="0">
+                <a:latin typeface="나눔바른고딕" panose="020B0603020101020101" pitchFamily="34" charset="-127"/>
+                <a:ea typeface="나눔바른고딕" panose="020B0603020101020101" pitchFamily="34" charset="-127"/>
+              </a:rPr>
+              <a:t>확인</a:t>
+            </a:r>
+            <a:endParaRPr lang="en-US" altLang="ko-KR" sz="1000" dirty="0">
+              <a:latin typeface="나눔바른고딕" panose="020B0603020101020101" pitchFamily="34" charset="-127"/>
+              <a:ea typeface="나눔바른고딕" panose="020B0603020101020101" pitchFamily="34" charset="-127"/>
+            </a:endParaRPr>
+          </a:p>
+        </p:txBody>
+      </p:sp>
+      <p:sp>
+        <p:nvSpPr>
+          <p:cNvPr id="6" name="직사각형 5">
+            <a:extLst>
+              <a:ext uri="{FF2B5EF4-FFF2-40B4-BE49-F238E27FC236}">
+                <a16:creationId xmlns:a16="http://schemas.microsoft.com/office/drawing/2014/main" id="{66E01F80-9E4F-DA82-0550-C055AD174C80}"/>
+              </a:ext>
+            </a:extLst>
+          </p:cNvPr>
+          <p:cNvSpPr/>
+          <p:nvPr/>
+        </p:nvSpPr>
+        <p:spPr>
+          <a:xfrm>
+            <a:off x="597434" y="2938799"/>
+            <a:ext cx="3526891" cy="3100493"/>
+          </a:xfrm>
+          <a:prstGeom prst="rect">
+            <a:avLst/>
+          </a:prstGeom>
+        </p:spPr>
+        <p:style>
+          <a:lnRef idx="2">
+            <a:schemeClr val="accent1">
+              <a:shade val="15000"/>
+            </a:schemeClr>
+          </a:lnRef>
+          <a:fillRef idx="1">
+            <a:schemeClr val="accent1"/>
+          </a:fillRef>
+          <a:effectRef idx="0">
+            <a:schemeClr val="accent1"/>
+          </a:effectRef>
+          <a:fontRef idx="minor">
+            <a:schemeClr val="lt1"/>
+          </a:fontRef>
+        </p:style>
+        <p:txBody>
+          <a:bodyPr rtlCol="0" anchor="ctr"/>
+          <a:lstStyle/>
+          <a:p>
+            <a:pPr algn="ctr"/>
+            <a:r>
+              <a:rPr lang="ko-KR" altLang="en-US" dirty="0"/>
+              <a:t>적용 영상</a:t>
+            </a:r>
+            <a:endParaRPr lang="en-US" altLang="ko-KR" dirty="0"/>
+          </a:p>
+        </p:txBody>
+      </p:sp>
+      <p:sp>
+        <p:nvSpPr>
+          <p:cNvPr id="9" name="직사각형 8">
+            <a:extLst>
+              <a:ext uri="{FF2B5EF4-FFF2-40B4-BE49-F238E27FC236}">
+                <a16:creationId xmlns:a16="http://schemas.microsoft.com/office/drawing/2014/main" id="{5D29930A-5965-B7E1-FECF-7878DA120BC2}"/>
+              </a:ext>
+            </a:extLst>
+          </p:cNvPr>
+          <p:cNvSpPr/>
+          <p:nvPr/>
+        </p:nvSpPr>
+        <p:spPr>
+          <a:xfrm>
+            <a:off x="4492443" y="2938799"/>
+            <a:ext cx="3321413" cy="3100493"/>
+          </a:xfrm>
+          <a:prstGeom prst="rect">
+            <a:avLst/>
+          </a:prstGeom>
+        </p:spPr>
+        <p:style>
+          <a:lnRef idx="2">
+            <a:schemeClr val="accent1">
+              <a:shade val="15000"/>
+            </a:schemeClr>
+          </a:lnRef>
+          <a:fillRef idx="1">
+            <a:schemeClr val="accent1"/>
+          </a:fillRef>
+          <a:effectRef idx="0">
+            <a:schemeClr val="accent1"/>
+          </a:effectRef>
+          <a:fontRef idx="minor">
+            <a:schemeClr val="lt1"/>
+          </a:fontRef>
+        </p:style>
+        <p:txBody>
+          <a:bodyPr rtlCol="0" anchor="ctr"/>
+          <a:lstStyle/>
+          <a:p>
+            <a:pPr algn="ctr"/>
+            <a:r>
+              <a:rPr lang="ko-KR" altLang="en-US" dirty="0"/>
+              <a:t>적용 영상</a:t>
+            </a:r>
+            <a:endParaRPr lang="en-US" altLang="ko-KR" dirty="0"/>
+          </a:p>
+        </p:txBody>
+      </p:sp>
+      <p:sp>
+        <p:nvSpPr>
+          <p:cNvPr id="14" name="직사각형 13">
+            <a:extLst>
+              <a:ext uri="{FF2B5EF4-FFF2-40B4-BE49-F238E27FC236}">
+                <a16:creationId xmlns:a16="http://schemas.microsoft.com/office/drawing/2014/main" id="{9A6E97A0-61BB-96EF-B421-399BFBB942E9}"/>
+              </a:ext>
+            </a:extLst>
+          </p:cNvPr>
+          <p:cNvSpPr/>
+          <p:nvPr/>
+        </p:nvSpPr>
+        <p:spPr>
+          <a:xfrm>
+            <a:off x="8181974" y="2938798"/>
+            <a:ext cx="3321413" cy="3100493"/>
+          </a:xfrm>
+          <a:prstGeom prst="rect">
+            <a:avLst/>
+          </a:prstGeom>
+        </p:spPr>
+        <p:style>
+          <a:lnRef idx="2">
+            <a:schemeClr val="accent1">
+              <a:shade val="15000"/>
+            </a:schemeClr>
+          </a:lnRef>
+          <a:fillRef idx="1">
+            <a:schemeClr val="accent1"/>
+          </a:fillRef>
+          <a:effectRef idx="0">
+            <a:schemeClr val="accent1"/>
+          </a:effectRef>
+          <a:fontRef idx="minor">
+            <a:schemeClr val="lt1"/>
+          </a:fontRef>
+        </p:style>
+        <p:txBody>
+          <a:bodyPr rtlCol="0" anchor="ctr"/>
+          <a:lstStyle/>
+          <a:p>
+            <a:pPr algn="ctr"/>
+            <a:r>
+              <a:rPr lang="ko-KR" altLang="en-US" dirty="0"/>
+              <a:t>적용 영상</a:t>
+            </a:r>
+            <a:endParaRPr lang="en-US" altLang="ko-KR" dirty="0"/>
+          </a:p>
+        </p:txBody>
+      </p:sp>
     </p:spTree>
     <p:extLst>
       <p:ext uri="{BB962C8B-B14F-4D97-AF65-F5344CB8AC3E}">
-        <p14:creationId xmlns:p14="http://schemas.microsoft.com/office/powerpoint/2010/main" val="4035459805"/>
+        <p14:creationId xmlns:p14="http://schemas.microsoft.com/office/powerpoint/2010/main" val="3278767070"/>
       </p:ext>
     </p:extLst>
   </p:cSld>
@@ -6491,7 +7062,7 @@
         <p:cNvPr id="1" name="">
           <a:extLst>
             <a:ext uri="{FF2B5EF4-FFF2-40B4-BE49-F238E27FC236}">
-              <a16:creationId xmlns:a16="http://schemas.microsoft.com/office/drawing/2014/main" xmlns="" id="{19CD7694-15C9-2B5F-2454-CCD6068E8F16}"/>
+              <a16:creationId xmlns:a16="http://schemas.microsoft.com/office/drawing/2014/main" id="{706C8C19-EFD0-1B5E-9E51-C8E355F0AE91}"/>
             </a:ext>
           </a:extLst>
         </p:cNvPr>
@@ -6511,7 +7082,7 @@
           <p:cNvPr id="8" name="TextBox 7">
             <a:extLst>
               <a:ext uri="{FF2B5EF4-FFF2-40B4-BE49-F238E27FC236}">
-                <a16:creationId xmlns:a16="http://schemas.microsoft.com/office/drawing/2014/main" xmlns="" id="{4AEECA0C-9A32-F3E5-E975-1FDB1339F910}"/>
+                <a16:creationId xmlns:a16="http://schemas.microsoft.com/office/drawing/2014/main" id="{8AF0DE98-E8B3-90F2-3BAB-CA48DC374639}"/>
               </a:ext>
             </a:extLst>
           </p:cNvPr>
@@ -6553,7 +7124,7 @@
           <p:cNvPr id="10" name="TextBox 9">
             <a:extLst>
               <a:ext uri="{FF2B5EF4-FFF2-40B4-BE49-F238E27FC236}">
-                <a16:creationId xmlns:a16="http://schemas.microsoft.com/office/drawing/2014/main" xmlns="" id="{5C94AD87-D564-2675-2F05-8F123D604850}"/>
+                <a16:creationId xmlns:a16="http://schemas.microsoft.com/office/drawing/2014/main" id="{BDE0C847-CA5E-0EC9-73E1-B2C5D77F5C2D}"/>
               </a:ext>
             </a:extLst>
           </p:cNvPr>
@@ -6595,7 +7166,7 @@
           <p:cNvPr id="3" name="직선 연결선 2">
             <a:extLst>
               <a:ext uri="{FF2B5EF4-FFF2-40B4-BE49-F238E27FC236}">
-                <a16:creationId xmlns:a16="http://schemas.microsoft.com/office/drawing/2014/main" xmlns="" id="{AEC0AE64-6745-F3AF-9F4D-3B0CF04F6912}"/>
+                <a16:creationId xmlns:a16="http://schemas.microsoft.com/office/drawing/2014/main" id="{5EB32D7F-01F4-033A-E2AC-5D41D25F8094}"/>
               </a:ext>
             </a:extLst>
           </p:cNvPr>
@@ -6638,7 +7209,7 @@
           <p:cNvPr id="12" name="직사각형 11">
             <a:extLst>
               <a:ext uri="{FF2B5EF4-FFF2-40B4-BE49-F238E27FC236}">
-                <a16:creationId xmlns:a16="http://schemas.microsoft.com/office/drawing/2014/main" xmlns="" id="{02400626-BD59-190A-81E2-83D54499C5F9}"/>
+                <a16:creationId xmlns:a16="http://schemas.microsoft.com/office/drawing/2014/main" id="{DBBBE646-F147-D346-73B2-EE485B0DA1BE}"/>
               </a:ext>
             </a:extLst>
           </p:cNvPr>
@@ -6737,7 +7308,7 @@
           <p:cNvPr id="13" name="TextBox 12">
             <a:extLst>
               <a:ext uri="{FF2B5EF4-FFF2-40B4-BE49-F238E27FC236}">
-                <a16:creationId xmlns:a16="http://schemas.microsoft.com/office/drawing/2014/main" xmlns="" id="{61CE754C-ED0F-6AE7-84F9-D34590444436}"/>
+                <a16:creationId xmlns:a16="http://schemas.microsoft.com/office/drawing/2014/main" id="{1F3B39DF-80E2-D179-27A8-3CFB22A8BB8C}"/>
               </a:ext>
             </a:extLst>
           </p:cNvPr>
@@ -6747,7 +7318,7 @@
         <p:spPr>
           <a:xfrm>
             <a:off x="302449" y="1342316"/>
-            <a:ext cx="7464813" cy="276999"/>
+            <a:ext cx="7464813" cy="346249"/>
           </a:xfrm>
           <a:prstGeom prst="rect">
             <a:avLst/>
@@ -6760,6 +7331,11 @@
           </a:bodyPr>
           <a:lstStyle/>
           <a:p>
+            <a:pPr>
+              <a:lnSpc>
+                <a:spcPct val="150000"/>
+              </a:lnSpc>
+            </a:pPr>
             <a:r>
               <a:rPr lang="ko-KR" altLang="en-US" sz="1200" dirty="0">
                 <a:latin typeface="나눔바른고딕" panose="020B0603020101020101" pitchFamily="34" charset="-127"/>
@@ -6772,14 +7348,21 @@
                 <a:latin typeface="나눔바른고딕" panose="020B0603020101020101" pitchFamily="34" charset="-127"/>
                 <a:ea typeface="나눔바른고딕" panose="020B0603020101020101" pitchFamily="34" charset="-127"/>
               </a:rPr>
-              <a:t>3. </a:t>
+              <a:t>4. </a:t>
+            </a:r>
+            <a:r>
+              <a:rPr lang="ko-KR" altLang="en-US" sz="1200" dirty="0" err="1">
+                <a:latin typeface="나눔바른고딕" panose="020B0603020101020101" pitchFamily="34" charset="-127"/>
+                <a:ea typeface="나눔바른고딕" panose="020B0603020101020101" pitchFamily="34" charset="-127"/>
+              </a:rPr>
+              <a:t>경계값</a:t>
             </a:r>
             <a:r>
               <a:rPr lang="ko-KR" altLang="en-US" sz="1200" dirty="0">
                 <a:latin typeface="나눔바른고딕" panose="020B0603020101020101" pitchFamily="34" charset="-127"/>
                 <a:ea typeface="나눔바른고딕" panose="020B0603020101020101" pitchFamily="34" charset="-127"/>
               </a:rPr>
-              <a:t>공중에서 타 장애물 캐치</a:t>
+              <a:t> 테스트</a:t>
             </a:r>
             <a:endParaRPr lang="en-US" altLang="ko-KR" sz="1200" dirty="0">
               <a:latin typeface="나눔바른고딕" panose="020B0603020101020101" pitchFamily="34" charset="-127"/>
@@ -6788,10 +7371,237 @@
           </a:p>
         </p:txBody>
       </p:sp>
+      <p:sp>
+        <p:nvSpPr>
+          <p:cNvPr id="4" name="TextBox 3">
+            <a:extLst>
+              <a:ext uri="{FF2B5EF4-FFF2-40B4-BE49-F238E27FC236}">
+                <a16:creationId xmlns:a16="http://schemas.microsoft.com/office/drawing/2014/main" id="{046D901C-157A-B566-D3F4-394FD22A3EC9}"/>
+              </a:ext>
+            </a:extLst>
+          </p:cNvPr>
+          <p:cNvSpPr txBox="1"/>
+          <p:nvPr/>
+        </p:nvSpPr>
+        <p:spPr>
+          <a:xfrm>
+            <a:off x="302449" y="1727036"/>
+            <a:ext cx="6520758" cy="303929"/>
+          </a:xfrm>
+          <a:prstGeom prst="rect">
+            <a:avLst/>
+          </a:prstGeom>
+          <a:noFill/>
+        </p:spPr>
+        <p:txBody>
+          <a:bodyPr wrap="square">
+            <a:spAutoFit/>
+          </a:bodyPr>
+          <a:lstStyle/>
+          <a:p>
+            <a:pPr marL="171450" indent="-171450">
+              <a:lnSpc>
+                <a:spcPct val="150000"/>
+              </a:lnSpc>
+              <a:buFont typeface="Arial" panose="020B0604020202020204" pitchFamily="34" charset="0"/>
+              <a:buChar char="•"/>
+            </a:pPr>
+            <a:r>
+              <a:rPr lang="ko-KR" altLang="en-US" sz="1000" dirty="0">
+                <a:latin typeface="나눔바른고딕" panose="020B0603020101020101" pitchFamily="34" charset="-127"/>
+                <a:ea typeface="나눔바른고딕" panose="020B0603020101020101" pitchFamily="34" charset="-127"/>
+              </a:rPr>
+              <a:t>높이 인식 시</a:t>
+            </a:r>
+            <a:r>
+              <a:rPr lang="en-US" altLang="ko-KR" sz="1000" dirty="0">
+                <a:latin typeface="나눔바른고딕" panose="020B0603020101020101" pitchFamily="34" charset="-127"/>
+                <a:ea typeface="나눔바른고딕" panose="020B0603020101020101" pitchFamily="34" charset="-127"/>
+              </a:rPr>
+              <a:t>, </a:t>
+            </a:r>
+            <a:r>
+              <a:rPr lang="ko-KR" altLang="en-US" sz="1000" dirty="0">
+                <a:latin typeface="나눔바른고딕" panose="020B0603020101020101" pitchFamily="34" charset="-127"/>
+                <a:ea typeface="나눔바른고딕" panose="020B0603020101020101" pitchFamily="34" charset="-127"/>
+              </a:rPr>
+              <a:t>기존보다 단위를 더 세세하게 쪼개고</a:t>
+            </a:r>
+            <a:r>
+              <a:rPr lang="en-US" altLang="ko-KR" sz="1000" dirty="0">
+                <a:latin typeface="나눔바른고딕" panose="020B0603020101020101" pitchFamily="34" charset="-127"/>
+                <a:ea typeface="나눔바른고딕" panose="020B0603020101020101" pitchFamily="34" charset="-127"/>
+              </a:rPr>
+              <a:t> </a:t>
+            </a:r>
+            <a:r>
+              <a:rPr lang="ko-KR" altLang="en-US" sz="1000" dirty="0">
+                <a:latin typeface="나눔바른고딕" panose="020B0603020101020101" pitchFamily="34" charset="-127"/>
+                <a:ea typeface="나눔바른고딕" panose="020B0603020101020101" pitchFamily="34" charset="-127"/>
+              </a:rPr>
+              <a:t>인식 횟수를 늘려 더 정확한 높이를 측정</a:t>
+            </a:r>
+            <a:endParaRPr lang="en-US" altLang="ko-KR" sz="1000" dirty="0">
+              <a:latin typeface="나눔바른고딕" panose="020B0603020101020101" pitchFamily="34" charset="-127"/>
+              <a:ea typeface="나눔바른고딕" panose="020B0603020101020101" pitchFamily="34" charset="-127"/>
+            </a:endParaRPr>
+          </a:p>
+        </p:txBody>
+      </p:sp>
+      <p:sp>
+        <p:nvSpPr>
+          <p:cNvPr id="5" name="직사각형 4">
+            <a:extLst>
+              <a:ext uri="{FF2B5EF4-FFF2-40B4-BE49-F238E27FC236}">
+                <a16:creationId xmlns:a16="http://schemas.microsoft.com/office/drawing/2014/main" id="{929429CB-EE61-5AFD-D56E-7477728C97AE}"/>
+              </a:ext>
+            </a:extLst>
+          </p:cNvPr>
+          <p:cNvSpPr/>
+          <p:nvPr/>
+        </p:nvSpPr>
+        <p:spPr>
+          <a:xfrm>
+            <a:off x="1212982" y="3965663"/>
+            <a:ext cx="4246075" cy="2576884"/>
+          </a:xfrm>
+          <a:prstGeom prst="rect">
+            <a:avLst/>
+          </a:prstGeom>
+        </p:spPr>
+        <p:style>
+          <a:lnRef idx="2">
+            <a:schemeClr val="accent1">
+              <a:shade val="15000"/>
+            </a:schemeClr>
+          </a:lnRef>
+          <a:fillRef idx="1">
+            <a:schemeClr val="accent1"/>
+          </a:fillRef>
+          <a:effectRef idx="0">
+            <a:schemeClr val="accent1"/>
+          </a:effectRef>
+          <a:fontRef idx="minor">
+            <a:schemeClr val="lt1"/>
+          </a:fontRef>
+        </p:style>
+        <p:txBody>
+          <a:bodyPr rtlCol="0" anchor="ctr"/>
+          <a:lstStyle/>
+          <a:p>
+            <a:pPr algn="ctr"/>
+            <a:r>
+              <a:rPr lang="ko-KR" altLang="en-US"/>
+              <a:t>적용 전</a:t>
+            </a:r>
+            <a:endParaRPr lang="en-US" altLang="ko-KR" dirty="0"/>
+          </a:p>
+        </p:txBody>
+      </p:sp>
+      <p:sp>
+        <p:nvSpPr>
+          <p:cNvPr id="7" name="직사각형 6">
+            <a:extLst>
+              <a:ext uri="{FF2B5EF4-FFF2-40B4-BE49-F238E27FC236}">
+                <a16:creationId xmlns:a16="http://schemas.microsoft.com/office/drawing/2014/main" id="{7C27354D-2728-4EC6-88E8-01068E85F16B}"/>
+              </a:ext>
+            </a:extLst>
+          </p:cNvPr>
+          <p:cNvSpPr/>
+          <p:nvPr/>
+        </p:nvSpPr>
+        <p:spPr>
+          <a:xfrm>
+            <a:off x="6041662" y="3965663"/>
+            <a:ext cx="4246075" cy="2576884"/>
+          </a:xfrm>
+          <a:prstGeom prst="rect">
+            <a:avLst/>
+          </a:prstGeom>
+        </p:spPr>
+        <p:style>
+          <a:lnRef idx="2">
+            <a:schemeClr val="accent1">
+              <a:shade val="15000"/>
+            </a:schemeClr>
+          </a:lnRef>
+          <a:fillRef idx="1">
+            <a:schemeClr val="accent1"/>
+          </a:fillRef>
+          <a:effectRef idx="0">
+            <a:schemeClr val="accent1"/>
+          </a:effectRef>
+          <a:fontRef idx="minor">
+            <a:schemeClr val="lt1"/>
+          </a:fontRef>
+        </p:style>
+        <p:txBody>
+          <a:bodyPr rtlCol="0" anchor="ctr"/>
+          <a:lstStyle/>
+          <a:p>
+            <a:pPr algn="ctr"/>
+            <a:r>
+              <a:rPr lang="ko-KR" altLang="en-US" dirty="0"/>
+              <a:t>적용 후</a:t>
+            </a:r>
+            <a:endParaRPr lang="en-US" altLang="ko-KR" dirty="0"/>
+          </a:p>
+        </p:txBody>
+      </p:sp>
+      <p:sp>
+        <p:nvSpPr>
+          <p:cNvPr id="11" name="직사각형 10">
+            <a:extLst>
+              <a:ext uri="{FF2B5EF4-FFF2-40B4-BE49-F238E27FC236}">
+                <a16:creationId xmlns:a16="http://schemas.microsoft.com/office/drawing/2014/main" id="{70141D5A-58DE-75ED-61B6-4C8CC0EBCC02}"/>
+              </a:ext>
+            </a:extLst>
+          </p:cNvPr>
+          <p:cNvSpPr/>
+          <p:nvPr/>
+        </p:nvSpPr>
+        <p:spPr>
+          <a:xfrm>
+            <a:off x="6041662" y="1164177"/>
+            <a:ext cx="4246075" cy="2576884"/>
+          </a:xfrm>
+          <a:prstGeom prst="rect">
+            <a:avLst/>
+          </a:prstGeom>
+        </p:spPr>
+        <p:style>
+          <a:lnRef idx="2">
+            <a:schemeClr val="accent1">
+              <a:shade val="15000"/>
+            </a:schemeClr>
+          </a:lnRef>
+          <a:fillRef idx="1">
+            <a:schemeClr val="accent1"/>
+          </a:fillRef>
+          <a:effectRef idx="0">
+            <a:schemeClr val="accent1"/>
+          </a:effectRef>
+          <a:fontRef idx="minor">
+            <a:schemeClr val="lt1"/>
+          </a:fontRef>
+        </p:style>
+        <p:txBody>
+          <a:bodyPr rtlCol="0" anchor="ctr"/>
+          <a:lstStyle/>
+          <a:p>
+            <a:pPr algn="ctr"/>
+            <a:r>
+              <a:rPr lang="ko-KR" altLang="en-US"/>
+              <a:t>데이터 차이</a:t>
+            </a:r>
+            <a:endParaRPr lang="en-US" altLang="ko-KR" dirty="0"/>
+          </a:p>
+        </p:txBody>
+      </p:sp>
     </p:spTree>
     <p:extLst>
       <p:ext uri="{BB962C8B-B14F-4D97-AF65-F5344CB8AC3E}">
-        <p14:creationId xmlns:p14="http://schemas.microsoft.com/office/powerpoint/2010/main" val="3278767070"/>
+        <p14:creationId xmlns:p14="http://schemas.microsoft.com/office/powerpoint/2010/main" val="2588964608"/>
       </p:ext>
     </p:extLst>
   </p:cSld>
@@ -6809,7 +7619,7 @@
         <p:cNvPr id="1" name="">
           <a:extLst>
             <a:ext uri="{FF2B5EF4-FFF2-40B4-BE49-F238E27FC236}">
-              <a16:creationId xmlns:a16="http://schemas.microsoft.com/office/drawing/2014/main" xmlns="" id="{49DA7EAA-204E-2F90-E52A-6C83B9013025}"/>
+              <a16:creationId xmlns:a16="http://schemas.microsoft.com/office/drawing/2014/main" id="{49DA7EAA-204E-2F90-E52A-6C83B9013025}"/>
             </a:ext>
           </a:extLst>
         </p:cNvPr>
@@ -6829,7 +7639,7 @@
           <p:cNvPr id="5" name="TextBox 4">
             <a:extLst>
               <a:ext uri="{FF2B5EF4-FFF2-40B4-BE49-F238E27FC236}">
-                <a16:creationId xmlns:a16="http://schemas.microsoft.com/office/drawing/2014/main" xmlns="" id="{4715F932-2F2C-4A3F-7F16-1B13D352985A}"/>
+                <a16:creationId xmlns:a16="http://schemas.microsoft.com/office/drawing/2014/main" id="{4715F932-2F2C-4A3F-7F16-1B13D352985A}"/>
               </a:ext>
             </a:extLst>
           </p:cNvPr>
@@ -6899,7 +7709,7 @@
           <p:nvPr>
             <p:extLst>
               <p:ext uri="{D42A27DB-BD31-4B8C-83A1-F6EECF244321}">
-                <p14:modId xmlns:p14="http://schemas.microsoft.com/office/powerpoint/2010/main" val="89076629"/>
+                <p14:modId xmlns:p14="http://schemas.microsoft.com/office/powerpoint/2010/main" val="3372322530"/>
               </p:ext>
             </p:extLst>
           </p:nvPr>
@@ -6918,21 +7728,21 @@
                 <a:gridCol w="791436">
                   <a:extLst>
                     <a:ext uri="{9D8B030D-6E8A-4147-A177-3AD203B41FA5}">
-                      <a16:colId xmlns:a16="http://schemas.microsoft.com/office/drawing/2014/main" xmlns="" val="20000"/>
+                      <a16:colId xmlns:a16="http://schemas.microsoft.com/office/drawing/2014/main" val="20000"/>
                     </a:ext>
                   </a:extLst>
                 </a:gridCol>
                 <a:gridCol w="4207281">
                   <a:extLst>
                     <a:ext uri="{9D8B030D-6E8A-4147-A177-3AD203B41FA5}">
-                      <a16:colId xmlns:a16="http://schemas.microsoft.com/office/drawing/2014/main" xmlns="" val="20001"/>
+                      <a16:colId xmlns:a16="http://schemas.microsoft.com/office/drawing/2014/main" val="20001"/>
                     </a:ext>
                   </a:extLst>
                 </a:gridCol>
                 <a:gridCol w="6320143">
                   <a:extLst>
                     <a:ext uri="{9D8B030D-6E8A-4147-A177-3AD203B41FA5}">
-                      <a16:colId xmlns:a16="http://schemas.microsoft.com/office/drawing/2014/main" xmlns="" val="20002"/>
+                      <a16:colId xmlns:a16="http://schemas.microsoft.com/office/drawing/2014/main" val="20002"/>
                     </a:ext>
                   </a:extLst>
                 </a:gridCol>
@@ -6988,7 +7798,7 @@
                 </a:tc>
                 <a:extLst>
                   <a:ext uri="{0D108BD9-81ED-4DB2-BD59-A6C34878D82A}">
-                    <a16:rowId xmlns:a16="http://schemas.microsoft.com/office/drawing/2014/main" xmlns="" val="10000"/>
+                    <a16:rowId xmlns:a16="http://schemas.microsoft.com/office/drawing/2014/main" val="10000"/>
                   </a:ext>
                 </a:extLst>
               </a:tr>
@@ -7167,7 +7977,7 @@
                 </a:tc>
                 <a:extLst>
                   <a:ext uri="{0D108BD9-81ED-4DB2-BD59-A6C34878D82A}">
-                    <a16:rowId xmlns:a16="http://schemas.microsoft.com/office/drawing/2014/main" xmlns="" val="10001"/>
+                    <a16:rowId xmlns:a16="http://schemas.microsoft.com/office/drawing/2014/main" val="10001"/>
                   </a:ext>
                 </a:extLst>
               </a:tr>
@@ -7387,7 +8197,7 @@
                 </a:tc>
                 <a:extLst>
                   <a:ext uri="{0D108BD9-81ED-4DB2-BD59-A6C34878D82A}">
-                    <a16:rowId xmlns:a16="http://schemas.microsoft.com/office/drawing/2014/main" xmlns="" val="10002"/>
+                    <a16:rowId xmlns:a16="http://schemas.microsoft.com/office/drawing/2014/main" val="10002"/>
                   </a:ext>
                 </a:extLst>
               </a:tr>
@@ -7562,7 +8372,7 @@
                 </a:tc>
                 <a:extLst>
                   <a:ext uri="{0D108BD9-81ED-4DB2-BD59-A6C34878D82A}">
-                    <a16:rowId xmlns:a16="http://schemas.microsoft.com/office/drawing/2014/main" xmlns="" val="10003"/>
+                    <a16:rowId xmlns:a16="http://schemas.microsoft.com/office/drawing/2014/main" val="10003"/>
                   </a:ext>
                 </a:extLst>
               </a:tr>
@@ -7761,7 +8571,7 @@
                 </a:tc>
                 <a:extLst>
                   <a:ext uri="{0D108BD9-81ED-4DB2-BD59-A6C34878D82A}">
-                    <a16:rowId xmlns:a16="http://schemas.microsoft.com/office/drawing/2014/main" xmlns="" val="10004"/>
+                    <a16:rowId xmlns:a16="http://schemas.microsoft.com/office/drawing/2014/main" val="10004"/>
                   </a:ext>
                 </a:extLst>
               </a:tr>
@@ -7786,12 +8596,7 @@
                     </a:p>
                   </a:txBody>
                   <a:tcPr anchor="ctr">
-                    <a:solidFill>
-                      <a:schemeClr val="accent1">
-                        <a:lumMod val="20000"/>
-                        <a:lumOff val="80000"/>
-                      </a:schemeClr>
-                    </a:solidFill>
+                    <a:noFill/>
                   </a:tcPr>
                 </a:tc>
                 <a:tc>
@@ -7817,12 +8622,7 @@
                     </a:p>
                   </a:txBody>
                   <a:tcPr anchor="ctr">
-                    <a:solidFill>
-                      <a:schemeClr val="accent1">
-                        <a:lumMod val="20000"/>
-                        <a:lumOff val="80000"/>
-                      </a:schemeClr>
-                    </a:solidFill>
+                    <a:noFill/>
                   </a:tcPr>
                 </a:tc>
                 <a:tc>
@@ -7956,17 +8756,12 @@
                     </a:p>
                   </a:txBody>
                   <a:tcPr anchor="ctr">
-                    <a:solidFill>
-                      <a:schemeClr val="accent1">
-                        <a:lumMod val="20000"/>
-                        <a:lumOff val="80000"/>
-                      </a:schemeClr>
-                    </a:solidFill>
+                    <a:noFill/>
                   </a:tcPr>
                 </a:tc>
                 <a:extLst>
                   <a:ext uri="{0D108BD9-81ED-4DB2-BD59-A6C34878D82A}">
-                    <a16:rowId xmlns:a16="http://schemas.microsoft.com/office/drawing/2014/main" xmlns="" val="10005"/>
+                    <a16:rowId xmlns:a16="http://schemas.microsoft.com/office/drawing/2014/main" val="10005"/>
                   </a:ext>
                 </a:extLst>
               </a:tr>
@@ -7990,7 +8785,14 @@
                       </a:endParaRPr>
                     </a:p>
                   </a:txBody>
-                  <a:tcPr anchor="ctr"/>
+                  <a:tcPr anchor="ctr">
+                    <a:solidFill>
+                      <a:schemeClr val="accent1">
+                        <a:lumMod val="20000"/>
+                        <a:lumOff val="80000"/>
+                      </a:schemeClr>
+                    </a:solidFill>
+                  </a:tcPr>
                 </a:tc>
                 <a:tc>
                   <a:txBody>
@@ -8055,7 +8857,14 @@
                       </a:endParaRPr>
                     </a:p>
                   </a:txBody>
-                  <a:tcPr anchor="ctr"/>
+                  <a:tcPr anchor="ctr">
+                    <a:solidFill>
+                      <a:schemeClr val="accent1">
+                        <a:lumMod val="20000"/>
+                        <a:lumOff val="80000"/>
+                      </a:schemeClr>
+                    </a:solidFill>
+                  </a:tcPr>
                 </a:tc>
                 <a:tc>
                   <a:txBody>
@@ -8130,24 +8939,17 @@
                           <a:latin typeface="나눔바른고딕" panose="020B0603020101020101" pitchFamily="34" charset="-127"/>
                           <a:ea typeface="나눔바른고딕" panose="020B0603020101020101" pitchFamily="34" charset="-127"/>
                         </a:rPr>
-                        <a:t>테스트 및 버그 </a:t>
+                        <a:t>테스트 및 버그 수정</a:t>
                       </a:r>
                       <a:r>
-                        <a:rPr lang="ko-KR" altLang="en-US" sz="1400" strike="sngStrike" baseline="0" dirty="0" smtClean="0">
-                          <a:latin typeface="나눔바른고딕" panose="020B0603020101020101" pitchFamily="34" charset="-127"/>
-                          <a:ea typeface="나눔바른고딕" panose="020B0603020101020101" pitchFamily="34" charset="-127"/>
-                        </a:rPr>
-                        <a:t>수정</a:t>
-                      </a:r>
-                      <a:r>
-                        <a:rPr lang="en-US" altLang="ko-KR" sz="1400" strike="sngStrike" baseline="0" dirty="0" smtClean="0">
+                        <a:rPr lang="en-US" altLang="ko-KR" sz="1400" strike="sngStrike" baseline="0" dirty="0">
                           <a:latin typeface="나눔바른고딕" panose="020B0603020101020101" pitchFamily="34" charset="-127"/>
                           <a:ea typeface="나눔바른고딕" panose="020B0603020101020101" pitchFamily="34" charset="-127"/>
                         </a:rPr>
                         <a:t>, </a:t>
                       </a:r>
                       <a:r>
-                        <a:rPr lang="ko-KR" altLang="en-US" sz="1400" strike="sngStrike" baseline="0" dirty="0" smtClean="0">
+                        <a:rPr lang="ko-KR" altLang="en-US" sz="1400" strike="sngStrike" baseline="0" dirty="0">
                           <a:latin typeface="나눔바른고딕" panose="020B0603020101020101" pitchFamily="34" charset="-127"/>
                           <a:ea typeface="나눔바른고딕" panose="020B0603020101020101" pitchFamily="34" charset="-127"/>
                         </a:rPr>
@@ -8159,11 +8961,18 @@
                       </a:endParaRPr>
                     </a:p>
                   </a:txBody>
-                  <a:tcPr anchor="ctr"/>
+                  <a:tcPr anchor="ctr">
+                    <a:solidFill>
+                      <a:schemeClr val="accent1">
+                        <a:lumMod val="20000"/>
+                        <a:lumOff val="80000"/>
+                      </a:schemeClr>
+                    </a:solidFill>
+                  </a:tcPr>
                 </a:tc>
                 <a:extLst>
                   <a:ext uri="{0D108BD9-81ED-4DB2-BD59-A6C34878D82A}">
-                    <a16:rowId xmlns:a16="http://schemas.microsoft.com/office/drawing/2014/main" xmlns="" val="10006"/>
+                    <a16:rowId xmlns:a16="http://schemas.microsoft.com/office/drawing/2014/main" val="10006"/>
                   </a:ext>
                 </a:extLst>
               </a:tr>
@@ -8262,7 +9071,7 @@
                 </a:tc>
                 <a:extLst>
                   <a:ext uri="{0D108BD9-81ED-4DB2-BD59-A6C34878D82A}">
-                    <a16:rowId xmlns:a16="http://schemas.microsoft.com/office/drawing/2014/main" xmlns="" val="10007"/>
+                    <a16:rowId xmlns:a16="http://schemas.microsoft.com/office/drawing/2014/main" val="10007"/>
                   </a:ext>
                 </a:extLst>
               </a:tr>
@@ -8338,7 +9147,7 @@
                 </a:tc>
                 <a:extLst>
                   <a:ext uri="{0D108BD9-81ED-4DB2-BD59-A6C34878D82A}">
-                    <a16:rowId xmlns:a16="http://schemas.microsoft.com/office/drawing/2014/main" xmlns="" val="10008"/>
+                    <a16:rowId xmlns:a16="http://schemas.microsoft.com/office/drawing/2014/main" val="10008"/>
                   </a:ext>
                 </a:extLst>
               </a:tr>
@@ -8460,7 +9269,7 @@
         <p:cNvPr id="1" name="">
           <a:extLst>
             <a:ext uri="{FF2B5EF4-FFF2-40B4-BE49-F238E27FC236}">
-              <a16:creationId xmlns:a16="http://schemas.microsoft.com/office/drawing/2014/main" xmlns="" id="{49DA7EAA-204E-2F90-E52A-6C83B9013025}"/>
+              <a16:creationId xmlns:a16="http://schemas.microsoft.com/office/drawing/2014/main" id="{49DA7EAA-204E-2F90-E52A-6C83B9013025}"/>
             </a:ext>
           </a:extLst>
         </p:cNvPr>
@@ -8480,7 +9289,7 @@
           <p:cNvPr id="8" name="TextBox 7">
             <a:extLst>
               <a:ext uri="{FF2B5EF4-FFF2-40B4-BE49-F238E27FC236}">
-                <a16:creationId xmlns:a16="http://schemas.microsoft.com/office/drawing/2014/main" xmlns="" id="{701093AF-254C-83D7-8032-465A5FB513FB}"/>
+                <a16:creationId xmlns:a16="http://schemas.microsoft.com/office/drawing/2014/main" id="{701093AF-254C-83D7-8032-465A5FB513FB}"/>
               </a:ext>
             </a:extLst>
           </p:cNvPr>
@@ -8522,7 +9331,7 @@
           <p:cNvPr id="10" name="TextBox 9">
             <a:extLst>
               <a:ext uri="{FF2B5EF4-FFF2-40B4-BE49-F238E27FC236}">
-                <a16:creationId xmlns:a16="http://schemas.microsoft.com/office/drawing/2014/main" xmlns="" id="{2D538815-CBEF-E37B-5659-B5091F86B485}"/>
+                <a16:creationId xmlns:a16="http://schemas.microsoft.com/office/drawing/2014/main" id="{2D538815-CBEF-E37B-5659-B5091F86B485}"/>
               </a:ext>
             </a:extLst>
           </p:cNvPr>
@@ -8564,7 +9373,7 @@
           <p:cNvPr id="3" name="직선 연결선 2">
             <a:extLst>
               <a:ext uri="{FF2B5EF4-FFF2-40B4-BE49-F238E27FC236}">
-                <a16:creationId xmlns:a16="http://schemas.microsoft.com/office/drawing/2014/main" xmlns="" id="{76FFFECF-4B1C-95DF-32C3-2D2F19BEDAFB}"/>
+                <a16:creationId xmlns:a16="http://schemas.microsoft.com/office/drawing/2014/main" id="{76FFFECF-4B1C-95DF-32C3-2D2F19BEDAFB}"/>
               </a:ext>
             </a:extLst>
           </p:cNvPr>
@@ -8700,7 +9509,7 @@
           <p:cNvPr id="4" name="TextBox 3">
             <a:extLst>
               <a:ext uri="{FF2B5EF4-FFF2-40B4-BE49-F238E27FC236}">
-                <a16:creationId xmlns:a16="http://schemas.microsoft.com/office/drawing/2014/main" xmlns="" id="{BDC3BDF7-0C17-3E65-3F95-62AEFEB0CD86}"/>
+                <a16:creationId xmlns:a16="http://schemas.microsoft.com/office/drawing/2014/main" id="{BDC3BDF7-0C17-3E65-3F95-62AEFEB0CD86}"/>
               </a:ext>
             </a:extLst>
           </p:cNvPr>
@@ -8710,7 +9519,7 @@
         <p:spPr>
           <a:xfrm>
             <a:off x="302450" y="1342316"/>
-            <a:ext cx="5138684" cy="900246"/>
+            <a:ext cx="5138684" cy="623248"/>
           </a:xfrm>
           <a:prstGeom prst="rect">
             <a:avLst/>
@@ -8765,65 +9574,31 @@
               <a:buChar char="•"/>
             </a:pPr>
             <a:r>
-              <a:rPr lang="en-US" altLang="ko-KR" sz="1200" dirty="0">
-                <a:latin typeface="나눔바른고딕" panose="020B0603020101020101" pitchFamily="34" charset="-127"/>
-                <a:ea typeface="나눔바른고딕" panose="020B0603020101020101" pitchFamily="34" charset="-127"/>
-              </a:rPr>
-              <a:t>IK</a:t>
-            </a:r>
-            <a:r>
               <a:rPr lang="ko-KR" altLang="en-US" sz="1200" dirty="0">
                 <a:latin typeface="나눔바른고딕" panose="020B0603020101020101" pitchFamily="34" charset="-127"/>
                 <a:ea typeface="나눔바른고딕" panose="020B0603020101020101" pitchFamily="34" charset="-127"/>
               </a:rPr>
-              <a:t> 적용 후</a:t>
-            </a:r>
-            <a:r>
-              <a:rPr lang="en-US" altLang="ko-KR" sz="1200" dirty="0">
-                <a:latin typeface="나눔바른고딕" panose="020B0603020101020101" pitchFamily="34" charset="-127"/>
-                <a:ea typeface="나눔바른고딕" panose="020B0603020101020101" pitchFamily="34" charset="-127"/>
-              </a:rPr>
-              <a:t> </a:t>
+              <a:t>지형 테스트 및 </a:t>
+            </a:r>
+            <a:r>
+              <a:rPr lang="ko-KR" altLang="en-US" sz="1200" dirty="0" err="1">
+                <a:latin typeface="나눔바른고딕" panose="020B0603020101020101" pitchFamily="34" charset="-127"/>
+                <a:ea typeface="나눔바른고딕" panose="020B0603020101020101" pitchFamily="34" charset="-127"/>
+              </a:rPr>
+              <a:t>폴리싱</a:t>
             </a:r>
             <a:r>
               <a:rPr lang="ko-KR" altLang="en-US" sz="1200" dirty="0">
                 <a:latin typeface="나눔바른고딕" panose="020B0603020101020101" pitchFamily="34" charset="-127"/>
                 <a:ea typeface="나눔바른고딕" panose="020B0603020101020101" pitchFamily="34" charset="-127"/>
               </a:rPr>
-              <a:t>디테일 </a:t>
-            </a:r>
-            <a:r>
-              <a:rPr lang="ko-KR" altLang="en-US" sz="1200" dirty="0" err="1">
-                <a:latin typeface="나눔바른고딕" panose="020B0603020101020101" pitchFamily="34" charset="-127"/>
-                <a:ea typeface="나눔바른고딕" panose="020B0603020101020101" pitchFamily="34" charset="-127"/>
-              </a:rPr>
-              <a:t>폴리싱</a:t>
+              <a:t> 작업</a:t>
             </a:r>
             <a:endParaRPr lang="en-US" altLang="ko-KR" sz="1200" dirty="0">
               <a:latin typeface="나눔바른고딕" panose="020B0603020101020101" pitchFamily="34" charset="-127"/>
               <a:ea typeface="나눔바른고딕" panose="020B0603020101020101" pitchFamily="34" charset="-127"/>
             </a:endParaRPr>
           </a:p>
-          <a:p>
-            <a:pPr marL="171450" indent="-171450">
-              <a:lnSpc>
-                <a:spcPct val="150000"/>
-              </a:lnSpc>
-              <a:buFont typeface="Arial" panose="020B0604020202020204" pitchFamily="34" charset="0"/>
-              <a:buChar char="•"/>
-            </a:pPr>
-            <a:r>
-              <a:rPr lang="ko-KR" altLang="en-US" sz="1200" dirty="0">
-                <a:latin typeface="나눔바른고딕" panose="020B0603020101020101" pitchFamily="34" charset="-127"/>
-                <a:ea typeface="나눔바른고딕" panose="020B0603020101020101" pitchFamily="34" charset="-127"/>
-              </a:rPr>
-              <a:t>지형 테스트</a:t>
-            </a:r>
-            <a:endParaRPr lang="en-US" altLang="ko-KR" sz="1200" dirty="0">
-              <a:latin typeface="나눔바른고딕" panose="020B0603020101020101" pitchFamily="34" charset="-127"/>
-              <a:ea typeface="나눔바른고딕" panose="020B0603020101020101" pitchFamily="34" charset="-127"/>
-            </a:endParaRPr>
-          </a:p>
         </p:txBody>
       </p:sp>
       <p:sp>
@@ -8831,7 +9606,7 @@
           <p:cNvPr id="6" name="직사각형 5">
             <a:extLst>
               <a:ext uri="{FF2B5EF4-FFF2-40B4-BE49-F238E27FC236}">
-                <a16:creationId xmlns:a16="http://schemas.microsoft.com/office/drawing/2014/main" xmlns="" id="{2A46B86B-2A5E-39F7-A0B5-6BB8D1D20358}"/>
+                <a16:creationId xmlns:a16="http://schemas.microsoft.com/office/drawing/2014/main" id="{2A46B86B-2A5E-39F7-A0B5-6BB8D1D20358}"/>
               </a:ext>
             </a:extLst>
           </p:cNvPr>
@@ -8840,7 +9615,7 @@
         </p:nvSpPr>
         <p:spPr>
           <a:xfrm>
-            <a:off x="769545" y="2359742"/>
+            <a:off x="1012462" y="2342408"/>
             <a:ext cx="10058399" cy="4113482"/>
           </a:xfrm>
           <a:prstGeom prst="rect">
@@ -8922,7 +9697,7 @@
         <p:cNvPr id="1" name="">
           <a:extLst>
             <a:ext uri="{FF2B5EF4-FFF2-40B4-BE49-F238E27FC236}">
-              <a16:creationId xmlns:a16="http://schemas.microsoft.com/office/drawing/2014/main" xmlns="" id="{CD9567D0-8D8D-4F82-AAD7-B0FF119C0461}"/>
+              <a16:creationId xmlns:a16="http://schemas.microsoft.com/office/drawing/2014/main" id="{CD9567D0-8D8D-4F82-AAD7-B0FF119C0461}"/>
             </a:ext>
           </a:extLst>
         </p:cNvPr>
@@ -8937,12 +9712,42 @@
           <a:chExt cx="0" cy="0"/>
         </a:xfrm>
       </p:grpSpPr>
+      <p:pic>
+        <p:nvPicPr>
+          <p:cNvPr id="9" name="그림 8">
+            <a:extLst>
+              <a:ext uri="{FF2B5EF4-FFF2-40B4-BE49-F238E27FC236}">
+                <a16:creationId xmlns:a16="http://schemas.microsoft.com/office/drawing/2014/main" id="{AD3BE4B7-8FB9-BCBD-26FD-F0EEE04C13BC}"/>
+              </a:ext>
+            </a:extLst>
+          </p:cNvPr>
+          <p:cNvPicPr>
+            <a:picLocks noChangeAspect="1"/>
+          </p:cNvPicPr>
+          <p:nvPr/>
+        </p:nvPicPr>
+        <p:blipFill>
+          <a:blip r:embed="rId3"/>
+          <a:stretch>
+            <a:fillRect/>
+          </a:stretch>
+        </p:blipFill>
+        <p:spPr>
+          <a:xfrm>
+            <a:off x="6029325" y="905560"/>
+            <a:ext cx="3971026" cy="3257875"/>
+          </a:xfrm>
+          <a:prstGeom prst="rect">
+            <a:avLst/>
+          </a:prstGeom>
+        </p:spPr>
+      </p:pic>
       <p:sp>
         <p:nvSpPr>
           <p:cNvPr id="8" name="TextBox 7">
             <a:extLst>
               <a:ext uri="{FF2B5EF4-FFF2-40B4-BE49-F238E27FC236}">
-                <a16:creationId xmlns:a16="http://schemas.microsoft.com/office/drawing/2014/main" xmlns="" id="{EA448F56-014E-4B94-FB44-E56AECD3FEB6}"/>
+                <a16:creationId xmlns:a16="http://schemas.microsoft.com/office/drawing/2014/main" id="{EA448F56-014E-4B94-FB44-E56AECD3FEB6}"/>
               </a:ext>
             </a:extLst>
           </p:cNvPr>
@@ -8984,7 +9789,7 @@
           <p:cNvPr id="10" name="TextBox 9">
             <a:extLst>
               <a:ext uri="{FF2B5EF4-FFF2-40B4-BE49-F238E27FC236}">
-                <a16:creationId xmlns:a16="http://schemas.microsoft.com/office/drawing/2014/main" xmlns="" id="{6316BC8B-3E9C-4B1A-E79B-6ACB06F238D1}"/>
+                <a16:creationId xmlns:a16="http://schemas.microsoft.com/office/drawing/2014/main" id="{6316BC8B-3E9C-4B1A-E79B-6ACB06F238D1}"/>
               </a:ext>
             </a:extLst>
           </p:cNvPr>
@@ -9040,7 +9845,7 @@
           <p:cNvPr id="3" name="직선 연결선 2">
             <a:extLst>
               <a:ext uri="{FF2B5EF4-FFF2-40B4-BE49-F238E27FC236}">
-                <a16:creationId xmlns:a16="http://schemas.microsoft.com/office/drawing/2014/main" xmlns="" id="{225FDA88-AB34-8322-EAD0-B9E3833A2962}"/>
+                <a16:creationId xmlns:a16="http://schemas.microsoft.com/office/drawing/2014/main" id="{225FDA88-AB34-8322-EAD0-B9E3833A2962}"/>
               </a:ext>
             </a:extLst>
           </p:cNvPr>
@@ -9083,7 +9888,7 @@
           <p:cNvPr id="12" name="직사각형 11">
             <a:extLst>
               <a:ext uri="{FF2B5EF4-FFF2-40B4-BE49-F238E27FC236}">
-                <a16:creationId xmlns:a16="http://schemas.microsoft.com/office/drawing/2014/main" xmlns="" id="{445848D8-1587-C15E-4275-1CAD486BF1EB}"/>
+                <a16:creationId xmlns:a16="http://schemas.microsoft.com/office/drawing/2014/main" id="{445848D8-1587-C15E-4275-1CAD486BF1EB}"/>
               </a:ext>
             </a:extLst>
           </p:cNvPr>
@@ -9182,7 +9987,7 @@
           <p:cNvPr id="11" name="TextBox 10">
             <a:extLst>
               <a:ext uri="{FF2B5EF4-FFF2-40B4-BE49-F238E27FC236}">
-                <a16:creationId xmlns:a16="http://schemas.microsoft.com/office/drawing/2014/main" xmlns="" id="{EB4EBD0C-7AD4-F15A-16EF-C7AFB68FB270}"/>
+                <a16:creationId xmlns:a16="http://schemas.microsoft.com/office/drawing/2014/main" id="{EB4EBD0C-7AD4-F15A-16EF-C7AFB68FB270}"/>
               </a:ext>
             </a:extLst>
           </p:cNvPr>
@@ -9192,7 +9997,7 @@
         <p:spPr>
           <a:xfrm>
             <a:off x="302450" y="1342316"/>
-            <a:ext cx="5138684" cy="1477328"/>
+            <a:ext cx="5138684" cy="1088760"/>
           </a:xfrm>
           <a:prstGeom prst="rect">
             <a:avLst/>
@@ -9211,44 +10016,26 @@
               </a:lnSpc>
             </a:pPr>
             <a:r>
-              <a:rPr lang="ko-KR" altLang="en-US" sz="1200" dirty="0" smtClean="0">
-                <a:latin typeface="나눔바른고딕" panose="020B0603020101020101" pitchFamily="34" charset="-127"/>
-                <a:ea typeface="나눔바른고딕" panose="020B0603020101020101" pitchFamily="34" charset="-127"/>
-              </a:rPr>
-              <a:t>지난 주 지형 </a:t>
-            </a:r>
-            <a:r>
               <a:rPr lang="ko-KR" altLang="en-US" sz="1200" dirty="0">
                 <a:latin typeface="나눔바른고딕" panose="020B0603020101020101" pitchFamily="34" charset="-127"/>
                 <a:ea typeface="나눔바른고딕" panose="020B0603020101020101" pitchFamily="34" charset="-127"/>
               </a:rPr>
-              <a:t>인식과 처리 결과 분리 후</a:t>
+              <a:t>지난 주 지형 인식 </a:t>
             </a:r>
             <a:r>
               <a:rPr lang="en-US" altLang="ko-KR" sz="1200" dirty="0">
                 <a:latin typeface="나눔바른고딕" panose="020B0603020101020101" pitchFamily="34" charset="-127"/>
                 <a:ea typeface="나눔바른고딕" panose="020B0603020101020101" pitchFamily="34" charset="-127"/>
               </a:rPr>
-              <a:t>, </a:t>
+              <a:t>-</a:t>
             </a:r>
             <a:r>
               <a:rPr lang="ko-KR" altLang="en-US" sz="1200" dirty="0">
                 <a:latin typeface="나눔바른고딕" panose="020B0603020101020101" pitchFamily="34" charset="-127"/>
                 <a:ea typeface="나눔바른고딕" panose="020B0603020101020101" pitchFamily="34" charset="-127"/>
               </a:rPr>
-              <a:t>후속 작업 진행</a:t>
-            </a:r>
-            <a:endParaRPr lang="en-US" altLang="ko-KR" sz="1200" dirty="0">
-              <a:latin typeface="나눔바른고딕" panose="020B0603020101020101" pitchFamily="34" charset="-127"/>
-              <a:ea typeface="나눔바른고딕" panose="020B0603020101020101" pitchFamily="34" charset="-127"/>
-            </a:endParaRPr>
-          </a:p>
-          <a:p>
-            <a:pPr>
-              <a:lnSpc>
-                <a:spcPct val="150000"/>
-              </a:lnSpc>
-            </a:pPr>
+              <a:t> 처리 결과 분리 후속 작업 진행</a:t>
+            </a:r>
             <a:endParaRPr lang="en-US" altLang="ko-KR" sz="1200" dirty="0">
               <a:latin typeface="나눔바른고딕" panose="020B0603020101020101" pitchFamily="34" charset="-127"/>
               <a:ea typeface="나눔바른고딕" panose="020B0603020101020101" pitchFamily="34" charset="-127"/>
@@ -9281,13 +10068,13 @@
               <a:buChar char="•"/>
             </a:pPr>
             <a:r>
-              <a:rPr lang="ko-KR" altLang="en-US" sz="1200" dirty="0">
+              <a:rPr lang="ko-KR" altLang="en-US" sz="1000" dirty="0">
                 <a:latin typeface="나눔바른고딕" panose="020B0603020101020101" pitchFamily="34" charset="-127"/>
                 <a:ea typeface="나눔바른고딕" panose="020B0603020101020101" pitchFamily="34" charset="-127"/>
               </a:rPr>
               <a:t>지형 인식 트리 </a:t>
             </a:r>
-            <a:endParaRPr lang="en-US" altLang="ko-KR" sz="1200" dirty="0" smtClean="0">
+            <a:endParaRPr lang="en-US" altLang="ko-KR" sz="1000" dirty="0">
               <a:latin typeface="나눔바른고딕" panose="020B0603020101020101" pitchFamily="34" charset="-127"/>
               <a:ea typeface="나눔바른고딕" panose="020B0603020101020101" pitchFamily="34" charset="-127"/>
             </a:endParaRPr>
@@ -9301,48 +10088,34 @@
               <a:buChar char="•"/>
             </a:pPr>
             <a:r>
-              <a:rPr lang="ko-KR" altLang="en-US" sz="1200" dirty="0" smtClean="0">
+              <a:rPr lang="ko-KR" altLang="en-US" sz="1000" dirty="0">
                 <a:latin typeface="나눔바른고딕" panose="020B0603020101020101" pitchFamily="34" charset="-127"/>
                 <a:ea typeface="나눔바른고딕" panose="020B0603020101020101" pitchFamily="34" charset="-127"/>
               </a:rPr>
               <a:t>인식</a:t>
             </a:r>
             <a:r>
-              <a:rPr lang="en-US" altLang="ko-KR" sz="1200" dirty="0" smtClean="0">
+              <a:rPr lang="en-US" altLang="ko-KR" sz="1000" dirty="0">
                 <a:latin typeface="나눔바른고딕" panose="020B0603020101020101" pitchFamily="34" charset="-127"/>
                 <a:ea typeface="나눔바른고딕" panose="020B0603020101020101" pitchFamily="34" charset="-127"/>
               </a:rPr>
               <a:t> </a:t>
             </a:r>
             <a:r>
-              <a:rPr lang="ko-KR" altLang="en-US" sz="1200" dirty="0" smtClean="0">
-                <a:latin typeface="나눔바른고딕" panose="020B0603020101020101" pitchFamily="34" charset="-127"/>
-                <a:ea typeface="나눔바른고딕" panose="020B0603020101020101" pitchFamily="34" charset="-127"/>
-              </a:rPr>
-              <a:t>결과 </a:t>
-            </a:r>
-            <a:r>
-              <a:rPr lang="ko-KR" altLang="en-US" sz="1200" dirty="0">
-                <a:latin typeface="나눔바른고딕" panose="020B0603020101020101" pitchFamily="34" charset="-127"/>
-                <a:ea typeface="나눔바른고딕" panose="020B0603020101020101" pitchFamily="34" charset="-127"/>
-              </a:rPr>
-              <a:t>처리 </a:t>
-            </a:r>
-            <a:r>
-              <a:rPr lang="ko-KR" altLang="en-US" sz="1200" dirty="0" smtClean="0">
-                <a:latin typeface="나눔바른고딕" panose="020B0603020101020101" pitchFamily="34" charset="-127"/>
-                <a:ea typeface="나눔바른고딕" panose="020B0603020101020101" pitchFamily="34" charset="-127"/>
-              </a:rPr>
-              <a:t>조건과 출력할 모션 정보 </a:t>
-            </a:r>
-            <a:r>
-              <a:rPr lang="ko-KR" altLang="en-US" sz="1200" dirty="0" err="1" smtClean="0">
+              <a:rPr lang="ko-KR" altLang="en-US" sz="1000" dirty="0">
+                <a:latin typeface="나눔바른고딕" panose="020B0603020101020101" pitchFamily="34" charset="-127"/>
+                <a:ea typeface="나눔바른고딕" panose="020B0603020101020101" pitchFamily="34" charset="-127"/>
+              </a:rPr>
+              <a:t>결과 처리 조건과 출력할 모션 정보 </a:t>
+            </a:r>
+            <a:r>
+              <a:rPr lang="ko-KR" altLang="en-US" sz="1000" dirty="0" err="1">
                 <a:latin typeface="나눔바른고딕" panose="020B0603020101020101" pitchFamily="34" charset="-127"/>
                 <a:ea typeface="나눔바른고딕" panose="020B0603020101020101" pitchFamily="34" charset="-127"/>
               </a:rPr>
               <a:t>매칭</a:t>
             </a:r>
-            <a:endParaRPr lang="en-US" altLang="ko-KR" sz="1200" dirty="0">
+            <a:endParaRPr lang="en-US" altLang="ko-KR" sz="1000" dirty="0">
               <a:latin typeface="나눔바른고딕" panose="020B0603020101020101" pitchFamily="34" charset="-127"/>
               <a:ea typeface="나눔바른고딕" panose="020B0603020101020101" pitchFamily="34" charset="-127"/>
             </a:endParaRPr>
@@ -9354,7 +10127,7 @@
           <p:cNvPr id="4" name="TextBox 3">
             <a:extLst>
               <a:ext uri="{FF2B5EF4-FFF2-40B4-BE49-F238E27FC236}">
-                <a16:creationId xmlns:a16="http://schemas.microsoft.com/office/drawing/2014/main" xmlns="" id="{FC09C16A-35D2-48AD-4061-2C115EAF7976}"/>
+                <a16:creationId xmlns:a16="http://schemas.microsoft.com/office/drawing/2014/main" id="{FC09C16A-35D2-48AD-4061-2C115EAF7976}"/>
               </a:ext>
             </a:extLst>
           </p:cNvPr>
@@ -9363,8 +10136,8 @@
         </p:nvSpPr>
         <p:spPr>
           <a:xfrm>
-            <a:off x="302449" y="3055241"/>
-            <a:ext cx="5138686" cy="2585323"/>
+            <a:off x="302449" y="2833970"/>
+            <a:ext cx="5138686" cy="1504258"/>
           </a:xfrm>
           <a:prstGeom prst="rect">
             <a:avLst/>
@@ -9387,7 +10160,7 @@
                 <a:latin typeface="나눔바른고딕" panose="020B0603020101020101" pitchFamily="34" charset="-127"/>
                 <a:ea typeface="나눔바른고딕" panose="020B0603020101020101" pitchFamily="34" charset="-127"/>
               </a:rPr>
-              <a:t>구조적 문제점</a:t>
+              <a:t>문제점</a:t>
             </a:r>
             <a:endParaRPr lang="en-US" altLang="ko-KR" sz="1200" dirty="0">
               <a:latin typeface="나눔바른고딕" panose="020B0603020101020101" pitchFamily="34" charset="-127"/>
@@ -9403,13 +10176,40 @@
               <a:buChar char="•"/>
             </a:pPr>
             <a:r>
-              <a:rPr lang="ko-KR" altLang="en-US" sz="1200" dirty="0">
-                <a:latin typeface="나눔바른고딕" panose="020B0603020101020101" pitchFamily="34" charset="-127"/>
-                <a:ea typeface="나눔바른고딕" panose="020B0603020101020101" pitchFamily="34" charset="-127"/>
-              </a:rPr>
-              <a:t>지형 인식 과정을 트리 구조로 처리</a:t>
-            </a:r>
-            <a:endParaRPr lang="en-US" altLang="ko-KR" sz="1200" dirty="0">
+              <a:rPr lang="ko-KR" altLang="en-US" sz="1000" dirty="0">
+                <a:latin typeface="나눔바른고딕" panose="020B0603020101020101" pitchFamily="34" charset="-127"/>
+                <a:ea typeface="나눔바른고딕" panose="020B0603020101020101" pitchFamily="34" charset="-127"/>
+              </a:rPr>
+              <a:t>지형 인식 과정을 트리 구조로 처리 </a:t>
+            </a:r>
+            <a:br>
+              <a:rPr lang="en-US" altLang="ko-KR" sz="1000" dirty="0">
+                <a:latin typeface="나눔바른고딕" panose="020B0603020101020101" pitchFamily="34" charset="-127"/>
+                <a:ea typeface="나눔바른고딕" panose="020B0603020101020101" pitchFamily="34" charset="-127"/>
+              </a:rPr>
+            </a:br>
+            <a:r>
+              <a:rPr lang="ko-KR" altLang="en-US" sz="1000" dirty="0">
+                <a:latin typeface="나눔바른고딕" panose="020B0603020101020101" pitchFamily="34" charset="-127"/>
+                <a:ea typeface="나눔바른고딕" panose="020B0603020101020101" pitchFamily="34" charset="-127"/>
+              </a:rPr>
+              <a:t>결과는 무수히 많아질 수 있는데 이걸 </a:t>
+            </a:r>
+            <a:r>
+              <a:rPr lang="en-US" altLang="ko-KR" sz="1000" dirty="0">
+                <a:latin typeface="나눔바른고딕" panose="020B0603020101020101" pitchFamily="34" charset="-127"/>
+                <a:ea typeface="나눔바른고딕" panose="020B0603020101020101" pitchFamily="34" charset="-127"/>
+              </a:rPr>
+              <a:t>FSM</a:t>
+            </a:r>
+            <a:r>
+              <a:rPr lang="ko-KR" altLang="en-US" sz="1000" dirty="0">
+                <a:latin typeface="나눔바른고딕" panose="020B0603020101020101" pitchFamily="34" charset="-127"/>
+                <a:ea typeface="나눔바른고딕" panose="020B0603020101020101" pitchFamily="34" charset="-127"/>
+              </a:rPr>
+              <a:t>으로 처리하고 있는 상황</a:t>
+            </a:r>
+            <a:endParaRPr lang="en-US" altLang="ko-KR" sz="1000" dirty="0">
               <a:latin typeface="나눔바른고딕" panose="020B0603020101020101" pitchFamily="34" charset="-127"/>
               <a:ea typeface="나눔바른고딕" panose="020B0603020101020101" pitchFamily="34" charset="-127"/>
             </a:endParaRPr>
@@ -9423,257 +10223,136 @@
               <a:buChar char="•"/>
             </a:pPr>
             <a:r>
-              <a:rPr lang="ko-KR" altLang="en-US" sz="1200" dirty="0">
-                <a:latin typeface="나눔바른고딕" panose="020B0603020101020101" pitchFamily="34" charset="-127"/>
-                <a:ea typeface="나눔바른고딕" panose="020B0603020101020101" pitchFamily="34" charset="-127"/>
-              </a:rPr>
-              <a:t>결과는 무수히 많아질 수 있는데 이걸 </a:t>
-            </a:r>
-            <a:r>
-              <a:rPr lang="en-US" altLang="ko-KR" sz="1200" dirty="0" smtClean="0">
+              <a:rPr lang="ko-KR" altLang="en-US" sz="1000" dirty="0">
+                <a:latin typeface="나눔바른고딕" panose="020B0603020101020101" pitchFamily="34" charset="-127"/>
+                <a:ea typeface="나눔바른고딕" panose="020B0603020101020101" pitchFamily="34" charset="-127"/>
+              </a:rPr>
+              <a:t>처리해야 할 </a:t>
+            </a:r>
+            <a:r>
+              <a:rPr lang="ko-KR" altLang="en-US" sz="1000" b="1" dirty="0">
+                <a:latin typeface="나눔바른고딕" panose="020B0603020101020101" pitchFamily="34" charset="-127"/>
+                <a:ea typeface="나눔바른고딕" panose="020B0603020101020101" pitchFamily="34" charset="-127"/>
+              </a:rPr>
+              <a:t>조건</a:t>
+            </a:r>
+            <a:r>
+              <a:rPr lang="en-US" altLang="ko-KR" sz="1000" b="1" dirty="0">
+                <a:latin typeface="나눔바른고딕" panose="020B0603020101020101" pitchFamily="34" charset="-127"/>
+                <a:ea typeface="나눔바른고딕" panose="020B0603020101020101" pitchFamily="34" charset="-127"/>
+              </a:rPr>
+              <a:t>, </a:t>
+            </a:r>
+            <a:r>
+              <a:rPr lang="ko-KR" altLang="en-US" sz="1000" b="1" dirty="0">
+                <a:latin typeface="나눔바른고딕" panose="020B0603020101020101" pitchFamily="34" charset="-127"/>
+                <a:ea typeface="나눔바른고딕" panose="020B0603020101020101" pitchFamily="34" charset="-127"/>
+              </a:rPr>
+              <a:t>상황</a:t>
+            </a:r>
+            <a:r>
+              <a:rPr lang="ko-KR" altLang="en-US" sz="1000" dirty="0">
+                <a:latin typeface="나눔바른고딕" panose="020B0603020101020101" pitchFamily="34" charset="-127"/>
+                <a:ea typeface="나눔바른고딕" panose="020B0603020101020101" pitchFamily="34" charset="-127"/>
+              </a:rPr>
+              <a:t>들은 많은데 </a:t>
+            </a:r>
+            <a:br>
+              <a:rPr lang="en-US" altLang="ko-KR" sz="1000" dirty="0">
+                <a:latin typeface="나눔바른고딕" panose="020B0603020101020101" pitchFamily="34" charset="-127"/>
+                <a:ea typeface="나눔바른고딕" panose="020B0603020101020101" pitchFamily="34" charset="-127"/>
+              </a:rPr>
+            </a:br>
+            <a:r>
+              <a:rPr lang="ko-KR" altLang="en-US" sz="1000" dirty="0">
+                <a:latin typeface="나눔바른고딕" panose="020B0603020101020101" pitchFamily="34" charset="-127"/>
+                <a:ea typeface="나눔바른고딕" panose="020B0603020101020101" pitchFamily="34" charset="-127"/>
+              </a:rPr>
+              <a:t>이것들을 </a:t>
+            </a:r>
+            <a:r>
+              <a:rPr lang="ko-KR" altLang="en-US" sz="1000" b="1" dirty="0" err="1">
+                <a:latin typeface="나눔바른고딕" panose="020B0603020101020101" pitchFamily="34" charset="-127"/>
+                <a:ea typeface="나눔바른고딕" panose="020B0603020101020101" pitchFamily="34" charset="-127"/>
+              </a:rPr>
+              <a:t>일일히</a:t>
+            </a:r>
+            <a:r>
+              <a:rPr lang="ko-KR" altLang="en-US" sz="1000" b="1" dirty="0">
+                <a:latin typeface="나눔바른고딕" panose="020B0603020101020101" pitchFamily="34" charset="-127"/>
+                <a:ea typeface="나눔바른고딕" panose="020B0603020101020101" pitchFamily="34" charset="-127"/>
+              </a:rPr>
+              <a:t> </a:t>
+            </a:r>
+            <a:r>
+              <a:rPr lang="en-US" altLang="ko-KR" sz="1000" b="1" dirty="0">
                 <a:latin typeface="나눔바른고딕" panose="020B0603020101020101" pitchFamily="34" charset="-127"/>
                 <a:ea typeface="나눔바른고딕" panose="020B0603020101020101" pitchFamily="34" charset="-127"/>
               </a:rPr>
               <a:t>FSM</a:t>
             </a:r>
             <a:r>
-              <a:rPr lang="ko-KR" altLang="en-US" sz="1200" dirty="0">
-                <a:latin typeface="나눔바른고딕" panose="020B0603020101020101" pitchFamily="34" charset="-127"/>
-                <a:ea typeface="나눔바른고딕" panose="020B0603020101020101" pitchFamily="34" charset="-127"/>
-              </a:rPr>
-              <a:t>으로 처리하고 있는 </a:t>
-            </a:r>
-            <a:r>
-              <a:rPr lang="ko-KR" altLang="en-US" sz="1200" dirty="0" smtClean="0">
-                <a:latin typeface="나눔바른고딕" panose="020B0603020101020101" pitchFamily="34" charset="-127"/>
-                <a:ea typeface="나눔바른고딕" panose="020B0603020101020101" pitchFamily="34" charset="-127"/>
-              </a:rPr>
-              <a:t>상황</a:t>
-            </a:r>
-            <a:endParaRPr lang="en-US" altLang="ko-KR" sz="1200" dirty="0">
+              <a:rPr lang="ko-KR" altLang="en-US" sz="1000" b="1" dirty="0">
+                <a:latin typeface="나눔바른고딕" panose="020B0603020101020101" pitchFamily="34" charset="-127"/>
+                <a:ea typeface="나눔바른고딕" panose="020B0603020101020101" pitchFamily="34" charset="-127"/>
+              </a:rPr>
+              <a:t>에서 코드로 처리</a:t>
+            </a:r>
+            <a:r>
+              <a:rPr lang="ko-KR" altLang="en-US" sz="1000" dirty="0">
+                <a:latin typeface="나눔바른고딕" panose="020B0603020101020101" pitchFamily="34" charset="-127"/>
+                <a:ea typeface="나눔바른고딕" panose="020B0603020101020101" pitchFamily="34" charset="-127"/>
+              </a:rPr>
+              <a:t>하는 것은 </a:t>
+            </a:r>
+            <a:r>
+              <a:rPr lang="ko-KR" altLang="en-US" sz="1000" b="1" dirty="0">
+                <a:latin typeface="나눔바른고딕" panose="020B0603020101020101" pitchFamily="34" charset="-127"/>
+                <a:ea typeface="나눔바른고딕" panose="020B0603020101020101" pitchFamily="34" charset="-127"/>
+              </a:rPr>
+              <a:t>비효율적</a:t>
+            </a:r>
+            <a:endParaRPr lang="en-US" altLang="ko-KR" sz="1000" b="1" dirty="0">
               <a:latin typeface="나눔바른고딕" panose="020B0603020101020101" pitchFamily="34" charset="-127"/>
               <a:ea typeface="나눔바른고딕" panose="020B0603020101020101" pitchFamily="34" charset="-127"/>
             </a:endParaRPr>
           </a:p>
           <a:p>
-            <a:pPr marL="171450" indent="-171450">
+            <a:pPr marL="628650" lvl="1" indent="-171450">
               <a:lnSpc>
                 <a:spcPct val="150000"/>
               </a:lnSpc>
               <a:buFont typeface="Arial" panose="020B0604020202020204" pitchFamily="34" charset="0"/>
               <a:buChar char="•"/>
             </a:pPr>
-            <a:endParaRPr lang="en-US" altLang="ko-KR" sz="1200" dirty="0" smtClean="0">
+            <a:r>
+              <a:rPr lang="ko-KR" altLang="en-US" sz="1000" dirty="0">
+                <a:latin typeface="나눔바른고딕" panose="020B0603020101020101" pitchFamily="34" charset="-127"/>
+                <a:ea typeface="나눔바른고딕" panose="020B0603020101020101" pitchFamily="34" charset="-127"/>
+              </a:rPr>
+              <a:t>처리 속도 문제 </a:t>
+            </a:r>
+            <a:r>
+              <a:rPr lang="en-US" altLang="ko-KR" sz="1000" dirty="0">
+                <a:latin typeface="나눔바른고딕" panose="020B0603020101020101" pitchFamily="34" charset="-127"/>
+                <a:ea typeface="나눔바른고딕" panose="020B0603020101020101" pitchFamily="34" charset="-127"/>
+              </a:rPr>
+              <a:t>+ </a:t>
+            </a:r>
+            <a:r>
+              <a:rPr lang="ko-KR" altLang="en-US" sz="1000" dirty="0">
+                <a:latin typeface="나눔바른고딕" panose="020B0603020101020101" pitchFamily="34" charset="-127"/>
+                <a:ea typeface="나눔바른고딕" panose="020B0603020101020101" pitchFamily="34" charset="-127"/>
+              </a:rPr>
+              <a:t>휴먼 에러 문제 발생 가능</a:t>
+            </a:r>
+            <a:endParaRPr lang="en-US" altLang="ko-KR" sz="1000" dirty="0">
               <a:latin typeface="나눔바른고딕" panose="020B0603020101020101" pitchFamily="34" charset="-127"/>
               <a:ea typeface="나눔바른고딕" panose="020B0603020101020101" pitchFamily="34" charset="-127"/>
             </a:endParaRPr>
           </a:p>
-          <a:p>
-            <a:pPr marL="171450" indent="-171450">
-              <a:lnSpc>
-                <a:spcPct val="150000"/>
-              </a:lnSpc>
-              <a:buFont typeface="Arial" panose="020B0604020202020204" pitchFamily="34" charset="0"/>
-              <a:buChar char="•"/>
-            </a:pPr>
-            <a:r>
-              <a:rPr lang="ko-KR" altLang="en-US" sz="1200" dirty="0" smtClean="0">
-                <a:latin typeface="나눔바른고딕" panose="020B0603020101020101" pitchFamily="34" charset="-127"/>
-                <a:ea typeface="나눔바른고딕" panose="020B0603020101020101" pitchFamily="34" charset="-127"/>
-              </a:rPr>
-              <a:t>처리해야 </a:t>
-            </a:r>
-            <a:r>
-              <a:rPr lang="ko-KR" altLang="en-US" sz="1200" dirty="0">
-                <a:latin typeface="나눔바른고딕" panose="020B0603020101020101" pitchFamily="34" charset="-127"/>
-                <a:ea typeface="나눔바른고딕" panose="020B0603020101020101" pitchFamily="34" charset="-127"/>
-              </a:rPr>
-              <a:t>할 조건들</a:t>
-            </a:r>
-            <a:r>
-              <a:rPr lang="en-US" altLang="ko-KR" sz="1200" dirty="0">
-                <a:latin typeface="나눔바른고딕" panose="020B0603020101020101" pitchFamily="34" charset="-127"/>
-                <a:ea typeface="나눔바른고딕" panose="020B0603020101020101" pitchFamily="34" charset="-127"/>
-              </a:rPr>
-              <a:t>, </a:t>
-            </a:r>
-            <a:r>
-              <a:rPr lang="ko-KR" altLang="en-US" sz="1200" dirty="0">
-                <a:latin typeface="나눔바른고딕" panose="020B0603020101020101" pitchFamily="34" charset="-127"/>
-                <a:ea typeface="나눔바른고딕" panose="020B0603020101020101" pitchFamily="34" charset="-127"/>
-              </a:rPr>
-              <a:t>상황들은 많은데 </a:t>
-            </a:r>
-            <a:r>
-              <a:rPr lang="en-US" altLang="ko-KR" sz="1200" dirty="0" smtClean="0">
-                <a:latin typeface="나눔바른고딕" panose="020B0603020101020101" pitchFamily="34" charset="-127"/>
-                <a:ea typeface="나눔바른고딕" panose="020B0603020101020101" pitchFamily="34" charset="-127"/>
-              </a:rPr>
-              <a:t/>
-            </a:r>
-            <a:br>
-              <a:rPr lang="en-US" altLang="ko-KR" sz="1200" dirty="0" smtClean="0">
-                <a:latin typeface="나눔바른고딕" panose="020B0603020101020101" pitchFamily="34" charset="-127"/>
-                <a:ea typeface="나눔바른고딕" panose="020B0603020101020101" pitchFamily="34" charset="-127"/>
-              </a:rPr>
-            </a:br>
-            <a:r>
-              <a:rPr lang="ko-KR" altLang="en-US" sz="1200" dirty="0" smtClean="0">
-                <a:latin typeface="나눔바른고딕" panose="020B0603020101020101" pitchFamily="34" charset="-127"/>
-                <a:ea typeface="나눔바른고딕" panose="020B0603020101020101" pitchFamily="34" charset="-127"/>
-              </a:rPr>
-              <a:t>이것들을 </a:t>
-            </a:r>
-            <a:r>
-              <a:rPr lang="ko-KR" altLang="en-US" sz="1200" dirty="0" err="1">
-                <a:latin typeface="나눔바른고딕" panose="020B0603020101020101" pitchFamily="34" charset="-127"/>
-                <a:ea typeface="나눔바른고딕" panose="020B0603020101020101" pitchFamily="34" charset="-127"/>
-              </a:rPr>
-              <a:t>일일히</a:t>
-            </a:r>
-            <a:r>
-              <a:rPr lang="ko-KR" altLang="en-US" sz="1200" dirty="0">
-                <a:latin typeface="나눔바른고딕" panose="020B0603020101020101" pitchFamily="34" charset="-127"/>
-                <a:ea typeface="나눔바른고딕" panose="020B0603020101020101" pitchFamily="34" charset="-127"/>
-              </a:rPr>
-              <a:t> </a:t>
-            </a:r>
-            <a:r>
-              <a:rPr lang="en-US" altLang="ko-KR" sz="1200" dirty="0">
-                <a:latin typeface="나눔바른고딕" panose="020B0603020101020101" pitchFamily="34" charset="-127"/>
-                <a:ea typeface="나눔바른고딕" panose="020B0603020101020101" pitchFamily="34" charset="-127"/>
-              </a:rPr>
-              <a:t>FSM</a:t>
-            </a:r>
-            <a:r>
-              <a:rPr lang="ko-KR" altLang="en-US" sz="1200" dirty="0">
-                <a:latin typeface="나눔바른고딕" panose="020B0603020101020101" pitchFamily="34" charset="-127"/>
-                <a:ea typeface="나눔바른고딕" panose="020B0603020101020101" pitchFamily="34" charset="-127"/>
-              </a:rPr>
-              <a:t>에서 코드로 처리하는 것은 </a:t>
-            </a:r>
-            <a:r>
-              <a:rPr lang="ko-KR" altLang="en-US" sz="1200" dirty="0" smtClean="0">
-                <a:latin typeface="나눔바른고딕" panose="020B0603020101020101" pitchFamily="34" charset="-127"/>
-                <a:ea typeface="나눔바른고딕" panose="020B0603020101020101" pitchFamily="34" charset="-127"/>
-              </a:rPr>
-              <a:t>비효율적</a:t>
-            </a:r>
-            <a:endParaRPr lang="en-US" altLang="ko-KR" sz="1200" dirty="0" smtClean="0">
-              <a:latin typeface="나눔바른고딕" panose="020B0603020101020101" pitchFamily="34" charset="-127"/>
-              <a:ea typeface="나눔바른고딕" panose="020B0603020101020101" pitchFamily="34" charset="-127"/>
-            </a:endParaRPr>
-          </a:p>
-          <a:p>
-            <a:pPr marL="171450" indent="-171450">
-              <a:lnSpc>
-                <a:spcPct val="150000"/>
-              </a:lnSpc>
-              <a:buFont typeface="Arial" panose="020B0604020202020204" pitchFamily="34" charset="0"/>
-              <a:buChar char="•"/>
-            </a:pPr>
-            <a:endParaRPr lang="en-US" altLang="ko-KR" sz="1200" dirty="0" smtClean="0">
-              <a:latin typeface="나눔바른고딕" panose="020B0603020101020101" pitchFamily="34" charset="-127"/>
-              <a:ea typeface="나눔바른고딕" panose="020B0603020101020101" pitchFamily="34" charset="-127"/>
-            </a:endParaRPr>
-          </a:p>
-          <a:p>
-            <a:pPr marL="171450" indent="-171450">
-              <a:lnSpc>
-                <a:spcPct val="150000"/>
-              </a:lnSpc>
-              <a:buFont typeface="Arial" panose="020B0604020202020204" pitchFamily="34" charset="0"/>
-              <a:buChar char="•"/>
-            </a:pPr>
-            <a:r>
-              <a:rPr lang="ko-KR" altLang="en-US" sz="1200" dirty="0" smtClean="0">
-                <a:latin typeface="나눔바른고딕" panose="020B0603020101020101" pitchFamily="34" charset="-127"/>
-                <a:ea typeface="나눔바른고딕" panose="020B0603020101020101" pitchFamily="34" charset="-127"/>
-              </a:rPr>
-              <a:t>지형 인식의 경우</a:t>
-            </a:r>
-            <a:r>
-              <a:rPr lang="ko-KR" altLang="en-US" sz="1200" dirty="0" smtClean="0">
-                <a:latin typeface="나눔바른고딕" panose="020B0603020101020101" pitchFamily="34" charset="-127"/>
-                <a:ea typeface="나눔바른고딕" panose="020B0603020101020101" pitchFamily="34" charset="-127"/>
-              </a:rPr>
-              <a:t>의 추가는 용이하지만</a:t>
-            </a:r>
-            <a:r>
-              <a:rPr lang="en-US" altLang="ko-KR" sz="1200" dirty="0" smtClean="0">
-                <a:latin typeface="나눔바른고딕" panose="020B0603020101020101" pitchFamily="34" charset="-127"/>
-                <a:ea typeface="나눔바른고딕" panose="020B0603020101020101" pitchFamily="34" charset="-127"/>
-              </a:rPr>
-              <a:t>,</a:t>
-            </a:r>
-            <a:br>
-              <a:rPr lang="en-US" altLang="ko-KR" sz="1200" dirty="0" smtClean="0">
-                <a:latin typeface="나눔바른고딕" panose="020B0603020101020101" pitchFamily="34" charset="-127"/>
-                <a:ea typeface="나눔바른고딕" panose="020B0603020101020101" pitchFamily="34" charset="-127"/>
-              </a:rPr>
-            </a:br>
-            <a:r>
-              <a:rPr lang="ko-KR" altLang="en-US" sz="1200" dirty="0" smtClean="0">
-                <a:latin typeface="나눔바른고딕" panose="020B0603020101020101" pitchFamily="34" charset="-127"/>
-                <a:ea typeface="나눔바른고딕" panose="020B0603020101020101" pitchFamily="34" charset="-127"/>
-              </a:rPr>
-              <a:t>처리하는 방식이 이를 따라가지 못하는 형태</a:t>
-            </a:r>
-            <a:endParaRPr lang="en-US" altLang="ko-KR" sz="1200" dirty="0">
-              <a:latin typeface="나눔바른고딕" panose="020B0603020101020101" pitchFamily="34" charset="-127"/>
-              <a:ea typeface="나눔바른고딕" panose="020B0603020101020101" pitchFamily="34" charset="-127"/>
-            </a:endParaRPr>
-          </a:p>
-        </p:txBody>
-      </p:sp>
-      <p:pic>
-        <p:nvPicPr>
-          <p:cNvPr id="2" name="그림 1"/>
-          <p:cNvPicPr>
-            <a:picLocks noChangeAspect="1"/>
-          </p:cNvPicPr>
-          <p:nvPr/>
-        </p:nvPicPr>
-        <p:blipFill>
-          <a:blip r:embed="rId3"/>
-          <a:stretch>
-            <a:fillRect/>
-          </a:stretch>
-        </p:blipFill>
-        <p:spPr>
-          <a:xfrm>
-            <a:off x="7516974" y="1039909"/>
-            <a:ext cx="2693612" cy="2642645"/>
-          </a:xfrm>
-          <a:prstGeom prst="rect">
-            <a:avLst/>
-          </a:prstGeom>
-        </p:spPr>
-      </p:pic>
-      <p:pic>
-        <p:nvPicPr>
-          <p:cNvPr id="5" name="그림 4"/>
-          <p:cNvPicPr>
-            <a:picLocks noChangeAspect="1"/>
-          </p:cNvPicPr>
-          <p:nvPr/>
-        </p:nvPicPr>
-        <p:blipFill>
-          <a:blip r:embed="rId4"/>
-          <a:stretch>
-            <a:fillRect/>
-          </a:stretch>
-        </p:blipFill>
-        <p:spPr>
-          <a:xfrm>
-            <a:off x="6683689" y="4426874"/>
-            <a:ext cx="4448671" cy="2065772"/>
-          </a:xfrm>
-          <a:prstGeom prst="rect">
-            <a:avLst/>
-          </a:prstGeom>
-        </p:spPr>
-      </p:pic>
+        </p:txBody>
+      </p:sp>
       <p:sp>
         <p:nvSpPr>
           <p:cNvPr id="7" name="아래쪽 화살표 6"/>
@@ -9682,7 +10361,7 @@
         </p:nvSpPr>
         <p:spPr>
           <a:xfrm>
-            <a:off x="8698213" y="3850001"/>
+            <a:off x="7919280" y="3829527"/>
             <a:ext cx="419624" cy="450374"/>
           </a:xfrm>
           <a:prstGeom prst="downArrow">
@@ -9714,6 +10393,78 @@
           </a:p>
         </p:txBody>
       </p:sp>
+      <p:pic>
+        <p:nvPicPr>
+          <p:cNvPr id="14" name="그림 13">
+            <a:extLst>
+              <a:ext uri="{FF2B5EF4-FFF2-40B4-BE49-F238E27FC236}">
+                <a16:creationId xmlns:a16="http://schemas.microsoft.com/office/drawing/2014/main" id="{F2DA1719-56E2-86E6-A805-CC85E5BEA182}"/>
+              </a:ext>
+            </a:extLst>
+          </p:cNvPr>
+          <p:cNvPicPr>
+            <a:picLocks noChangeAspect="1"/>
+          </p:cNvPicPr>
+          <p:nvPr/>
+        </p:nvPicPr>
+        <p:blipFill>
+          <a:blip r:embed="rId4"/>
+          <a:stretch>
+            <a:fillRect/>
+          </a:stretch>
+        </p:blipFill>
+        <p:spPr>
+          <a:xfrm>
+            <a:off x="4772420" y="4481753"/>
+            <a:ext cx="6667105" cy="2135557"/>
+          </a:xfrm>
+          <a:prstGeom prst="rect">
+            <a:avLst/>
+          </a:prstGeom>
+        </p:spPr>
+      </p:pic>
+      <p:cxnSp>
+        <p:nvCxnSpPr>
+          <p:cNvPr id="18" name="연결선: 꺾임 17">
+            <a:extLst>
+              <a:ext uri="{FF2B5EF4-FFF2-40B4-BE49-F238E27FC236}">
+                <a16:creationId xmlns:a16="http://schemas.microsoft.com/office/drawing/2014/main" id="{84B039F6-83D8-5E28-8B23-2A0C00FD608E}"/>
+              </a:ext>
+            </a:extLst>
+          </p:cNvPr>
+          <p:cNvCxnSpPr>
+            <a:cxnSpLocks/>
+            <a:stCxn id="9" idx="3"/>
+          </p:cNvCxnSpPr>
+          <p:nvPr/>
+        </p:nvCxnSpPr>
+        <p:spPr>
+          <a:xfrm>
+            <a:off x="10000351" y="2534498"/>
+            <a:ext cx="554049" cy="2199427"/>
+          </a:xfrm>
+          <a:prstGeom prst="bentConnector2">
+            <a:avLst/>
+          </a:prstGeom>
+          <a:ln>
+            <a:tailEnd type="triangle"/>
+          </a:ln>
+        </p:spPr>
+        <p:style>
+          <a:lnRef idx="2">
+            <a:schemeClr val="accent4"/>
+          </a:lnRef>
+          <a:fillRef idx="0">
+            <a:schemeClr val="accent4"/>
+          </a:fillRef>
+          <a:effectRef idx="1">
+            <a:schemeClr val="accent4"/>
+          </a:effectRef>
+          <a:fontRef idx="minor">
+            <a:schemeClr val="tx1"/>
+          </a:fontRef>
+        </p:style>
+      </p:cxnSp>
     </p:spTree>
     <p:extLst>
       <p:ext uri="{BB962C8B-B14F-4D97-AF65-F5344CB8AC3E}">
@@ -9735,7 +10486,7 @@
         <p:cNvPr id="1" name="">
           <a:extLst>
             <a:ext uri="{FF2B5EF4-FFF2-40B4-BE49-F238E27FC236}">
-              <a16:creationId xmlns:a16="http://schemas.microsoft.com/office/drawing/2014/main" xmlns="" id="{CD9567D0-8D8D-4F82-AAD7-B0FF119C0461}"/>
+              <a16:creationId xmlns:a16="http://schemas.microsoft.com/office/drawing/2014/main" id="{CD9567D0-8D8D-4F82-AAD7-B0FF119C0461}"/>
             </a:ext>
           </a:extLst>
         </p:cNvPr>
@@ -9755,7 +10506,7 @@
           <p:cNvPr id="8" name="TextBox 7">
             <a:extLst>
               <a:ext uri="{FF2B5EF4-FFF2-40B4-BE49-F238E27FC236}">
-                <a16:creationId xmlns:a16="http://schemas.microsoft.com/office/drawing/2014/main" xmlns="" id="{EA448F56-014E-4B94-FB44-E56AECD3FEB6}"/>
+                <a16:creationId xmlns:a16="http://schemas.microsoft.com/office/drawing/2014/main" id="{EA448F56-014E-4B94-FB44-E56AECD3FEB6}"/>
               </a:ext>
             </a:extLst>
           </p:cNvPr>
@@ -9797,7 +10548,7 @@
           <p:cNvPr id="10" name="TextBox 9">
             <a:extLst>
               <a:ext uri="{FF2B5EF4-FFF2-40B4-BE49-F238E27FC236}">
-                <a16:creationId xmlns:a16="http://schemas.microsoft.com/office/drawing/2014/main" xmlns="" id="{6316BC8B-3E9C-4B1A-E79B-6ACB06F238D1}"/>
+                <a16:creationId xmlns:a16="http://schemas.microsoft.com/office/drawing/2014/main" id="{6316BC8B-3E9C-4B1A-E79B-6ACB06F238D1}"/>
               </a:ext>
             </a:extLst>
           </p:cNvPr>
@@ -9853,7 +10604,7 @@
           <p:cNvPr id="3" name="직선 연결선 2">
             <a:extLst>
               <a:ext uri="{FF2B5EF4-FFF2-40B4-BE49-F238E27FC236}">
-                <a16:creationId xmlns:a16="http://schemas.microsoft.com/office/drawing/2014/main" xmlns="" id="{225FDA88-AB34-8322-EAD0-B9E3833A2962}"/>
+                <a16:creationId xmlns:a16="http://schemas.microsoft.com/office/drawing/2014/main" id="{225FDA88-AB34-8322-EAD0-B9E3833A2962}"/>
               </a:ext>
             </a:extLst>
           </p:cNvPr>
@@ -9896,7 +10647,7 @@
           <p:cNvPr id="12" name="직사각형 11">
             <a:extLst>
               <a:ext uri="{FF2B5EF4-FFF2-40B4-BE49-F238E27FC236}">
-                <a16:creationId xmlns:a16="http://schemas.microsoft.com/office/drawing/2014/main" xmlns="" id="{445848D8-1587-C15E-4275-1CAD486BF1EB}"/>
+                <a16:creationId xmlns:a16="http://schemas.microsoft.com/office/drawing/2014/main" id="{445848D8-1587-C15E-4275-1CAD486BF1EB}"/>
               </a:ext>
             </a:extLst>
           </p:cNvPr>
@@ -10019,7 +10770,7 @@
           <p:cNvPr id="13" name="TextBox 12">
             <a:extLst>
               <a:ext uri="{FF2B5EF4-FFF2-40B4-BE49-F238E27FC236}">
-                <a16:creationId xmlns:a16="http://schemas.microsoft.com/office/drawing/2014/main" xmlns="" id="{EB4EBD0C-7AD4-F15A-16EF-C7AFB68FB270}"/>
+                <a16:creationId xmlns:a16="http://schemas.microsoft.com/office/drawing/2014/main" id="{EB4EBD0C-7AD4-F15A-16EF-C7AFB68FB270}"/>
               </a:ext>
             </a:extLst>
           </p:cNvPr>
@@ -10028,8 +10779,8 @@
         </p:nvSpPr>
         <p:spPr>
           <a:xfrm>
-            <a:off x="2527905" y="2489172"/>
-            <a:ext cx="1859815" cy="369582"/>
+            <a:off x="2527905" y="2176077"/>
+            <a:ext cx="1859815" cy="346249"/>
           </a:xfrm>
           <a:prstGeom prst="rect">
             <a:avLst/>
@@ -10048,32 +10799,32 @@
               </a:lnSpc>
             </a:pPr>
             <a:r>
-              <a:rPr lang="en-US" altLang="ko-KR" sz="1200" dirty="0" smtClean="0">
+              <a:rPr lang="en-US" altLang="ko-KR" sz="1200" dirty="0">
                 <a:latin typeface="나눔바른고딕" panose="020B0603020101020101" pitchFamily="34" charset="-127"/>
                 <a:ea typeface="나눔바른고딕" panose="020B0603020101020101" pitchFamily="34" charset="-127"/>
               </a:rPr>
               <a:t>1. </a:t>
             </a:r>
             <a:r>
-              <a:rPr lang="ko-KR" altLang="en-US" sz="1200" dirty="0" smtClean="0">
+              <a:rPr lang="ko-KR" altLang="en-US" sz="1200" dirty="0">
                 <a:latin typeface="나눔바른고딕" panose="020B0603020101020101" pitchFamily="34" charset="-127"/>
                 <a:ea typeface="나눔바른고딕" panose="020B0603020101020101" pitchFamily="34" charset="-127"/>
               </a:rPr>
               <a:t>인식 단계 </a:t>
             </a:r>
             <a:r>
-              <a:rPr lang="en-US" altLang="ko-KR" sz="1200" dirty="0" smtClean="0">
+              <a:rPr lang="en-US" altLang="ko-KR" sz="1200" dirty="0">
                 <a:latin typeface="나눔바른고딕" panose="020B0603020101020101" pitchFamily="34" charset="-127"/>
                 <a:ea typeface="나눔바른고딕" panose="020B0603020101020101" pitchFamily="34" charset="-127"/>
               </a:rPr>
               <a:t>: </a:t>
             </a:r>
             <a:r>
-              <a:rPr lang="ko-KR" altLang="en-US" sz="1200" dirty="0" smtClean="0">
-                <a:latin typeface="나눔바른고딕" panose="020B0603020101020101" pitchFamily="34" charset="-127"/>
-                <a:ea typeface="나눔바른고딕" panose="020B0603020101020101" pitchFamily="34" charset="-127"/>
-              </a:rPr>
-              <a:t>장애물 측정</a:t>
+              <a:rPr lang="ko-KR" altLang="en-US" sz="1200" dirty="0">
+                <a:latin typeface="나눔바른고딕" panose="020B0603020101020101" pitchFamily="34" charset="-127"/>
+                <a:ea typeface="나눔바른고딕" panose="020B0603020101020101" pitchFamily="34" charset="-127"/>
+              </a:rPr>
+              <a:t>지형 측정</a:t>
             </a:r>
             <a:endParaRPr lang="en-US" altLang="ko-KR" sz="1200" dirty="0">
               <a:latin typeface="나눔바른고딕" panose="020B0603020101020101" pitchFamily="34" charset="-127"/>
@@ -10087,7 +10838,7 @@
           <p:cNvPr id="14" name="TextBox 13">
             <a:extLst>
               <a:ext uri="{FF2B5EF4-FFF2-40B4-BE49-F238E27FC236}">
-                <a16:creationId xmlns:a16="http://schemas.microsoft.com/office/drawing/2014/main" xmlns="" id="{EB4EBD0C-7AD4-F15A-16EF-C7AFB68FB270}"/>
+                <a16:creationId xmlns:a16="http://schemas.microsoft.com/office/drawing/2014/main" id="{EB4EBD0C-7AD4-F15A-16EF-C7AFB68FB270}"/>
               </a:ext>
             </a:extLst>
           </p:cNvPr>
@@ -10096,8 +10847,8 @@
         </p:nvSpPr>
         <p:spPr>
           <a:xfrm>
-            <a:off x="7039361" y="2489172"/>
-            <a:ext cx="2817887" cy="369332"/>
+            <a:off x="7039361" y="2176077"/>
+            <a:ext cx="2817887" cy="623248"/>
           </a:xfrm>
           <a:prstGeom prst="rect">
             <a:avLst/>
@@ -10116,34 +10867,76 @@
               </a:lnSpc>
             </a:pPr>
             <a:r>
-              <a:rPr lang="en-US" altLang="ko-KR" sz="1200" dirty="0" smtClean="0">
+              <a:rPr lang="en-US" altLang="ko-KR" sz="1200" dirty="0">
                 <a:latin typeface="나눔바른고딕" panose="020B0603020101020101" pitchFamily="34" charset="-127"/>
                 <a:ea typeface="나눔바른고딕" panose="020B0603020101020101" pitchFamily="34" charset="-127"/>
               </a:rPr>
               <a:t>2. </a:t>
             </a:r>
             <a:r>
-              <a:rPr lang="ko-KR" altLang="en-US" sz="1200" dirty="0" smtClean="0">
+              <a:rPr lang="ko-KR" altLang="en-US" sz="1200" dirty="0">
                 <a:latin typeface="나눔바른고딕" panose="020B0603020101020101" pitchFamily="34" charset="-127"/>
                 <a:ea typeface="나눔바른고딕" panose="020B0603020101020101" pitchFamily="34" charset="-127"/>
               </a:rPr>
               <a:t>결과 처리 단계 </a:t>
             </a:r>
             <a:r>
-              <a:rPr lang="en-US" altLang="ko-KR" sz="1200" dirty="0" smtClean="0">
+              <a:rPr lang="en-US" altLang="ko-KR" sz="1200" dirty="0">
                 <a:latin typeface="나눔바른고딕" panose="020B0603020101020101" pitchFamily="34" charset="-127"/>
                 <a:ea typeface="나눔바른고딕" panose="020B0603020101020101" pitchFamily="34" charset="-127"/>
               </a:rPr>
               <a:t>: </a:t>
             </a:r>
-            <a:r>
-              <a:rPr lang="ko-KR" altLang="en-US" sz="1200" dirty="0" smtClean="0">
-                <a:latin typeface="나눔바른고딕" panose="020B0603020101020101" pitchFamily="34" charset="-127"/>
-                <a:ea typeface="나눔바른고딕" panose="020B0603020101020101" pitchFamily="34" charset="-127"/>
-              </a:rPr>
-              <a:t>조건에 맞는 모션 찾기</a:t>
-            </a:r>
-            <a:endParaRPr lang="en-US" altLang="ko-KR" sz="1200" dirty="0">
+          </a:p>
+          <a:p>
+            <a:pPr algn="ctr">
+              <a:lnSpc>
+                <a:spcPct val="150000"/>
+              </a:lnSpc>
+            </a:pPr>
+            <a:r>
+              <a:rPr lang="ko-KR" altLang="en-US" sz="1200" dirty="0">
+                <a:latin typeface="나눔바른고딕" panose="020B0603020101020101" pitchFamily="34" charset="-127"/>
+                <a:ea typeface="나눔바른고딕" panose="020B0603020101020101" pitchFamily="34" charset="-127"/>
+              </a:rPr>
+              <a:t>측정 결과 활용</a:t>
+            </a:r>
+            <a:r>
+              <a:rPr lang="en-US" altLang="ko-KR" sz="1200" dirty="0">
+                <a:latin typeface="나눔바른고딕" panose="020B0603020101020101" pitchFamily="34" charset="-127"/>
+                <a:ea typeface="나눔바른고딕" panose="020B0603020101020101" pitchFamily="34" charset="-127"/>
+              </a:rPr>
+              <a:t>,</a:t>
+            </a:r>
+            <a:r>
+              <a:rPr lang="ko-KR" altLang="en-US" sz="1200" dirty="0">
+                <a:latin typeface="나눔바른고딕" panose="020B0603020101020101" pitchFamily="34" charset="-127"/>
+                <a:ea typeface="나눔바른고딕" panose="020B0603020101020101" pitchFamily="34" charset="-127"/>
+              </a:rPr>
+              <a:t> </a:t>
+            </a:r>
+            <a:r>
+              <a:rPr lang="ko-KR" altLang="en-US" sz="1200" b="1" dirty="0">
+                <a:latin typeface="나눔바른고딕" panose="020B0603020101020101" pitchFamily="34" charset="-127"/>
+                <a:ea typeface="나눔바른고딕" panose="020B0603020101020101" pitchFamily="34" charset="-127"/>
+              </a:rPr>
+              <a:t>조건</a:t>
+            </a:r>
+            <a:r>
+              <a:rPr lang="ko-KR" altLang="en-US" sz="1200" dirty="0">
+                <a:latin typeface="나눔바른고딕" panose="020B0603020101020101" pitchFamily="34" charset="-127"/>
+                <a:ea typeface="나눔바른고딕" panose="020B0603020101020101" pitchFamily="34" charset="-127"/>
+              </a:rPr>
+              <a:t>에 맞는 </a:t>
+            </a:r>
+            <a:r>
+              <a:rPr lang="ko-KR" altLang="en-US" sz="1200" b="1" dirty="0">
+                <a:latin typeface="나눔바른고딕" panose="020B0603020101020101" pitchFamily="34" charset="-127"/>
+                <a:ea typeface="나눔바른고딕" panose="020B0603020101020101" pitchFamily="34" charset="-127"/>
+              </a:rPr>
+              <a:t>모션 찾기</a:t>
+            </a:r>
+            <a:endParaRPr lang="en-US" altLang="ko-KR" sz="1200" b="1" dirty="0">
               <a:latin typeface="나눔바른고딕" panose="020B0603020101020101" pitchFamily="34" charset="-127"/>
               <a:ea typeface="나눔바른고딕" panose="020B0603020101020101" pitchFamily="34" charset="-127"/>
             </a:endParaRPr>
@@ -10179,7 +10972,7 @@
           <p:cNvPr id="17" name="TextBox 16">
             <a:extLst>
               <a:ext uri="{FF2B5EF4-FFF2-40B4-BE49-F238E27FC236}">
-                <a16:creationId xmlns:a16="http://schemas.microsoft.com/office/drawing/2014/main" xmlns="" id="{E8CCFE6E-0F8B-0AFD-783E-1814D9C177FA}"/>
+                <a16:creationId xmlns:a16="http://schemas.microsoft.com/office/drawing/2014/main" id="{E8CCFE6E-0F8B-0AFD-783E-1814D9C177FA}"/>
               </a:ext>
             </a:extLst>
           </p:cNvPr>
@@ -10189,7 +10982,7 @@
         <p:spPr>
           <a:xfrm>
             <a:off x="302449" y="1342316"/>
-            <a:ext cx="6822627" cy="623248"/>
+            <a:ext cx="6822627" cy="580928"/>
           </a:xfrm>
           <a:prstGeom prst="rect">
             <a:avLst/>
@@ -10228,41 +11021,27 @@
               <a:buChar char="•"/>
             </a:pPr>
             <a:r>
-              <a:rPr lang="ko-KR" altLang="en-US" sz="1200" dirty="0">
+              <a:rPr lang="ko-KR" altLang="en-US" sz="1000" dirty="0">
                 <a:latin typeface="나눔바른고딕" panose="020B0603020101020101" pitchFamily="34" charset="-127"/>
                 <a:ea typeface="나눔바른고딕" panose="020B0603020101020101" pitchFamily="34" charset="-127"/>
               </a:rPr>
               <a:t>처리 결과를 </a:t>
             </a:r>
             <a:r>
-              <a:rPr lang="en-US" altLang="ko-KR" sz="1200" dirty="0">
+              <a:rPr lang="en-US" altLang="ko-KR" sz="1000" dirty="0">
                 <a:latin typeface="나눔바른고딕" panose="020B0603020101020101" pitchFamily="34" charset="-127"/>
                 <a:ea typeface="나눔바른고딕" panose="020B0603020101020101" pitchFamily="34" charset="-127"/>
               </a:rPr>
               <a:t>FSM</a:t>
             </a:r>
             <a:r>
-              <a:rPr lang="ko-KR" altLang="en-US" sz="1200" dirty="0">
-                <a:latin typeface="나눔바른고딕" panose="020B0603020101020101" pitchFamily="34" charset="-127"/>
-                <a:ea typeface="나눔바른고딕" panose="020B0603020101020101" pitchFamily="34" charset="-127"/>
-              </a:rPr>
-              <a:t>으로 하지 않고 </a:t>
-            </a:r>
-            <a:r>
-              <a:rPr lang="ko-KR" altLang="en-US" sz="1200" dirty="0" smtClean="0">
-                <a:latin typeface="나눔바른고딕" panose="020B0603020101020101" pitchFamily="34" charset="-127"/>
-                <a:ea typeface="나눔바른고딕" panose="020B0603020101020101" pitchFamily="34" charset="-127"/>
-              </a:rPr>
-              <a:t>마찬가지로 </a:t>
-            </a:r>
-            <a:r>
-              <a:rPr lang="ko-KR" altLang="en-US" sz="1200" dirty="0">
-                <a:latin typeface="나눔바른고딕" panose="020B0603020101020101" pitchFamily="34" charset="-127"/>
-                <a:ea typeface="나눔바른고딕" panose="020B0603020101020101" pitchFamily="34" charset="-127"/>
-              </a:rPr>
-              <a:t>추가하기 용이한 방법으로 데이터화</a:t>
-            </a:r>
-            <a:endParaRPr lang="en-US" altLang="ko-KR" sz="1200" dirty="0">
+              <a:rPr lang="ko-KR" altLang="en-US" sz="1000" dirty="0">
+                <a:latin typeface="나눔바른고딕" panose="020B0603020101020101" pitchFamily="34" charset="-127"/>
+                <a:ea typeface="나눔바른고딕" panose="020B0603020101020101" pitchFamily="34" charset="-127"/>
+              </a:rPr>
+              <a:t>으로 하지 않고 마찬가지로 추가하기 용이한 방법으로 데이터화</a:t>
+            </a:r>
+            <a:endParaRPr lang="en-US" altLang="ko-KR" sz="1000" dirty="0">
               <a:latin typeface="나눔바른고딕" panose="020B0603020101020101" pitchFamily="34" charset="-127"/>
               <a:ea typeface="나눔바른고딕" panose="020B0603020101020101" pitchFamily="34" charset="-127"/>
             </a:endParaRPr>
@@ -10290,7 +11069,7 @@
         <p:cNvPr id="1" name="">
           <a:extLst>
             <a:ext uri="{FF2B5EF4-FFF2-40B4-BE49-F238E27FC236}">
-              <a16:creationId xmlns:a16="http://schemas.microsoft.com/office/drawing/2014/main" xmlns="" id="{48549640-3534-B328-F19D-483A4CB1ABE8}"/>
+              <a16:creationId xmlns:a16="http://schemas.microsoft.com/office/drawing/2014/main" id="{48549640-3534-B328-F19D-483A4CB1ABE8}"/>
             </a:ext>
           </a:extLst>
         </p:cNvPr>
@@ -10310,7 +11089,7 @@
           <p:cNvPr id="8" name="TextBox 7">
             <a:extLst>
               <a:ext uri="{FF2B5EF4-FFF2-40B4-BE49-F238E27FC236}">
-                <a16:creationId xmlns:a16="http://schemas.microsoft.com/office/drawing/2014/main" xmlns="" id="{B1A3C1A3-4416-EBEB-03C5-ADA3B9DDFD9F}"/>
+                <a16:creationId xmlns:a16="http://schemas.microsoft.com/office/drawing/2014/main" id="{B1A3C1A3-4416-EBEB-03C5-ADA3B9DDFD9F}"/>
               </a:ext>
             </a:extLst>
           </p:cNvPr>
@@ -10352,7 +11131,7 @@
           <p:cNvPr id="10" name="TextBox 9">
             <a:extLst>
               <a:ext uri="{FF2B5EF4-FFF2-40B4-BE49-F238E27FC236}">
-                <a16:creationId xmlns:a16="http://schemas.microsoft.com/office/drawing/2014/main" xmlns="" id="{B280500D-53D9-B8BE-35B6-A5F3FD71B9BB}"/>
+                <a16:creationId xmlns:a16="http://schemas.microsoft.com/office/drawing/2014/main" id="{B280500D-53D9-B8BE-35B6-A5F3FD71B9BB}"/>
               </a:ext>
             </a:extLst>
           </p:cNvPr>
@@ -10408,7 +11187,7 @@
           <p:cNvPr id="3" name="직선 연결선 2">
             <a:extLst>
               <a:ext uri="{FF2B5EF4-FFF2-40B4-BE49-F238E27FC236}">
-                <a16:creationId xmlns:a16="http://schemas.microsoft.com/office/drawing/2014/main" xmlns="" id="{2337E7D7-473D-730B-07F1-97FF6521A5E0}"/>
+                <a16:creationId xmlns:a16="http://schemas.microsoft.com/office/drawing/2014/main" id="{2337E7D7-473D-730B-07F1-97FF6521A5E0}"/>
               </a:ext>
             </a:extLst>
           </p:cNvPr>
@@ -10451,7 +11230,7 @@
           <p:cNvPr id="12" name="직사각형 11">
             <a:extLst>
               <a:ext uri="{FF2B5EF4-FFF2-40B4-BE49-F238E27FC236}">
-                <a16:creationId xmlns:a16="http://schemas.microsoft.com/office/drawing/2014/main" xmlns="" id="{8B3FCCC0-FB7B-8632-1ACD-EB0F3BD1468A}"/>
+                <a16:creationId xmlns:a16="http://schemas.microsoft.com/office/drawing/2014/main" id="{8B3FCCC0-FB7B-8632-1ACD-EB0F3BD1468A}"/>
               </a:ext>
             </a:extLst>
           </p:cNvPr>
@@ -10550,7 +11329,7 @@
           <p:cNvPr id="11" name="TextBox 10">
             <a:extLst>
               <a:ext uri="{FF2B5EF4-FFF2-40B4-BE49-F238E27FC236}">
-                <a16:creationId xmlns:a16="http://schemas.microsoft.com/office/drawing/2014/main" xmlns="" id="{1ECF1401-017B-8423-172E-E3F163EFB8EB}"/>
+                <a16:creationId xmlns:a16="http://schemas.microsoft.com/office/drawing/2014/main" id="{1ECF1401-017B-8423-172E-E3F163EFB8EB}"/>
               </a:ext>
             </a:extLst>
           </p:cNvPr>
@@ -10560,7 +11339,7 @@
         <p:spPr>
           <a:xfrm>
             <a:off x="302450" y="1342316"/>
-            <a:ext cx="5138684" cy="623248"/>
+            <a:ext cx="5138684" cy="580928"/>
           </a:xfrm>
           <a:prstGeom prst="rect">
             <a:avLst/>
@@ -10597,14 +11376,7 @@
                 <a:latin typeface="나눔바른고딕" panose="020B0603020101020101" pitchFamily="34" charset="-127"/>
                 <a:ea typeface="나눔바른고딕" panose="020B0603020101020101" pitchFamily="34" charset="-127"/>
               </a:rPr>
-              <a:t> </a:t>
-            </a:r>
-            <a:r>
-              <a:rPr lang="ko-KR" altLang="en-US" sz="1200" dirty="0" smtClean="0">
-                <a:latin typeface="나눔바른고딕" panose="020B0603020101020101" pitchFamily="34" charset="-127"/>
-                <a:ea typeface="나눔바른고딕" panose="020B0603020101020101" pitchFamily="34" charset="-127"/>
-              </a:rPr>
-              <a:t>데이터화</a:t>
+              <a:t> 데이터화</a:t>
             </a:r>
             <a:endParaRPr lang="en-US" altLang="ko-KR" sz="1200" dirty="0">
               <a:latin typeface="나눔바른고딕" panose="020B0603020101020101" pitchFamily="34" charset="-127"/>
@@ -10620,27 +11392,34 @@
               <a:buChar char="•"/>
             </a:pPr>
             <a:r>
-              <a:rPr lang="ko-KR" altLang="en-US" sz="1200" dirty="0" smtClean="0">
+              <a:rPr lang="ko-KR" altLang="en-US" sz="1000" dirty="0">
                 <a:latin typeface="나눔바른고딕" panose="020B0603020101020101" pitchFamily="34" charset="-127"/>
                 <a:ea typeface="나눔바른고딕" panose="020B0603020101020101" pitchFamily="34" charset="-127"/>
               </a:rPr>
               <a:t>주요 상태</a:t>
             </a:r>
             <a:r>
-              <a:rPr lang="en-US" altLang="ko-KR" sz="1200" dirty="0" smtClean="0">
+              <a:rPr lang="en-US" altLang="ko-KR" sz="1000" dirty="0">
                 <a:latin typeface="나눔바른고딕" panose="020B0603020101020101" pitchFamily="34" charset="-127"/>
                 <a:ea typeface="나눔바른고딕" panose="020B0603020101020101" pitchFamily="34" charset="-127"/>
               </a:rPr>
               <a:t>, </a:t>
             </a:r>
             <a:r>
-              <a:rPr lang="ko-KR" altLang="en-US" sz="1200" dirty="0" smtClean="0">
-                <a:latin typeface="나눔바른고딕" panose="020B0603020101020101" pitchFamily="34" charset="-127"/>
-                <a:ea typeface="나눔바른고딕" panose="020B0603020101020101" pitchFamily="34" charset="-127"/>
-              </a:rPr>
-              <a:t>변수 등을 통한 경우에 따른 지형 인식 동작 처리</a:t>
-            </a:r>
-            <a:endParaRPr lang="en-US" altLang="ko-KR" sz="1200" dirty="0">
+              <a:rPr lang="ko-KR" altLang="en-US" sz="1000" dirty="0">
+                <a:latin typeface="나눔바른고딕" panose="020B0603020101020101" pitchFamily="34" charset="-127"/>
+                <a:ea typeface="나눔바른고딕" panose="020B0603020101020101" pitchFamily="34" charset="-127"/>
+              </a:rPr>
+              <a:t>변수 등을 이용하여 </a:t>
+            </a:r>
+            <a:r>
+              <a:rPr lang="ko-KR" altLang="en-US" sz="1000" b="1" dirty="0">
+                <a:latin typeface="나눔바른고딕" panose="020B0603020101020101" pitchFamily="34" charset="-127"/>
+                <a:ea typeface="나눔바른고딕" panose="020B0603020101020101" pitchFamily="34" charset="-127"/>
+              </a:rPr>
+              <a:t>지형 인식 동작 처리</a:t>
+            </a:r>
+            <a:endParaRPr lang="en-US" altLang="ko-KR" sz="1000" b="1" dirty="0">
               <a:latin typeface="나눔바른고딕" panose="020B0603020101020101" pitchFamily="34" charset="-127"/>
               <a:ea typeface="나눔바른고딕" panose="020B0603020101020101" pitchFamily="34" charset="-127"/>
             </a:endParaRPr>
@@ -10652,7 +11431,7 @@
           <p:cNvPr id="30" name="그룹 29">
             <a:extLst>
               <a:ext uri="{FF2B5EF4-FFF2-40B4-BE49-F238E27FC236}">
-                <a16:creationId xmlns:a16="http://schemas.microsoft.com/office/drawing/2014/main" xmlns="" id="{A6DA15CE-5F24-FFF6-A074-18E1A83481E6}"/>
+                <a16:creationId xmlns:a16="http://schemas.microsoft.com/office/drawing/2014/main" id="{A6DA15CE-5F24-FFF6-A074-18E1A83481E6}"/>
               </a:ext>
             </a:extLst>
           </p:cNvPr>
@@ -10672,7 +11451,7 @@
             <p:cNvPr id="4" name="그림 3">
               <a:extLst>
                 <a:ext uri="{FF2B5EF4-FFF2-40B4-BE49-F238E27FC236}">
-                  <a16:creationId xmlns:a16="http://schemas.microsoft.com/office/drawing/2014/main" xmlns="" id="{3A214DBD-1651-1475-989A-E14493702D2D}"/>
+                  <a16:creationId xmlns:a16="http://schemas.microsoft.com/office/drawing/2014/main" id="{3A214DBD-1651-1475-989A-E14493702D2D}"/>
                 </a:ext>
               </a:extLst>
             </p:cNvPr>
@@ -10702,7 +11481,7 @@
             <p:cNvPr id="7" name="직사각형 6">
               <a:extLst>
                 <a:ext uri="{FF2B5EF4-FFF2-40B4-BE49-F238E27FC236}">
-                  <a16:creationId xmlns:a16="http://schemas.microsoft.com/office/drawing/2014/main" xmlns="" id="{F9E65E49-A8A8-BBD3-74E0-04B6A2EFAA36}"/>
+                  <a16:creationId xmlns:a16="http://schemas.microsoft.com/office/drawing/2014/main" id="{F9E65E49-A8A8-BBD3-74E0-04B6A2EFAA36}"/>
                 </a:ext>
               </a:extLst>
             </p:cNvPr>
@@ -10757,7 +11536,7 @@
             <p:cNvPr id="13" name="직사각형 12">
               <a:extLst>
                 <a:ext uri="{FF2B5EF4-FFF2-40B4-BE49-F238E27FC236}">
-                  <a16:creationId xmlns:a16="http://schemas.microsoft.com/office/drawing/2014/main" xmlns="" id="{23AD9AF1-9D94-6237-6A92-1A3A5817628C}"/>
+                  <a16:creationId xmlns:a16="http://schemas.microsoft.com/office/drawing/2014/main" id="{23AD9AF1-9D94-6237-6A92-1A3A5817628C}"/>
                 </a:ext>
               </a:extLst>
             </p:cNvPr>
@@ -10812,7 +11591,7 @@
             <p:cNvPr id="15" name="연결선: 꺾임 14">
               <a:extLst>
                 <a:ext uri="{FF2B5EF4-FFF2-40B4-BE49-F238E27FC236}">
-                  <a16:creationId xmlns:a16="http://schemas.microsoft.com/office/drawing/2014/main" xmlns="" id="{DAB8CAF1-FB11-9067-1644-667819E60FB0}"/>
+                  <a16:creationId xmlns:a16="http://schemas.microsoft.com/office/drawing/2014/main" id="{DAB8CAF1-FB11-9067-1644-667819E60FB0}"/>
                 </a:ext>
               </a:extLst>
             </p:cNvPr>
@@ -10864,7 +11643,7 @@
             <p:cNvPr id="18" name="직사각형 17">
               <a:extLst>
                 <a:ext uri="{FF2B5EF4-FFF2-40B4-BE49-F238E27FC236}">
-                  <a16:creationId xmlns:a16="http://schemas.microsoft.com/office/drawing/2014/main" xmlns="" id="{2DC80D0A-EBA1-DF24-6345-7929413EC1D8}"/>
+                  <a16:creationId xmlns:a16="http://schemas.microsoft.com/office/drawing/2014/main" id="{2DC80D0A-EBA1-DF24-6345-7929413EC1D8}"/>
                 </a:ext>
               </a:extLst>
             </p:cNvPr>
@@ -10919,7 +11698,7 @@
             <p:cNvPr id="20" name="직사각형 19">
               <a:extLst>
                 <a:ext uri="{FF2B5EF4-FFF2-40B4-BE49-F238E27FC236}">
-                  <a16:creationId xmlns:a16="http://schemas.microsoft.com/office/drawing/2014/main" xmlns="" id="{3B3F4FF5-4D70-71E7-C892-86F125617051}"/>
+                  <a16:creationId xmlns:a16="http://schemas.microsoft.com/office/drawing/2014/main" id="{3B3F4FF5-4D70-71E7-C892-86F125617051}"/>
                 </a:ext>
               </a:extLst>
             </p:cNvPr>
@@ -10974,7 +11753,7 @@
             <p:cNvPr id="21" name="연결선: 꺾임 20">
               <a:extLst>
                 <a:ext uri="{FF2B5EF4-FFF2-40B4-BE49-F238E27FC236}">
-                  <a16:creationId xmlns:a16="http://schemas.microsoft.com/office/drawing/2014/main" xmlns="" id="{0E207835-0D29-1B22-9A3F-4DEAA7DB59AE}"/>
+                  <a16:creationId xmlns:a16="http://schemas.microsoft.com/office/drawing/2014/main" id="{0E207835-0D29-1B22-9A3F-4DEAA7DB59AE}"/>
                 </a:ext>
               </a:extLst>
             </p:cNvPr>
@@ -11050,7 +11829,7 @@
           <p:cNvPr id="23" name="연결선: 꺾임 14">
             <a:extLst>
               <a:ext uri="{FF2B5EF4-FFF2-40B4-BE49-F238E27FC236}">
-                <a16:creationId xmlns:a16="http://schemas.microsoft.com/office/drawing/2014/main" xmlns="" id="{DAB8CAF1-FB11-9067-1644-667819E60FB0}"/>
+                <a16:creationId xmlns:a16="http://schemas.microsoft.com/office/drawing/2014/main" id="{DAB8CAF1-FB11-9067-1644-667819E60FB0}"/>
               </a:ext>
             </a:extLst>
           </p:cNvPr>
@@ -11061,8 +11840,8 @@
         </p:nvCxnSpPr>
         <p:spPr>
           <a:xfrm flipV="1">
-            <a:off x="3657600" y="1898647"/>
-            <a:ext cx="4201872" cy="1389859"/>
+            <a:off x="3683000" y="1898647"/>
+            <a:ext cx="4176472" cy="1401918"/>
           </a:xfrm>
           <a:prstGeom prst="bentConnector3">
             <a:avLst>
@@ -11099,7 +11878,7 @@
           <p:cNvPr id="25" name="TextBox 24">
             <a:extLst>
               <a:ext uri="{FF2B5EF4-FFF2-40B4-BE49-F238E27FC236}">
-                <a16:creationId xmlns:a16="http://schemas.microsoft.com/office/drawing/2014/main" xmlns="" id="{1ECF1401-017B-8423-172E-E3F163EFB8EB}"/>
+                <a16:creationId xmlns:a16="http://schemas.microsoft.com/office/drawing/2014/main" id="{1ECF1401-017B-8423-172E-E3F163EFB8EB}"/>
               </a:ext>
             </a:extLst>
           </p:cNvPr>
@@ -11128,35 +11907,35 @@
               </a:lnSpc>
             </a:pPr>
             <a:r>
-              <a:rPr lang="ko-KR" altLang="en-US" sz="1200" dirty="0" err="1" smtClean="0">
+              <a:rPr lang="ko-KR" altLang="en-US" sz="1200" dirty="0" err="1">
                 <a:latin typeface="나눔바른고딕" panose="020B0603020101020101" pitchFamily="34" charset="-127"/>
                 <a:ea typeface="나눔바른고딕" panose="020B0603020101020101" pitchFamily="34" charset="-127"/>
               </a:rPr>
               <a:t>콘텐츠</a:t>
             </a:r>
             <a:r>
-              <a:rPr lang="ko-KR" altLang="en-US" sz="1200" dirty="0" smtClean="0">
+              <a:rPr lang="ko-KR" altLang="en-US" sz="1200" dirty="0">
                 <a:latin typeface="나눔바른고딕" panose="020B0603020101020101" pitchFamily="34" charset="-127"/>
                 <a:ea typeface="나눔바른고딕" panose="020B0603020101020101" pitchFamily="34" charset="-127"/>
               </a:rPr>
               <a:t> 단에서</a:t>
             </a:r>
             <a:r>
-              <a:rPr lang="en-US" altLang="ko-KR" sz="1200" dirty="0" smtClean="0">
+              <a:rPr lang="en-US" altLang="ko-KR" sz="1200" dirty="0">
                 <a:latin typeface="나눔바른고딕" panose="020B0603020101020101" pitchFamily="34" charset="-127"/>
                 <a:ea typeface="나눔바른고딕" panose="020B0603020101020101" pitchFamily="34" charset="-127"/>
               </a:rPr>
               <a:t> </a:t>
             </a:r>
             <a:r>
-              <a:rPr lang="ko-KR" altLang="en-US" sz="1200" dirty="0" err="1" smtClean="0">
+              <a:rPr lang="ko-KR" altLang="en-US" sz="1200" dirty="0" err="1">
                 <a:latin typeface="나눔바른고딕" panose="020B0603020101020101" pitchFamily="34" charset="-127"/>
                 <a:ea typeface="나눔바른고딕" panose="020B0603020101020101" pitchFamily="34" charset="-127"/>
               </a:rPr>
               <a:t>노드들을</a:t>
             </a:r>
             <a:r>
-              <a:rPr lang="ko-KR" altLang="en-US" sz="1200" dirty="0" smtClean="0">
+              <a:rPr lang="ko-KR" altLang="en-US" sz="1200" dirty="0">
                 <a:latin typeface="나눔바른고딕" panose="020B0603020101020101" pitchFamily="34" charset="-127"/>
                 <a:ea typeface="나눔바른고딕" panose="020B0603020101020101" pitchFamily="34" charset="-127"/>
               </a:rPr>
@@ -11179,13 +11958,6 @@
   <p:clrMapOvr>
     <a:masterClrMapping/>
   </p:clrMapOvr>
-  <p:timing>
-    <p:tnLst>
-      <p:par>
-        <p:cTn id="1" dur="indefinite" restart="never" nodeType="tmRoot"/>
-      </p:par>
-    </p:tnLst>
-  </p:timing>
 </p:sld>
 </file>
 
@@ -11197,7 +11969,7 @@
         <p:cNvPr id="1" name="">
           <a:extLst>
             <a:ext uri="{FF2B5EF4-FFF2-40B4-BE49-F238E27FC236}">
-              <a16:creationId xmlns:a16="http://schemas.microsoft.com/office/drawing/2014/main" xmlns="" id="{A0D40794-C860-43E7-F9ED-71A8381C4F19}"/>
+              <a16:creationId xmlns:a16="http://schemas.microsoft.com/office/drawing/2014/main" id="{A0D40794-C860-43E7-F9ED-71A8381C4F19}"/>
             </a:ext>
           </a:extLst>
         </p:cNvPr>
@@ -11214,10 +11986,40 @@
       </p:grpSpPr>
       <p:pic>
         <p:nvPicPr>
+          <p:cNvPr id="19" name="그림 18">
+            <a:extLst>
+              <a:ext uri="{FF2B5EF4-FFF2-40B4-BE49-F238E27FC236}">
+                <a16:creationId xmlns:a16="http://schemas.microsoft.com/office/drawing/2014/main" id="{23EEDDAF-D745-7173-3938-4C299B720173}"/>
+              </a:ext>
+            </a:extLst>
+          </p:cNvPr>
+          <p:cNvPicPr>
+            <a:picLocks noChangeAspect="1"/>
+          </p:cNvPicPr>
+          <p:nvPr/>
+        </p:nvPicPr>
+        <p:blipFill>
+          <a:blip r:embed="rId3"/>
+          <a:stretch>
+            <a:fillRect/>
+          </a:stretch>
+        </p:blipFill>
+        <p:spPr>
+          <a:xfrm>
+            <a:off x="302450" y="2472663"/>
+            <a:ext cx="6260584" cy="4286249"/>
+          </a:xfrm>
+          <a:prstGeom prst="rect">
+            <a:avLst/>
+          </a:prstGeom>
+        </p:spPr>
+      </p:pic>
+      <p:pic>
+        <p:nvPicPr>
           <p:cNvPr id="26" name="그림 25">
             <a:extLst>
               <a:ext uri="{FF2B5EF4-FFF2-40B4-BE49-F238E27FC236}">
-                <a16:creationId xmlns:a16="http://schemas.microsoft.com/office/drawing/2014/main" xmlns="" id="{94998307-14E9-A7BB-377D-CF5C660A48B2}"/>
+                <a16:creationId xmlns:a16="http://schemas.microsoft.com/office/drawing/2014/main" id="{94998307-14E9-A7BB-377D-CF5C660A48B2}"/>
               </a:ext>
             </a:extLst>
           </p:cNvPr>
@@ -11227,7 +12029,7 @@
           <p:nvPr/>
         </p:nvPicPr>
         <p:blipFill rotWithShape="1">
-          <a:blip r:embed="rId3"/>
+          <a:blip r:embed="rId4"/>
           <a:srcRect l="7776" t="22743" r="17893" b="47427"/>
           <a:stretch/>
         </p:blipFill>
@@ -11241,36 +12043,12 @@
           </a:prstGeom>
         </p:spPr>
       </p:pic>
-      <p:pic>
-        <p:nvPicPr>
-          <p:cNvPr id="2" name="그림 1"/>
-          <p:cNvPicPr>
-            <a:picLocks noChangeAspect="1"/>
-          </p:cNvPicPr>
-          <p:nvPr/>
-        </p:nvPicPr>
-        <p:blipFill>
-          <a:blip r:embed="rId4"/>
-          <a:stretch>
-            <a:fillRect/>
-          </a:stretch>
-        </p:blipFill>
-        <p:spPr>
-          <a:xfrm>
-            <a:off x="334366" y="2165898"/>
-            <a:ext cx="6046619" cy="4139760"/>
-          </a:xfrm>
-          <a:prstGeom prst="rect">
-            <a:avLst/>
-          </a:prstGeom>
-        </p:spPr>
-      </p:pic>
       <p:sp>
         <p:nvSpPr>
           <p:cNvPr id="8" name="TextBox 7">
             <a:extLst>
               <a:ext uri="{FF2B5EF4-FFF2-40B4-BE49-F238E27FC236}">
-                <a16:creationId xmlns:a16="http://schemas.microsoft.com/office/drawing/2014/main" xmlns="" id="{82B74064-1CF1-64B6-B967-87A34DBEBA5B}"/>
+                <a16:creationId xmlns:a16="http://schemas.microsoft.com/office/drawing/2014/main" id="{82B74064-1CF1-64B6-B967-87A34DBEBA5B}"/>
               </a:ext>
             </a:extLst>
           </p:cNvPr>
@@ -11312,7 +12090,7 @@
           <p:cNvPr id="10" name="TextBox 9">
             <a:extLst>
               <a:ext uri="{FF2B5EF4-FFF2-40B4-BE49-F238E27FC236}">
-                <a16:creationId xmlns:a16="http://schemas.microsoft.com/office/drawing/2014/main" xmlns="" id="{60EDB4A4-AD43-7437-1751-585C2EE07962}"/>
+                <a16:creationId xmlns:a16="http://schemas.microsoft.com/office/drawing/2014/main" id="{60EDB4A4-AD43-7437-1751-585C2EE07962}"/>
               </a:ext>
             </a:extLst>
           </p:cNvPr>
@@ -11368,7 +12146,7 @@
           <p:cNvPr id="3" name="직선 연결선 2">
             <a:extLst>
               <a:ext uri="{FF2B5EF4-FFF2-40B4-BE49-F238E27FC236}">
-                <a16:creationId xmlns:a16="http://schemas.microsoft.com/office/drawing/2014/main" xmlns="" id="{5881176A-B630-2E6B-975F-F70B31FECDCA}"/>
+                <a16:creationId xmlns:a16="http://schemas.microsoft.com/office/drawing/2014/main" id="{5881176A-B630-2E6B-975F-F70B31FECDCA}"/>
               </a:ext>
             </a:extLst>
           </p:cNvPr>
@@ -11411,7 +12189,7 @@
           <p:cNvPr id="12" name="직사각형 11">
             <a:extLst>
               <a:ext uri="{FF2B5EF4-FFF2-40B4-BE49-F238E27FC236}">
-                <a16:creationId xmlns:a16="http://schemas.microsoft.com/office/drawing/2014/main" xmlns="" id="{1076178A-F76B-2754-F98B-62FC7E00E197}"/>
+                <a16:creationId xmlns:a16="http://schemas.microsoft.com/office/drawing/2014/main" id="{1076178A-F76B-2754-F98B-62FC7E00E197}"/>
               </a:ext>
             </a:extLst>
           </p:cNvPr>
@@ -11510,7 +12288,7 @@
           <p:cNvPr id="11" name="TextBox 10">
             <a:extLst>
               <a:ext uri="{FF2B5EF4-FFF2-40B4-BE49-F238E27FC236}">
-                <a16:creationId xmlns:a16="http://schemas.microsoft.com/office/drawing/2014/main" xmlns="" id="{D2EE7006-8FDB-6FA8-36D5-06293A0CF1E2}"/>
+                <a16:creationId xmlns:a16="http://schemas.microsoft.com/office/drawing/2014/main" id="{D2EE7006-8FDB-6FA8-36D5-06293A0CF1E2}"/>
               </a:ext>
             </a:extLst>
           </p:cNvPr>
@@ -11520,7 +12298,7 @@
         <p:spPr>
           <a:xfrm>
             <a:off x="302450" y="1342316"/>
-            <a:ext cx="5138684" cy="646331"/>
+            <a:ext cx="5138684" cy="1042593"/>
           </a:xfrm>
           <a:prstGeom prst="rect">
             <a:avLst/>
@@ -11543,16 +12321,9 @@
                 <a:latin typeface="나눔바른고딕" panose="020B0603020101020101" pitchFamily="34" charset="-127"/>
                 <a:ea typeface="나눔바른고딕" panose="020B0603020101020101" pitchFamily="34" charset="-127"/>
               </a:rPr>
-              <a:t>처리 결과 조건 </a:t>
-            </a:r>
-            <a:r>
-              <a:rPr lang="ko-KR" altLang="en-US" sz="1200" dirty="0" smtClean="0">
-                <a:latin typeface="나눔바른고딕" panose="020B0603020101020101" pitchFamily="34" charset="-127"/>
-                <a:ea typeface="나눔바른고딕" panose="020B0603020101020101" pitchFamily="34" charset="-127"/>
-              </a:rPr>
-              <a:t>데이터화</a:t>
-            </a:r>
-            <a:endParaRPr lang="en-US" altLang="ko-KR" sz="1200" dirty="0" smtClean="0">
+              <a:t>처리 결과 조건 데이터화</a:t>
+            </a:r>
+            <a:endParaRPr lang="en-US" altLang="ko-KR" sz="1200" dirty="0">
               <a:latin typeface="나눔바른고딕" panose="020B0603020101020101" pitchFamily="34" charset="-127"/>
               <a:ea typeface="나눔바른고딕" panose="020B0603020101020101" pitchFamily="34" charset="-127"/>
             </a:endParaRPr>
@@ -11566,17 +12337,113 @@
               <a:buChar char="•"/>
             </a:pPr>
             <a:r>
-              <a:rPr lang="ko-KR" altLang="en-US" sz="1200" dirty="0" smtClean="0">
-                <a:latin typeface="나눔바른고딕" panose="020B0603020101020101" pitchFamily="34" charset="-127"/>
-                <a:ea typeface="나눔바른고딕" panose="020B0603020101020101" pitchFamily="34" charset="-127"/>
-              </a:rPr>
-              <a:t>특정 모션이 선택되기 위한 조건들의 묶음</a:t>
-            </a:r>
-            <a:endParaRPr lang="en-US" altLang="ko-KR" sz="1200" dirty="0">
+              <a:rPr lang="ko-KR" altLang="en-US" sz="1000" dirty="0">
+                <a:latin typeface="나눔바른고딕" panose="020B0603020101020101" pitchFamily="34" charset="-127"/>
+                <a:ea typeface="나눔바른고딕" panose="020B0603020101020101" pitchFamily="34" charset="-127"/>
+              </a:rPr>
+              <a:t>특정 모션이 선택되기 위한 </a:t>
+            </a:r>
+            <a:r>
+              <a:rPr lang="ko-KR" altLang="en-US" sz="1000" b="1" dirty="0">
+                <a:latin typeface="나눔바른고딕" panose="020B0603020101020101" pitchFamily="34" charset="-127"/>
+                <a:ea typeface="나눔바른고딕" panose="020B0603020101020101" pitchFamily="34" charset="-127"/>
+              </a:rPr>
+              <a:t>조건들의 묶음</a:t>
+            </a:r>
+            <a:endParaRPr lang="en-US" altLang="ko-KR" sz="1000" b="1" dirty="0">
               <a:latin typeface="나눔바른고딕" panose="020B0603020101020101" pitchFamily="34" charset="-127"/>
               <a:ea typeface="나눔바른고딕" panose="020B0603020101020101" pitchFamily="34" charset="-127"/>
             </a:endParaRPr>
           </a:p>
+          <a:p>
+            <a:pPr marL="171450" indent="-171450">
+              <a:lnSpc>
+                <a:spcPct val="150000"/>
+              </a:lnSpc>
+              <a:buFont typeface="Arial" panose="020B0604020202020204" pitchFamily="34" charset="0"/>
+              <a:buChar char="•"/>
+            </a:pPr>
+            <a:r>
+              <a:rPr lang="ko-KR" altLang="en-US" sz="1000" dirty="0">
+                <a:latin typeface="나눔바른고딕" panose="020B0603020101020101" pitchFamily="34" charset="-127"/>
+                <a:ea typeface="나눔바른고딕" panose="020B0603020101020101" pitchFamily="34" charset="-127"/>
+              </a:rPr>
+              <a:t>결과 처리 시</a:t>
+            </a:r>
+            <a:r>
+              <a:rPr lang="en-US" altLang="ko-KR" sz="1000" dirty="0">
+                <a:latin typeface="나눔바른고딕" panose="020B0603020101020101" pitchFamily="34" charset="-127"/>
+                <a:ea typeface="나눔바른고딕" panose="020B0603020101020101" pitchFamily="34" charset="-127"/>
+              </a:rPr>
+              <a:t>, </a:t>
+            </a:r>
+            <a:r>
+              <a:rPr lang="en-US" altLang="ko-KR" sz="1000" dirty="0" err="1">
+                <a:latin typeface="나눔바른고딕" panose="020B0603020101020101" pitchFamily="34" charset="-127"/>
+                <a:ea typeface="나눔바른고딕" panose="020B0603020101020101" pitchFamily="34" charset="-127"/>
+              </a:rPr>
+              <a:t>ProcessorComp</a:t>
+            </a:r>
+            <a:r>
+              <a:rPr lang="ko-KR" altLang="en-US" sz="1000" dirty="0">
+                <a:latin typeface="나눔바른고딕" panose="020B0603020101020101" pitchFamily="34" charset="-127"/>
+                <a:ea typeface="나눔바른고딕" panose="020B0603020101020101" pitchFamily="34" charset="-127"/>
+              </a:rPr>
+              <a:t>는 </a:t>
+            </a:r>
+            <a:r>
+              <a:rPr lang="en-US" altLang="ko-KR" sz="1000" dirty="0" err="1">
+                <a:latin typeface="나눔바른고딕" panose="020B0603020101020101" pitchFamily="34" charset="-127"/>
+                <a:ea typeface="나눔바른고딕" panose="020B0603020101020101" pitchFamily="34" charset="-127"/>
+              </a:rPr>
+              <a:t>ProcessData</a:t>
+            </a:r>
+            <a:r>
+              <a:rPr lang="en-US" altLang="ko-KR" sz="1000" dirty="0">
+                <a:latin typeface="나눔바른고딕" panose="020B0603020101020101" pitchFamily="34" charset="-127"/>
+                <a:ea typeface="나눔바른고딕" panose="020B0603020101020101" pitchFamily="34" charset="-127"/>
+              </a:rPr>
+              <a:t> </a:t>
+            </a:r>
+            <a:r>
+              <a:rPr lang="ko-KR" altLang="en-US" sz="1000" dirty="0">
+                <a:latin typeface="나눔바른고딕" panose="020B0603020101020101" pitchFamily="34" charset="-127"/>
+                <a:ea typeface="나눔바른고딕" panose="020B0603020101020101" pitchFamily="34" charset="-127"/>
+              </a:rPr>
+              <a:t>배열을 순회</a:t>
+            </a:r>
+            <a:r>
+              <a:rPr lang="en-US" altLang="ko-KR" sz="1000" dirty="0">
+                <a:latin typeface="나눔바른고딕" panose="020B0603020101020101" pitchFamily="34" charset="-127"/>
+                <a:ea typeface="나눔바른고딕" panose="020B0603020101020101" pitchFamily="34" charset="-127"/>
+              </a:rPr>
+              <a:t>,</a:t>
+            </a:r>
+            <a:br>
+              <a:rPr lang="en-US" altLang="ko-KR" sz="1000" dirty="0">
+                <a:latin typeface="나눔바른고딕" panose="020B0603020101020101" pitchFamily="34" charset="-127"/>
+                <a:ea typeface="나눔바른고딕" panose="020B0603020101020101" pitchFamily="34" charset="-127"/>
+              </a:rPr>
+            </a:br>
+            <a:r>
+              <a:rPr lang="ko-KR" altLang="en-US" sz="1000" b="1" dirty="0">
+                <a:latin typeface="나눔바른고딕" panose="020B0603020101020101" pitchFamily="34" charset="-127"/>
+                <a:ea typeface="나눔바른고딕" panose="020B0603020101020101" pitchFamily="34" charset="-127"/>
+              </a:rPr>
+              <a:t>조건 중 가장 먼저 만족하는 모션</a:t>
+            </a:r>
+            <a:r>
+              <a:rPr lang="ko-KR" altLang="en-US" sz="1000" dirty="0">
+                <a:latin typeface="나눔바른고딕" panose="020B0603020101020101" pitchFamily="34" charset="-127"/>
+                <a:ea typeface="나눔바른고딕" panose="020B0603020101020101" pitchFamily="34" charset="-127"/>
+              </a:rPr>
+              <a:t>을 탐색</a:t>
+            </a:r>
+            <a:endParaRPr lang="en-US" altLang="ko-KR" sz="1000" dirty="0">
+              <a:latin typeface="나눔바른고딕" panose="020B0603020101020101" pitchFamily="34" charset="-127"/>
+              <a:ea typeface="나눔바른고딕" panose="020B0603020101020101" pitchFamily="34" charset="-127"/>
+            </a:endParaRPr>
+          </a:p>
         </p:txBody>
       </p:sp>
       <p:pic>
@@ -11584,7 +12451,7 @@
           <p:cNvPr id="30" name="그림 29">
             <a:extLst>
               <a:ext uri="{FF2B5EF4-FFF2-40B4-BE49-F238E27FC236}">
-                <a16:creationId xmlns:a16="http://schemas.microsoft.com/office/drawing/2014/main" xmlns="" id="{626AF803-A46C-A563-26C1-DC47EB5CBE95}"/>
+                <a16:creationId xmlns:a16="http://schemas.microsoft.com/office/drawing/2014/main" id="{626AF803-A46C-A563-26C1-DC47EB5CBE95}"/>
               </a:ext>
             </a:extLst>
           </p:cNvPr>
@@ -11613,7 +12480,7 @@
           <p:cNvPr id="32" name="TextBox 31">
             <a:extLst>
               <a:ext uri="{FF2B5EF4-FFF2-40B4-BE49-F238E27FC236}">
-                <a16:creationId xmlns:a16="http://schemas.microsoft.com/office/drawing/2014/main" xmlns="" id="{59294F2D-ECCD-F62C-6CB8-6A61C54D819A}"/>
+                <a16:creationId xmlns:a16="http://schemas.microsoft.com/office/drawing/2014/main" id="{59294F2D-ECCD-F62C-6CB8-6A61C54D819A}"/>
               </a:ext>
             </a:extLst>
           </p:cNvPr>
@@ -11622,7 +12489,7 @@
         </p:nvSpPr>
         <p:spPr>
           <a:xfrm>
-            <a:off x="7870285" y="4888203"/>
+            <a:off x="7930166" y="4817566"/>
             <a:ext cx="668773" cy="246221"/>
           </a:xfrm>
           <a:prstGeom prst="rect">
@@ -11652,7 +12519,7 @@
           <p:cNvPr id="34" name="TextBox 33">
             <a:extLst>
               <a:ext uri="{FF2B5EF4-FFF2-40B4-BE49-F238E27FC236}">
-                <a16:creationId xmlns:a16="http://schemas.microsoft.com/office/drawing/2014/main" xmlns="" id="{DC5D9207-25EB-035F-5DCB-626072ECDBD4}"/>
+                <a16:creationId xmlns:a16="http://schemas.microsoft.com/office/drawing/2014/main" id="{DC5D9207-25EB-035F-5DCB-626072ECDBD4}"/>
               </a:ext>
             </a:extLst>
           </p:cNvPr>
@@ -11661,8 +12528,8 @@
         </p:nvSpPr>
         <p:spPr>
           <a:xfrm>
-            <a:off x="9003461" y="4053170"/>
-            <a:ext cx="925254" cy="246221"/>
+            <a:off x="9003461" y="4021110"/>
+            <a:ext cx="668773" cy="246221"/>
           </a:xfrm>
           <a:prstGeom prst="rect">
             <a:avLst/>
@@ -11680,7 +12547,7 @@
                 <a:latin typeface="나눔바른고딕" panose="020B0603020101020101" pitchFamily="50" charset="-127"/>
                 <a:ea typeface="나눔바른고딕" panose="020B0603020101020101" pitchFamily="50" charset="-127"/>
               </a:rPr>
-              <a:t>개별 조건 합성</a:t>
+              <a:t>합성 조건</a:t>
             </a:r>
           </a:p>
         </p:txBody>
@@ -11690,7 +12557,7 @@
           <p:cNvPr id="36" name="TextBox 35">
             <a:extLst>
               <a:ext uri="{FF2B5EF4-FFF2-40B4-BE49-F238E27FC236}">
-                <a16:creationId xmlns:a16="http://schemas.microsoft.com/office/drawing/2014/main" xmlns="" id="{3EDC0331-B6CA-958E-7125-B577FD65F081}"/>
+                <a16:creationId xmlns:a16="http://schemas.microsoft.com/office/drawing/2014/main" id="{3EDC0331-B6CA-958E-7125-B577FD65F081}"/>
               </a:ext>
             </a:extLst>
           </p:cNvPr>
@@ -11699,8 +12566,8 @@
         </p:nvSpPr>
         <p:spPr>
           <a:xfrm>
-            <a:off x="9003461" y="6472075"/>
-            <a:ext cx="1067921" cy="246221"/>
+            <a:off x="9003461" y="6456909"/>
+            <a:ext cx="1866217" cy="246221"/>
           </a:xfrm>
           <a:prstGeom prst="rect">
             <a:avLst/>
@@ -11718,7 +12585,7 @@
                 <a:latin typeface="나눔바른고딕" panose="020B0603020101020101" pitchFamily="50" charset="-127"/>
                 <a:ea typeface="나눔바른고딕" panose="020B0603020101020101" pitchFamily="50" charset="-127"/>
               </a:rPr>
-              <a:t>조건 </a:t>
+              <a:t>모션에 대한 태그 </a:t>
             </a:r>
             <a:r>
               <a:rPr lang="en-US" altLang="ko-KR" sz="1000" dirty="0">
@@ -11732,7 +12599,7 @@
                 <a:latin typeface="나눔바른고딕" panose="020B0603020101020101" pitchFamily="50" charset="-127"/>
                 <a:ea typeface="나눔바른고딕" panose="020B0603020101020101" pitchFamily="50" charset="-127"/>
               </a:rPr>
-              <a:t>액션 매핑</a:t>
+              <a:t>조건을 연결</a:t>
             </a:r>
           </a:p>
         </p:txBody>
@@ -11846,25 +12713,89 @@
           </a:p>
         </p:txBody>
       </p:sp>
-      <p:sp>
-        <p:nvSpPr>
-          <p:cNvPr id="9" name="아래쪽 화살표 8"/>
+      <p:cxnSp>
+        <p:nvCxnSpPr>
+          <p:cNvPr id="13" name="연결선: 꺾임 14">
+            <a:extLst>
+              <a:ext uri="{FF2B5EF4-FFF2-40B4-BE49-F238E27FC236}">
+                <a16:creationId xmlns:a16="http://schemas.microsoft.com/office/drawing/2014/main" id="{6A7E2A39-C9BA-0761-46E2-9DC93192BE8A}"/>
+              </a:ext>
+            </a:extLst>
+          </p:cNvPr>
+          <p:cNvCxnSpPr>
+            <a:cxnSpLocks/>
+          </p:cNvCxnSpPr>
+          <p:nvPr/>
+        </p:nvCxnSpPr>
+        <p:spPr>
+          <a:xfrm flipV="1">
+            <a:off x="3657600" y="2709333"/>
+            <a:ext cx="2723385" cy="673543"/>
+          </a:xfrm>
+          <a:prstGeom prst="bentConnector3">
+            <a:avLst>
+              <a:gd name="adj1" fmla="val 50000"/>
+            </a:avLst>
+          </a:prstGeom>
+          <a:ln>
+            <a:solidFill>
+              <a:schemeClr val="tx2">
+                <a:lumMod val="50000"/>
+                <a:lumOff val="50000"/>
+              </a:schemeClr>
+            </a:solidFill>
+            <a:tailEnd type="triangle"/>
+          </a:ln>
+        </p:spPr>
+        <p:style>
+          <a:lnRef idx="2">
+            <a:schemeClr val="accent1"/>
+          </a:lnRef>
+          <a:fillRef idx="0">
+            <a:schemeClr val="accent1"/>
+          </a:fillRef>
+          <a:effectRef idx="1">
+            <a:schemeClr val="accent1"/>
+          </a:effectRef>
+          <a:fontRef idx="minor">
+            <a:schemeClr val="tx1"/>
+          </a:fontRef>
+        </p:style>
+      </p:cxnSp>
+      <p:sp>
+        <p:nvSpPr>
+          <p:cNvPr id="20" name="직사각형 19">
+            <a:extLst>
+              <a:ext uri="{FF2B5EF4-FFF2-40B4-BE49-F238E27FC236}">
+                <a16:creationId xmlns:a16="http://schemas.microsoft.com/office/drawing/2014/main" id="{B477A80E-A382-3583-6595-29AFC3A1E3AB}"/>
+              </a:ext>
+            </a:extLst>
+          </p:cNvPr>
           <p:cNvSpPr/>
           <p:nvPr/>
         </p:nvSpPr>
         <p:spPr>
           <a:xfrm>
-            <a:off x="10396470" y="4080291"/>
-            <a:ext cx="195629" cy="522776"/>
+            <a:off x="9575257" y="2859599"/>
+            <a:ext cx="1005001" cy="176742"/>
           </a:xfrm>
-          <a:prstGeom prst="downArrow">
+          <a:prstGeom prst="rect">
             <a:avLst/>
           </a:prstGeom>
+          <a:noFill/>
+          <a:ln>
+            <a:solidFill>
+              <a:schemeClr val="tx2">
+                <a:lumMod val="50000"/>
+                <a:lumOff val="50000"/>
+              </a:schemeClr>
+            </a:solidFill>
+          </a:ln>
         </p:spPr>
         <p:style>
           <a:lnRef idx="2">
             <a:schemeClr val="accent1">
-              <a:shade val="50000"/>
+              <a:shade val="15000"/>
             </a:schemeClr>
           </a:lnRef>
           <a:fillRef idx="1">
@@ -11886,6 +12817,109 @@
           </a:p>
         </p:txBody>
       </p:sp>
+      <p:cxnSp>
+        <p:nvCxnSpPr>
+          <p:cNvPr id="21" name="연결선: 꺾임 20">
+            <a:extLst>
+              <a:ext uri="{FF2B5EF4-FFF2-40B4-BE49-F238E27FC236}">
+                <a16:creationId xmlns:a16="http://schemas.microsoft.com/office/drawing/2014/main" id="{2659E29F-81F2-36C3-CFF4-953AD1C2B536}"/>
+              </a:ext>
+            </a:extLst>
+          </p:cNvPr>
+          <p:cNvCxnSpPr>
+            <a:cxnSpLocks/>
+            <a:stCxn id="20" idx="3"/>
+          </p:cNvCxnSpPr>
+          <p:nvPr/>
+        </p:nvCxnSpPr>
+        <p:spPr>
+          <a:xfrm>
+            <a:off x="10580258" y="2947970"/>
+            <a:ext cx="729625" cy="2036971"/>
+          </a:xfrm>
+          <a:prstGeom prst="bentConnector2">
+            <a:avLst/>
+          </a:prstGeom>
+          <a:ln>
+            <a:solidFill>
+              <a:schemeClr val="tx2">
+                <a:lumMod val="50000"/>
+                <a:lumOff val="50000"/>
+              </a:schemeClr>
+            </a:solidFill>
+            <a:tailEnd type="triangle"/>
+          </a:ln>
+        </p:spPr>
+        <p:style>
+          <a:lnRef idx="2">
+            <a:schemeClr val="accent1"/>
+          </a:lnRef>
+          <a:fillRef idx="0">
+            <a:schemeClr val="accent1"/>
+          </a:fillRef>
+          <a:effectRef idx="1">
+            <a:schemeClr val="accent1"/>
+          </a:effectRef>
+          <a:fontRef idx="minor">
+            <a:schemeClr val="tx1"/>
+          </a:fontRef>
+        </p:style>
+      </p:cxnSp>
+      <p:sp>
+        <p:nvSpPr>
+          <p:cNvPr id="25" name="직사각형 24">
+            <a:extLst>
+              <a:ext uri="{FF2B5EF4-FFF2-40B4-BE49-F238E27FC236}">
+                <a16:creationId xmlns:a16="http://schemas.microsoft.com/office/drawing/2014/main" id="{C40278B8-5C23-63FC-4BD0-9C90532B4C66}"/>
+              </a:ext>
+            </a:extLst>
+          </p:cNvPr>
+          <p:cNvSpPr/>
+          <p:nvPr/>
+        </p:nvSpPr>
+        <p:spPr>
+          <a:xfrm>
+            <a:off x="9334326" y="4984941"/>
+            <a:ext cx="2152824" cy="157693"/>
+          </a:xfrm>
+          <a:prstGeom prst="rect">
+            <a:avLst/>
+          </a:prstGeom>
+          <a:noFill/>
+          <a:ln>
+            <a:solidFill>
+              <a:schemeClr val="tx2">
+                <a:lumMod val="50000"/>
+                <a:lumOff val="50000"/>
+              </a:schemeClr>
+            </a:solidFill>
+          </a:ln>
+        </p:spPr>
+        <p:style>
+          <a:lnRef idx="2">
+            <a:schemeClr val="accent1">
+              <a:shade val="15000"/>
+            </a:schemeClr>
+          </a:lnRef>
+          <a:fillRef idx="1">
+            <a:schemeClr val="accent1"/>
+          </a:fillRef>
+          <a:effectRef idx="0">
+            <a:schemeClr val="accent1"/>
+          </a:effectRef>
+          <a:fontRef idx="minor">
+            <a:schemeClr val="lt1"/>
+          </a:fontRef>
+        </p:style>
+        <p:txBody>
+          <a:bodyPr rtlCol="0" anchor="ctr"/>
+          <a:lstStyle/>
+          <a:p>
+            <a:pPr algn="ctr"/>
+            <a:endParaRPr lang="ko-KR" altLang="en-US"/>
+          </a:p>
+        </p:txBody>
+      </p:sp>
     </p:spTree>
     <p:extLst>
       <p:ext uri="{BB962C8B-B14F-4D97-AF65-F5344CB8AC3E}">
@@ -11896,13 +12930,6 @@
   <p:clrMapOvr>
     <a:masterClrMapping/>
   </p:clrMapOvr>
-  <p:timing>
-    <p:tnLst>
-      <p:par>
-        <p:cTn id="1" dur="indefinite" restart="never" nodeType="tmRoot"/>
-      </p:par>
-    </p:tnLst>
-  </p:timing>
 </p:sld>
 </file>
 
@@ -11914,7 +12941,7 @@
         <p:cNvPr id="1" name="">
           <a:extLst>
             <a:ext uri="{FF2B5EF4-FFF2-40B4-BE49-F238E27FC236}">
-              <a16:creationId xmlns:a16="http://schemas.microsoft.com/office/drawing/2014/main" xmlns="" id="{3B6C87CA-FBA0-1129-2CD2-B7595C90C9C5}"/>
+              <a16:creationId xmlns:a16="http://schemas.microsoft.com/office/drawing/2014/main" id="{3B6C87CA-FBA0-1129-2CD2-B7595C90C9C5}"/>
             </a:ext>
           </a:extLst>
         </p:cNvPr>
@@ -11929,12 +12956,42 @@
           <a:chExt cx="0" cy="0"/>
         </a:xfrm>
       </p:grpSpPr>
+      <p:pic>
+        <p:nvPicPr>
+          <p:cNvPr id="20" name="그림 19">
+            <a:extLst>
+              <a:ext uri="{FF2B5EF4-FFF2-40B4-BE49-F238E27FC236}">
+                <a16:creationId xmlns:a16="http://schemas.microsoft.com/office/drawing/2014/main" id="{3DA81849-54E4-C1A0-CDAC-B1F004C8DA16}"/>
+              </a:ext>
+            </a:extLst>
+          </p:cNvPr>
+          <p:cNvPicPr>
+            <a:picLocks noChangeAspect="1"/>
+          </p:cNvPicPr>
+          <p:nvPr/>
+        </p:nvPicPr>
+        <p:blipFill>
+          <a:blip r:embed="rId3"/>
+          <a:stretch>
+            <a:fillRect/>
+          </a:stretch>
+        </p:blipFill>
+        <p:spPr>
+          <a:xfrm>
+            <a:off x="387511" y="3176248"/>
+            <a:ext cx="7803777" cy="1782671"/>
+          </a:xfrm>
+          <a:prstGeom prst="rect">
+            <a:avLst/>
+          </a:prstGeom>
+        </p:spPr>
+      </p:pic>
       <p:sp>
         <p:nvSpPr>
           <p:cNvPr id="8" name="TextBox 7">
             <a:extLst>
               <a:ext uri="{FF2B5EF4-FFF2-40B4-BE49-F238E27FC236}">
-                <a16:creationId xmlns:a16="http://schemas.microsoft.com/office/drawing/2014/main" xmlns="" id="{077FE9DB-6D36-3752-E690-70E8B6E2179F}"/>
+                <a16:creationId xmlns:a16="http://schemas.microsoft.com/office/drawing/2014/main" id="{077FE9DB-6D36-3752-E690-70E8B6E2179F}"/>
               </a:ext>
             </a:extLst>
           </p:cNvPr>
@@ -11976,7 +13033,7 @@
           <p:cNvPr id="10" name="TextBox 9">
             <a:extLst>
               <a:ext uri="{FF2B5EF4-FFF2-40B4-BE49-F238E27FC236}">
-                <a16:creationId xmlns:a16="http://schemas.microsoft.com/office/drawing/2014/main" xmlns="" id="{85139DE7-8E55-0D67-0B7E-3427D1146A81}"/>
+                <a16:creationId xmlns:a16="http://schemas.microsoft.com/office/drawing/2014/main" id="{85139DE7-8E55-0D67-0B7E-3427D1146A81}"/>
               </a:ext>
             </a:extLst>
           </p:cNvPr>
@@ -12032,7 +13089,7 @@
           <p:cNvPr id="3" name="직선 연결선 2">
             <a:extLst>
               <a:ext uri="{FF2B5EF4-FFF2-40B4-BE49-F238E27FC236}">
-                <a16:creationId xmlns:a16="http://schemas.microsoft.com/office/drawing/2014/main" xmlns="" id="{1F5D6D6D-B1AA-D0F0-5BEC-5A1116B9B75D}"/>
+                <a16:creationId xmlns:a16="http://schemas.microsoft.com/office/drawing/2014/main" id="{1F5D6D6D-B1AA-D0F0-5BEC-5A1116B9B75D}"/>
               </a:ext>
             </a:extLst>
           </p:cNvPr>
@@ -12075,7 +13132,7 @@
           <p:cNvPr id="12" name="직사각형 11">
             <a:extLst>
               <a:ext uri="{FF2B5EF4-FFF2-40B4-BE49-F238E27FC236}">
-                <a16:creationId xmlns:a16="http://schemas.microsoft.com/office/drawing/2014/main" xmlns="" id="{F02250AE-83E3-72FA-BE0F-035FE27B7CE3}"/>
+                <a16:creationId xmlns:a16="http://schemas.microsoft.com/office/drawing/2014/main" id="{F02250AE-83E3-72FA-BE0F-035FE27B7CE3}"/>
               </a:ext>
             </a:extLst>
           </p:cNvPr>
@@ -12174,7 +13231,7 @@
           <p:cNvPr id="11" name="TextBox 10">
             <a:extLst>
               <a:ext uri="{FF2B5EF4-FFF2-40B4-BE49-F238E27FC236}">
-                <a16:creationId xmlns:a16="http://schemas.microsoft.com/office/drawing/2014/main" xmlns="" id="{2D3FF80F-4A63-E7D7-CC28-F6B2D2F05A83}"/>
+                <a16:creationId xmlns:a16="http://schemas.microsoft.com/office/drawing/2014/main" id="{2D3FF80F-4A63-E7D7-CC28-F6B2D2F05A83}"/>
               </a:ext>
             </a:extLst>
           </p:cNvPr>
@@ -12184,7 +13241,7 @@
         <p:spPr>
           <a:xfrm>
             <a:off x="302450" y="1342316"/>
-            <a:ext cx="5138684" cy="276999"/>
+            <a:ext cx="5138684" cy="1273426"/>
           </a:xfrm>
           <a:prstGeom prst="rect">
             <a:avLst/>
@@ -12197,20 +13254,562 @@
           </a:bodyPr>
           <a:lstStyle/>
           <a:p>
+            <a:pPr>
+              <a:lnSpc>
+                <a:spcPct val="150000"/>
+              </a:lnSpc>
+            </a:pPr>
             <a:r>
               <a:rPr lang="ko-KR" altLang="en-US" sz="1200" dirty="0">
                 <a:latin typeface="나눔바른고딕" panose="020B0603020101020101" pitchFamily="34" charset="-127"/>
                 <a:ea typeface="나눔바른고딕" panose="020B0603020101020101" pitchFamily="34" charset="-127"/>
               </a:rPr>
-              <a:t>작동 과정</a:t>
+              <a:t>결과 처리</a:t>
             </a:r>
             <a:endParaRPr lang="en-US" altLang="ko-KR" sz="1200" dirty="0">
               <a:latin typeface="나눔바른고딕" panose="020B0603020101020101" pitchFamily="34" charset="-127"/>
               <a:ea typeface="나눔바른고딕" panose="020B0603020101020101" pitchFamily="34" charset="-127"/>
             </a:endParaRPr>
           </a:p>
-        </p:txBody>
-      </p:sp>
+          <a:p>
+            <a:pPr marL="171450" indent="-171450">
+              <a:lnSpc>
+                <a:spcPct val="150000"/>
+              </a:lnSpc>
+              <a:buFont typeface="Arial" panose="020B0604020202020204" pitchFamily="34" charset="0"/>
+              <a:buChar char="•"/>
+            </a:pPr>
+            <a:r>
+              <a:rPr lang="ko-KR" altLang="en-US" sz="1000" dirty="0">
+                <a:latin typeface="나눔바른고딕" panose="020B0603020101020101" pitchFamily="34" charset="-127"/>
+                <a:ea typeface="나눔바른고딕" panose="020B0603020101020101" pitchFamily="34" charset="-127"/>
+              </a:rPr>
+              <a:t>조건 배열 순회</a:t>
+            </a:r>
+            <a:endParaRPr lang="en-US" altLang="ko-KR" sz="1000" dirty="0">
+              <a:latin typeface="나눔바른고딕" panose="020B0603020101020101" pitchFamily="34" charset="-127"/>
+              <a:ea typeface="나눔바른고딕" panose="020B0603020101020101" pitchFamily="34" charset="-127"/>
+            </a:endParaRPr>
+          </a:p>
+          <a:p>
+            <a:pPr marL="171450" indent="-171450">
+              <a:lnSpc>
+                <a:spcPct val="150000"/>
+              </a:lnSpc>
+              <a:buFont typeface="Arial" panose="020B0604020202020204" pitchFamily="34" charset="0"/>
+              <a:buChar char="•"/>
+            </a:pPr>
+            <a:r>
+              <a:rPr lang="ko-KR" altLang="en-US" sz="1000" dirty="0">
+                <a:latin typeface="나눔바른고딕" panose="020B0603020101020101" pitchFamily="34" charset="-127"/>
+                <a:ea typeface="나눔바른고딕" panose="020B0603020101020101" pitchFamily="34" charset="-127"/>
+              </a:rPr>
+              <a:t>가장 먼저 만족하는 조건을 발견하면 해당 모션 재생</a:t>
+            </a:r>
+            <a:endParaRPr lang="en-US" altLang="ko-KR" sz="1000" dirty="0">
+              <a:latin typeface="나눔바른고딕" panose="020B0603020101020101" pitchFamily="34" charset="-127"/>
+              <a:ea typeface="나눔바른고딕" panose="020B0603020101020101" pitchFamily="34" charset="-127"/>
+            </a:endParaRPr>
+          </a:p>
+          <a:p>
+            <a:pPr marL="171450" indent="-171450">
+              <a:lnSpc>
+                <a:spcPct val="150000"/>
+              </a:lnSpc>
+              <a:buFont typeface="Arial" panose="020B0604020202020204" pitchFamily="34" charset="0"/>
+              <a:buChar char="•"/>
+            </a:pPr>
+            <a:r>
+              <a:rPr lang="ko-KR" altLang="en-US" sz="1000" dirty="0">
+                <a:latin typeface="나눔바른고딕" panose="020B0603020101020101" pitchFamily="34" charset="-127"/>
+                <a:ea typeface="나눔바른고딕" panose="020B0603020101020101" pitchFamily="34" charset="-127"/>
+              </a:rPr>
+              <a:t>가장 까다로운 조건을 앞에 두고</a:t>
+            </a:r>
+            <a:r>
+              <a:rPr lang="en-US" altLang="ko-KR" sz="1000" dirty="0">
+                <a:latin typeface="나눔바른고딕" panose="020B0603020101020101" pitchFamily="34" charset="-127"/>
+                <a:ea typeface="나눔바른고딕" panose="020B0603020101020101" pitchFamily="34" charset="-127"/>
+              </a:rPr>
+              <a:t>, </a:t>
+            </a:r>
+            <a:r>
+              <a:rPr lang="ko-KR" altLang="en-US" sz="1000" dirty="0">
+                <a:latin typeface="나눔바른고딕" panose="020B0603020101020101" pitchFamily="34" charset="-127"/>
+                <a:ea typeface="나눔바른고딕" panose="020B0603020101020101" pitchFamily="34" charset="-127"/>
+              </a:rPr>
+              <a:t>뒤로 갈수록 느슨한 조건을 배치</a:t>
+            </a:r>
+            <a:endParaRPr lang="en-US" altLang="ko-KR" sz="1000" dirty="0">
+              <a:latin typeface="나눔바른고딕" panose="020B0603020101020101" pitchFamily="34" charset="-127"/>
+              <a:ea typeface="나눔바른고딕" panose="020B0603020101020101" pitchFamily="34" charset="-127"/>
+            </a:endParaRPr>
+          </a:p>
+          <a:p>
+            <a:pPr marL="628650" lvl="1" indent="-171450">
+              <a:lnSpc>
+                <a:spcPct val="150000"/>
+              </a:lnSpc>
+              <a:buFont typeface="Arial" panose="020B0604020202020204" pitchFamily="34" charset="0"/>
+              <a:buChar char="•"/>
+            </a:pPr>
+            <a:r>
+              <a:rPr lang="ko-KR" altLang="en-US" sz="1000" dirty="0">
+                <a:latin typeface="나눔바른고딕" panose="020B0603020101020101" pitchFamily="34" charset="-127"/>
+                <a:ea typeface="나눔바른고딕" panose="020B0603020101020101" pitchFamily="34" charset="-127"/>
+              </a:rPr>
+              <a:t>알맞은 조건이 없다면 모션은 재생하지 않도록 처리</a:t>
+            </a:r>
+            <a:endParaRPr lang="en-US" altLang="ko-KR" sz="1000" dirty="0">
+              <a:latin typeface="나눔바른고딕" panose="020B0603020101020101" pitchFamily="34" charset="-127"/>
+              <a:ea typeface="나눔바른고딕" panose="020B0603020101020101" pitchFamily="34" charset="-127"/>
+            </a:endParaRPr>
+          </a:p>
+        </p:txBody>
+      </p:sp>
+      <p:sp>
+        <p:nvSpPr>
+          <p:cNvPr id="24" name="TextBox 23">
+            <a:extLst>
+              <a:ext uri="{FF2B5EF4-FFF2-40B4-BE49-F238E27FC236}">
+                <a16:creationId xmlns:a16="http://schemas.microsoft.com/office/drawing/2014/main" id="{6F2CDF5C-5733-C245-1EF4-F24F8306466F}"/>
+              </a:ext>
+            </a:extLst>
+          </p:cNvPr>
+          <p:cNvSpPr txBox="1"/>
+          <p:nvPr/>
+        </p:nvSpPr>
+        <p:spPr>
+          <a:xfrm>
+            <a:off x="7171849" y="5651576"/>
+            <a:ext cx="5138684" cy="534762"/>
+          </a:xfrm>
+          <a:prstGeom prst="rect">
+            <a:avLst/>
+          </a:prstGeom>
+          <a:noFill/>
+        </p:spPr>
+        <p:txBody>
+          <a:bodyPr wrap="square" rtlCol="0">
+            <a:spAutoFit/>
+          </a:bodyPr>
+          <a:lstStyle/>
+          <a:p>
+            <a:pPr marL="171450" indent="-171450">
+              <a:lnSpc>
+                <a:spcPct val="150000"/>
+              </a:lnSpc>
+              <a:buFont typeface="Arial" panose="020B0604020202020204" pitchFamily="34" charset="0"/>
+              <a:buChar char="•"/>
+            </a:pPr>
+            <a:r>
+              <a:rPr lang="ko-KR" altLang="en-US" sz="1000" b="1" dirty="0">
+                <a:latin typeface="나눔바른고딕" panose="020B0603020101020101" pitchFamily="34" charset="-127"/>
+                <a:ea typeface="나눔바른고딕" panose="020B0603020101020101" pitchFamily="34" charset="-127"/>
+              </a:rPr>
+              <a:t>재사용되는 조건</a:t>
+            </a:r>
+            <a:r>
+              <a:rPr lang="ko-KR" altLang="en-US" sz="1000" dirty="0">
+                <a:latin typeface="나눔바른고딕" panose="020B0603020101020101" pitchFamily="34" charset="-127"/>
+                <a:ea typeface="나눔바른고딕" panose="020B0603020101020101" pitchFamily="34" charset="-127"/>
+              </a:rPr>
+              <a:t>들이 있을 수 있고</a:t>
+            </a:r>
+            <a:r>
+              <a:rPr lang="en-US" altLang="ko-KR" sz="1000" dirty="0">
+                <a:latin typeface="나눔바른고딕" panose="020B0603020101020101" pitchFamily="34" charset="-127"/>
+                <a:ea typeface="나눔바른고딕" panose="020B0603020101020101" pitchFamily="34" charset="-127"/>
+              </a:rPr>
+              <a:t> </a:t>
+            </a:r>
+            <a:r>
+              <a:rPr lang="ko-KR" altLang="en-US" sz="1000" dirty="0">
+                <a:latin typeface="나눔바른고딕" panose="020B0603020101020101" pitchFamily="34" charset="-127"/>
+                <a:ea typeface="나눔바른고딕" panose="020B0603020101020101" pitchFamily="34" charset="-127"/>
+              </a:rPr>
+              <a:t>매 탐색마다 이 </a:t>
+            </a:r>
+            <a:r>
+              <a:rPr lang="ko-KR" altLang="en-US" sz="1000" b="1" dirty="0">
+                <a:latin typeface="나눔바른고딕" panose="020B0603020101020101" pitchFamily="34" charset="-127"/>
+                <a:ea typeface="나눔바른고딕" panose="020B0603020101020101" pitchFamily="34" charset="-127"/>
+              </a:rPr>
+              <a:t>조건의 연산을 실행</a:t>
+            </a:r>
+            <a:r>
+              <a:rPr lang="ko-KR" altLang="en-US" sz="1000" dirty="0">
+                <a:latin typeface="나눔바른고딕" panose="020B0603020101020101" pitchFamily="34" charset="-127"/>
+                <a:ea typeface="나눔바른고딕" panose="020B0603020101020101" pitchFamily="34" charset="-127"/>
+              </a:rPr>
+              <a:t>하는 것은 </a:t>
+            </a:r>
+            <a:r>
+              <a:rPr lang="ko-KR" altLang="en-US" sz="1000" b="1" dirty="0">
+                <a:latin typeface="나눔바른고딕" panose="020B0603020101020101" pitchFamily="34" charset="-127"/>
+                <a:ea typeface="나눔바른고딕" panose="020B0603020101020101" pitchFamily="34" charset="-127"/>
+              </a:rPr>
+              <a:t>비효율적</a:t>
+            </a:r>
+            <a:endParaRPr lang="en-US" altLang="ko-KR" sz="1000" b="1" dirty="0">
+              <a:latin typeface="나눔바른고딕" panose="020B0603020101020101" pitchFamily="34" charset="-127"/>
+              <a:ea typeface="나눔바른고딕" panose="020B0603020101020101" pitchFamily="34" charset="-127"/>
+            </a:endParaRPr>
+          </a:p>
+          <a:p>
+            <a:pPr marL="171450" indent="-171450">
+              <a:lnSpc>
+                <a:spcPct val="150000"/>
+              </a:lnSpc>
+              <a:buFont typeface="Arial" panose="020B0604020202020204" pitchFamily="34" charset="0"/>
+              <a:buChar char="•"/>
+            </a:pPr>
+            <a:r>
+              <a:rPr lang="ko-KR" altLang="en-US" sz="1000" b="1" dirty="0">
+                <a:latin typeface="나눔바른고딕" panose="020B0603020101020101" pitchFamily="34" charset="-127"/>
+                <a:ea typeface="나눔바른고딕" panose="020B0603020101020101" pitchFamily="34" charset="-127"/>
+              </a:rPr>
+              <a:t>한 번의 결과 처리 과정</a:t>
+            </a:r>
+            <a:r>
+              <a:rPr lang="ko-KR" altLang="en-US" sz="1000" dirty="0">
+                <a:latin typeface="나눔바른고딕" panose="020B0603020101020101" pitchFamily="34" charset="-127"/>
+                <a:ea typeface="나눔바른고딕" panose="020B0603020101020101" pitchFamily="34" charset="-127"/>
+              </a:rPr>
+              <a:t>에서 조건 객체 순회 시</a:t>
+            </a:r>
+            <a:r>
+              <a:rPr lang="en-US" altLang="ko-KR" sz="1000" dirty="0">
+                <a:latin typeface="나눔바른고딕" panose="020B0603020101020101" pitchFamily="34" charset="-127"/>
+                <a:ea typeface="나눔바른고딕" panose="020B0603020101020101" pitchFamily="34" charset="-127"/>
+              </a:rPr>
+              <a:t>, </a:t>
+            </a:r>
+            <a:r>
+              <a:rPr lang="ko-KR" altLang="en-US" sz="1000" b="1" dirty="0">
+                <a:latin typeface="나눔바른고딕" panose="020B0603020101020101" pitchFamily="34" charset="-127"/>
+                <a:ea typeface="나눔바른고딕" panose="020B0603020101020101" pitchFamily="34" charset="-127"/>
+              </a:rPr>
+              <a:t>한 번만 평가할 수 있도록 처리</a:t>
+            </a:r>
+            <a:endParaRPr lang="en-US" altLang="ko-KR" sz="1000" b="1" dirty="0">
+              <a:latin typeface="나눔바른고딕" panose="020B0603020101020101" pitchFamily="34" charset="-127"/>
+              <a:ea typeface="나눔바른고딕" panose="020B0603020101020101" pitchFamily="34" charset="-127"/>
+            </a:endParaRPr>
+          </a:p>
+        </p:txBody>
+      </p:sp>
+      <p:grpSp>
+        <p:nvGrpSpPr>
+          <p:cNvPr id="2" name="그룹 1">
+            <a:extLst>
+              <a:ext uri="{FF2B5EF4-FFF2-40B4-BE49-F238E27FC236}">
+                <a16:creationId xmlns:a16="http://schemas.microsoft.com/office/drawing/2014/main" id="{88726826-740F-3FEB-E639-65767D0E728A}"/>
+              </a:ext>
+            </a:extLst>
+          </p:cNvPr>
+          <p:cNvGrpSpPr/>
+          <p:nvPr/>
+        </p:nvGrpSpPr>
+        <p:grpSpPr>
+          <a:xfrm>
+            <a:off x="8674030" y="2547170"/>
+            <a:ext cx="2822333" cy="2426112"/>
+            <a:chOff x="5441134" y="4019550"/>
+            <a:chExt cx="2955944" cy="2572162"/>
+          </a:xfrm>
+        </p:grpSpPr>
+        <p:pic>
+          <p:nvPicPr>
+            <p:cNvPr id="22" name="그림 21">
+              <a:extLst>
+                <a:ext uri="{FF2B5EF4-FFF2-40B4-BE49-F238E27FC236}">
+                  <a16:creationId xmlns:a16="http://schemas.microsoft.com/office/drawing/2014/main" id="{1B7A4335-89EB-4EA5-415D-E81F601B0DA2}"/>
+                </a:ext>
+              </a:extLst>
+            </p:cNvPr>
+            <p:cNvPicPr>
+              <a:picLocks noChangeAspect="1"/>
+            </p:cNvPicPr>
+            <p:nvPr/>
+          </p:nvPicPr>
+          <p:blipFill>
+            <a:blip r:embed="rId4"/>
+            <a:stretch>
+              <a:fillRect/>
+            </a:stretch>
+          </p:blipFill>
+          <p:spPr>
+            <a:xfrm>
+              <a:off x="5441134" y="4019550"/>
+              <a:ext cx="2955944" cy="2572162"/>
+            </a:xfrm>
+            <a:prstGeom prst="rect">
+              <a:avLst/>
+            </a:prstGeom>
+          </p:spPr>
+        </p:pic>
+        <p:sp>
+          <p:nvSpPr>
+            <p:cNvPr id="26" name="직사각형 25">
+              <a:extLst>
+                <a:ext uri="{FF2B5EF4-FFF2-40B4-BE49-F238E27FC236}">
+                  <a16:creationId xmlns:a16="http://schemas.microsoft.com/office/drawing/2014/main" id="{4FA6EDC7-5BC1-66CB-A79F-9F585514A845}"/>
+                </a:ext>
+              </a:extLst>
+            </p:cNvPr>
+            <p:cNvSpPr/>
+            <p:nvPr/>
+          </p:nvSpPr>
+          <p:spPr>
+            <a:xfrm>
+              <a:off x="5685295" y="4560257"/>
+              <a:ext cx="2221389" cy="523608"/>
+            </a:xfrm>
+            <a:prstGeom prst="rect">
+              <a:avLst/>
+            </a:prstGeom>
+            <a:noFill/>
+            <a:ln>
+              <a:solidFill>
+                <a:schemeClr val="tx2">
+                  <a:lumMod val="50000"/>
+                  <a:lumOff val="50000"/>
+                </a:schemeClr>
+              </a:solidFill>
+            </a:ln>
+          </p:spPr>
+          <p:style>
+            <a:lnRef idx="2">
+              <a:schemeClr val="accent1">
+                <a:shade val="15000"/>
+              </a:schemeClr>
+            </a:lnRef>
+            <a:fillRef idx="1">
+              <a:schemeClr val="accent1"/>
+            </a:fillRef>
+            <a:effectRef idx="0">
+              <a:schemeClr val="accent1"/>
+            </a:effectRef>
+            <a:fontRef idx="minor">
+              <a:schemeClr val="lt1"/>
+            </a:fontRef>
+          </p:style>
+          <p:txBody>
+            <a:bodyPr rtlCol="0" anchor="ctr"/>
+            <a:lstStyle/>
+            <a:p>
+              <a:pPr algn="ctr"/>
+              <a:endParaRPr lang="ko-KR" altLang="en-US"/>
+            </a:p>
+          </p:txBody>
+        </p:sp>
+        <p:sp>
+          <p:nvSpPr>
+            <p:cNvPr id="28" name="직사각형 27">
+              <a:extLst>
+                <a:ext uri="{FF2B5EF4-FFF2-40B4-BE49-F238E27FC236}">
+                  <a16:creationId xmlns:a16="http://schemas.microsoft.com/office/drawing/2014/main" id="{EF53B7D2-9696-251A-5D98-C2760CCA4822}"/>
+                </a:ext>
+              </a:extLst>
+            </p:cNvPr>
+            <p:cNvSpPr/>
+            <p:nvPr/>
+          </p:nvSpPr>
+          <p:spPr>
+            <a:xfrm>
+              <a:off x="5773084" y="5854238"/>
+              <a:ext cx="1819275" cy="293942"/>
+            </a:xfrm>
+            <a:prstGeom prst="rect">
+              <a:avLst/>
+            </a:prstGeom>
+            <a:noFill/>
+            <a:ln>
+              <a:solidFill>
+                <a:schemeClr val="tx2">
+                  <a:lumMod val="50000"/>
+                  <a:lumOff val="50000"/>
+                </a:schemeClr>
+              </a:solidFill>
+            </a:ln>
+          </p:spPr>
+          <p:style>
+            <a:lnRef idx="2">
+              <a:schemeClr val="accent1">
+                <a:shade val="15000"/>
+              </a:schemeClr>
+            </a:lnRef>
+            <a:fillRef idx="1">
+              <a:schemeClr val="accent1"/>
+            </a:fillRef>
+            <a:effectRef idx="0">
+              <a:schemeClr val="accent1"/>
+            </a:effectRef>
+            <a:fontRef idx="minor">
+              <a:schemeClr val="lt1"/>
+            </a:fontRef>
+          </p:style>
+          <p:txBody>
+            <a:bodyPr rtlCol="0" anchor="ctr"/>
+            <a:lstStyle/>
+            <a:p>
+              <a:pPr algn="ctr"/>
+              <a:endParaRPr lang="ko-KR" altLang="en-US"/>
+            </a:p>
+          </p:txBody>
+        </p:sp>
+      </p:grpSp>
+      <p:pic>
+        <p:nvPicPr>
+          <p:cNvPr id="5" name="그림 4">
+            <a:extLst>
+              <a:ext uri="{FF2B5EF4-FFF2-40B4-BE49-F238E27FC236}">
+                <a16:creationId xmlns:a16="http://schemas.microsoft.com/office/drawing/2014/main" id="{27F8300D-CAA7-4629-6F85-8038810C5FC7}"/>
+              </a:ext>
+            </a:extLst>
+          </p:cNvPr>
+          <p:cNvPicPr>
+            <a:picLocks noChangeAspect="1"/>
+          </p:cNvPicPr>
+          <p:nvPr/>
+        </p:nvPicPr>
+        <p:blipFill>
+          <a:blip r:embed="rId5"/>
+          <a:srcRect t="60472" r="35848"/>
+          <a:stretch>
+            <a:fillRect/>
+          </a:stretch>
+        </p:blipFill>
+        <p:spPr>
+          <a:xfrm>
+            <a:off x="4610759" y="1845822"/>
+            <a:ext cx="1888897" cy="1212140"/>
+          </a:xfrm>
+          <a:prstGeom prst="rect">
+            <a:avLst/>
+          </a:prstGeom>
+        </p:spPr>
+      </p:pic>
+      <p:pic>
+        <p:nvPicPr>
+          <p:cNvPr id="7" name="그림 6">
+            <a:extLst>
+              <a:ext uri="{FF2B5EF4-FFF2-40B4-BE49-F238E27FC236}">
+                <a16:creationId xmlns:a16="http://schemas.microsoft.com/office/drawing/2014/main" id="{84628725-12DE-7C1B-9D78-C3B8255ED291}"/>
+              </a:ext>
+            </a:extLst>
+          </p:cNvPr>
+          <p:cNvPicPr>
+            <a:picLocks noChangeAspect="1"/>
+          </p:cNvPicPr>
+          <p:nvPr/>
+        </p:nvPicPr>
+        <p:blipFill rotWithShape="1">
+          <a:blip r:embed="rId6"/>
+          <a:srcRect l="7776" t="22743" r="17893" b="61866"/>
+          <a:stretch>
+            <a:fillRect/>
+          </a:stretch>
+        </p:blipFill>
+        <p:spPr>
+          <a:xfrm>
+            <a:off x="4496685" y="5083338"/>
+            <a:ext cx="2158073" cy="602354"/>
+          </a:xfrm>
+          <a:prstGeom prst="rect">
+            <a:avLst/>
+          </a:prstGeom>
+        </p:spPr>
+      </p:pic>
+      <p:cxnSp>
+        <p:nvCxnSpPr>
+          <p:cNvPr id="13" name="연결선: 꺾임 12">
+            <a:extLst>
+              <a:ext uri="{FF2B5EF4-FFF2-40B4-BE49-F238E27FC236}">
+                <a16:creationId xmlns:a16="http://schemas.microsoft.com/office/drawing/2014/main" id="{CE8BBBF0-A0B7-2923-DF45-B0DF08B0CD91}"/>
+              </a:ext>
+            </a:extLst>
+          </p:cNvPr>
+          <p:cNvCxnSpPr>
+            <a:stCxn id="7" idx="3"/>
+            <a:endCxn id="22" idx="1"/>
+          </p:cNvCxnSpPr>
+          <p:nvPr/>
+        </p:nvCxnSpPr>
+        <p:spPr>
+          <a:xfrm flipV="1">
+            <a:off x="6654758" y="3760226"/>
+            <a:ext cx="2019272" cy="1624289"/>
+          </a:xfrm>
+          <a:prstGeom prst="bentConnector3">
+            <a:avLst>
+              <a:gd name="adj1" fmla="val 79770"/>
+            </a:avLst>
+          </a:prstGeom>
+          <a:ln>
+            <a:tailEnd type="triangle"/>
+          </a:ln>
+        </p:spPr>
+        <p:style>
+          <a:lnRef idx="2">
+            <a:schemeClr val="accent1"/>
+          </a:lnRef>
+          <a:fillRef idx="0">
+            <a:schemeClr val="accent1"/>
+          </a:fillRef>
+          <a:effectRef idx="1">
+            <a:schemeClr val="accent1"/>
+          </a:effectRef>
+          <a:fontRef idx="minor">
+            <a:schemeClr val="tx1"/>
+          </a:fontRef>
+        </p:style>
+      </p:cxnSp>
+      <p:cxnSp>
+        <p:nvCxnSpPr>
+          <p:cNvPr id="16" name="연결선: 꺾임 15">
+            <a:extLst>
+              <a:ext uri="{FF2B5EF4-FFF2-40B4-BE49-F238E27FC236}">
+                <a16:creationId xmlns:a16="http://schemas.microsoft.com/office/drawing/2014/main" id="{15DD2CE8-F211-AD48-E6DE-355C855D63F5}"/>
+              </a:ext>
+            </a:extLst>
+          </p:cNvPr>
+          <p:cNvCxnSpPr>
+            <a:stCxn id="5" idx="3"/>
+            <a:endCxn id="22" idx="1"/>
+          </p:cNvCxnSpPr>
+          <p:nvPr/>
+        </p:nvCxnSpPr>
+        <p:spPr>
+          <a:xfrm>
+            <a:off x="6499656" y="2451892"/>
+            <a:ext cx="2174374" cy="1308334"/>
+          </a:xfrm>
+          <a:prstGeom prst="bentConnector3">
+            <a:avLst>
+              <a:gd name="adj1" fmla="val 81151"/>
+            </a:avLst>
+          </a:prstGeom>
+          <a:ln>
+            <a:tailEnd type="triangle"/>
+          </a:ln>
+        </p:spPr>
+        <p:style>
+          <a:lnRef idx="2">
+            <a:schemeClr val="accent1"/>
+          </a:lnRef>
+          <a:fillRef idx="0">
+            <a:schemeClr val="accent1"/>
+          </a:fillRef>
+          <a:effectRef idx="1">
+            <a:schemeClr val="accent1"/>
+          </a:effectRef>
+          <a:fontRef idx="minor">
+            <a:schemeClr val="tx1"/>
+          </a:fontRef>
+        </p:style>
+      </p:cxnSp>
     </p:spTree>
     <p:extLst>
       <p:ext uri="{BB962C8B-B14F-4D97-AF65-F5344CB8AC3E}">
@@ -12221,13 +13820,6 @@
   <p:clrMapOvr>
     <a:masterClrMapping/>
   </p:clrMapOvr>
-  <p:timing>
-    <p:tnLst>
-      <p:par>
-        <p:cTn id="1" dur="indefinite" restart="never" nodeType="tmRoot"/>
-      </p:par>
-    </p:tnLst>
-  </p:timing>
 </p:sld>
 </file>
 
@@ -12239,7 +13831,7 @@
         <p:cNvPr id="1" name="">
           <a:extLst>
             <a:ext uri="{FF2B5EF4-FFF2-40B4-BE49-F238E27FC236}">
-              <a16:creationId xmlns:a16="http://schemas.microsoft.com/office/drawing/2014/main" xmlns="" id="{D1D0A15A-753E-D76E-7EA6-D7EC3C7C4084}"/>
+              <a16:creationId xmlns:a16="http://schemas.microsoft.com/office/drawing/2014/main" id="{D1D0A15A-753E-D76E-7EA6-D7EC3C7C4084}"/>
             </a:ext>
           </a:extLst>
         </p:cNvPr>
@@ -12259,7 +13851,7 @@
           <p:cNvPr id="8" name="TextBox 7">
             <a:extLst>
               <a:ext uri="{FF2B5EF4-FFF2-40B4-BE49-F238E27FC236}">
-                <a16:creationId xmlns:a16="http://schemas.microsoft.com/office/drawing/2014/main" xmlns="" id="{8CAEF54E-C261-DAEA-E241-FDBE88008C12}"/>
+                <a16:creationId xmlns:a16="http://schemas.microsoft.com/office/drawing/2014/main" id="{8CAEF54E-C261-DAEA-E241-FDBE88008C12}"/>
               </a:ext>
             </a:extLst>
           </p:cNvPr>
@@ -12301,7 +13893,7 @@
           <p:cNvPr id="10" name="TextBox 9">
             <a:extLst>
               <a:ext uri="{FF2B5EF4-FFF2-40B4-BE49-F238E27FC236}">
-                <a16:creationId xmlns:a16="http://schemas.microsoft.com/office/drawing/2014/main" xmlns="" id="{C2834159-A529-642E-DA72-BC14004E6795}"/>
+                <a16:creationId xmlns:a16="http://schemas.microsoft.com/office/drawing/2014/main" id="{C2834159-A529-642E-DA72-BC14004E6795}"/>
               </a:ext>
             </a:extLst>
           </p:cNvPr>
@@ -12343,7 +13935,7 @@
           <p:cNvPr id="3" name="직선 연결선 2">
             <a:extLst>
               <a:ext uri="{FF2B5EF4-FFF2-40B4-BE49-F238E27FC236}">
-                <a16:creationId xmlns:a16="http://schemas.microsoft.com/office/drawing/2014/main" xmlns="" id="{DA84CF49-B3AE-55A6-B5C8-1AFB49183522}"/>
+                <a16:creationId xmlns:a16="http://schemas.microsoft.com/office/drawing/2014/main" id="{DA84CF49-B3AE-55A6-B5C8-1AFB49183522}"/>
               </a:ext>
             </a:extLst>
           </p:cNvPr>
@@ -12386,7 +13978,7 @@
           <p:cNvPr id="12" name="직사각형 11">
             <a:extLst>
               <a:ext uri="{FF2B5EF4-FFF2-40B4-BE49-F238E27FC236}">
-                <a16:creationId xmlns:a16="http://schemas.microsoft.com/office/drawing/2014/main" xmlns="" id="{20BE5BF5-965D-78BB-5728-A037B8A2E486}"/>
+                <a16:creationId xmlns:a16="http://schemas.microsoft.com/office/drawing/2014/main" id="{20BE5BF5-965D-78BB-5728-A037B8A2E486}"/>
               </a:ext>
             </a:extLst>
           </p:cNvPr>
@@ -12485,7 +14077,7 @@
           <p:cNvPr id="13" name="TextBox 12">
             <a:extLst>
               <a:ext uri="{FF2B5EF4-FFF2-40B4-BE49-F238E27FC236}">
-                <a16:creationId xmlns:a16="http://schemas.microsoft.com/office/drawing/2014/main" xmlns="" id="{83366076-5195-604B-D474-8C276C9406C6}"/>
+                <a16:creationId xmlns:a16="http://schemas.microsoft.com/office/drawing/2014/main" id="{83366076-5195-604B-D474-8C276C9406C6}"/>
               </a:ext>
             </a:extLst>
           </p:cNvPr>
@@ -12495,7 +14087,7 @@
         <p:spPr>
           <a:xfrm>
             <a:off x="302449" y="1342316"/>
-            <a:ext cx="7464813" cy="276999"/>
+            <a:ext cx="7464813" cy="346249"/>
           </a:xfrm>
           <a:prstGeom prst="rect">
             <a:avLst/>
@@ -12508,6 +14100,11 @@
           </a:bodyPr>
           <a:lstStyle/>
           <a:p>
+            <a:pPr>
+              <a:lnSpc>
+                <a:spcPct val="150000"/>
+              </a:lnSpc>
+            </a:pPr>
             <a:r>
               <a:rPr lang="ko-KR" altLang="en-US" sz="1200" dirty="0">
                 <a:latin typeface="나눔바른고딕" panose="020B0603020101020101" pitchFamily="34" charset="-127"/>
@@ -12527,7 +14124,7 @@
           <p:cNvPr id="9" name="TextBox 8">
             <a:extLst>
               <a:ext uri="{FF2B5EF4-FFF2-40B4-BE49-F238E27FC236}">
-                <a16:creationId xmlns:a16="http://schemas.microsoft.com/office/drawing/2014/main" xmlns="" id="{AD3C5630-512F-1962-4801-A817035479B0}"/>
+                <a16:creationId xmlns:a16="http://schemas.microsoft.com/office/drawing/2014/main" id="{AD3C5630-512F-1962-4801-A817035479B0}"/>
               </a:ext>
             </a:extLst>
           </p:cNvPr>
@@ -12537,7 +14134,7 @@
         <p:spPr>
           <a:xfrm>
             <a:off x="302449" y="1727036"/>
-            <a:ext cx="6520758" cy="1015663"/>
+            <a:ext cx="5793551" cy="534762"/>
           </a:xfrm>
           <a:prstGeom prst="rect">
             <a:avLst/>
@@ -12550,225 +14147,202 @@
           </a:bodyPr>
           <a:lstStyle/>
           <a:p>
-            <a:r>
-              <a:rPr lang="ko-KR" altLang="en-US" sz="1200" dirty="0" err="1">
+            <a:pPr marL="171450" indent="-171450">
+              <a:lnSpc>
+                <a:spcPct val="150000"/>
+              </a:lnSpc>
+              <a:buFont typeface="Arial" panose="020B0604020202020204" pitchFamily="34" charset="0"/>
+              <a:buChar char="•"/>
+            </a:pPr>
+            <a:r>
+              <a:rPr lang="ko-KR" altLang="en-US" sz="1000" dirty="0" err="1">
                 <a:latin typeface="나눔바른고딕" panose="020B0603020101020101" pitchFamily="34" charset="-127"/>
                 <a:ea typeface="나눔바른고딕" panose="020B0603020101020101" pitchFamily="34" charset="-127"/>
               </a:rPr>
               <a:t>파쿠르</a:t>
             </a:r>
             <a:r>
-              <a:rPr lang="ko-KR" altLang="en-US" sz="1200" dirty="0">
+              <a:rPr lang="ko-KR" altLang="en-US" sz="1000" dirty="0">
                 <a:latin typeface="나눔바른고딕" panose="020B0603020101020101" pitchFamily="34" charset="-127"/>
                 <a:ea typeface="나눔바른고딕" panose="020B0603020101020101" pitchFamily="34" charset="-127"/>
               </a:rPr>
               <a:t> 시</a:t>
             </a:r>
             <a:r>
-              <a:rPr lang="en-US" altLang="ko-KR" sz="1200" dirty="0">
+              <a:rPr lang="en-US" altLang="ko-KR" sz="1000" dirty="0">
                 <a:latin typeface="나눔바른고딕" panose="020B0603020101020101" pitchFamily="34" charset="-127"/>
                 <a:ea typeface="나눔바른고딕" panose="020B0603020101020101" pitchFamily="34" charset="-127"/>
               </a:rPr>
               <a:t>, </a:t>
             </a:r>
             <a:r>
-              <a:rPr lang="ko-KR" altLang="en-US" sz="1200" dirty="0">
-                <a:latin typeface="나눔바른고딕" panose="020B0603020101020101" pitchFamily="34" charset="-127"/>
-                <a:ea typeface="나눔바른고딕" panose="020B0603020101020101" pitchFamily="34" charset="-127"/>
-              </a:rPr>
-              <a:t>대체로 매끈한 면보다는 돌출된 부분을 이용</a:t>
-            </a:r>
-            <a:endParaRPr lang="en-US" altLang="ko-KR" sz="1200" dirty="0">
+              <a:rPr lang="ko-KR" altLang="en-US" sz="1000" dirty="0">
+                <a:latin typeface="나눔바른고딕" panose="020B0603020101020101" pitchFamily="34" charset="-127"/>
+                <a:ea typeface="나눔바른고딕" panose="020B0603020101020101" pitchFamily="34" charset="-127"/>
+              </a:rPr>
+              <a:t>대체로 매끈한 면보다는 돌출된 부분을 이용하여 장애물을 극복</a:t>
+            </a:r>
+            <a:endParaRPr lang="en-US" altLang="ko-KR" sz="1000" dirty="0">
               <a:latin typeface="나눔바른고딕" panose="020B0603020101020101" pitchFamily="34" charset="-127"/>
               <a:ea typeface="나눔바른고딕" panose="020B0603020101020101" pitchFamily="34" charset="-127"/>
             </a:endParaRPr>
           </a:p>
           <a:p>
-            <a:r>
-              <a:rPr lang="ko-KR" altLang="en-US" sz="1200" dirty="0">
+            <a:pPr marL="171450" indent="-171450">
+              <a:lnSpc>
+                <a:spcPct val="150000"/>
+              </a:lnSpc>
+              <a:buFont typeface="Arial" panose="020B0604020202020204" pitchFamily="34" charset="0"/>
+              <a:buChar char="•"/>
+            </a:pPr>
+            <a:r>
+              <a:rPr lang="ko-KR" altLang="en-US" sz="1000" dirty="0">
                 <a:latin typeface="나눔바른고딕" panose="020B0603020101020101" pitchFamily="34" charset="-127"/>
                 <a:ea typeface="나눔바른고딕" panose="020B0603020101020101" pitchFamily="34" charset="-127"/>
               </a:rPr>
               <a:t>이 부분을 모사하고자 돌출부 유형을 추가</a:t>
             </a:r>
-            <a:endParaRPr lang="en-US" altLang="ko-KR" sz="1200" dirty="0">
+            <a:endParaRPr lang="en-US" altLang="ko-KR" sz="1000" dirty="0">
               <a:latin typeface="나눔바른고딕" panose="020B0603020101020101" pitchFamily="34" charset="-127"/>
               <a:ea typeface="나눔바른고딕" panose="020B0603020101020101" pitchFamily="34" charset="-127"/>
             </a:endParaRPr>
           </a:p>
-          <a:p>
-            <a:endParaRPr lang="en-US" altLang="ko-KR" sz="1200" dirty="0">
-              <a:latin typeface="나눔바른고딕" panose="020B0603020101020101" pitchFamily="34" charset="-127"/>
-              <a:ea typeface="나눔바른고딕" panose="020B0603020101020101" pitchFamily="34" charset="-127"/>
-            </a:endParaRPr>
-          </a:p>
-          <a:p>
-            <a:r>
-              <a:rPr lang="ko-KR" altLang="en-US" sz="1200" dirty="0">
-                <a:latin typeface="나눔바른고딕" panose="020B0603020101020101" pitchFamily="34" charset="-127"/>
-                <a:ea typeface="나눔바른고딕" panose="020B0603020101020101" pitchFamily="34" charset="-127"/>
-              </a:rPr>
-              <a:t>독립적으로 있진 않고</a:t>
-            </a:r>
-            <a:r>
-              <a:rPr lang="en-US" altLang="ko-KR" sz="1200" dirty="0">
-                <a:latin typeface="나눔바른고딕" panose="020B0603020101020101" pitchFamily="34" charset="-127"/>
-                <a:ea typeface="나눔바른고딕" panose="020B0603020101020101" pitchFamily="34" charset="-127"/>
-              </a:rPr>
-              <a:t>, </a:t>
-            </a:r>
-            <a:r>
-              <a:rPr lang="ko-KR" altLang="en-US" sz="1200" dirty="0">
-                <a:latin typeface="나눔바른고딕" panose="020B0603020101020101" pitchFamily="34" charset="-127"/>
-                <a:ea typeface="나눔바른고딕" panose="020B0603020101020101" pitchFamily="34" charset="-127"/>
-              </a:rPr>
-              <a:t>다른 장애물에 부속으로 추가된 형태</a:t>
-            </a:r>
-            <a:endParaRPr lang="en-US" altLang="ko-KR" sz="1200" dirty="0">
-              <a:latin typeface="나눔바른고딕" panose="020B0603020101020101" pitchFamily="34" charset="-127"/>
-              <a:ea typeface="나눔바른고딕" panose="020B0603020101020101" pitchFamily="34" charset="-127"/>
-            </a:endParaRPr>
-          </a:p>
-          <a:p>
-            <a:r>
-              <a:rPr lang="ko-KR" altLang="en-US" sz="1200" dirty="0">
-                <a:latin typeface="나눔바른고딕" panose="020B0603020101020101" pitchFamily="34" charset="-127"/>
-                <a:ea typeface="나눔바른고딕" panose="020B0603020101020101" pitchFamily="34" charset="-127"/>
-              </a:rPr>
-              <a:t>장애물 인식 시</a:t>
-            </a:r>
-            <a:r>
-              <a:rPr lang="en-US" altLang="ko-KR" sz="1200" dirty="0">
-                <a:latin typeface="나눔바른고딕" panose="020B0603020101020101" pitchFamily="34" charset="-127"/>
-                <a:ea typeface="나눔바른고딕" panose="020B0603020101020101" pitchFamily="34" charset="-127"/>
-              </a:rPr>
-              <a:t>, </a:t>
-            </a:r>
-            <a:r>
-              <a:rPr lang="ko-KR" altLang="en-US" sz="1200" dirty="0">
-                <a:latin typeface="나눔바른고딕" panose="020B0603020101020101" pitchFamily="34" charset="-127"/>
-                <a:ea typeface="나눔바른고딕" panose="020B0603020101020101" pitchFamily="34" charset="-127"/>
-              </a:rPr>
-              <a:t>우선해서 인식처리 </a:t>
-            </a:r>
-            <a:r>
-              <a:rPr lang="en-US" altLang="ko-KR" sz="1200" dirty="0">
-                <a:latin typeface="나눔바른고딕" panose="020B0603020101020101" pitchFamily="34" charset="-127"/>
-                <a:ea typeface="나눔바른고딕" panose="020B0603020101020101" pitchFamily="34" charset="-127"/>
-              </a:rPr>
-              <a:t>-&gt; </a:t>
-            </a:r>
-            <a:r>
-              <a:rPr lang="ko-KR" altLang="en-US" sz="1200" dirty="0">
-                <a:latin typeface="나눔바른고딕" panose="020B0603020101020101" pitchFamily="34" charset="-127"/>
-                <a:ea typeface="나눔바른고딕" panose="020B0603020101020101" pitchFamily="34" charset="-127"/>
-              </a:rPr>
-              <a:t>인식 과정에서 우선순위 적용</a:t>
-            </a:r>
-            <a:endParaRPr lang="en-US" altLang="ko-KR" sz="1200" dirty="0">
-              <a:latin typeface="나눔바른고딕" panose="020B0603020101020101" pitchFamily="34" charset="-127"/>
-              <a:ea typeface="나눔바른고딕" panose="020B0603020101020101" pitchFamily="34" charset="-127"/>
-            </a:endParaRPr>
-          </a:p>
-        </p:txBody>
-      </p:sp>
-      <p:sp>
-        <p:nvSpPr>
-          <p:cNvPr id="2" name="직사각형 1">
-            <a:extLst>
-              <a:ext uri="{FF2B5EF4-FFF2-40B4-BE49-F238E27FC236}">
-                <a16:creationId xmlns:a16="http://schemas.microsoft.com/office/drawing/2014/main" xmlns="" id="{882AF4B5-EDA2-1820-BA45-BE5BEC846ABC}"/>
-              </a:ext>
-            </a:extLst>
-          </p:cNvPr>
-          <p:cNvSpPr/>
+        </p:txBody>
+      </p:sp>
+      <p:pic>
+        <p:nvPicPr>
+          <p:cNvPr id="5" name="그림 4">
+            <a:extLst>
+              <a:ext uri="{FF2B5EF4-FFF2-40B4-BE49-F238E27FC236}">
+                <a16:creationId xmlns:a16="http://schemas.microsoft.com/office/drawing/2014/main" id="{92E914A8-96A1-FBAB-046C-8E04FAD5D2BC}"/>
+              </a:ext>
+            </a:extLst>
+          </p:cNvPr>
+          <p:cNvPicPr>
+            <a:picLocks noChangeAspect="1"/>
+          </p:cNvPicPr>
           <p:nvPr/>
-        </p:nvSpPr>
+        </p:nvPicPr>
+        <p:blipFill>
+          <a:blip r:embed="rId3"/>
+          <a:srcRect b="21464"/>
+          <a:stretch>
+            <a:fillRect/>
+          </a:stretch>
+        </p:blipFill>
         <p:spPr>
           <a:xfrm>
-            <a:off x="1733738" y="3365626"/>
-            <a:ext cx="4246075" cy="2576884"/>
+            <a:off x="1514811" y="3254510"/>
+            <a:ext cx="4262005" cy="3169588"/>
           </a:xfrm>
           <a:prstGeom prst="rect">
             <a:avLst/>
           </a:prstGeom>
         </p:spPr>
-        <p:style>
-          <a:lnRef idx="2">
-            <a:schemeClr val="accent1">
-              <a:shade val="15000"/>
-            </a:schemeClr>
-          </a:lnRef>
-          <a:fillRef idx="1">
-            <a:schemeClr val="accent1"/>
-          </a:fillRef>
-          <a:effectRef idx="0">
-            <a:schemeClr val="accent1"/>
-          </a:effectRef>
-          <a:fontRef idx="minor">
-            <a:schemeClr val="lt1"/>
-          </a:fontRef>
-        </p:style>
-        <p:txBody>
-          <a:bodyPr rtlCol="0" anchor="ctr"/>
-          <a:lstStyle/>
-          <a:p>
-            <a:pPr algn="ctr"/>
-            <a:r>
-              <a:rPr lang="ko-KR" altLang="en-US" dirty="0"/>
-              <a:t>예시 이미지</a:t>
-            </a:r>
-            <a:endParaRPr lang="en-US" altLang="ko-KR" dirty="0"/>
-          </a:p>
-        </p:txBody>
-      </p:sp>
-      <p:sp>
-        <p:nvSpPr>
-          <p:cNvPr id="6" name="직사각형 5">
-            <a:extLst>
-              <a:ext uri="{FF2B5EF4-FFF2-40B4-BE49-F238E27FC236}">
-                <a16:creationId xmlns:a16="http://schemas.microsoft.com/office/drawing/2014/main" xmlns="" id="{8CD54640-16D0-6184-2B2B-58AF16D76054}"/>
-              </a:ext>
-            </a:extLst>
-          </p:cNvPr>
-          <p:cNvSpPr/>
+      </p:pic>
+      <p:pic>
+        <p:nvPicPr>
+          <p:cNvPr id="11" name="그림 10">
+            <a:extLst>
+              <a:ext uri="{FF2B5EF4-FFF2-40B4-BE49-F238E27FC236}">
+                <a16:creationId xmlns:a16="http://schemas.microsoft.com/office/drawing/2014/main" id="{9CCC1950-D896-205D-7455-ED34EEAD6AA9}"/>
+              </a:ext>
+            </a:extLst>
+          </p:cNvPr>
+          <p:cNvPicPr>
+            <a:picLocks noChangeAspect="1"/>
+          </p:cNvPicPr>
           <p:nvPr/>
-        </p:nvSpPr>
+        </p:nvPicPr>
+        <p:blipFill>
+          <a:blip r:embed="rId4"/>
+          <a:stretch>
+            <a:fillRect/>
+          </a:stretch>
+        </p:blipFill>
         <p:spPr>
           <a:xfrm>
-            <a:off x="6268016" y="3365626"/>
-            <a:ext cx="4246075" cy="2576884"/>
+            <a:off x="6340475" y="1688565"/>
+            <a:ext cx="3962720" cy="4735533"/>
           </a:xfrm>
           <a:prstGeom prst="rect">
             <a:avLst/>
           </a:prstGeom>
         </p:spPr>
-        <p:style>
-          <a:lnRef idx="2">
-            <a:schemeClr val="accent1">
-              <a:shade val="15000"/>
-            </a:schemeClr>
-          </a:lnRef>
-          <a:fillRef idx="1">
-            <a:schemeClr val="accent1"/>
-          </a:fillRef>
-          <a:effectRef idx="0">
-            <a:schemeClr val="accent1"/>
-          </a:effectRef>
-          <a:fontRef idx="minor">
-            <a:schemeClr val="lt1"/>
-          </a:fontRef>
-        </p:style>
-        <p:txBody>
-          <a:bodyPr rtlCol="0" anchor="ctr"/>
-          <a:lstStyle/>
-          <a:p>
-            <a:pPr algn="ctr"/>
-            <a:r>
-              <a:rPr lang="ko-KR" altLang="en-US" dirty="0"/>
-              <a:t>예시 이미지</a:t>
-            </a:r>
-            <a:endParaRPr lang="en-US" altLang="ko-KR" dirty="0"/>
+      </p:pic>
+      <p:sp>
+        <p:nvSpPr>
+          <p:cNvPr id="15" name="TextBox 14">
+            <a:extLst>
+              <a:ext uri="{FF2B5EF4-FFF2-40B4-BE49-F238E27FC236}">
+                <a16:creationId xmlns:a16="http://schemas.microsoft.com/office/drawing/2014/main" id="{59F884C4-79B0-4748-434F-6CE8731BC21F}"/>
+              </a:ext>
+            </a:extLst>
+          </p:cNvPr>
+          <p:cNvSpPr txBox="1"/>
+          <p:nvPr/>
+        </p:nvSpPr>
+        <p:spPr>
+          <a:xfrm>
+            <a:off x="302449" y="2384331"/>
+            <a:ext cx="6520758" cy="534762"/>
+          </a:xfrm>
+          <a:prstGeom prst="rect">
+            <a:avLst/>
+          </a:prstGeom>
+          <a:noFill/>
+        </p:spPr>
+        <p:txBody>
+          <a:bodyPr wrap="square">
+            <a:spAutoFit/>
+          </a:bodyPr>
+          <a:lstStyle/>
+          <a:p>
+            <a:pPr marL="171450" indent="-171450">
+              <a:lnSpc>
+                <a:spcPct val="150000"/>
+              </a:lnSpc>
+              <a:buFont typeface="Arial" panose="020B0604020202020204" pitchFamily="34" charset="0"/>
+              <a:buChar char="•"/>
+            </a:pPr>
+            <a:r>
+              <a:rPr lang="en-US" altLang="ko-KR" sz="1000" dirty="0">
+                <a:latin typeface="나눔바른고딕" panose="020B0603020101020101" pitchFamily="34" charset="-127"/>
+                <a:ea typeface="나눔바른고딕" panose="020B0603020101020101" pitchFamily="34" charset="-127"/>
+              </a:rPr>
+              <a:t>Protrude</a:t>
+            </a:r>
+            <a:r>
+              <a:rPr lang="ko-KR" altLang="en-US" sz="1000" dirty="0">
+                <a:latin typeface="나눔바른고딕" panose="020B0603020101020101" pitchFamily="34" charset="-127"/>
+                <a:ea typeface="나눔바른고딕" panose="020B0603020101020101" pitchFamily="34" charset="-127"/>
+              </a:rPr>
+              <a:t>라는 태그를 부여해서 인식할 수 있도록 처리</a:t>
+            </a:r>
+            <a:endParaRPr lang="en-US" altLang="ko-KR" sz="1000" dirty="0">
+              <a:latin typeface="나눔바른고딕" panose="020B0603020101020101" pitchFamily="34" charset="-127"/>
+              <a:ea typeface="나눔바른고딕" panose="020B0603020101020101" pitchFamily="34" charset="-127"/>
+            </a:endParaRPr>
+          </a:p>
+          <a:p>
+            <a:pPr marL="171450" indent="-171450">
+              <a:lnSpc>
+                <a:spcPct val="150000"/>
+              </a:lnSpc>
+              <a:buFont typeface="Arial" panose="020B0604020202020204" pitchFamily="34" charset="0"/>
+              <a:buChar char="•"/>
+            </a:pPr>
+            <a:r>
+              <a:rPr lang="ko-KR" altLang="en-US" sz="1000" dirty="0">
+                <a:latin typeface="나눔바른고딕" panose="020B0603020101020101" pitchFamily="34" charset="-127"/>
+                <a:ea typeface="나눔바른고딕" panose="020B0603020101020101" pitchFamily="34" charset="-127"/>
+              </a:rPr>
+              <a:t>결과 처리 단계에서 우선순위를 높여 먼저 처리할 수 있도록 함</a:t>
+            </a:r>
+            <a:endParaRPr lang="en-US" altLang="ko-KR" sz="1000" dirty="0">
+              <a:latin typeface="나눔바른고딕" panose="020B0603020101020101" pitchFamily="34" charset="-127"/>
+              <a:ea typeface="나눔바른고딕" panose="020B0603020101020101" pitchFamily="34" charset="-127"/>
+            </a:endParaRPr>
           </a:p>
         </p:txBody>
       </p:sp>
@@ -12782,13 +14356,6 @@
   <p:clrMapOvr>
     <a:masterClrMapping/>
   </p:clrMapOvr>
-  <p:timing>
-    <p:tnLst>
-      <p:par>
-        <p:cTn id="1" dur="indefinite" restart="never" nodeType="tmRoot"/>
-      </p:par>
-    </p:tnLst>
-  </p:timing>
 </p:sld>
 </file>
 
@@ -12800,7 +14367,7 @@
         <p:cNvPr id="1" name="">
           <a:extLst>
             <a:ext uri="{FF2B5EF4-FFF2-40B4-BE49-F238E27FC236}">
-              <a16:creationId xmlns:a16="http://schemas.microsoft.com/office/drawing/2014/main" xmlns="" id="{1FA86296-173C-4AC2-A55F-D30AFCB90C55}"/>
+              <a16:creationId xmlns:a16="http://schemas.microsoft.com/office/drawing/2014/main" id="{94AC5628-6096-007D-4F9A-097D06EAA780}"/>
             </a:ext>
           </a:extLst>
         </p:cNvPr>
@@ -12820,7 +14387,7 @@
           <p:cNvPr id="8" name="TextBox 7">
             <a:extLst>
               <a:ext uri="{FF2B5EF4-FFF2-40B4-BE49-F238E27FC236}">
-                <a16:creationId xmlns:a16="http://schemas.microsoft.com/office/drawing/2014/main" xmlns="" id="{0887BFEF-E1BD-42E7-5862-15A8B92AD0E2}"/>
+                <a16:creationId xmlns:a16="http://schemas.microsoft.com/office/drawing/2014/main" id="{BCBC9F85-F7A3-3F83-1806-6A8A789EB677}"/>
               </a:ext>
             </a:extLst>
           </p:cNvPr>
@@ -12862,7 +14429,7 @@
           <p:cNvPr id="10" name="TextBox 9">
             <a:extLst>
               <a:ext uri="{FF2B5EF4-FFF2-40B4-BE49-F238E27FC236}">
-                <a16:creationId xmlns:a16="http://schemas.microsoft.com/office/drawing/2014/main" xmlns="" id="{E584577B-DDFD-04C0-8325-711E292A17D8}"/>
+                <a16:creationId xmlns:a16="http://schemas.microsoft.com/office/drawing/2014/main" id="{FD273E2F-7739-7201-81F8-1F5E095D26E7}"/>
               </a:ext>
             </a:extLst>
           </p:cNvPr>
@@ -12904,7 +14471,7 @@
           <p:cNvPr id="3" name="직선 연결선 2">
             <a:extLst>
               <a:ext uri="{FF2B5EF4-FFF2-40B4-BE49-F238E27FC236}">
-                <a16:creationId xmlns:a16="http://schemas.microsoft.com/office/drawing/2014/main" xmlns="" id="{B8A80CFC-DFA8-D9B5-4A33-5D6D856774E9}"/>
+                <a16:creationId xmlns:a16="http://schemas.microsoft.com/office/drawing/2014/main" id="{B40C969E-FCF4-2ECC-59EC-50B8643A5B76}"/>
               </a:ext>
             </a:extLst>
           </p:cNvPr>
@@ -12947,7 +14514,7 @@
           <p:cNvPr id="12" name="직사각형 11">
             <a:extLst>
               <a:ext uri="{FF2B5EF4-FFF2-40B4-BE49-F238E27FC236}">
-                <a16:creationId xmlns:a16="http://schemas.microsoft.com/office/drawing/2014/main" xmlns="" id="{8CE27908-B35F-A041-B2CF-3D7698DCD08E}"/>
+                <a16:creationId xmlns:a16="http://schemas.microsoft.com/office/drawing/2014/main" id="{3A205B8F-1C93-C984-E61E-45A53634FE3C}"/>
               </a:ext>
             </a:extLst>
           </p:cNvPr>
@@ -13043,212 +14610,20 @@
       </p:sp>
       <p:sp>
         <p:nvSpPr>
-          <p:cNvPr id="13" name="TextBox 12">
-            <a:extLst>
-              <a:ext uri="{FF2B5EF4-FFF2-40B4-BE49-F238E27FC236}">
-                <a16:creationId xmlns:a16="http://schemas.microsoft.com/office/drawing/2014/main" xmlns="" id="{60689D22-0DA1-7A1E-CECB-EC31F0063E61}"/>
-              </a:ext>
-            </a:extLst>
-          </p:cNvPr>
-          <p:cNvSpPr txBox="1"/>
+          <p:cNvPr id="4" name="직사각형 3">
+            <a:extLst>
+              <a:ext uri="{FF2B5EF4-FFF2-40B4-BE49-F238E27FC236}">
+                <a16:creationId xmlns:a16="http://schemas.microsoft.com/office/drawing/2014/main" id="{05832E80-A59D-9F14-5DAB-D51BFF4C47A1}"/>
+              </a:ext>
+            </a:extLst>
+          </p:cNvPr>
+          <p:cNvSpPr/>
           <p:nvPr/>
         </p:nvSpPr>
         <p:spPr>
           <a:xfrm>
-            <a:off x="302449" y="1342316"/>
-            <a:ext cx="7464813" cy="276999"/>
-          </a:xfrm>
-          <a:prstGeom prst="rect">
-            <a:avLst/>
-          </a:prstGeom>
-          <a:noFill/>
-        </p:spPr>
-        <p:txBody>
-          <a:bodyPr wrap="square" rtlCol="0">
-            <a:spAutoFit/>
-          </a:bodyPr>
-          <a:lstStyle/>
-          <a:p>
-            <a:r>
-              <a:rPr lang="ko-KR" altLang="en-US" sz="1200" dirty="0">
-                <a:latin typeface="나눔바른고딕" panose="020B0603020101020101" pitchFamily="34" charset="-127"/>
-                <a:ea typeface="나눔바른고딕" panose="020B0603020101020101" pitchFamily="34" charset="-127"/>
-              </a:rPr>
-              <a:t>장애물에 돌출부 유형 추가</a:t>
-            </a:r>
-            <a:endParaRPr lang="en-US" altLang="ko-KR" sz="1200" dirty="0">
-              <a:latin typeface="나눔바른고딕" panose="020B0603020101020101" pitchFamily="34" charset="-127"/>
-              <a:ea typeface="나눔바른고딕" panose="020B0603020101020101" pitchFamily="34" charset="-127"/>
-            </a:endParaRPr>
-          </a:p>
-        </p:txBody>
-      </p:sp>
-      <p:sp>
-        <p:nvSpPr>
-          <p:cNvPr id="9" name="TextBox 8">
-            <a:extLst>
-              <a:ext uri="{FF2B5EF4-FFF2-40B4-BE49-F238E27FC236}">
-                <a16:creationId xmlns:a16="http://schemas.microsoft.com/office/drawing/2014/main" xmlns="" id="{982E8436-9881-CBB7-FD72-2A84E303A454}"/>
-              </a:ext>
-            </a:extLst>
-          </p:cNvPr>
-          <p:cNvSpPr txBox="1"/>
-          <p:nvPr/>
-        </p:nvSpPr>
-        <p:spPr>
-          <a:xfrm>
-            <a:off x="302449" y="1727036"/>
-            <a:ext cx="6520758" cy="1015663"/>
-          </a:xfrm>
-          <a:prstGeom prst="rect">
-            <a:avLst/>
-          </a:prstGeom>
-          <a:noFill/>
-        </p:spPr>
-        <p:txBody>
-          <a:bodyPr wrap="square">
-            <a:spAutoFit/>
-          </a:bodyPr>
-          <a:lstStyle/>
-          <a:p>
-            <a:r>
-              <a:rPr lang="ko-KR" altLang="en-US" sz="1200" dirty="0" err="1">
-                <a:latin typeface="나눔바른고딕" panose="020B0603020101020101" pitchFamily="34" charset="-127"/>
-                <a:ea typeface="나눔바른고딕" panose="020B0603020101020101" pitchFamily="34" charset="-127"/>
-              </a:rPr>
-              <a:t>파쿠르</a:t>
-            </a:r>
-            <a:r>
-              <a:rPr lang="ko-KR" altLang="en-US" sz="1200" dirty="0">
-                <a:latin typeface="나눔바른고딕" panose="020B0603020101020101" pitchFamily="34" charset="-127"/>
-                <a:ea typeface="나눔바른고딕" panose="020B0603020101020101" pitchFamily="34" charset="-127"/>
-              </a:rPr>
-              <a:t> 시</a:t>
-            </a:r>
-            <a:r>
-              <a:rPr lang="en-US" altLang="ko-KR" sz="1200" dirty="0">
-                <a:latin typeface="나눔바른고딕" panose="020B0603020101020101" pitchFamily="34" charset="-127"/>
-                <a:ea typeface="나눔바른고딕" panose="020B0603020101020101" pitchFamily="34" charset="-127"/>
-              </a:rPr>
-              <a:t>, </a:t>
-            </a:r>
-            <a:r>
-              <a:rPr lang="ko-KR" altLang="en-US" sz="1200" dirty="0">
-                <a:latin typeface="나눔바른고딕" panose="020B0603020101020101" pitchFamily="34" charset="-127"/>
-                <a:ea typeface="나눔바른고딕" panose="020B0603020101020101" pitchFamily="34" charset="-127"/>
-              </a:rPr>
-              <a:t>대체로 매끈한 면보다는 돌출된 부분을 이용</a:t>
-            </a:r>
-            <a:endParaRPr lang="en-US" altLang="ko-KR" sz="1200" dirty="0">
-              <a:latin typeface="나눔바른고딕" panose="020B0603020101020101" pitchFamily="34" charset="-127"/>
-              <a:ea typeface="나눔바른고딕" panose="020B0603020101020101" pitchFamily="34" charset="-127"/>
-            </a:endParaRPr>
-          </a:p>
-          <a:p>
-            <a:r>
-              <a:rPr lang="ko-KR" altLang="en-US" sz="1200" dirty="0">
-                <a:latin typeface="나눔바른고딕" panose="020B0603020101020101" pitchFamily="34" charset="-127"/>
-                <a:ea typeface="나눔바른고딕" panose="020B0603020101020101" pitchFamily="34" charset="-127"/>
-              </a:rPr>
-              <a:t>이 부분을 모사하고자 돌출부 유형을 추가</a:t>
-            </a:r>
-            <a:endParaRPr lang="en-US" altLang="ko-KR" sz="1200" dirty="0">
-              <a:latin typeface="나눔바른고딕" panose="020B0603020101020101" pitchFamily="34" charset="-127"/>
-              <a:ea typeface="나눔바른고딕" panose="020B0603020101020101" pitchFamily="34" charset="-127"/>
-            </a:endParaRPr>
-          </a:p>
-          <a:p>
-            <a:endParaRPr lang="en-US" altLang="ko-KR" sz="1200" dirty="0">
-              <a:latin typeface="나눔바른고딕" panose="020B0603020101020101" pitchFamily="34" charset="-127"/>
-              <a:ea typeface="나눔바른고딕" panose="020B0603020101020101" pitchFamily="34" charset="-127"/>
-            </a:endParaRPr>
-          </a:p>
-          <a:p>
-            <a:r>
-              <a:rPr lang="ko-KR" altLang="en-US" sz="1200" dirty="0">
-                <a:latin typeface="나눔바른고딕" panose="020B0603020101020101" pitchFamily="34" charset="-127"/>
-                <a:ea typeface="나눔바른고딕" panose="020B0603020101020101" pitchFamily="34" charset="-127"/>
-              </a:rPr>
-              <a:t>독립적으로 있진 않고</a:t>
-            </a:r>
-            <a:r>
-              <a:rPr lang="en-US" altLang="ko-KR" sz="1200" dirty="0">
-                <a:latin typeface="나눔바른고딕" panose="020B0603020101020101" pitchFamily="34" charset="-127"/>
-                <a:ea typeface="나눔바른고딕" panose="020B0603020101020101" pitchFamily="34" charset="-127"/>
-              </a:rPr>
-              <a:t>, </a:t>
-            </a:r>
-            <a:r>
-              <a:rPr lang="ko-KR" altLang="en-US" sz="1200" dirty="0">
-                <a:latin typeface="나눔바른고딕" panose="020B0603020101020101" pitchFamily="34" charset="-127"/>
-                <a:ea typeface="나눔바른고딕" panose="020B0603020101020101" pitchFamily="34" charset="-127"/>
-              </a:rPr>
-              <a:t>다른 장애물에 부속으로 추가된 형태</a:t>
-            </a:r>
-            <a:endParaRPr lang="en-US" altLang="ko-KR" sz="1200" dirty="0">
-              <a:latin typeface="나눔바른고딕" panose="020B0603020101020101" pitchFamily="34" charset="-127"/>
-              <a:ea typeface="나눔바른고딕" panose="020B0603020101020101" pitchFamily="34" charset="-127"/>
-            </a:endParaRPr>
-          </a:p>
-          <a:p>
-            <a:r>
-              <a:rPr lang="ko-KR" altLang="en-US" sz="1200" dirty="0">
-                <a:latin typeface="나눔바른고딕" panose="020B0603020101020101" pitchFamily="34" charset="-127"/>
-                <a:ea typeface="나눔바른고딕" panose="020B0603020101020101" pitchFamily="34" charset="-127"/>
-              </a:rPr>
-              <a:t>장애물 인식 시</a:t>
-            </a:r>
-            <a:r>
-              <a:rPr lang="en-US" altLang="ko-KR" sz="1200" dirty="0">
-                <a:latin typeface="나눔바른고딕" panose="020B0603020101020101" pitchFamily="34" charset="-127"/>
-                <a:ea typeface="나눔바른고딕" panose="020B0603020101020101" pitchFamily="34" charset="-127"/>
-              </a:rPr>
-              <a:t>, </a:t>
-            </a:r>
-            <a:r>
-              <a:rPr lang="ko-KR" altLang="en-US" sz="1200" dirty="0">
-                <a:latin typeface="나눔바른고딕" panose="020B0603020101020101" pitchFamily="34" charset="-127"/>
-                <a:ea typeface="나눔바른고딕" panose="020B0603020101020101" pitchFamily="34" charset="-127"/>
-              </a:rPr>
-              <a:t>우선해서 인식처리 </a:t>
-            </a:r>
-            <a:r>
-              <a:rPr lang="en-US" altLang="ko-KR" sz="1200" dirty="0">
-                <a:latin typeface="나눔바른고딕" panose="020B0603020101020101" pitchFamily="34" charset="-127"/>
-                <a:ea typeface="나눔바른고딕" panose="020B0603020101020101" pitchFamily="34" charset="-127"/>
-              </a:rPr>
-              <a:t>-&gt; </a:t>
-            </a:r>
-            <a:r>
-              <a:rPr lang="ko-KR" altLang="en-US" sz="1200" dirty="0">
-                <a:latin typeface="나눔바른고딕" panose="020B0603020101020101" pitchFamily="34" charset="-127"/>
-                <a:ea typeface="나눔바른고딕" panose="020B0603020101020101" pitchFamily="34" charset="-127"/>
-              </a:rPr>
-              <a:t>인식 과정에서 우선순위 적용</a:t>
-            </a:r>
-            <a:endParaRPr lang="en-US" altLang="ko-KR" sz="1200" dirty="0">
-              <a:latin typeface="나눔바른고딕" panose="020B0603020101020101" pitchFamily="34" charset="-127"/>
-              <a:ea typeface="나눔바른고딕" panose="020B0603020101020101" pitchFamily="34" charset="-127"/>
-            </a:endParaRPr>
-          </a:p>
-        </p:txBody>
-      </p:sp>
-      <p:sp>
-        <p:nvSpPr>
-          <p:cNvPr id="4" name="직사각형 3">
-            <a:extLst>
-              <a:ext uri="{FF2B5EF4-FFF2-40B4-BE49-F238E27FC236}">
-                <a16:creationId xmlns:a16="http://schemas.microsoft.com/office/drawing/2014/main" xmlns="" id="{5CEF6D9A-E641-4C3C-D3A0-1AB138A6686E}"/>
-              </a:ext>
-            </a:extLst>
-          </p:cNvPr>
-          <p:cNvSpPr/>
-          <p:nvPr/>
-        </p:nvSpPr>
-        <p:spPr>
-          <a:xfrm>
-            <a:off x="1333769" y="3429000"/>
-            <a:ext cx="4246075" cy="2576884"/>
+            <a:off x="1514744" y="2953315"/>
+            <a:ext cx="4246075" cy="3285776"/>
           </a:xfrm>
           <a:prstGeom prst="rect">
             <a:avLst/>
@@ -13276,19 +14651,22 @@
           <a:p>
             <a:pPr algn="ctr"/>
             <a:r>
-              <a:rPr lang="ko-KR" altLang="en-US"/>
-              <a:t>인식 과정 트리</a:t>
-            </a:r>
-            <a:endParaRPr lang="en-US" altLang="ko-KR" dirty="0"/>
-          </a:p>
-        </p:txBody>
-      </p:sp>
-      <p:sp>
-        <p:nvSpPr>
-          <p:cNvPr id="11" name="직사각형 10">
-            <a:extLst>
-              <a:ext uri="{FF2B5EF4-FFF2-40B4-BE49-F238E27FC236}">
-                <a16:creationId xmlns:a16="http://schemas.microsoft.com/office/drawing/2014/main" xmlns="" id="{3753B949-0A30-2B30-B95A-A5D6F341C4BC}"/>
+              <a:rPr lang="ko-KR" altLang="en-US" dirty="0"/>
+              <a:t>적용 영상 </a:t>
+            </a:r>
+            <a:r>
+              <a:rPr lang="en-US" altLang="ko-KR" dirty="0"/>
+              <a:t>1</a:t>
+            </a:r>
+          </a:p>
+        </p:txBody>
+      </p:sp>
+      <p:sp>
+        <p:nvSpPr>
+          <p:cNvPr id="6" name="직사각형 5">
+            <a:extLst>
+              <a:ext uri="{FF2B5EF4-FFF2-40B4-BE49-F238E27FC236}">
+                <a16:creationId xmlns:a16="http://schemas.microsoft.com/office/drawing/2014/main" id="{57E9570B-25D7-061D-8946-9CCEBBC71B1A}"/>
               </a:ext>
             </a:extLst>
           </p:cNvPr>
@@ -13297,8 +14675,8 @@
         </p:nvSpPr>
         <p:spPr>
           <a:xfrm>
-            <a:off x="6096000" y="3429000"/>
-            <a:ext cx="4246075" cy="2576884"/>
+            <a:off x="6276975" y="2953315"/>
+            <a:ext cx="4246075" cy="3285776"/>
           </a:xfrm>
           <a:prstGeom prst="rect">
             <a:avLst/>
@@ -13326,17 +14704,150 @@
           <a:p>
             <a:pPr algn="ctr"/>
             <a:r>
-              <a:rPr lang="ko-KR" altLang="en-US"/>
-              <a:t>처리 조건</a:t>
-            </a:r>
-            <a:endParaRPr lang="en-US" altLang="ko-KR" dirty="0"/>
+              <a:rPr lang="ko-KR" altLang="en-US" dirty="0"/>
+              <a:t>적용 영상 </a:t>
+            </a:r>
+            <a:r>
+              <a:rPr lang="en-US" altLang="ko-KR" dirty="0"/>
+              <a:t>2</a:t>
+            </a:r>
+          </a:p>
+        </p:txBody>
+      </p:sp>
+      <p:sp>
+        <p:nvSpPr>
+          <p:cNvPr id="5" name="TextBox 4">
+            <a:extLst>
+              <a:ext uri="{FF2B5EF4-FFF2-40B4-BE49-F238E27FC236}">
+                <a16:creationId xmlns:a16="http://schemas.microsoft.com/office/drawing/2014/main" id="{22CFA5D7-1740-0566-E198-3D6707C83E07}"/>
+              </a:ext>
+            </a:extLst>
+          </p:cNvPr>
+          <p:cNvSpPr txBox="1"/>
+          <p:nvPr/>
+        </p:nvSpPr>
+        <p:spPr>
+          <a:xfrm>
+            <a:off x="302449" y="1727036"/>
+            <a:ext cx="6520758" cy="534762"/>
+          </a:xfrm>
+          <a:prstGeom prst="rect">
+            <a:avLst/>
+          </a:prstGeom>
+          <a:noFill/>
+        </p:spPr>
+        <p:txBody>
+          <a:bodyPr wrap="square">
+            <a:spAutoFit/>
+          </a:bodyPr>
+          <a:lstStyle/>
+          <a:p>
+            <a:pPr marL="171450" indent="-171450">
+              <a:lnSpc>
+                <a:spcPct val="150000"/>
+              </a:lnSpc>
+              <a:buFont typeface="Arial" panose="020B0604020202020204" pitchFamily="34" charset="0"/>
+              <a:buChar char="•"/>
+            </a:pPr>
+            <a:r>
+              <a:rPr lang="ko-KR" altLang="en-US" sz="1000" dirty="0">
+                <a:latin typeface="나눔바른고딕" panose="020B0603020101020101" pitchFamily="34" charset="-127"/>
+                <a:ea typeface="나눔바른고딕" panose="020B0603020101020101" pitchFamily="34" charset="-127"/>
+              </a:rPr>
+              <a:t>일반적인 벽면을 탈 수도 있지만</a:t>
+            </a:r>
+            <a:r>
+              <a:rPr lang="en-US" altLang="ko-KR" sz="1000" dirty="0">
+                <a:latin typeface="나눔바른고딕" panose="020B0603020101020101" pitchFamily="34" charset="-127"/>
+                <a:ea typeface="나눔바른고딕" panose="020B0603020101020101" pitchFamily="34" charset="-127"/>
+              </a:rPr>
+              <a:t> </a:t>
+            </a:r>
+            <a:r>
+              <a:rPr lang="ko-KR" altLang="en-US" sz="1000" dirty="0">
+                <a:latin typeface="나눔바른고딕" panose="020B0603020101020101" pitchFamily="34" charset="-127"/>
+                <a:ea typeface="나눔바른고딕" panose="020B0603020101020101" pitchFamily="34" charset="-127"/>
+              </a:rPr>
+              <a:t>돌출부를 인식하면 우선해서 처리</a:t>
+            </a:r>
+            <a:endParaRPr lang="en-US" altLang="ko-KR" sz="1000" dirty="0">
+              <a:latin typeface="나눔바른고딕" panose="020B0603020101020101" pitchFamily="34" charset="-127"/>
+              <a:ea typeface="나눔바른고딕" panose="020B0603020101020101" pitchFamily="34" charset="-127"/>
+            </a:endParaRPr>
+          </a:p>
+          <a:p>
+            <a:pPr marL="171450" indent="-171450">
+              <a:lnSpc>
+                <a:spcPct val="150000"/>
+              </a:lnSpc>
+              <a:buFont typeface="Arial" panose="020B0604020202020204" pitchFamily="34" charset="0"/>
+              <a:buChar char="•"/>
+            </a:pPr>
+            <a:r>
+              <a:rPr lang="ko-KR" altLang="en-US" sz="1000" dirty="0">
+                <a:latin typeface="나눔바른고딕" panose="020B0603020101020101" pitchFamily="34" charset="-127"/>
+                <a:ea typeface="나눔바른고딕" panose="020B0603020101020101" pitchFamily="34" charset="-127"/>
+              </a:rPr>
+              <a:t>일반적인 이동보다 좀 더 멀리 이동 가능하도록 처리</a:t>
+            </a:r>
+            <a:endParaRPr lang="en-US" altLang="ko-KR" sz="1000" dirty="0">
+              <a:latin typeface="나눔바른고딕" panose="020B0603020101020101" pitchFamily="34" charset="-127"/>
+              <a:ea typeface="나눔바른고딕" panose="020B0603020101020101" pitchFamily="34" charset="-127"/>
+            </a:endParaRPr>
+          </a:p>
+        </p:txBody>
+      </p:sp>
+      <p:sp>
+        <p:nvSpPr>
+          <p:cNvPr id="11" name="TextBox 10">
+            <a:extLst>
+              <a:ext uri="{FF2B5EF4-FFF2-40B4-BE49-F238E27FC236}">
+                <a16:creationId xmlns:a16="http://schemas.microsoft.com/office/drawing/2014/main" id="{F50CCD4C-6EF5-FEFC-3F13-E33D025FD49B}"/>
+              </a:ext>
+            </a:extLst>
+          </p:cNvPr>
+          <p:cNvSpPr txBox="1"/>
+          <p:nvPr/>
+        </p:nvSpPr>
+        <p:spPr>
+          <a:xfrm>
+            <a:off x="302449" y="1342316"/>
+            <a:ext cx="7464813" cy="346249"/>
+          </a:xfrm>
+          <a:prstGeom prst="rect">
+            <a:avLst/>
+          </a:prstGeom>
+          <a:noFill/>
+        </p:spPr>
+        <p:txBody>
+          <a:bodyPr wrap="square" rtlCol="0">
+            <a:spAutoFit/>
+          </a:bodyPr>
+          <a:lstStyle/>
+          <a:p>
+            <a:pPr>
+              <a:lnSpc>
+                <a:spcPct val="150000"/>
+              </a:lnSpc>
+            </a:pPr>
+            <a:r>
+              <a:rPr lang="ko-KR" altLang="en-US" sz="1200" dirty="0">
+                <a:latin typeface="나눔바른고딕" panose="020B0603020101020101" pitchFamily="34" charset="-127"/>
+                <a:ea typeface="나눔바른고딕" panose="020B0603020101020101" pitchFamily="34" charset="-127"/>
+              </a:rPr>
+              <a:t>장애물에 돌출부 유형 추가</a:t>
+            </a:r>
+            <a:endParaRPr lang="en-US" altLang="ko-KR" sz="1200" dirty="0">
+              <a:latin typeface="나눔바른고딕" panose="020B0603020101020101" pitchFamily="34" charset="-127"/>
+              <a:ea typeface="나눔바른고딕" panose="020B0603020101020101" pitchFamily="34" charset="-127"/>
+            </a:endParaRPr>
           </a:p>
         </p:txBody>
       </p:sp>
     </p:spTree>
     <p:extLst>
       <p:ext uri="{BB962C8B-B14F-4D97-AF65-F5344CB8AC3E}">
-        <p14:creationId xmlns:p14="http://schemas.microsoft.com/office/powerpoint/2010/main" val="1388334780"/>
+        <p14:creationId xmlns:p14="http://schemas.microsoft.com/office/powerpoint/2010/main" val="1939725433"/>
       </p:ext>
     </p:extLst>
   </p:cSld>
